--- a/1224報告_NAudio.pptx
+++ b/1224報告_NAudio.pptx
@@ -5,7 +5,7 @@
     <p:sldMasterId id="2147483648" r:id="rId1"/>
   </p:sldMasterIdLst>
   <p:notesMasterIdLst>
-    <p:notesMasterId r:id="rId17"/>
+    <p:notesMasterId r:id="rId18"/>
   </p:notesMasterIdLst>
   <p:sldIdLst>
     <p:sldId id="256" r:id="rId2"/>
@@ -18,11 +18,12 @@
     <p:sldId id="273" r:id="rId9"/>
     <p:sldId id="272" r:id="rId10"/>
     <p:sldId id="258" r:id="rId11"/>
-    <p:sldId id="270" r:id="rId12"/>
-    <p:sldId id="263" r:id="rId13"/>
-    <p:sldId id="268" r:id="rId14"/>
-    <p:sldId id="264" r:id="rId15"/>
-    <p:sldId id="262" r:id="rId16"/>
+    <p:sldId id="274" r:id="rId12"/>
+    <p:sldId id="270" r:id="rId13"/>
+    <p:sldId id="263" r:id="rId14"/>
+    <p:sldId id="268" r:id="rId15"/>
+    <p:sldId id="264" r:id="rId16"/>
+    <p:sldId id="262" r:id="rId17"/>
   </p:sldIdLst>
   <p:sldSz cx="12192000" cy="6858000"/>
   <p:notesSz cx="6858000" cy="9144000"/>
@@ -3972,7 +3973,7 @@
           <a:bodyPr/>
           <a:lstStyle/>
           <a:p>
-            <a:endParaRPr lang="zh-TW" altLang="en-US"/>
+            <a:endParaRPr lang="zh-TW" altLang="en-US" dirty="0"/>
           </a:p>
         </p:txBody>
       </p:sp>
@@ -3998,8 +3999,38 @@
         </p:blipFill>
         <p:spPr>
           <a:xfrm>
-            <a:off x="576645" y="427620"/>
-            <a:ext cx="7462456" cy="5359400"/>
+            <a:off x="451140" y="134471"/>
+            <a:ext cx="6859620" cy="4926454"/>
+          </a:xfrm>
+          <a:prstGeom prst="rect">
+            <a:avLst/>
+          </a:prstGeom>
+        </p:spPr>
+      </p:pic>
+      <p:pic>
+        <p:nvPicPr>
+          <p:cNvPr id="8" name="圖片 7">
+            <a:extLst>
+              <a:ext uri="{FF2B5EF4-FFF2-40B4-BE49-F238E27FC236}">
+                <a16:creationId xmlns:a16="http://schemas.microsoft.com/office/drawing/2014/main" id="{31DD6903-BBD2-40C6-8CA7-CE8920E4AB16}"/>
+              </a:ext>
+            </a:extLst>
+          </p:cNvPr>
+          <p:cNvPicPr>
+            <a:picLocks noChangeAspect="1"/>
+          </p:cNvPicPr>
+          <p:nvPr/>
+        </p:nvPicPr>
+        <p:blipFill>
+          <a:blip r:embed="rId3"/>
+          <a:stretch>
+            <a:fillRect/>
+          </a:stretch>
+        </p:blipFill>
+        <p:spPr>
+          <a:xfrm>
+            <a:off x="3293431" y="5103482"/>
+            <a:ext cx="8034657" cy="1389393"/>
           </a:xfrm>
           <a:prstGeom prst="rect">
             <a:avLst/>
@@ -4020,6 +4051,116 @@
 </file>
 
 <file path=ppt/slides/slide11.xml><?xml version="1.0" encoding="utf-8"?>
+<p:sld xmlns:a="http://schemas.openxmlformats.org/drawingml/2006/main" xmlns:r="http://schemas.openxmlformats.org/officeDocument/2006/relationships" xmlns:p="http://schemas.openxmlformats.org/presentationml/2006/main">
+  <p:cSld>
+    <p:spTree>
+      <p:nvGrpSpPr>
+        <p:cNvPr id="1" name=""/>
+        <p:cNvGrpSpPr/>
+        <p:nvPr/>
+      </p:nvGrpSpPr>
+      <p:grpSpPr>
+        <a:xfrm>
+          <a:off x="0" y="0"/>
+          <a:ext cx="0" cy="0"/>
+          <a:chOff x="0" y="0"/>
+          <a:chExt cx="0" cy="0"/>
+        </a:xfrm>
+      </p:grpSpPr>
+      <p:sp>
+        <p:nvSpPr>
+          <p:cNvPr id="2" name="標題 1">
+            <a:extLst>
+              <a:ext uri="{FF2B5EF4-FFF2-40B4-BE49-F238E27FC236}">
+                <a16:creationId xmlns:a16="http://schemas.microsoft.com/office/drawing/2014/main" id="{EB780416-4C22-4DC3-BD32-489193CC2B19}"/>
+              </a:ext>
+            </a:extLst>
+          </p:cNvPr>
+          <p:cNvSpPr>
+            <a:spLocks noGrp="1"/>
+          </p:cNvSpPr>
+          <p:nvPr>
+            <p:ph type="title"/>
+          </p:nvPr>
+        </p:nvSpPr>
+        <p:spPr/>
+        <p:txBody>
+          <a:bodyPr/>
+          <a:lstStyle/>
+          <a:p>
+            <a:endParaRPr lang="zh-TW" altLang="en-US"/>
+          </a:p>
+        </p:txBody>
+      </p:sp>
+      <p:sp>
+        <p:nvSpPr>
+          <p:cNvPr id="3" name="內容版面配置區 2">
+            <a:extLst>
+              <a:ext uri="{FF2B5EF4-FFF2-40B4-BE49-F238E27FC236}">
+                <a16:creationId xmlns:a16="http://schemas.microsoft.com/office/drawing/2014/main" id="{D9AF8F58-6600-45DE-BE5A-CF7A4DAEEF59}"/>
+              </a:ext>
+            </a:extLst>
+          </p:cNvPr>
+          <p:cNvSpPr>
+            <a:spLocks noGrp="1"/>
+          </p:cNvSpPr>
+          <p:nvPr>
+            <p:ph idx="1"/>
+          </p:nvPr>
+        </p:nvSpPr>
+        <p:spPr/>
+        <p:txBody>
+          <a:bodyPr/>
+          <a:lstStyle/>
+          <a:p>
+            <a:endParaRPr lang="zh-TW" altLang="en-US"/>
+          </a:p>
+        </p:txBody>
+      </p:sp>
+      <p:pic>
+        <p:nvPicPr>
+          <p:cNvPr id="5" name="圖片 4">
+            <a:extLst>
+              <a:ext uri="{FF2B5EF4-FFF2-40B4-BE49-F238E27FC236}">
+                <a16:creationId xmlns:a16="http://schemas.microsoft.com/office/drawing/2014/main" id="{C3B1B544-7BD6-4DE2-A75B-DD290EFBD6CE}"/>
+              </a:ext>
+            </a:extLst>
+          </p:cNvPr>
+          <p:cNvPicPr>
+            <a:picLocks noChangeAspect="1"/>
+          </p:cNvPicPr>
+          <p:nvPr/>
+        </p:nvPicPr>
+        <p:blipFill>
+          <a:blip r:embed="rId2"/>
+          <a:stretch>
+            <a:fillRect/>
+          </a:stretch>
+        </p:blipFill>
+        <p:spPr>
+          <a:xfrm>
+            <a:off x="2236117" y="324784"/>
+            <a:ext cx="7562306" cy="5777213"/>
+          </a:xfrm>
+          <a:prstGeom prst="rect">
+            <a:avLst/>
+          </a:prstGeom>
+        </p:spPr>
+      </p:pic>
+    </p:spTree>
+    <p:extLst>
+      <p:ext uri="{BB962C8B-B14F-4D97-AF65-F5344CB8AC3E}">
+        <p14:creationId xmlns:p14="http://schemas.microsoft.com/office/powerpoint/2010/main" val="1123486672"/>
+      </p:ext>
+    </p:extLst>
+  </p:cSld>
+  <p:clrMapOvr>
+    <a:masterClrMapping/>
+  </p:clrMapOvr>
+</p:sld>
+</file>
+
+<file path=ppt/slides/slide12.xml><?xml version="1.0" encoding="utf-8"?>
 <p:sld xmlns:a="http://schemas.openxmlformats.org/drawingml/2006/main" xmlns:r="http://schemas.openxmlformats.org/officeDocument/2006/relationships" xmlns:p="http://schemas.openxmlformats.org/presentationml/2006/main">
   <p:cSld>
     <p:spTree>
@@ -4146,7 +4287,7 @@
 </p:sld>
 </file>
 
-<file path=ppt/slides/slide12.xml><?xml version="1.0" encoding="utf-8"?>
+<file path=ppt/slides/slide13.xml><?xml version="1.0" encoding="utf-8"?>
 <p:sld xmlns:a="http://schemas.openxmlformats.org/drawingml/2006/main" xmlns:r="http://schemas.openxmlformats.org/officeDocument/2006/relationships" xmlns:p="http://schemas.openxmlformats.org/presentationml/2006/main">
   <p:cSld>
     <p:spTree>
@@ -4256,7 +4397,7 @@
 </p:sld>
 </file>
 
-<file path=ppt/slides/slide13.xml><?xml version="1.0" encoding="utf-8"?>
+<file path=ppt/slides/slide14.xml><?xml version="1.0" encoding="utf-8"?>
 <p:sld xmlns:a="http://schemas.openxmlformats.org/drawingml/2006/main" xmlns:r="http://schemas.openxmlformats.org/officeDocument/2006/relationships" xmlns:p="http://schemas.openxmlformats.org/presentationml/2006/main">
   <p:cSld>
     <p:spTree>
@@ -4345,7 +4486,7 @@
 </p:sld>
 </file>
 
-<file path=ppt/slides/slide14.xml><?xml version="1.0" encoding="utf-8"?>
+<file path=ppt/slides/slide15.xml><?xml version="1.0" encoding="utf-8"?>
 <p:sld xmlns:a="http://schemas.openxmlformats.org/drawingml/2006/main" xmlns:r="http://schemas.openxmlformats.org/officeDocument/2006/relationships" xmlns:p="http://schemas.openxmlformats.org/presentationml/2006/main">
   <p:cSld>
     <p:spTree>
@@ -4470,6 +4611,122 @@
             </a:endParaRPr>
           </a:p>
           <a:p>
+            <a:pPr marL="0" indent="0">
+              <a:buNone/>
+            </a:pPr>
+            <a:r>
+              <a:rPr lang="zh-TW" altLang="en-US" sz="2000" dirty="0">
+                <a:latin typeface="標楷體" panose="03000509000000000000" pitchFamily="65" charset="-120"/>
+                <a:ea typeface="標楷體" panose="03000509000000000000" pitchFamily="65" charset="-120"/>
+              </a:rPr>
+              <a:t>  </a:t>
+            </a:r>
+            <a:r>
+              <a:rPr lang="en-US" altLang="zh-TW" sz="2000" dirty="0">
+                <a:latin typeface="Arial" panose="020B0604020202020204" pitchFamily="34" charset="0"/>
+                <a:ea typeface="標楷體" panose="03000509000000000000" pitchFamily="65" charset="-120"/>
+                <a:cs typeface="Arial" panose="020B0604020202020204" pitchFamily="34" charset="0"/>
+              </a:rPr>
+              <a:t>(</a:t>
+            </a:r>
+            <a:r>
+              <a:rPr lang="zh-TW" altLang="en-US" sz="2000" dirty="0">
+                <a:latin typeface="Arial" panose="020B0604020202020204" pitchFamily="34" charset="0"/>
+                <a:ea typeface="標楷體" panose="03000509000000000000" pitchFamily="65" charset="-120"/>
+                <a:cs typeface="Arial" panose="020B0604020202020204" pitchFamily="34" charset="0"/>
+              </a:rPr>
+              <a:t>用兩台手機交叉比對，</a:t>
+            </a:r>
+            <a:r>
+              <a:rPr lang="en-US" altLang="zh-TW" sz="2000" dirty="0">
+                <a:latin typeface="Arial" panose="020B0604020202020204" pitchFamily="34" charset="0"/>
+                <a:ea typeface="標楷體" panose="03000509000000000000" pitchFamily="65" charset="-120"/>
+                <a:cs typeface="Arial" panose="020B0604020202020204" pitchFamily="34" charset="0"/>
+              </a:rPr>
+              <a:t>A</a:t>
+            </a:r>
+            <a:r>
+              <a:rPr lang="zh-TW" altLang="en-US" sz="2000" dirty="0">
+                <a:latin typeface="Arial" panose="020B0604020202020204" pitchFamily="34" charset="0"/>
+                <a:ea typeface="標楷體" panose="03000509000000000000" pitchFamily="65" charset="-120"/>
+                <a:cs typeface="Arial" panose="020B0604020202020204" pitchFamily="34" charset="0"/>
+              </a:rPr>
+              <a:t>手機用鋼琴</a:t>
+            </a:r>
+            <a:r>
+              <a:rPr lang="en-US" altLang="zh-TW" sz="2000" dirty="0">
+                <a:latin typeface="Arial" panose="020B0604020202020204" pitchFamily="34" charset="0"/>
+                <a:ea typeface="標楷體" panose="03000509000000000000" pitchFamily="65" charset="-120"/>
+                <a:cs typeface="Arial" panose="020B0604020202020204" pitchFamily="34" charset="0"/>
+              </a:rPr>
+              <a:t>APP</a:t>
+            </a:r>
+            <a:r>
+              <a:rPr lang="zh-TW" altLang="en-US" sz="2000" dirty="0">
+                <a:latin typeface="Arial" panose="020B0604020202020204" pitchFamily="34" charset="0"/>
+                <a:ea typeface="標楷體" panose="03000509000000000000" pitchFamily="65" charset="-120"/>
+                <a:cs typeface="Arial" panose="020B0604020202020204" pitchFamily="34" charset="0"/>
+              </a:rPr>
+              <a:t>發出</a:t>
+            </a:r>
+            <a:r>
+              <a:rPr lang="en-US" altLang="zh-TW" sz="2000" dirty="0">
+                <a:latin typeface="Arial" panose="020B0604020202020204" pitchFamily="34" charset="0"/>
+                <a:ea typeface="標楷體" panose="03000509000000000000" pitchFamily="65" charset="-120"/>
+                <a:cs typeface="Arial" panose="020B0604020202020204" pitchFamily="34" charset="0"/>
+              </a:rPr>
+              <a:t>A4</a:t>
+            </a:r>
+            <a:r>
+              <a:rPr lang="zh-TW" altLang="en-US" sz="2000" dirty="0">
+                <a:latin typeface="Arial" panose="020B0604020202020204" pitchFamily="34" charset="0"/>
+                <a:ea typeface="標楷體" panose="03000509000000000000" pitchFamily="65" charset="-120"/>
+                <a:cs typeface="Arial" panose="020B0604020202020204" pitchFamily="34" charset="0"/>
+              </a:rPr>
+              <a:t>鍵，</a:t>
+            </a:r>
+            <a:r>
+              <a:rPr lang="en-US" altLang="zh-TW" sz="2000" dirty="0">
+                <a:latin typeface="Arial" panose="020B0604020202020204" pitchFamily="34" charset="0"/>
+                <a:ea typeface="標楷體" panose="03000509000000000000" pitchFamily="65" charset="-120"/>
+                <a:cs typeface="Arial" panose="020B0604020202020204" pitchFamily="34" charset="0"/>
+              </a:rPr>
+              <a:t>B</a:t>
+            </a:r>
+            <a:r>
+              <a:rPr lang="zh-TW" altLang="en-US" sz="2000" dirty="0">
+                <a:latin typeface="Arial" panose="020B0604020202020204" pitchFamily="34" charset="0"/>
+                <a:ea typeface="標楷體" panose="03000509000000000000" pitchFamily="65" charset="-120"/>
+                <a:cs typeface="Arial" panose="020B0604020202020204" pitchFamily="34" charset="0"/>
+              </a:rPr>
+              <a:t>手機測量到仍會高於</a:t>
+            </a:r>
+            <a:r>
+              <a:rPr lang="en-US" altLang="zh-TW" sz="2000" dirty="0">
+                <a:latin typeface="Arial" panose="020B0604020202020204" pitchFamily="34" charset="0"/>
+                <a:ea typeface="標楷體" panose="03000509000000000000" pitchFamily="65" charset="-120"/>
+                <a:cs typeface="Arial" panose="020B0604020202020204" pitchFamily="34" charset="0"/>
+              </a:rPr>
+              <a:t>440Hz</a:t>
+            </a:r>
+            <a:r>
+              <a:rPr lang="zh-TW" altLang="en-US" sz="2000" dirty="0">
+                <a:latin typeface="Arial" panose="020B0604020202020204" pitchFamily="34" charset="0"/>
+                <a:ea typeface="標楷體" panose="03000509000000000000" pitchFamily="65" charset="-120"/>
+                <a:cs typeface="Arial" panose="020B0604020202020204" pitchFamily="34" charset="0"/>
+              </a:rPr>
+              <a:t>一點</a:t>
+            </a:r>
+            <a:r>
+              <a:rPr lang="en-US" altLang="zh-TW" sz="2000" dirty="0">
+                <a:latin typeface="Arial" panose="020B0604020202020204" pitchFamily="34" charset="0"/>
+                <a:ea typeface="標楷體" panose="03000509000000000000" pitchFamily="65" charset="-120"/>
+                <a:cs typeface="Arial" panose="020B0604020202020204" pitchFamily="34" charset="0"/>
+              </a:rPr>
+              <a:t>)</a:t>
+            </a:r>
+          </a:p>
+          <a:p>
             <a:r>
               <a:rPr lang="zh-TW" altLang="en-US" sz="2000" dirty="0">
                 <a:latin typeface="標楷體" panose="03000509000000000000" pitchFamily="65" charset="-120"/>
@@ -4602,7 +4859,7 @@
                 <a:latin typeface="Consolas" panose="020B0609020204030204" pitchFamily="49" charset="0"/>
                 <a:ea typeface="標楷體" panose="03000509000000000000" pitchFamily="65" charset="-120"/>
               </a:rPr>
-              <a:t>，而收音器也會受到泛音的影響而結果不同。</a:t>
+              <a:t>，實際物體的泛音會受到材質的影響形成偏差音，而收音器也會受到泛音的影響而結果不同。</a:t>
             </a:r>
             <a:endParaRPr lang="en-US" altLang="zh-TW" sz="2000" dirty="0">
               <a:latin typeface="Consolas" panose="020B0609020204030204" pitchFamily="49" charset="0"/>
@@ -4639,32 +4896,6 @@
               <a:ea typeface="標楷體" panose="03000509000000000000" pitchFamily="65" charset="-120"/>
               <a:cs typeface="Arial" panose="020B0604020202020204" pitchFamily="34" charset="0"/>
             </a:endParaRPr>
-          </a:p>
-          <a:p>
-            <a:r>
-              <a:rPr lang="zh-TW" altLang="en-US" sz="2000" dirty="0">
-                <a:latin typeface="Arial" panose="020B0604020202020204" pitchFamily="34" charset="0"/>
-                <a:ea typeface="標楷體" panose="03000509000000000000" pitchFamily="65" charset="-120"/>
-                <a:cs typeface="Arial" panose="020B0604020202020204" pitchFamily="34" charset="0"/>
-              </a:rPr>
-              <a:t>測量人聲或是樂器音高，只需</a:t>
-            </a:r>
-            <a:r>
-              <a:rPr lang="en-US" altLang="zh-TW" sz="2000" dirty="0">
-                <a:latin typeface="Arial" panose="020B0604020202020204" pitchFamily="34" charset="0"/>
-                <a:ea typeface="標楷體" panose="03000509000000000000" pitchFamily="65" charset="-120"/>
-                <a:cs typeface="Arial" panose="020B0604020202020204" pitchFamily="34" charset="0"/>
-              </a:rPr>
-              <a:t>NAudio</a:t>
-            </a:r>
-            <a:r>
-              <a:rPr lang="zh-TW" altLang="en-US" sz="2000" dirty="0">
-                <a:latin typeface="Arial" panose="020B0604020202020204" pitchFamily="34" charset="0"/>
-                <a:ea typeface="標楷體" panose="03000509000000000000" pitchFamily="65" charset="-120"/>
-                <a:cs typeface="Arial" panose="020B0604020202020204" pitchFamily="34" charset="0"/>
-              </a:rPr>
-              <a:t>套件即可。</a:t>
-            </a:r>
           </a:p>
         </p:txBody>
       </p:sp>
@@ -4681,7 +4912,7 @@
 </p:sld>
 </file>
 
-<file path=ppt/slides/slide15.xml><?xml version="1.0" encoding="utf-8"?>
+<file path=ppt/slides/slide16.xml><?xml version="1.0" encoding="utf-8"?>
 <p:sld xmlns:a="http://schemas.openxmlformats.org/drawingml/2006/main" xmlns:r="http://schemas.openxmlformats.org/officeDocument/2006/relationships" xmlns:p="http://schemas.openxmlformats.org/presentationml/2006/main">
   <p:cSld>
     <p:spTree>

--- a/1224報告_NAudio.pptx
+++ b/1224報告_NAudio.pptx
@@ -5,12 +5,12 @@
     <p:sldMasterId id="2147483648" r:id="rId1"/>
   </p:sldMasterIdLst>
   <p:notesMasterIdLst>
-    <p:notesMasterId r:id="rId18"/>
+    <p:notesMasterId r:id="rId19"/>
   </p:notesMasterIdLst>
   <p:sldIdLst>
     <p:sldId id="256" r:id="rId2"/>
     <p:sldId id="269" r:id="rId3"/>
-    <p:sldId id="261" r:id="rId4"/>
+    <p:sldId id="275" r:id="rId4"/>
     <p:sldId id="267" r:id="rId5"/>
     <p:sldId id="259" r:id="rId6"/>
     <p:sldId id="260" r:id="rId7"/>
@@ -22,8 +22,9 @@
     <p:sldId id="270" r:id="rId13"/>
     <p:sldId id="263" r:id="rId14"/>
     <p:sldId id="268" r:id="rId15"/>
-    <p:sldId id="264" r:id="rId16"/>
-    <p:sldId id="262" r:id="rId17"/>
+    <p:sldId id="276" r:id="rId16"/>
+    <p:sldId id="264" r:id="rId17"/>
+    <p:sldId id="262" r:id="rId18"/>
   </p:sldIdLst>
   <p:sldSz cx="12192000" cy="6858000"/>
   <p:notesSz cx="6858000" cy="9144000"/>
@@ -212,7 +213,7 @@
           <a:p>
             <a:fld id="{6413CF5F-F7FE-4C60-8BAA-96CD33FF18AC}" type="datetimeFigureOut">
               <a:rPr lang="zh-TW" altLang="en-US" smtClean="0"/>
-              <a:t>2024/12/27</a:t>
+              <a:t>2024/12/30</a:t>
             </a:fld>
             <a:endParaRPr lang="zh-TW" altLang="en-US"/>
           </a:p>
@@ -710,7 +711,7 @@
           <a:p>
             <a:fld id="{31822A52-CB54-4445-AC34-F501DA2D4712}" type="datetimeFigureOut">
               <a:rPr lang="zh-TW" altLang="en-US" smtClean="0"/>
-              <a:t>2024/12/27</a:t>
+              <a:t>2024/12/30</a:t>
             </a:fld>
             <a:endParaRPr lang="zh-TW" altLang="en-US"/>
           </a:p>
@@ -908,7 +909,7 @@
           <a:p>
             <a:fld id="{31822A52-CB54-4445-AC34-F501DA2D4712}" type="datetimeFigureOut">
               <a:rPr lang="zh-TW" altLang="en-US" smtClean="0"/>
-              <a:t>2024/12/27</a:t>
+              <a:t>2024/12/30</a:t>
             </a:fld>
             <a:endParaRPr lang="zh-TW" altLang="en-US"/>
           </a:p>
@@ -1116,7 +1117,7 @@
           <a:p>
             <a:fld id="{31822A52-CB54-4445-AC34-F501DA2D4712}" type="datetimeFigureOut">
               <a:rPr lang="zh-TW" altLang="en-US" smtClean="0"/>
-              <a:t>2024/12/27</a:t>
+              <a:t>2024/12/30</a:t>
             </a:fld>
             <a:endParaRPr lang="zh-TW" altLang="en-US"/>
           </a:p>
@@ -1314,7 +1315,7 @@
           <a:p>
             <a:fld id="{31822A52-CB54-4445-AC34-F501DA2D4712}" type="datetimeFigureOut">
               <a:rPr lang="zh-TW" altLang="en-US" smtClean="0"/>
-              <a:t>2024/12/27</a:t>
+              <a:t>2024/12/30</a:t>
             </a:fld>
             <a:endParaRPr lang="zh-TW" altLang="en-US"/>
           </a:p>
@@ -1589,7 +1590,7 @@
           <a:p>
             <a:fld id="{31822A52-CB54-4445-AC34-F501DA2D4712}" type="datetimeFigureOut">
               <a:rPr lang="zh-TW" altLang="en-US" smtClean="0"/>
-              <a:t>2024/12/27</a:t>
+              <a:t>2024/12/30</a:t>
             </a:fld>
             <a:endParaRPr lang="zh-TW" altLang="en-US"/>
           </a:p>
@@ -1854,7 +1855,7 @@
           <a:p>
             <a:fld id="{31822A52-CB54-4445-AC34-F501DA2D4712}" type="datetimeFigureOut">
               <a:rPr lang="zh-TW" altLang="en-US" smtClean="0"/>
-              <a:t>2024/12/27</a:t>
+              <a:t>2024/12/30</a:t>
             </a:fld>
             <a:endParaRPr lang="zh-TW" altLang="en-US"/>
           </a:p>
@@ -2266,7 +2267,7 @@
           <a:p>
             <a:fld id="{31822A52-CB54-4445-AC34-F501DA2D4712}" type="datetimeFigureOut">
               <a:rPr lang="zh-TW" altLang="en-US" smtClean="0"/>
-              <a:t>2024/12/27</a:t>
+              <a:t>2024/12/30</a:t>
             </a:fld>
             <a:endParaRPr lang="zh-TW" altLang="en-US"/>
           </a:p>
@@ -2407,7 +2408,7 @@
           <a:p>
             <a:fld id="{31822A52-CB54-4445-AC34-F501DA2D4712}" type="datetimeFigureOut">
               <a:rPr lang="zh-TW" altLang="en-US" smtClean="0"/>
-              <a:t>2024/12/27</a:t>
+              <a:t>2024/12/30</a:t>
             </a:fld>
             <a:endParaRPr lang="zh-TW" altLang="en-US"/>
           </a:p>
@@ -2520,7 +2521,7 @@
           <a:p>
             <a:fld id="{31822A52-CB54-4445-AC34-F501DA2D4712}" type="datetimeFigureOut">
               <a:rPr lang="zh-TW" altLang="en-US" smtClean="0"/>
-              <a:t>2024/12/27</a:t>
+              <a:t>2024/12/30</a:t>
             </a:fld>
             <a:endParaRPr lang="zh-TW" altLang="en-US"/>
           </a:p>
@@ -2831,7 +2832,7 @@
           <a:p>
             <a:fld id="{31822A52-CB54-4445-AC34-F501DA2D4712}" type="datetimeFigureOut">
               <a:rPr lang="zh-TW" altLang="en-US" smtClean="0"/>
-              <a:t>2024/12/27</a:t>
+              <a:t>2024/12/30</a:t>
             </a:fld>
             <a:endParaRPr lang="zh-TW" altLang="en-US"/>
           </a:p>
@@ -3119,7 +3120,7 @@
           <a:p>
             <a:fld id="{31822A52-CB54-4445-AC34-F501DA2D4712}" type="datetimeFigureOut">
               <a:rPr lang="zh-TW" altLang="en-US" smtClean="0"/>
-              <a:t>2024/12/27</a:t>
+              <a:t>2024/12/30</a:t>
             </a:fld>
             <a:endParaRPr lang="zh-TW" altLang="en-US"/>
           </a:p>
@@ -3360,7 +3361,7 @@
           <a:p>
             <a:fld id="{31822A52-CB54-4445-AC34-F501DA2D4712}" type="datetimeFigureOut">
               <a:rPr lang="zh-TW" altLang="en-US" smtClean="0"/>
-              <a:t>2024/12/27</a:t>
+              <a:t>2024/12/30</a:t>
             </a:fld>
             <a:endParaRPr lang="zh-TW" altLang="en-US"/>
           </a:p>
@@ -4508,7 +4509,7 @@
           <p:cNvPr id="2" name="標題 1">
             <a:extLst>
               <a:ext uri="{FF2B5EF4-FFF2-40B4-BE49-F238E27FC236}">
-                <a16:creationId xmlns:a16="http://schemas.microsoft.com/office/drawing/2014/main" id="{87DBD4E5-2E32-4135-A3A9-BFC3B91E11F0}"/>
+                <a16:creationId xmlns:a16="http://schemas.microsoft.com/office/drawing/2014/main" id="{9E41BC16-39D1-44CE-A804-37119988FCF7}"/>
               </a:ext>
             </a:extLst>
           </p:cNvPr>
@@ -4524,13 +4525,7 @@
           <a:bodyPr/>
           <a:lstStyle/>
           <a:p>
-            <a:r>
-              <a:rPr lang="zh-TW" altLang="en-US" b="1" dirty="0">
-                <a:latin typeface="標楷體" panose="03000509000000000000" pitchFamily="65" charset="-120"/>
-                <a:ea typeface="標楷體" panose="03000509000000000000" pitchFamily="65" charset="-120"/>
-              </a:rPr>
-              <a:t>總結</a:t>
-            </a:r>
+            <a:endParaRPr lang="zh-TW" altLang="en-US"/>
           </a:p>
         </p:txBody>
       </p:sp>
@@ -4539,7 +4534,7 @@
           <p:cNvPr id="3" name="內容版面配置區 2">
             <a:extLst>
               <a:ext uri="{FF2B5EF4-FFF2-40B4-BE49-F238E27FC236}">
-                <a16:creationId xmlns:a16="http://schemas.microsoft.com/office/drawing/2014/main" id="{A283AC9F-D36C-4C51-9F27-9095C1E13EF3}"/>
+                <a16:creationId xmlns:a16="http://schemas.microsoft.com/office/drawing/2014/main" id="{29AD569C-ED92-43D0-AEA7-357816502C51}"/>
               </a:ext>
             </a:extLst>
           </p:cNvPr>
@@ -4550,359 +4545,48 @@
             <p:ph idx="1"/>
           </p:nvPr>
         </p:nvSpPr>
+        <p:spPr/>
+        <p:txBody>
+          <a:bodyPr/>
+          <a:lstStyle/>
+          <a:p>
+            <a:endParaRPr lang="zh-TW" altLang="en-US"/>
+          </a:p>
+        </p:txBody>
+      </p:sp>
+      <p:pic>
+        <p:nvPicPr>
+          <p:cNvPr id="7" name="圖片 6">
+            <a:extLst>
+              <a:ext uri="{FF2B5EF4-FFF2-40B4-BE49-F238E27FC236}">
+                <a16:creationId xmlns:a16="http://schemas.microsoft.com/office/drawing/2014/main" id="{767234CD-85E9-4965-82E8-56D5CECA2342}"/>
+              </a:ext>
+            </a:extLst>
+          </p:cNvPr>
+          <p:cNvPicPr>
+            <a:picLocks noChangeAspect="1"/>
+          </p:cNvPicPr>
+          <p:nvPr/>
+        </p:nvPicPr>
+        <p:blipFill rotWithShape="1">
+          <a:blip r:embed="rId2"/>
+          <a:srcRect l="123" r="-1"/>
+          <a:stretch/>
+        </p:blipFill>
         <p:spPr>
           <a:xfrm>
-            <a:off x="838200" y="1825625"/>
-            <a:ext cx="10650166" cy="4351338"/>
+            <a:off x="838200" y="556296"/>
+            <a:ext cx="10515600" cy="5745408"/>
           </a:xfrm>
+          <a:prstGeom prst="rect">
+            <a:avLst/>
+          </a:prstGeom>
         </p:spPr>
-        <p:txBody>
-          <a:bodyPr>
-            <a:normAutofit/>
-          </a:bodyPr>
-          <a:lstStyle/>
-          <a:p>
-            <a:r>
-              <a:rPr lang="zh-TW" altLang="en-US" sz="2000" dirty="0">
-                <a:latin typeface="標楷體" panose="03000509000000000000" pitchFamily="65" charset="-120"/>
-                <a:ea typeface="標楷體" panose="03000509000000000000" pitchFamily="65" charset="-120"/>
-              </a:rPr>
-              <a:t>一般調音器的邏輯是一定的音分範圍內都算判斷準確，因為每個設備外放或是樂器的音會有些許泛音上的不同，非專業的收音設備可能會因為這些泛音而對不上標準音高頻率：</a:t>
-            </a:r>
-            <a:br>
-              <a:rPr lang="en-US" altLang="zh-TW" sz="2000" dirty="0">
-                <a:latin typeface="標楷體" panose="03000509000000000000" pitchFamily="65" charset="-120"/>
-                <a:ea typeface="標楷體" panose="03000509000000000000" pitchFamily="65" charset="-120"/>
-              </a:rPr>
-            </a:br>
-            <a:r>
-              <a:rPr lang="zh-TW" altLang="en-US" sz="2000" dirty="0">
-                <a:latin typeface="標楷體" panose="03000509000000000000" pitchFamily="65" charset="-120"/>
-                <a:ea typeface="標楷體" panose="03000509000000000000" pitchFamily="65" charset="-120"/>
-              </a:rPr>
-              <a:t>例如 </a:t>
-            </a:r>
-            <a:r>
-              <a:rPr lang="en-US" altLang="zh-TW" sz="2000" dirty="0">
-                <a:latin typeface="Arial" panose="020B0604020202020204" pitchFamily="34" charset="0"/>
-                <a:ea typeface="標楷體" panose="03000509000000000000" pitchFamily="65" charset="-120"/>
-                <a:cs typeface="Arial" panose="020B0604020202020204" pitchFamily="34" charset="0"/>
-              </a:rPr>
-              <a:t>A4 (440Hz)</a:t>
-            </a:r>
-            <a:r>
-              <a:rPr lang="zh-TW" altLang="en-US" sz="2000" dirty="0">
-                <a:latin typeface="Arial" panose="020B0604020202020204" pitchFamily="34" charset="0"/>
-                <a:ea typeface="標楷體" panose="03000509000000000000" pitchFamily="65" charset="-120"/>
-                <a:cs typeface="Arial" panose="020B0604020202020204" pitchFamily="34" charset="0"/>
-              </a:rPr>
-              <a:t> </a:t>
-            </a:r>
-            <a:r>
-              <a:rPr lang="zh-TW" altLang="en-US" sz="2000" dirty="0">
-                <a:latin typeface="標楷體" panose="03000509000000000000" pitchFamily="65" charset="-120"/>
-                <a:ea typeface="標楷體" panose="03000509000000000000" pitchFamily="65" charset="-120"/>
-              </a:rPr>
-              <a:t>可能就會測到偏高或是偏低，即便是由標準鋼琴發出的音。</a:t>
-            </a:r>
-            <a:endParaRPr lang="en-US" altLang="zh-TW" sz="2000" dirty="0">
-              <a:latin typeface="標楷體" panose="03000509000000000000" pitchFamily="65" charset="-120"/>
-              <a:ea typeface="標楷體" panose="03000509000000000000" pitchFamily="65" charset="-120"/>
-            </a:endParaRPr>
-          </a:p>
-          <a:p>
-            <a:pPr marL="0" indent="0">
-              <a:buNone/>
-            </a:pPr>
-            <a:r>
-              <a:rPr lang="zh-TW" altLang="en-US" sz="2000" dirty="0">
-                <a:latin typeface="標楷體" panose="03000509000000000000" pitchFamily="65" charset="-120"/>
-                <a:ea typeface="標楷體" panose="03000509000000000000" pitchFamily="65" charset="-120"/>
-              </a:rPr>
-              <a:t>  </a:t>
-            </a:r>
-            <a:r>
-              <a:rPr lang="en-US" altLang="zh-TW" sz="2000" dirty="0">
-                <a:latin typeface="Arial" panose="020B0604020202020204" pitchFamily="34" charset="0"/>
-                <a:ea typeface="標楷體" panose="03000509000000000000" pitchFamily="65" charset="-120"/>
-                <a:cs typeface="Arial" panose="020B0604020202020204" pitchFamily="34" charset="0"/>
-              </a:rPr>
-              <a:t>(</a:t>
-            </a:r>
-            <a:r>
-              <a:rPr lang="zh-TW" altLang="en-US" sz="2000" dirty="0">
-                <a:latin typeface="Arial" panose="020B0604020202020204" pitchFamily="34" charset="0"/>
-                <a:ea typeface="標楷體" panose="03000509000000000000" pitchFamily="65" charset="-120"/>
-                <a:cs typeface="Arial" panose="020B0604020202020204" pitchFamily="34" charset="0"/>
-              </a:rPr>
-              <a:t>用兩台手機交叉比對，</a:t>
-            </a:r>
-            <a:r>
-              <a:rPr lang="en-US" altLang="zh-TW" sz="2000" dirty="0">
-                <a:latin typeface="Arial" panose="020B0604020202020204" pitchFamily="34" charset="0"/>
-                <a:ea typeface="標楷體" panose="03000509000000000000" pitchFamily="65" charset="-120"/>
-                <a:cs typeface="Arial" panose="020B0604020202020204" pitchFamily="34" charset="0"/>
-              </a:rPr>
-              <a:t>A</a:t>
-            </a:r>
-            <a:r>
-              <a:rPr lang="zh-TW" altLang="en-US" sz="2000" dirty="0">
-                <a:latin typeface="Arial" panose="020B0604020202020204" pitchFamily="34" charset="0"/>
-                <a:ea typeface="標楷體" panose="03000509000000000000" pitchFamily="65" charset="-120"/>
-                <a:cs typeface="Arial" panose="020B0604020202020204" pitchFamily="34" charset="0"/>
-              </a:rPr>
-              <a:t>手機用鋼琴</a:t>
-            </a:r>
-            <a:r>
-              <a:rPr lang="en-US" altLang="zh-TW" sz="2000" dirty="0">
-                <a:latin typeface="Arial" panose="020B0604020202020204" pitchFamily="34" charset="0"/>
-                <a:ea typeface="標楷體" panose="03000509000000000000" pitchFamily="65" charset="-120"/>
-                <a:cs typeface="Arial" panose="020B0604020202020204" pitchFamily="34" charset="0"/>
-              </a:rPr>
-              <a:t>APP</a:t>
-            </a:r>
-            <a:r>
-              <a:rPr lang="zh-TW" altLang="en-US" sz="2000" dirty="0">
-                <a:latin typeface="Arial" panose="020B0604020202020204" pitchFamily="34" charset="0"/>
-                <a:ea typeface="標楷體" panose="03000509000000000000" pitchFamily="65" charset="-120"/>
-                <a:cs typeface="Arial" panose="020B0604020202020204" pitchFamily="34" charset="0"/>
-              </a:rPr>
-              <a:t>發出</a:t>
-            </a:r>
-            <a:r>
-              <a:rPr lang="en-US" altLang="zh-TW" sz="2000" dirty="0">
-                <a:latin typeface="Arial" panose="020B0604020202020204" pitchFamily="34" charset="0"/>
-                <a:ea typeface="標楷體" panose="03000509000000000000" pitchFamily="65" charset="-120"/>
-                <a:cs typeface="Arial" panose="020B0604020202020204" pitchFamily="34" charset="0"/>
-              </a:rPr>
-              <a:t>A4</a:t>
-            </a:r>
-            <a:r>
-              <a:rPr lang="zh-TW" altLang="en-US" sz="2000" dirty="0">
-                <a:latin typeface="Arial" panose="020B0604020202020204" pitchFamily="34" charset="0"/>
-                <a:ea typeface="標楷體" panose="03000509000000000000" pitchFamily="65" charset="-120"/>
-                <a:cs typeface="Arial" panose="020B0604020202020204" pitchFamily="34" charset="0"/>
-              </a:rPr>
-              <a:t>鍵，</a:t>
-            </a:r>
-            <a:r>
-              <a:rPr lang="en-US" altLang="zh-TW" sz="2000" dirty="0">
-                <a:latin typeface="Arial" panose="020B0604020202020204" pitchFamily="34" charset="0"/>
-                <a:ea typeface="標楷體" panose="03000509000000000000" pitchFamily="65" charset="-120"/>
-                <a:cs typeface="Arial" panose="020B0604020202020204" pitchFamily="34" charset="0"/>
-              </a:rPr>
-              <a:t>B</a:t>
-            </a:r>
-            <a:r>
-              <a:rPr lang="zh-TW" altLang="en-US" sz="2000" dirty="0">
-                <a:latin typeface="Arial" panose="020B0604020202020204" pitchFamily="34" charset="0"/>
-                <a:ea typeface="標楷體" panose="03000509000000000000" pitchFamily="65" charset="-120"/>
-                <a:cs typeface="Arial" panose="020B0604020202020204" pitchFamily="34" charset="0"/>
-              </a:rPr>
-              <a:t>手機測量到仍會高於</a:t>
-            </a:r>
-            <a:r>
-              <a:rPr lang="en-US" altLang="zh-TW" sz="2000" dirty="0">
-                <a:latin typeface="Arial" panose="020B0604020202020204" pitchFamily="34" charset="0"/>
-                <a:ea typeface="標楷體" panose="03000509000000000000" pitchFamily="65" charset="-120"/>
-                <a:cs typeface="Arial" panose="020B0604020202020204" pitchFamily="34" charset="0"/>
-              </a:rPr>
-              <a:t>440Hz</a:t>
-            </a:r>
-            <a:r>
-              <a:rPr lang="zh-TW" altLang="en-US" sz="2000" dirty="0">
-                <a:latin typeface="Arial" panose="020B0604020202020204" pitchFamily="34" charset="0"/>
-                <a:ea typeface="標楷體" panose="03000509000000000000" pitchFamily="65" charset="-120"/>
-                <a:cs typeface="Arial" panose="020B0604020202020204" pitchFamily="34" charset="0"/>
-              </a:rPr>
-              <a:t>一點</a:t>
-            </a:r>
-            <a:r>
-              <a:rPr lang="en-US" altLang="zh-TW" sz="2000" dirty="0">
-                <a:latin typeface="Arial" panose="020B0604020202020204" pitchFamily="34" charset="0"/>
-                <a:ea typeface="標楷體" panose="03000509000000000000" pitchFamily="65" charset="-120"/>
-                <a:cs typeface="Arial" panose="020B0604020202020204" pitchFamily="34" charset="0"/>
-              </a:rPr>
-              <a:t>)</a:t>
-            </a:r>
-          </a:p>
-          <a:p>
-            <a:r>
-              <a:rPr lang="zh-TW" altLang="en-US" sz="2000" dirty="0">
-                <a:latin typeface="標楷體" panose="03000509000000000000" pitchFamily="65" charset="-120"/>
-                <a:ea typeface="標楷體" panose="03000509000000000000" pitchFamily="65" charset="-120"/>
-              </a:rPr>
-              <a:t>一般的麥克風，容易收到環境或是電腦發出的高頻</a:t>
-            </a:r>
-            <a:r>
-              <a:rPr lang="en-US" altLang="zh-TW" sz="2000" dirty="0">
-                <a:latin typeface="Consolas" panose="020B0609020204030204" pitchFamily="49" charset="0"/>
-                <a:ea typeface="標楷體" panose="03000509000000000000" pitchFamily="65" charset="-120"/>
-              </a:rPr>
-              <a:t>(</a:t>
-            </a:r>
-            <a:r>
-              <a:rPr lang="zh-TW" altLang="en-US" sz="2000" dirty="0">
-                <a:latin typeface="Consolas" panose="020B0609020204030204" pitchFamily="49" charset="0"/>
-                <a:ea typeface="標楷體" panose="03000509000000000000" pitchFamily="65" charset="-120"/>
-              </a:rPr>
-              <a:t>大約在第</a:t>
-            </a:r>
-            <a:r>
-              <a:rPr lang="en-US" altLang="zh-TW" sz="2000" dirty="0">
-                <a:latin typeface="Arial" panose="020B0604020202020204" pitchFamily="34" charset="0"/>
-                <a:ea typeface="標楷體" panose="03000509000000000000" pitchFamily="65" charset="-120"/>
-                <a:cs typeface="Arial" panose="020B0604020202020204" pitchFamily="34" charset="0"/>
-              </a:rPr>
-              <a:t>6</a:t>
-            </a:r>
-            <a:r>
-              <a:rPr lang="zh-TW" altLang="en-US" sz="2000" dirty="0">
-                <a:latin typeface="Consolas" panose="020B0609020204030204" pitchFamily="49" charset="0"/>
-                <a:ea typeface="標楷體" panose="03000509000000000000" pitchFamily="65" charset="-120"/>
-              </a:rPr>
-              <a:t>、</a:t>
-            </a:r>
-            <a:r>
-              <a:rPr lang="en-US" altLang="zh-TW" sz="2000" dirty="0">
-                <a:latin typeface="Arial" panose="020B0604020202020204" pitchFamily="34" charset="0"/>
-                <a:ea typeface="標楷體" panose="03000509000000000000" pitchFamily="65" charset="-120"/>
-                <a:cs typeface="Arial" panose="020B0604020202020204" pitchFamily="34" charset="0"/>
-              </a:rPr>
-              <a:t>7</a:t>
-            </a:r>
-            <a:r>
-              <a:rPr lang="zh-TW" altLang="en-US" sz="2000" dirty="0">
-                <a:latin typeface="Consolas" panose="020B0609020204030204" pitchFamily="49" charset="0"/>
-                <a:ea typeface="標楷體" panose="03000509000000000000" pitchFamily="65" charset="-120"/>
-              </a:rPr>
-              <a:t>組八度</a:t>
-            </a:r>
-            <a:r>
-              <a:rPr lang="en-US" altLang="zh-TW" sz="2000" dirty="0">
-                <a:latin typeface="Consolas" panose="020B0609020204030204" pitchFamily="49" charset="0"/>
-                <a:ea typeface="標楷體" panose="03000509000000000000" pitchFamily="65" charset="-120"/>
-              </a:rPr>
-              <a:t>)</a:t>
-            </a:r>
-            <a:r>
-              <a:rPr lang="zh-TW" altLang="en-US" sz="2000" dirty="0">
-                <a:latin typeface="Consolas" panose="020B0609020204030204" pitchFamily="49" charset="0"/>
-                <a:ea typeface="標楷體" panose="03000509000000000000" pitchFamily="65" charset="-120"/>
-              </a:rPr>
-              <a:t>，這一點需要用程式或是硬體本身進行濾波處理。</a:t>
-            </a:r>
-            <a:endParaRPr lang="en-US" altLang="zh-TW" sz="2000" dirty="0">
-              <a:latin typeface="Consolas" panose="020B0609020204030204" pitchFamily="49" charset="0"/>
-              <a:ea typeface="標楷體" panose="03000509000000000000" pitchFamily="65" charset="-120"/>
-            </a:endParaRPr>
-          </a:p>
-          <a:p>
-            <a:r>
-              <a:rPr lang="zh-TW" altLang="en-US" sz="2000" dirty="0">
-                <a:latin typeface="Consolas" panose="020B0609020204030204" pitchFamily="49" charset="0"/>
-                <a:ea typeface="標楷體" panose="03000509000000000000" pitchFamily="65" charset="-120"/>
-              </a:rPr>
-              <a:t>只要是自然發出的音頻</a:t>
-            </a:r>
-            <a:r>
-              <a:rPr lang="en-US" altLang="zh-TW" sz="2000" dirty="0">
-                <a:latin typeface="Consolas" panose="020B0609020204030204" pitchFamily="49" charset="0"/>
-                <a:ea typeface="標楷體" panose="03000509000000000000" pitchFamily="65" charset="-120"/>
-              </a:rPr>
-              <a:t>(</a:t>
-            </a:r>
-            <a:r>
-              <a:rPr lang="zh-TW" altLang="en-US" sz="2000" dirty="0">
-                <a:latin typeface="Consolas" panose="020B0609020204030204" pitchFamily="49" charset="0"/>
-                <a:ea typeface="標楷體" panose="03000509000000000000" pitchFamily="65" charset="-120"/>
-              </a:rPr>
-              <a:t>不包含音叉</a:t>
-            </a:r>
-            <a:r>
-              <a:rPr lang="en-US" altLang="zh-TW" sz="2000" dirty="0">
-                <a:latin typeface="Consolas" panose="020B0609020204030204" pitchFamily="49" charset="0"/>
-                <a:ea typeface="標楷體" panose="03000509000000000000" pitchFamily="65" charset="-120"/>
-              </a:rPr>
-              <a:t>)</a:t>
-            </a:r>
-            <a:r>
-              <a:rPr lang="zh-TW" altLang="en-US" sz="2000" dirty="0">
-                <a:latin typeface="Consolas" panose="020B0609020204030204" pitchFamily="49" charset="0"/>
-                <a:ea typeface="標楷體" panose="03000509000000000000" pitchFamily="65" charset="-120"/>
-              </a:rPr>
-              <a:t>，就會有泛音列</a:t>
-            </a:r>
-            <a:r>
-              <a:rPr lang="en-US" altLang="zh-TW" sz="2000" dirty="0">
-                <a:latin typeface="Consolas" panose="020B0609020204030204" pitchFamily="49" charset="0"/>
-                <a:ea typeface="標楷體" panose="03000509000000000000" pitchFamily="65" charset="-120"/>
-              </a:rPr>
-              <a:t>(</a:t>
-            </a:r>
-            <a:r>
-              <a:rPr lang="zh-TW" altLang="en-US" sz="2000" dirty="0">
-                <a:latin typeface="Consolas" panose="020B0609020204030204" pitchFamily="49" charset="0"/>
-                <a:ea typeface="標楷體" panose="03000509000000000000" pitchFamily="65" charset="-120"/>
-              </a:rPr>
-              <a:t>形成駐波</a:t>
-            </a:r>
-            <a:r>
-              <a:rPr lang="en-US" altLang="zh-TW" sz="2000" dirty="0">
-                <a:latin typeface="Consolas" panose="020B0609020204030204" pitchFamily="49" charset="0"/>
-                <a:ea typeface="標楷體" panose="03000509000000000000" pitchFamily="65" charset="-120"/>
-              </a:rPr>
-              <a:t>)</a:t>
-            </a:r>
-            <a:r>
-              <a:rPr lang="zh-TW" altLang="en-US" sz="2000" dirty="0">
-                <a:latin typeface="Consolas" panose="020B0609020204030204" pitchFamily="49" charset="0"/>
-                <a:ea typeface="標楷體" panose="03000509000000000000" pitchFamily="65" charset="-120"/>
-              </a:rPr>
-              <a:t>，實際物體的泛音會受到材質的影響形成偏差音，而收音器也會受到泛音的影響而結果不同。</a:t>
-            </a:r>
-            <a:endParaRPr lang="en-US" altLang="zh-TW" sz="2000" dirty="0">
-              <a:latin typeface="Consolas" panose="020B0609020204030204" pitchFamily="49" charset="0"/>
-              <a:ea typeface="標楷體" panose="03000509000000000000" pitchFamily="65" charset="-120"/>
-            </a:endParaRPr>
-          </a:p>
-          <a:p>
-            <a:r>
-              <a:rPr lang="zh-TW" altLang="en-US" sz="2000" dirty="0">
-                <a:latin typeface="Arial" panose="020B0604020202020204" pitchFamily="34" charset="0"/>
-                <a:ea typeface="標楷體" panose="03000509000000000000" pitchFamily="65" charset="-120"/>
-                <a:cs typeface="Arial" panose="020B0604020202020204" pitchFamily="34" charset="0"/>
-              </a:rPr>
-              <a:t>實際上要分析歌曲調性技術複雜，需涉及到傅立葉轉換</a:t>
-            </a:r>
-            <a:r>
-              <a:rPr lang="en-US" altLang="zh-TW" sz="2000" dirty="0">
-                <a:latin typeface="Arial" panose="020B0604020202020204" pitchFamily="34" charset="0"/>
-                <a:ea typeface="標楷體" panose="03000509000000000000" pitchFamily="65" charset="-120"/>
-                <a:cs typeface="Arial" panose="020B0604020202020204" pitchFamily="34" charset="0"/>
-              </a:rPr>
-              <a:t>(Fourier transform, FT)</a:t>
-            </a:r>
-            <a:r>
-              <a:rPr lang="zh-TW" altLang="en-US" sz="2000" dirty="0">
-                <a:latin typeface="Arial" panose="020B0604020202020204" pitchFamily="34" charset="0"/>
-                <a:ea typeface="標楷體" panose="03000509000000000000" pitchFamily="65" charset="-120"/>
-                <a:cs typeface="Arial" panose="020B0604020202020204" pitchFamily="34" charset="0"/>
-              </a:rPr>
-              <a:t>。</a:t>
-            </a:r>
-            <a:endParaRPr lang="en-US" altLang="zh-TW" sz="2000" dirty="0">
-              <a:latin typeface="Arial" panose="020B0604020202020204" pitchFamily="34" charset="0"/>
-              <a:ea typeface="標楷體" panose="03000509000000000000" pitchFamily="65" charset="-120"/>
-              <a:cs typeface="Arial" panose="020B0604020202020204" pitchFamily="34" charset="0"/>
-            </a:endParaRPr>
-          </a:p>
-        </p:txBody>
-      </p:sp>
+      </p:pic>
     </p:spTree>
     <p:extLst>
       <p:ext uri="{BB962C8B-B14F-4D97-AF65-F5344CB8AC3E}">
-        <p14:creationId xmlns:p14="http://schemas.microsoft.com/office/powerpoint/2010/main" val="3070178691"/>
+        <p14:creationId xmlns:p14="http://schemas.microsoft.com/office/powerpoint/2010/main" val="221754085"/>
       </p:ext>
     </p:extLst>
   </p:cSld>
@@ -4934,7 +4618,7 @@
           <p:cNvPr id="2" name="標題 1">
             <a:extLst>
               <a:ext uri="{FF2B5EF4-FFF2-40B4-BE49-F238E27FC236}">
-                <a16:creationId xmlns:a16="http://schemas.microsoft.com/office/drawing/2014/main" id="{EB5148FA-0014-4A04-9A87-17E66529A9CC}"/>
+                <a16:creationId xmlns:a16="http://schemas.microsoft.com/office/drawing/2014/main" id="{87DBD4E5-2E32-4135-A3A9-BFC3B91E11F0}"/>
               </a:ext>
             </a:extLst>
           </p:cNvPr>
@@ -4955,7 +4639,7 @@
                 <a:latin typeface="標楷體" panose="03000509000000000000" pitchFamily="65" charset="-120"/>
                 <a:ea typeface="標楷體" panose="03000509000000000000" pitchFamily="65" charset="-120"/>
               </a:rPr>
-              <a:t>參考</a:t>
+              <a:t>總結</a:t>
             </a:r>
           </a:p>
         </p:txBody>
@@ -4965,7 +4649,7 @@
           <p:cNvPr id="3" name="內容版面配置區 2">
             <a:extLst>
               <a:ext uri="{FF2B5EF4-FFF2-40B4-BE49-F238E27FC236}">
-                <a16:creationId xmlns:a16="http://schemas.microsoft.com/office/drawing/2014/main" id="{1347C2E4-E0FC-4B89-9770-5884C01660DA}"/>
+                <a16:creationId xmlns:a16="http://schemas.microsoft.com/office/drawing/2014/main" id="{A283AC9F-D36C-4C51-9F27-9095C1E13EF3}"/>
               </a:ext>
             </a:extLst>
           </p:cNvPr>
@@ -4974,6 +4658,401 @@
           </p:cNvSpPr>
           <p:nvPr>
             <p:ph idx="1"/>
+          </p:nvPr>
+        </p:nvSpPr>
+        <p:spPr>
+          <a:xfrm>
+            <a:off x="838200" y="1825625"/>
+            <a:ext cx="10650166" cy="4351338"/>
+          </a:xfrm>
+        </p:spPr>
+        <p:txBody>
+          <a:bodyPr>
+            <a:normAutofit/>
+          </a:bodyPr>
+          <a:lstStyle/>
+          <a:p>
+            <a:r>
+              <a:rPr lang="zh-TW" altLang="en-US" sz="2000" dirty="0">
+                <a:latin typeface="標楷體" panose="03000509000000000000" pitchFamily="65" charset="-120"/>
+                <a:ea typeface="標楷體" panose="03000509000000000000" pitchFamily="65" charset="-120"/>
+              </a:rPr>
+              <a:t>一般調音器的邏輯是一定的音分範圍內都算判斷準確，因為每個設備外放或是樂器的音會有些許泛音上的不同，非專業的收音設備可能會因為這些泛音而對不上標準音高頻率：</a:t>
+            </a:r>
+            <a:br>
+              <a:rPr lang="en-US" altLang="zh-TW" sz="2000" dirty="0">
+                <a:latin typeface="標楷體" panose="03000509000000000000" pitchFamily="65" charset="-120"/>
+                <a:ea typeface="標楷體" panose="03000509000000000000" pitchFamily="65" charset="-120"/>
+              </a:rPr>
+            </a:br>
+            <a:r>
+              <a:rPr lang="zh-TW" altLang="en-US" sz="2000" dirty="0">
+                <a:latin typeface="標楷體" panose="03000509000000000000" pitchFamily="65" charset="-120"/>
+                <a:ea typeface="標楷體" panose="03000509000000000000" pitchFamily="65" charset="-120"/>
+              </a:rPr>
+              <a:t>例如 </a:t>
+            </a:r>
+            <a:r>
+              <a:rPr lang="en-US" altLang="zh-TW" sz="2000" dirty="0">
+                <a:latin typeface="Arial" panose="020B0604020202020204" pitchFamily="34" charset="0"/>
+                <a:ea typeface="標楷體" panose="03000509000000000000" pitchFamily="65" charset="-120"/>
+                <a:cs typeface="Arial" panose="020B0604020202020204" pitchFamily="34" charset="0"/>
+              </a:rPr>
+              <a:t>A4 (440Hz)</a:t>
+            </a:r>
+            <a:r>
+              <a:rPr lang="zh-TW" altLang="en-US" sz="2000" dirty="0">
+                <a:latin typeface="Arial" panose="020B0604020202020204" pitchFamily="34" charset="0"/>
+                <a:ea typeface="標楷體" panose="03000509000000000000" pitchFamily="65" charset="-120"/>
+                <a:cs typeface="Arial" panose="020B0604020202020204" pitchFamily="34" charset="0"/>
+              </a:rPr>
+              <a:t> </a:t>
+            </a:r>
+            <a:r>
+              <a:rPr lang="zh-TW" altLang="en-US" sz="2000" dirty="0">
+                <a:latin typeface="標楷體" panose="03000509000000000000" pitchFamily="65" charset="-120"/>
+                <a:ea typeface="標楷體" panose="03000509000000000000" pitchFamily="65" charset="-120"/>
+              </a:rPr>
+              <a:t>可能就會測到偏高或是偏低，即便是由標準鋼琴發出的音。</a:t>
+            </a:r>
+            <a:endParaRPr lang="en-US" altLang="zh-TW" sz="2000" dirty="0">
+              <a:latin typeface="標楷體" panose="03000509000000000000" pitchFamily="65" charset="-120"/>
+              <a:ea typeface="標楷體" panose="03000509000000000000" pitchFamily="65" charset="-120"/>
+            </a:endParaRPr>
+          </a:p>
+          <a:p>
+            <a:pPr marL="0" indent="0">
+              <a:buNone/>
+            </a:pPr>
+            <a:r>
+              <a:rPr lang="zh-TW" altLang="en-US" sz="2000" dirty="0">
+                <a:latin typeface="標楷體" panose="03000509000000000000" pitchFamily="65" charset="-120"/>
+                <a:ea typeface="標楷體" panose="03000509000000000000" pitchFamily="65" charset="-120"/>
+              </a:rPr>
+              <a:t>  </a:t>
+            </a:r>
+            <a:r>
+              <a:rPr lang="en-US" altLang="zh-TW" sz="2000" dirty="0">
+                <a:latin typeface="Arial" panose="020B0604020202020204" pitchFamily="34" charset="0"/>
+                <a:ea typeface="標楷體" panose="03000509000000000000" pitchFamily="65" charset="-120"/>
+                <a:cs typeface="Arial" panose="020B0604020202020204" pitchFamily="34" charset="0"/>
+              </a:rPr>
+              <a:t>(</a:t>
+            </a:r>
+            <a:r>
+              <a:rPr lang="zh-TW" altLang="en-US" sz="2000" dirty="0">
+                <a:latin typeface="Arial" panose="020B0604020202020204" pitchFamily="34" charset="0"/>
+                <a:ea typeface="標楷體" panose="03000509000000000000" pitchFamily="65" charset="-120"/>
+                <a:cs typeface="Arial" panose="020B0604020202020204" pitchFamily="34" charset="0"/>
+              </a:rPr>
+              <a:t>用兩台手機交叉比對，</a:t>
+            </a:r>
+            <a:r>
+              <a:rPr lang="en-US" altLang="zh-TW" sz="2000" dirty="0">
+                <a:latin typeface="Arial" panose="020B0604020202020204" pitchFamily="34" charset="0"/>
+                <a:ea typeface="標楷體" panose="03000509000000000000" pitchFamily="65" charset="-120"/>
+                <a:cs typeface="Arial" panose="020B0604020202020204" pitchFamily="34" charset="0"/>
+              </a:rPr>
+              <a:t>A</a:t>
+            </a:r>
+            <a:r>
+              <a:rPr lang="zh-TW" altLang="en-US" sz="2000" dirty="0">
+                <a:latin typeface="Arial" panose="020B0604020202020204" pitchFamily="34" charset="0"/>
+                <a:ea typeface="標楷體" panose="03000509000000000000" pitchFamily="65" charset="-120"/>
+                <a:cs typeface="Arial" panose="020B0604020202020204" pitchFamily="34" charset="0"/>
+              </a:rPr>
+              <a:t>手機用鋼琴</a:t>
+            </a:r>
+            <a:r>
+              <a:rPr lang="en-US" altLang="zh-TW" sz="2000" dirty="0">
+                <a:latin typeface="Arial" panose="020B0604020202020204" pitchFamily="34" charset="0"/>
+                <a:ea typeface="標楷體" panose="03000509000000000000" pitchFamily="65" charset="-120"/>
+                <a:cs typeface="Arial" panose="020B0604020202020204" pitchFamily="34" charset="0"/>
+              </a:rPr>
+              <a:t>APP</a:t>
+            </a:r>
+            <a:r>
+              <a:rPr lang="zh-TW" altLang="en-US" sz="2000" dirty="0">
+                <a:latin typeface="Arial" panose="020B0604020202020204" pitchFamily="34" charset="0"/>
+                <a:ea typeface="標楷體" panose="03000509000000000000" pitchFamily="65" charset="-120"/>
+                <a:cs typeface="Arial" panose="020B0604020202020204" pitchFamily="34" charset="0"/>
+              </a:rPr>
+              <a:t>發出</a:t>
+            </a:r>
+            <a:r>
+              <a:rPr lang="en-US" altLang="zh-TW" sz="2000" dirty="0">
+                <a:latin typeface="Arial" panose="020B0604020202020204" pitchFamily="34" charset="0"/>
+                <a:ea typeface="標楷體" panose="03000509000000000000" pitchFamily="65" charset="-120"/>
+                <a:cs typeface="Arial" panose="020B0604020202020204" pitchFamily="34" charset="0"/>
+              </a:rPr>
+              <a:t>A4</a:t>
+            </a:r>
+            <a:r>
+              <a:rPr lang="zh-TW" altLang="en-US" sz="2000" dirty="0">
+                <a:latin typeface="Arial" panose="020B0604020202020204" pitchFamily="34" charset="0"/>
+                <a:ea typeface="標楷體" panose="03000509000000000000" pitchFamily="65" charset="-120"/>
+                <a:cs typeface="Arial" panose="020B0604020202020204" pitchFamily="34" charset="0"/>
+              </a:rPr>
+              <a:t>鍵，</a:t>
+            </a:r>
+            <a:r>
+              <a:rPr lang="en-US" altLang="zh-TW" sz="2000" dirty="0">
+                <a:latin typeface="Arial" panose="020B0604020202020204" pitchFamily="34" charset="0"/>
+                <a:ea typeface="標楷體" panose="03000509000000000000" pitchFamily="65" charset="-120"/>
+                <a:cs typeface="Arial" panose="020B0604020202020204" pitchFamily="34" charset="0"/>
+              </a:rPr>
+              <a:t>B</a:t>
+            </a:r>
+            <a:r>
+              <a:rPr lang="zh-TW" altLang="en-US" sz="2000" dirty="0">
+                <a:latin typeface="Arial" panose="020B0604020202020204" pitchFamily="34" charset="0"/>
+                <a:ea typeface="標楷體" panose="03000509000000000000" pitchFamily="65" charset="-120"/>
+                <a:cs typeface="Arial" panose="020B0604020202020204" pitchFamily="34" charset="0"/>
+              </a:rPr>
+              <a:t>手機測量到仍會高於</a:t>
+            </a:r>
+            <a:r>
+              <a:rPr lang="en-US" altLang="zh-TW" sz="2000" dirty="0">
+                <a:latin typeface="Arial" panose="020B0604020202020204" pitchFamily="34" charset="0"/>
+                <a:ea typeface="標楷體" panose="03000509000000000000" pitchFamily="65" charset="-120"/>
+                <a:cs typeface="Arial" panose="020B0604020202020204" pitchFamily="34" charset="0"/>
+              </a:rPr>
+              <a:t>440Hz</a:t>
+            </a:r>
+            <a:r>
+              <a:rPr lang="zh-TW" altLang="en-US" sz="2000" dirty="0">
+                <a:latin typeface="Arial" panose="020B0604020202020204" pitchFamily="34" charset="0"/>
+                <a:ea typeface="標楷體" panose="03000509000000000000" pitchFamily="65" charset="-120"/>
+                <a:cs typeface="Arial" panose="020B0604020202020204" pitchFamily="34" charset="0"/>
+              </a:rPr>
+              <a:t>一點</a:t>
+            </a:r>
+            <a:r>
+              <a:rPr lang="en-US" altLang="zh-TW" sz="2000" dirty="0">
+                <a:latin typeface="Arial" panose="020B0604020202020204" pitchFamily="34" charset="0"/>
+                <a:ea typeface="標楷體" panose="03000509000000000000" pitchFamily="65" charset="-120"/>
+                <a:cs typeface="Arial" panose="020B0604020202020204" pitchFamily="34" charset="0"/>
+              </a:rPr>
+              <a:t>)</a:t>
+            </a:r>
+          </a:p>
+          <a:p>
+            <a:r>
+              <a:rPr lang="zh-TW" altLang="en-US" sz="2000" dirty="0">
+                <a:latin typeface="標楷體" panose="03000509000000000000" pitchFamily="65" charset="-120"/>
+                <a:ea typeface="標楷體" panose="03000509000000000000" pitchFamily="65" charset="-120"/>
+              </a:rPr>
+              <a:t>一般的麥克風，容易收到環境或是電腦發出的高頻</a:t>
+            </a:r>
+            <a:r>
+              <a:rPr lang="en-US" altLang="zh-TW" sz="2000" dirty="0">
+                <a:latin typeface="Consolas" panose="020B0609020204030204" pitchFamily="49" charset="0"/>
+                <a:ea typeface="標楷體" panose="03000509000000000000" pitchFamily="65" charset="-120"/>
+              </a:rPr>
+              <a:t>(</a:t>
+            </a:r>
+            <a:r>
+              <a:rPr lang="zh-TW" altLang="en-US" sz="2000" dirty="0">
+                <a:latin typeface="Consolas" panose="020B0609020204030204" pitchFamily="49" charset="0"/>
+                <a:ea typeface="標楷體" panose="03000509000000000000" pitchFamily="65" charset="-120"/>
+              </a:rPr>
+              <a:t>大約在第</a:t>
+            </a:r>
+            <a:r>
+              <a:rPr lang="en-US" altLang="zh-TW" sz="2000" dirty="0">
+                <a:latin typeface="Arial" panose="020B0604020202020204" pitchFamily="34" charset="0"/>
+                <a:ea typeface="標楷體" panose="03000509000000000000" pitchFamily="65" charset="-120"/>
+                <a:cs typeface="Arial" panose="020B0604020202020204" pitchFamily="34" charset="0"/>
+              </a:rPr>
+              <a:t>6</a:t>
+            </a:r>
+            <a:r>
+              <a:rPr lang="zh-TW" altLang="en-US" sz="2000" dirty="0">
+                <a:latin typeface="Consolas" panose="020B0609020204030204" pitchFamily="49" charset="0"/>
+                <a:ea typeface="標楷體" panose="03000509000000000000" pitchFamily="65" charset="-120"/>
+              </a:rPr>
+              <a:t>、</a:t>
+            </a:r>
+            <a:r>
+              <a:rPr lang="en-US" altLang="zh-TW" sz="2000" dirty="0">
+                <a:latin typeface="Arial" panose="020B0604020202020204" pitchFamily="34" charset="0"/>
+                <a:ea typeface="標楷體" panose="03000509000000000000" pitchFamily="65" charset="-120"/>
+                <a:cs typeface="Arial" panose="020B0604020202020204" pitchFamily="34" charset="0"/>
+              </a:rPr>
+              <a:t>7</a:t>
+            </a:r>
+            <a:r>
+              <a:rPr lang="zh-TW" altLang="en-US" sz="2000" dirty="0">
+                <a:latin typeface="Consolas" panose="020B0609020204030204" pitchFamily="49" charset="0"/>
+                <a:ea typeface="標楷體" panose="03000509000000000000" pitchFamily="65" charset="-120"/>
+              </a:rPr>
+              <a:t>組八度</a:t>
+            </a:r>
+            <a:r>
+              <a:rPr lang="en-US" altLang="zh-TW" sz="2000" dirty="0">
+                <a:latin typeface="Consolas" panose="020B0609020204030204" pitchFamily="49" charset="0"/>
+                <a:ea typeface="標楷體" panose="03000509000000000000" pitchFamily="65" charset="-120"/>
+              </a:rPr>
+              <a:t>)</a:t>
+            </a:r>
+            <a:r>
+              <a:rPr lang="zh-TW" altLang="en-US" sz="2000" dirty="0">
+                <a:latin typeface="Consolas" panose="020B0609020204030204" pitchFamily="49" charset="0"/>
+                <a:ea typeface="標楷體" panose="03000509000000000000" pitchFamily="65" charset="-120"/>
+              </a:rPr>
+              <a:t>，這一點需要用程式或是硬體本身進行濾波處理。</a:t>
+            </a:r>
+            <a:endParaRPr lang="en-US" altLang="zh-TW" sz="2000" dirty="0">
+              <a:latin typeface="Consolas" panose="020B0609020204030204" pitchFamily="49" charset="0"/>
+              <a:ea typeface="標楷體" panose="03000509000000000000" pitchFamily="65" charset="-120"/>
+            </a:endParaRPr>
+          </a:p>
+          <a:p>
+            <a:r>
+              <a:rPr lang="zh-TW" altLang="en-US" sz="2000" dirty="0">
+                <a:latin typeface="Consolas" panose="020B0609020204030204" pitchFamily="49" charset="0"/>
+                <a:ea typeface="標楷體" panose="03000509000000000000" pitchFamily="65" charset="-120"/>
+              </a:rPr>
+              <a:t>只要是自然發出的音頻</a:t>
+            </a:r>
+            <a:r>
+              <a:rPr lang="en-US" altLang="zh-TW" sz="2000" dirty="0">
+                <a:latin typeface="Consolas" panose="020B0609020204030204" pitchFamily="49" charset="0"/>
+                <a:ea typeface="標楷體" panose="03000509000000000000" pitchFamily="65" charset="-120"/>
+              </a:rPr>
+              <a:t>(</a:t>
+            </a:r>
+            <a:r>
+              <a:rPr lang="zh-TW" altLang="en-US" sz="2000" dirty="0">
+                <a:latin typeface="Consolas" panose="020B0609020204030204" pitchFamily="49" charset="0"/>
+                <a:ea typeface="標楷體" panose="03000509000000000000" pitchFamily="65" charset="-120"/>
+              </a:rPr>
+              <a:t>不包含音叉</a:t>
+            </a:r>
+            <a:r>
+              <a:rPr lang="en-US" altLang="zh-TW" sz="2000" dirty="0">
+                <a:latin typeface="Consolas" panose="020B0609020204030204" pitchFamily="49" charset="0"/>
+                <a:ea typeface="標楷體" panose="03000509000000000000" pitchFamily="65" charset="-120"/>
+              </a:rPr>
+              <a:t>)</a:t>
+            </a:r>
+            <a:r>
+              <a:rPr lang="zh-TW" altLang="en-US" sz="2000" dirty="0">
+                <a:latin typeface="Consolas" panose="020B0609020204030204" pitchFamily="49" charset="0"/>
+                <a:ea typeface="標楷體" panose="03000509000000000000" pitchFamily="65" charset="-120"/>
+              </a:rPr>
+              <a:t>，就會有泛音列</a:t>
+            </a:r>
+            <a:r>
+              <a:rPr lang="en-US" altLang="zh-TW" sz="2000" dirty="0">
+                <a:latin typeface="Consolas" panose="020B0609020204030204" pitchFamily="49" charset="0"/>
+                <a:ea typeface="標楷體" panose="03000509000000000000" pitchFamily="65" charset="-120"/>
+              </a:rPr>
+              <a:t>(</a:t>
+            </a:r>
+            <a:r>
+              <a:rPr lang="zh-TW" altLang="en-US" sz="2000" dirty="0">
+                <a:latin typeface="Consolas" panose="020B0609020204030204" pitchFamily="49" charset="0"/>
+                <a:ea typeface="標楷體" panose="03000509000000000000" pitchFamily="65" charset="-120"/>
+              </a:rPr>
+              <a:t>形成駐波</a:t>
+            </a:r>
+            <a:r>
+              <a:rPr lang="en-US" altLang="zh-TW" sz="2000" dirty="0">
+                <a:latin typeface="Consolas" panose="020B0609020204030204" pitchFamily="49" charset="0"/>
+                <a:ea typeface="標楷體" panose="03000509000000000000" pitchFamily="65" charset="-120"/>
+              </a:rPr>
+              <a:t>)</a:t>
+            </a:r>
+            <a:r>
+              <a:rPr lang="zh-TW" altLang="en-US" sz="2000" dirty="0">
+                <a:latin typeface="Consolas" panose="020B0609020204030204" pitchFamily="49" charset="0"/>
+                <a:ea typeface="標楷體" panose="03000509000000000000" pitchFamily="65" charset="-120"/>
+              </a:rPr>
+              <a:t>，實際物體的泛音會受到材質的影響形成偏差音，而收音器也會受到泛音的影響而結果不同。</a:t>
+            </a:r>
+            <a:endParaRPr lang="en-US" altLang="zh-TW" sz="2000" dirty="0">
+              <a:latin typeface="Consolas" panose="020B0609020204030204" pitchFamily="49" charset="0"/>
+              <a:ea typeface="標楷體" panose="03000509000000000000" pitchFamily="65" charset="-120"/>
+            </a:endParaRPr>
+          </a:p>
+          <a:p>
+            <a:r>
+              <a:rPr lang="zh-TW" altLang="en-US" sz="2000" dirty="0">
+                <a:latin typeface="Arial" panose="020B0604020202020204" pitchFamily="34" charset="0"/>
+                <a:ea typeface="標楷體" panose="03000509000000000000" pitchFamily="65" charset="-120"/>
+                <a:cs typeface="Arial" panose="020B0604020202020204" pitchFamily="34" charset="0"/>
+              </a:rPr>
+              <a:t>實際上要分析歌曲調性技術複雜，需涉及到傅立葉轉換</a:t>
+            </a:r>
+            <a:r>
+              <a:rPr lang="en-US" altLang="zh-TW" sz="2000" dirty="0">
+                <a:latin typeface="Arial" panose="020B0604020202020204" pitchFamily="34" charset="0"/>
+                <a:ea typeface="標楷體" panose="03000509000000000000" pitchFamily="65" charset="-120"/>
+                <a:cs typeface="Arial" panose="020B0604020202020204" pitchFamily="34" charset="0"/>
+              </a:rPr>
+              <a:t>(Fourier transform, FT)</a:t>
+            </a:r>
+            <a:r>
+              <a:rPr lang="zh-TW" altLang="en-US" sz="2000" dirty="0">
+                <a:latin typeface="Arial" panose="020B0604020202020204" pitchFamily="34" charset="0"/>
+                <a:ea typeface="標楷體" panose="03000509000000000000" pitchFamily="65" charset="-120"/>
+                <a:cs typeface="Arial" panose="020B0604020202020204" pitchFamily="34" charset="0"/>
+              </a:rPr>
+              <a:t>。</a:t>
+            </a:r>
+            <a:endParaRPr lang="en-US" altLang="zh-TW" sz="2000" dirty="0">
+              <a:latin typeface="Arial" panose="020B0604020202020204" pitchFamily="34" charset="0"/>
+              <a:ea typeface="標楷體" panose="03000509000000000000" pitchFamily="65" charset="-120"/>
+              <a:cs typeface="Arial" panose="020B0604020202020204" pitchFamily="34" charset="0"/>
+            </a:endParaRPr>
+          </a:p>
+        </p:txBody>
+      </p:sp>
+    </p:spTree>
+    <p:extLst>
+      <p:ext uri="{BB962C8B-B14F-4D97-AF65-F5344CB8AC3E}">
+        <p14:creationId xmlns:p14="http://schemas.microsoft.com/office/powerpoint/2010/main" val="3070178691"/>
+      </p:ext>
+    </p:extLst>
+  </p:cSld>
+  <p:clrMapOvr>
+    <a:masterClrMapping/>
+  </p:clrMapOvr>
+</p:sld>
+</file>
+
+<file path=ppt/slides/slide17.xml><?xml version="1.0" encoding="utf-8"?>
+<p:sld xmlns:a="http://schemas.openxmlformats.org/drawingml/2006/main" xmlns:r="http://schemas.openxmlformats.org/officeDocument/2006/relationships" xmlns:p="http://schemas.openxmlformats.org/presentationml/2006/main">
+  <p:cSld>
+    <p:spTree>
+      <p:nvGrpSpPr>
+        <p:cNvPr id="1" name=""/>
+        <p:cNvGrpSpPr/>
+        <p:nvPr/>
+      </p:nvGrpSpPr>
+      <p:grpSpPr>
+        <a:xfrm>
+          <a:off x="0" y="0"/>
+          <a:ext cx="0" cy="0"/>
+          <a:chOff x="0" y="0"/>
+          <a:chExt cx="0" cy="0"/>
+        </a:xfrm>
+      </p:grpSpPr>
+      <p:sp>
+        <p:nvSpPr>
+          <p:cNvPr id="2" name="標題 1">
+            <a:extLst>
+              <a:ext uri="{FF2B5EF4-FFF2-40B4-BE49-F238E27FC236}">
+                <a16:creationId xmlns:a16="http://schemas.microsoft.com/office/drawing/2014/main" id="{EB5148FA-0014-4A04-9A87-17E66529A9CC}"/>
+              </a:ext>
+            </a:extLst>
+          </p:cNvPr>
+          <p:cNvSpPr>
+            <a:spLocks noGrp="1"/>
+          </p:cNvSpPr>
+          <p:nvPr>
+            <p:ph type="title"/>
           </p:nvPr>
         </p:nvSpPr>
         <p:spPr/>
@@ -4982,66 +5061,333 @@
           <a:lstStyle/>
           <a:p>
             <a:r>
-              <a:rPr lang="en-US" altLang="zh-TW" dirty="0">
+              <a:rPr lang="zh-TW" altLang="en-US" b="1" dirty="0">
+                <a:latin typeface="標楷體" panose="03000509000000000000" pitchFamily="65" charset="-120"/>
+                <a:ea typeface="標楷體" panose="03000509000000000000" pitchFamily="65" charset="-120"/>
+              </a:rPr>
+              <a:t>參考</a:t>
+            </a:r>
+          </a:p>
+        </p:txBody>
+      </p:sp>
+      <p:sp>
+        <p:nvSpPr>
+          <p:cNvPr id="3" name="內容版面配置區 2">
+            <a:extLst>
+              <a:ext uri="{FF2B5EF4-FFF2-40B4-BE49-F238E27FC236}">
+                <a16:creationId xmlns:a16="http://schemas.microsoft.com/office/drawing/2014/main" id="{1347C2E4-E0FC-4B89-9770-5884C01660DA}"/>
+              </a:ext>
+            </a:extLst>
+          </p:cNvPr>
+          <p:cNvSpPr>
+            <a:spLocks noGrp="1"/>
+          </p:cNvSpPr>
+          <p:nvPr>
+            <p:ph idx="1"/>
+          </p:nvPr>
+        </p:nvSpPr>
+        <p:spPr>
+          <a:xfrm>
+            <a:off x="838200" y="1353670"/>
+            <a:ext cx="10515600" cy="5139205"/>
+          </a:xfrm>
+        </p:spPr>
+        <p:txBody>
+          <a:bodyPr>
+            <a:normAutofit/>
+          </a:bodyPr>
+          <a:lstStyle/>
+          <a:p>
+            <a:r>
+              <a:rPr lang="en-US" altLang="zh-TW" sz="2000" dirty="0">
+                <a:latin typeface="Arial" panose="020B0604020202020204" pitchFamily="34" charset="0"/>
+                <a:ea typeface="標楷體" panose="03000509000000000000" pitchFamily="65" charset="-120"/>
+                <a:cs typeface="Arial" panose="020B0604020202020204" pitchFamily="34" charset="0"/>
+              </a:rPr>
+              <a:t>Wiki-</a:t>
+            </a:r>
+            <a:r>
+              <a:rPr lang="zh-TW" altLang="en-US" sz="2000" dirty="0">
+                <a:latin typeface="Arial" panose="020B0604020202020204" pitchFamily="34" charset="0"/>
+                <a:ea typeface="標楷體" panose="03000509000000000000" pitchFamily="65" charset="-120"/>
+                <a:cs typeface="Arial" panose="020B0604020202020204" pitchFamily="34" charset="0"/>
+              </a:rPr>
+              <a:t>音高：</a:t>
+            </a:r>
+            <a:endParaRPr lang="en-US" altLang="zh-TW" sz="2000" dirty="0">
+              <a:latin typeface="Arial" panose="020B0604020202020204" pitchFamily="34" charset="0"/>
+              <a:ea typeface="標楷體" panose="03000509000000000000" pitchFamily="65" charset="-120"/>
+              <a:cs typeface="Arial" panose="020B0604020202020204" pitchFamily="34" charset="0"/>
+            </a:endParaRPr>
+          </a:p>
+          <a:p>
+            <a:pPr marL="0" indent="0">
+              <a:buNone/>
+            </a:pPr>
+            <a:r>
+              <a:rPr lang="en-US" altLang="zh-TW" sz="2000" dirty="0">
+                <a:latin typeface="Arial" panose="020B0604020202020204" pitchFamily="34" charset="0"/>
+                <a:ea typeface="標楷體" panose="03000509000000000000" pitchFamily="65" charset="-120"/>
+                <a:cs typeface="Arial" panose="020B0604020202020204" pitchFamily="34" charset="0"/>
+              </a:rPr>
+              <a:t>    </a:t>
+            </a:r>
+            <a:r>
+              <a:rPr lang="en-US" altLang="zh-TW" sz="2000" dirty="0">
+                <a:latin typeface="Arial" panose="020B0604020202020204" pitchFamily="34" charset="0"/>
+                <a:ea typeface="標楷體" panose="03000509000000000000" pitchFamily="65" charset="-120"/>
+                <a:cs typeface="Arial" panose="020B0604020202020204" pitchFamily="34" charset="0"/>
                 <a:hlinkClick r:id="rId2"/>
               </a:rPr>
               <a:t>mailto:https://zh.wikipedia.org/zh-tw/%E9%9F%B3%E9%AB%98</a:t>
             </a:r>
-            <a:endParaRPr lang="en-US" altLang="zh-TW" dirty="0"/>
-          </a:p>
-          <a:p>
-            <a:r>
-              <a:rPr lang="en-US" altLang="zh-TW" dirty="0">
+            <a:endParaRPr lang="en-US" altLang="zh-TW" sz="2000" dirty="0">
+              <a:latin typeface="Arial" panose="020B0604020202020204" pitchFamily="34" charset="0"/>
+              <a:ea typeface="標楷體" panose="03000509000000000000" pitchFamily="65" charset="-120"/>
+              <a:cs typeface="Arial" panose="020B0604020202020204" pitchFamily="34" charset="0"/>
+            </a:endParaRPr>
+          </a:p>
+          <a:p>
+            <a:pPr marL="0" indent="0">
+              <a:buNone/>
+            </a:pPr>
+            <a:r>
+              <a:rPr lang="zh-TW" altLang="en-US" sz="2000" dirty="0">
+                <a:latin typeface="Arial" panose="020B0604020202020204" pitchFamily="34" charset="0"/>
+                <a:ea typeface="標楷體" panose="03000509000000000000" pitchFamily="65" charset="-120"/>
+                <a:cs typeface="Arial" panose="020B0604020202020204" pitchFamily="34" charset="0"/>
+              </a:rPr>
+              <a:t>    </a:t>
+            </a:r>
+            <a:r>
+              <a:rPr lang="en-US" altLang="zh-TW" sz="2000" dirty="0">
+                <a:latin typeface="Arial" panose="020B0604020202020204" pitchFamily="34" charset="0"/>
+                <a:ea typeface="標楷體" panose="03000509000000000000" pitchFamily="65" charset="-120"/>
+                <a:cs typeface="Arial" panose="020B0604020202020204" pitchFamily="34" charset="0"/>
                 <a:hlinkClick r:id="rId3"/>
               </a:rPr>
+              <a:t>mailto:https://zh.wikipedia.org/zh-</a:t>
+            </a:r>
+            <a:r>
+              <a:rPr lang="zh-TW" altLang="en-US" sz="2000" dirty="0">
+                <a:latin typeface="Arial" panose="020B0604020202020204" pitchFamily="34" charset="0"/>
+                <a:ea typeface="標楷體" panose="03000509000000000000" pitchFamily="65" charset="-120"/>
+                <a:cs typeface="Arial" panose="020B0604020202020204" pitchFamily="34" charset="0"/>
+              </a:rPr>
+              <a:t>   </a:t>
+            </a:r>
+            <a:r>
+              <a:rPr lang="en-US" altLang="zh-TW" sz="2000" dirty="0" err="1">
+                <a:latin typeface="Arial" panose="020B0604020202020204" pitchFamily="34" charset="0"/>
+                <a:ea typeface="標楷體" panose="03000509000000000000" pitchFamily="65" charset="-120"/>
+                <a:cs typeface="Arial" panose="020B0604020202020204" pitchFamily="34" charset="0"/>
+                <a:hlinkClick r:id="rId4"/>
+              </a:rPr>
+              <a:t>tw</a:t>
+            </a:r>
+            <a:r>
+              <a:rPr lang="en-US" altLang="zh-TW" sz="2000" dirty="0">
+                <a:latin typeface="Arial" panose="020B0604020202020204" pitchFamily="34" charset="0"/>
+                <a:ea typeface="標楷體" panose="03000509000000000000" pitchFamily="65" charset="-120"/>
+                <a:cs typeface="Arial" panose="020B0604020202020204" pitchFamily="34" charset="0"/>
+                <a:hlinkClick r:id="rId4"/>
+              </a:rPr>
+              <a:t>/%E4%BA%BA%E5%A3%B0%E9%9F%B3%E5%9F%9F</a:t>
+            </a:r>
+            <a:endParaRPr lang="en-US" altLang="zh-TW" sz="2000" dirty="0">
+              <a:latin typeface="Arial" panose="020B0604020202020204" pitchFamily="34" charset="0"/>
+              <a:ea typeface="標楷體" panose="03000509000000000000" pitchFamily="65" charset="-120"/>
+              <a:cs typeface="Arial" panose="020B0604020202020204" pitchFamily="34" charset="0"/>
+            </a:endParaRPr>
+          </a:p>
+          <a:p>
+            <a:r>
+              <a:rPr lang="en-US" altLang="zh-TW" sz="2000" dirty="0">
+                <a:latin typeface="Arial" panose="020B0604020202020204" pitchFamily="34" charset="0"/>
+                <a:ea typeface="標楷體" panose="03000509000000000000" pitchFamily="65" charset="-120"/>
+                <a:cs typeface="Arial" panose="020B0604020202020204" pitchFamily="34" charset="0"/>
+              </a:rPr>
+              <a:t>Naudio</a:t>
+            </a:r>
+            <a:r>
+              <a:rPr lang="zh-TW" altLang="en-US" sz="2000" dirty="0">
+                <a:latin typeface="Arial" panose="020B0604020202020204" pitchFamily="34" charset="0"/>
+                <a:ea typeface="標楷體" panose="03000509000000000000" pitchFamily="65" charset="-120"/>
+                <a:cs typeface="Arial" panose="020B0604020202020204" pitchFamily="34" charset="0"/>
+              </a:rPr>
+              <a:t> 套件：</a:t>
+            </a:r>
+            <a:endParaRPr lang="en-US" altLang="zh-TW" sz="2000" dirty="0">
+              <a:latin typeface="Arial" panose="020B0604020202020204" pitchFamily="34" charset="0"/>
+              <a:ea typeface="標楷體" panose="03000509000000000000" pitchFamily="65" charset="-120"/>
+              <a:cs typeface="Arial" panose="020B0604020202020204" pitchFamily="34" charset="0"/>
+            </a:endParaRPr>
+          </a:p>
+          <a:p>
+            <a:r>
+              <a:rPr lang="en-US" altLang="zh-TW" sz="2000" dirty="0">
+                <a:latin typeface="Arial" panose="020B0604020202020204" pitchFamily="34" charset="0"/>
+                <a:ea typeface="標楷體" panose="03000509000000000000" pitchFamily="65" charset="-120"/>
+                <a:cs typeface="Arial" panose="020B0604020202020204" pitchFamily="34" charset="0"/>
+                <a:hlinkClick r:id="rId5"/>
+              </a:rPr>
               <a:t>mailto:https://github.com/naudio/NAudio?tab=readme-ov-file</a:t>
             </a:r>
-            <a:endParaRPr lang="en-US" altLang="zh-TW" dirty="0"/>
-          </a:p>
-          <a:p>
-            <a:r>
-              <a:rPr lang="en-US" altLang="zh-TW" dirty="0">
-                <a:hlinkClick r:id="rId4"/>
-              </a:rPr>
-              <a:t>mailto:https://muted.io/note-frequencies/</a:t>
-            </a:r>
-            <a:endParaRPr lang="en-US" altLang="zh-TW" dirty="0"/>
-          </a:p>
-          <a:p>
-            <a:r>
-              <a:rPr lang="en-US" altLang="zh-TW" dirty="0">
-                <a:hlinkClick r:id="rId5"/>
+            <a:endParaRPr lang="en-US" altLang="zh-TW" sz="2000" dirty="0">
+              <a:latin typeface="Arial" panose="020B0604020202020204" pitchFamily="34" charset="0"/>
+              <a:ea typeface="標楷體" panose="03000509000000000000" pitchFamily="65" charset="-120"/>
+              <a:cs typeface="Arial" panose="020B0604020202020204" pitchFamily="34" charset="0"/>
+            </a:endParaRPr>
+          </a:p>
+          <a:p>
+            <a:r>
+              <a:rPr lang="zh-TW" altLang="en-US" sz="2000" dirty="0">
+                <a:latin typeface="Arial" panose="020B0604020202020204" pitchFamily="34" charset="0"/>
+                <a:ea typeface="標楷體" panose="03000509000000000000" pitchFamily="65" charset="-120"/>
+                <a:cs typeface="Arial" panose="020B0604020202020204" pitchFamily="34" charset="0"/>
+              </a:rPr>
+              <a:t>好和弦：</a:t>
+            </a:r>
+            <a:endParaRPr lang="en-US" altLang="zh-TW" sz="2000" dirty="0">
+              <a:latin typeface="Arial" panose="020B0604020202020204" pitchFamily="34" charset="0"/>
+              <a:ea typeface="標楷體" panose="03000509000000000000" pitchFamily="65" charset="-120"/>
+              <a:cs typeface="Arial" panose="020B0604020202020204" pitchFamily="34" charset="0"/>
+            </a:endParaRPr>
+          </a:p>
+          <a:p>
+            <a:pPr marL="0" indent="0">
+              <a:buNone/>
+            </a:pPr>
+            <a:r>
+              <a:rPr lang="zh-TW" altLang="en-US" sz="2000" dirty="0">
+                <a:latin typeface="Arial" panose="020B0604020202020204" pitchFamily="34" charset="0"/>
+                <a:ea typeface="標楷體" panose="03000509000000000000" pitchFamily="65" charset="-120"/>
+                <a:cs typeface="Arial" panose="020B0604020202020204" pitchFamily="34" charset="0"/>
+              </a:rPr>
+              <a:t>    </a:t>
+            </a:r>
+            <a:r>
+              <a:rPr lang="en-US" altLang="zh-TW" sz="2000" dirty="0">
+                <a:latin typeface="Arial" panose="020B0604020202020204" pitchFamily="34" charset="0"/>
+                <a:ea typeface="標楷體" panose="03000509000000000000" pitchFamily="65" charset="-120"/>
+                <a:cs typeface="Arial" panose="020B0604020202020204" pitchFamily="34" charset="0"/>
+                <a:hlinkClick r:id="rId6"/>
               </a:rPr>
               <a:t>mailto:https://nicechord.com/post/major-and-minor-modes/</a:t>
             </a:r>
-            <a:endParaRPr lang="en-US" altLang="zh-TW" dirty="0"/>
-          </a:p>
-          <a:p>
-            <a:r>
-              <a:rPr lang="en-US" altLang="zh-TW" dirty="0">
-                <a:hlinkClick r:id="rId6"/>
-              </a:rPr>
-              <a:t>mailto:https://zh.wikipedia.org/zh-tw/%E8%87%AA%E7%9B%B8%E5%85%B3%E5%87%BD%E6%95%B0</a:t>
-            </a:r>
-            <a:endParaRPr lang="en-US" altLang="zh-TW" dirty="0"/>
-          </a:p>
-          <a:p>
-            <a:r>
-              <a:rPr lang="en-US" altLang="zh-TW" dirty="0">
+            <a:endParaRPr lang="en-US" altLang="zh-TW" sz="2000" dirty="0">
+              <a:latin typeface="Arial" panose="020B0604020202020204" pitchFamily="34" charset="0"/>
+              <a:ea typeface="標楷體" panose="03000509000000000000" pitchFamily="65" charset="-120"/>
+              <a:cs typeface="Arial" panose="020B0604020202020204" pitchFamily="34" charset="0"/>
+            </a:endParaRPr>
+          </a:p>
+          <a:p>
+            <a:r>
+              <a:rPr lang="en-US" altLang="zh-TW" sz="2000" dirty="0">
+                <a:latin typeface="Arial" panose="020B0604020202020204" pitchFamily="34" charset="0"/>
+                <a:ea typeface="標楷體" panose="03000509000000000000" pitchFamily="65" charset="-120"/>
+                <a:cs typeface="Arial" panose="020B0604020202020204" pitchFamily="34" charset="0"/>
+              </a:rPr>
+              <a:t>Think DSP: Digital Signal Processing in Python by Allen B. Downey) </a:t>
+            </a:r>
+            <a:r>
+              <a:rPr lang="zh-TW" altLang="en-US" sz="2000" dirty="0">
+                <a:latin typeface="Arial" panose="020B0604020202020204" pitchFamily="34" charset="0"/>
+                <a:ea typeface="標楷體" panose="03000509000000000000" pitchFamily="65" charset="-120"/>
+                <a:cs typeface="Arial" panose="020B0604020202020204" pitchFamily="34" charset="0"/>
+              </a:rPr>
+              <a:t>中譯電子書：</a:t>
+            </a:r>
+            <a:endParaRPr lang="en-US" altLang="zh-TW" sz="2000" dirty="0">
+              <a:latin typeface="Arial" panose="020B0604020202020204" pitchFamily="34" charset="0"/>
+              <a:ea typeface="標楷體" panose="03000509000000000000" pitchFamily="65" charset="-120"/>
+              <a:cs typeface="Arial" panose="020B0604020202020204" pitchFamily="34" charset="0"/>
+            </a:endParaRPr>
+          </a:p>
+          <a:p>
+            <a:r>
+              <a:rPr lang="en-US" altLang="zh-TW" sz="2000" dirty="0">
+                <a:latin typeface="Arial" panose="020B0604020202020204" pitchFamily="34" charset="0"/>
+                <a:ea typeface="標楷體" panose="03000509000000000000" pitchFamily="65" charset="-120"/>
+                <a:cs typeface="Arial" panose="020B0604020202020204" pitchFamily="34" charset="0"/>
                 <a:hlinkClick r:id="rId7"/>
               </a:rPr>
               <a:t>mailto:https://timag-shield.blogspot.com/2017/04/thinkdsp_82.html</a:t>
             </a:r>
-            <a:endParaRPr lang="en-US" altLang="zh-TW" dirty="0"/>
-          </a:p>
-          <a:p>
-            <a:r>
-              <a:rPr lang="en-US" altLang="zh-TW" dirty="0">
+            <a:endParaRPr lang="en-US" altLang="zh-TW" sz="2000" dirty="0">
+              <a:latin typeface="Arial" panose="020B0604020202020204" pitchFamily="34" charset="0"/>
+              <a:ea typeface="標楷體" panose="03000509000000000000" pitchFamily="65" charset="-120"/>
+              <a:cs typeface="Arial" panose="020B0604020202020204" pitchFamily="34" charset="0"/>
+            </a:endParaRPr>
+          </a:p>
+          <a:p>
+            <a:r>
+              <a:rPr lang="zh-TW" altLang="en-US" sz="2000" dirty="0">
+                <a:latin typeface="Arial" panose="020B0604020202020204" pitchFamily="34" charset="0"/>
+                <a:ea typeface="標楷體" panose="03000509000000000000" pitchFamily="65" charset="-120"/>
+                <a:cs typeface="Arial" panose="020B0604020202020204" pitchFamily="34" charset="0"/>
+              </a:rPr>
+              <a:t>音高測量相關影片：</a:t>
+            </a:r>
+            <a:endParaRPr lang="en-US" altLang="zh-TW" sz="2000" dirty="0">
+              <a:latin typeface="Arial" panose="020B0604020202020204" pitchFamily="34" charset="0"/>
+              <a:ea typeface="標楷體" panose="03000509000000000000" pitchFamily="65" charset="-120"/>
+              <a:cs typeface="Arial" panose="020B0604020202020204" pitchFamily="34" charset="0"/>
+            </a:endParaRPr>
+          </a:p>
+          <a:p>
+            <a:pPr marL="0" indent="0">
+              <a:buNone/>
+            </a:pPr>
+            <a:r>
+              <a:rPr lang="zh-TW" altLang="en-US" sz="2000" dirty="0">
+                <a:latin typeface="Arial" panose="020B0604020202020204" pitchFamily="34" charset="0"/>
+                <a:ea typeface="標楷體" panose="03000509000000000000" pitchFamily="65" charset="-120"/>
+                <a:cs typeface="Arial" panose="020B0604020202020204" pitchFamily="34" charset="0"/>
+              </a:rPr>
+              <a:t>    </a:t>
+            </a:r>
+            <a:r>
+              <a:rPr lang="en-US" altLang="zh-TW" sz="2000" dirty="0">
+                <a:latin typeface="Arial" panose="020B0604020202020204" pitchFamily="34" charset="0"/>
+                <a:ea typeface="標楷體" panose="03000509000000000000" pitchFamily="65" charset="-120"/>
+                <a:cs typeface="Arial" panose="020B0604020202020204" pitchFamily="34" charset="0"/>
                 <a:hlinkClick r:id="rId8"/>
               </a:rPr>
-              <a:t>mailto:https://zh.wikipedia.org/zh-tw/%E4%BA%BA%E5%A3%B0%E9%9F%B3%E5%9F%9F</a:t>
-            </a:r>
-            <a:endParaRPr lang="zh-TW" altLang="en-US" dirty="0"/>
+              <a:t>mailto:https://www.bilibili.com/video/BV1tj411T71P/?spm_id_from=333.337.search-</a:t>
+            </a:r>
+            <a:r>
+              <a:rPr lang="zh-TW" altLang="en-US" sz="2000" dirty="0">
+                <a:latin typeface="Arial" panose="020B0604020202020204" pitchFamily="34" charset="0"/>
+                <a:ea typeface="標楷體" panose="03000509000000000000" pitchFamily="65" charset="-120"/>
+                <a:cs typeface="Arial" panose="020B0604020202020204" pitchFamily="34" charset="0"/>
+                <a:hlinkClick r:id="rId8"/>
+              </a:rPr>
+              <a:t> </a:t>
+            </a:r>
+            <a:r>
+              <a:rPr lang="en-US" altLang="zh-TW" sz="2000" dirty="0" err="1">
+                <a:latin typeface="Arial" panose="020B0604020202020204" pitchFamily="34" charset="0"/>
+                <a:ea typeface="標楷體" panose="03000509000000000000" pitchFamily="65" charset="-120"/>
+                <a:cs typeface="Arial" panose="020B0604020202020204" pitchFamily="34" charset="0"/>
+                <a:hlinkClick r:id="rId8"/>
+              </a:rPr>
+              <a:t>card.all.click&amp;vd_source</a:t>
+            </a:r>
+            <a:r>
+              <a:rPr lang="en-US" altLang="zh-TW" sz="2000" dirty="0">
+                <a:latin typeface="Arial" panose="020B0604020202020204" pitchFamily="34" charset="0"/>
+                <a:ea typeface="標楷體" panose="03000509000000000000" pitchFamily="65" charset="-120"/>
+                <a:cs typeface="Arial" panose="020B0604020202020204" pitchFamily="34" charset="0"/>
+                <a:hlinkClick r:id="rId8"/>
+              </a:rPr>
+              <a:t>=88ea28052682913da01ac2ec14baf19d</a:t>
+            </a:r>
+            <a:endParaRPr lang="en-US" altLang="zh-TW" sz="2000" dirty="0">
+              <a:latin typeface="Arial" panose="020B0604020202020204" pitchFamily="34" charset="0"/>
+              <a:ea typeface="標楷體" panose="03000509000000000000" pitchFamily="65" charset="-120"/>
+              <a:cs typeface="Arial" panose="020B0604020202020204" pitchFamily="34" charset="0"/>
+            </a:endParaRPr>
           </a:p>
         </p:txBody>
       </p:sp>
@@ -5127,7 +5473,14 @@
           <a:bodyPr/>
           <a:lstStyle/>
           <a:p>
-            <a:endParaRPr lang="zh-TW" altLang="en-US" dirty="0"/>
+            <a:r>
+              <a:rPr lang="zh-TW" altLang="en-US" dirty="0">
+                <a:latin typeface="Arial" panose="020B0604020202020204" pitchFamily="34" charset="0"/>
+                <a:ea typeface="標楷體" panose="03000509000000000000" pitchFamily="65" charset="-120"/>
+                <a:cs typeface="Arial" panose="020B0604020202020204" pitchFamily="34" charset="0"/>
+              </a:rPr>
+              <a:t>生活中任何物理、化學現象都能以頻率表示，而聲音是頻率在大腦中的體現。</a:t>
+            </a:r>
           </a:p>
         </p:txBody>
       </p:sp>
@@ -5166,7 +5519,7 @@
           <p:cNvPr id="2" name="標題 1">
             <a:extLst>
               <a:ext uri="{FF2B5EF4-FFF2-40B4-BE49-F238E27FC236}">
-                <a16:creationId xmlns:a16="http://schemas.microsoft.com/office/drawing/2014/main" id="{C34DC5B8-0A57-4772-8EF5-FF29245F6FCB}"/>
+                <a16:creationId xmlns:a16="http://schemas.microsoft.com/office/drawing/2014/main" id="{3DD17195-ACBA-43F9-BEC2-268D5145B465}"/>
               </a:ext>
             </a:extLst>
           </p:cNvPr>
@@ -5182,13 +5535,7 @@
           <a:bodyPr/>
           <a:lstStyle/>
           <a:p>
-            <a:r>
-              <a:rPr lang="zh-TW" altLang="en-US" b="1" dirty="0">
-                <a:latin typeface="標楷體" panose="03000509000000000000" pitchFamily="65" charset="-120"/>
-                <a:ea typeface="標楷體" panose="03000509000000000000" pitchFamily="65" charset="-120"/>
-              </a:rPr>
-              <a:t>介紹及應用</a:t>
-            </a:r>
+            <a:endParaRPr lang="zh-TW" altLang="en-US"/>
           </a:p>
         </p:txBody>
       </p:sp>
@@ -5197,7 +5544,7 @@
           <p:cNvPr id="3" name="內容版面配置區 2">
             <a:extLst>
               <a:ext uri="{FF2B5EF4-FFF2-40B4-BE49-F238E27FC236}">
-                <a16:creationId xmlns:a16="http://schemas.microsoft.com/office/drawing/2014/main" id="{FBA27961-68F7-4D43-884A-5943E95195E5}"/>
+                <a16:creationId xmlns:a16="http://schemas.microsoft.com/office/drawing/2014/main" id="{AE3E89AB-59A7-45E8-827D-20F4A4434439}"/>
               </a:ext>
             </a:extLst>
           </p:cNvPr>
@@ -5210,164 +5557,47 @@
         </p:nvSpPr>
         <p:spPr/>
         <p:txBody>
-          <a:bodyPr>
-            <a:normAutofit/>
-          </a:bodyPr>
+          <a:bodyPr/>
           <a:lstStyle/>
           <a:p>
-            <a:r>
-              <a:rPr lang="zh-TW" altLang="en-US" dirty="0">
-                <a:latin typeface="標楷體" panose="03000509000000000000" pitchFamily="65" charset="-120"/>
-                <a:ea typeface="標楷體" panose="03000509000000000000" pitchFamily="65" charset="-120"/>
-              </a:rPr>
-              <a:t>基礎音頻分析處理的開源工具</a:t>
-            </a:r>
-            <a:endParaRPr lang="en-US" altLang="zh-TW" dirty="0">
-              <a:latin typeface="標楷體" panose="03000509000000000000" pitchFamily="65" charset="-120"/>
-              <a:ea typeface="標楷體" panose="03000509000000000000" pitchFamily="65" charset="-120"/>
-            </a:endParaRPr>
-          </a:p>
-          <a:p>
-            <a:r>
-              <a:rPr lang="zh-TW" altLang="en-US" dirty="0">
-                <a:latin typeface="標楷體" panose="03000509000000000000" pitchFamily="65" charset="-120"/>
-                <a:ea typeface="標楷體" panose="03000509000000000000" pitchFamily="65" charset="-120"/>
-              </a:rPr>
-              <a:t>開發音樂播放器</a:t>
-            </a:r>
-            <a:endParaRPr lang="en-US" altLang="zh-TW" dirty="0">
-              <a:latin typeface="標楷體" panose="03000509000000000000" pitchFamily="65" charset="-120"/>
-              <a:ea typeface="標楷體" panose="03000509000000000000" pitchFamily="65" charset="-120"/>
-            </a:endParaRPr>
-          </a:p>
-          <a:p>
-            <a:r>
-              <a:rPr lang="zh-TW" altLang="en-US" dirty="0">
-                <a:latin typeface="標楷體" panose="03000509000000000000" pitchFamily="65" charset="-120"/>
-                <a:ea typeface="標楷體" panose="03000509000000000000" pitchFamily="65" charset="-120"/>
-              </a:rPr>
-              <a:t>音頻錄製</a:t>
-            </a:r>
-            <a:endParaRPr lang="en-US" altLang="zh-TW" dirty="0">
-              <a:latin typeface="標楷體" panose="03000509000000000000" pitchFamily="65" charset="-120"/>
-              <a:ea typeface="標楷體" panose="03000509000000000000" pitchFamily="65" charset="-120"/>
-            </a:endParaRPr>
-          </a:p>
-          <a:p>
-            <a:r>
-              <a:rPr lang="zh-TW" altLang="en-US" dirty="0">
-                <a:latin typeface="標楷體" panose="03000509000000000000" pitchFamily="65" charset="-120"/>
-                <a:ea typeface="標楷體" panose="03000509000000000000" pitchFamily="65" charset="-120"/>
-              </a:rPr>
-              <a:t>音訊分析及處理 </a:t>
-            </a:r>
-            <a:r>
-              <a:rPr lang="en-US" altLang="zh-TW" dirty="0">
-                <a:latin typeface="Arial" panose="020B0604020202020204" pitchFamily="34" charset="0"/>
-                <a:cs typeface="Arial" panose="020B0604020202020204" pitchFamily="34" charset="0"/>
-              </a:rPr>
-              <a:t>(ex: </a:t>
-            </a:r>
-            <a:r>
-              <a:rPr lang="zh-TW" altLang="en-US" dirty="0">
-                <a:latin typeface="Arial" panose="020B0604020202020204" pitchFamily="34" charset="0"/>
-                <a:ea typeface="標楷體" panose="03000509000000000000" pitchFamily="65" charset="-120"/>
-                <a:cs typeface="Arial" panose="020B0604020202020204" pitchFamily="34" charset="0"/>
-              </a:rPr>
-              <a:t>音高偵測、音量調整，可配合傅立葉轉換相關套件</a:t>
-            </a:r>
-            <a:r>
-              <a:rPr lang="en-US" altLang="zh-TW" dirty="0">
-                <a:latin typeface="Arial" panose="020B0604020202020204" pitchFamily="34" charset="0"/>
-                <a:cs typeface="Arial" panose="020B0604020202020204" pitchFamily="34" charset="0"/>
-              </a:rPr>
-              <a:t>)</a:t>
-            </a:r>
-          </a:p>
-          <a:p>
-            <a:r>
-              <a:rPr lang="zh-TW" altLang="en-US" dirty="0">
-                <a:latin typeface="標楷體" panose="03000509000000000000" pitchFamily="65" charset="-120"/>
-                <a:ea typeface="標楷體" panose="03000509000000000000" pitchFamily="65" charset="-120"/>
-              </a:rPr>
-              <a:t>音訊特效 </a:t>
-            </a:r>
-            <a:r>
-              <a:rPr lang="en-US" altLang="zh-TW" dirty="0">
-                <a:latin typeface="Arial" panose="020B0604020202020204" pitchFamily="34" charset="0"/>
-                <a:cs typeface="Arial" panose="020B0604020202020204" pitchFamily="34" charset="0"/>
-              </a:rPr>
-              <a:t>(ex: </a:t>
-            </a:r>
-            <a:r>
-              <a:rPr lang="zh-TW" altLang="en-US" dirty="0">
-                <a:latin typeface="Arial" panose="020B0604020202020204" pitchFamily="34" charset="0"/>
-                <a:ea typeface="標楷體" panose="03000509000000000000" pitchFamily="65" charset="-120"/>
-                <a:cs typeface="Arial" panose="020B0604020202020204" pitchFamily="34" charset="0"/>
-              </a:rPr>
-              <a:t>回音、增益</a:t>
-            </a:r>
-            <a:r>
-              <a:rPr lang="en-US" altLang="zh-TW" dirty="0">
-                <a:latin typeface="Arial" panose="020B0604020202020204" pitchFamily="34" charset="0"/>
-                <a:cs typeface="Arial" panose="020B0604020202020204" pitchFamily="34" charset="0"/>
-              </a:rPr>
-              <a:t>)</a:t>
-            </a:r>
-          </a:p>
-          <a:p>
-            <a:r>
-              <a:rPr lang="zh-TW" altLang="en-US" dirty="0">
-                <a:latin typeface="標楷體" panose="03000509000000000000" pitchFamily="65" charset="-120"/>
-                <a:ea typeface="標楷體" panose="03000509000000000000" pitchFamily="65" charset="-120"/>
-              </a:rPr>
-              <a:t>編</a:t>
-            </a:r>
-            <a:r>
-              <a:rPr lang="en-US" altLang="zh-TW" dirty="0">
-                <a:latin typeface="Consolas" panose="020B0609020204030204" pitchFamily="49" charset="0"/>
-              </a:rPr>
-              <a:t>/</a:t>
-            </a:r>
-            <a:r>
-              <a:rPr lang="zh-TW" altLang="en-US" dirty="0">
-                <a:latin typeface="標楷體" panose="03000509000000000000" pitchFamily="65" charset="-120"/>
-                <a:ea typeface="標楷體" panose="03000509000000000000" pitchFamily="65" charset="-120"/>
-              </a:rPr>
-              <a:t>解碼不同音訊格式  </a:t>
-            </a:r>
-            <a:r>
-              <a:rPr lang="en-US" altLang="zh-TW" dirty="0">
-                <a:latin typeface="Arial" panose="020B0604020202020204" pitchFamily="34" charset="0"/>
-                <a:cs typeface="Arial" panose="020B0604020202020204" pitchFamily="34" charset="0"/>
-              </a:rPr>
-              <a:t>(ex: MP3</a:t>
-            </a:r>
-            <a:r>
-              <a:rPr lang="zh-TW" altLang="en-US" dirty="0">
-                <a:latin typeface="Arial" panose="020B0604020202020204" pitchFamily="34" charset="0"/>
-                <a:cs typeface="Arial" panose="020B0604020202020204" pitchFamily="34" charset="0"/>
-              </a:rPr>
-              <a:t>、</a:t>
-            </a:r>
-            <a:r>
-              <a:rPr lang="en-US" altLang="zh-TW" dirty="0">
-                <a:latin typeface="Arial" panose="020B0604020202020204" pitchFamily="34" charset="0"/>
-                <a:cs typeface="Arial" panose="020B0604020202020204" pitchFamily="34" charset="0"/>
-              </a:rPr>
-              <a:t>WAV)</a:t>
-            </a:r>
-            <a:endParaRPr lang="zh-TW" altLang="en-US" dirty="0">
-              <a:latin typeface="Arial" panose="020B0604020202020204" pitchFamily="34" charset="0"/>
-              <a:cs typeface="Arial" panose="020B0604020202020204" pitchFamily="34" charset="0"/>
-            </a:endParaRPr>
-          </a:p>
-        </p:txBody>
-      </p:sp>
+            <a:endParaRPr lang="zh-TW" altLang="en-US"/>
+          </a:p>
+        </p:txBody>
+      </p:sp>
+      <p:pic>
+        <p:nvPicPr>
+          <p:cNvPr id="4" name="圖片 3">
+            <a:extLst>
+              <a:ext uri="{FF2B5EF4-FFF2-40B4-BE49-F238E27FC236}">
+                <a16:creationId xmlns:a16="http://schemas.microsoft.com/office/drawing/2014/main" id="{C8861B61-F9A5-4CCA-88DD-0B04E81C62BE}"/>
+              </a:ext>
+            </a:extLst>
+          </p:cNvPr>
+          <p:cNvPicPr>
+            <a:picLocks noChangeAspect="1"/>
+          </p:cNvPicPr>
+          <p:nvPr/>
+        </p:nvPicPr>
+        <p:blipFill>
+          <a:blip r:embed="rId2"/>
+          <a:stretch>
+            <a:fillRect/>
+          </a:stretch>
+        </p:blipFill>
+        <p:spPr>
+          <a:xfrm>
+            <a:off x="5396753" y="1724585"/>
+            <a:ext cx="6060141" cy="3408829"/>
+          </a:xfrm>
+          <a:prstGeom prst="rect">
+            <a:avLst/>
+          </a:prstGeom>
+        </p:spPr>
+      </p:pic>
     </p:spTree>
     <p:extLst>
       <p:ext uri="{BB962C8B-B14F-4D97-AF65-F5344CB8AC3E}">
-        <p14:creationId xmlns:p14="http://schemas.microsoft.com/office/powerpoint/2010/main" val="304961792"/>
+        <p14:creationId xmlns:p14="http://schemas.microsoft.com/office/powerpoint/2010/main" val="765999463"/>
       </p:ext>
     </p:extLst>
   </p:cSld>

--- a/1224報告_NAudio.pptx
+++ b/1224報告_NAudio.pptx
@@ -5,7 +5,7 @@
     <p:sldMasterId id="2147483648" r:id="rId1"/>
   </p:sldMasterIdLst>
   <p:notesMasterIdLst>
-    <p:notesMasterId r:id="rId19"/>
+    <p:notesMasterId r:id="rId20"/>
   </p:notesMasterIdLst>
   <p:sldIdLst>
     <p:sldId id="256" r:id="rId2"/>
@@ -23,8 +23,9 @@
     <p:sldId id="263" r:id="rId14"/>
     <p:sldId id="268" r:id="rId15"/>
     <p:sldId id="276" r:id="rId16"/>
-    <p:sldId id="264" r:id="rId17"/>
-    <p:sldId id="262" r:id="rId18"/>
+    <p:sldId id="277" r:id="rId17"/>
+    <p:sldId id="264" r:id="rId18"/>
+    <p:sldId id="262" r:id="rId19"/>
   </p:sldIdLst>
   <p:sldSz cx="12192000" cy="6858000"/>
   <p:notesSz cx="6858000" cy="9144000"/>
@@ -4618,6 +4619,116 @@
           <p:cNvPr id="2" name="標題 1">
             <a:extLst>
               <a:ext uri="{FF2B5EF4-FFF2-40B4-BE49-F238E27FC236}">
+                <a16:creationId xmlns:a16="http://schemas.microsoft.com/office/drawing/2014/main" id="{28C0EAC7-D825-4FB0-9CF9-E033065915CC}"/>
+              </a:ext>
+            </a:extLst>
+          </p:cNvPr>
+          <p:cNvSpPr>
+            <a:spLocks noGrp="1"/>
+          </p:cNvSpPr>
+          <p:nvPr>
+            <p:ph type="title"/>
+          </p:nvPr>
+        </p:nvSpPr>
+        <p:spPr/>
+        <p:txBody>
+          <a:bodyPr/>
+          <a:lstStyle/>
+          <a:p>
+            <a:endParaRPr lang="zh-TW" altLang="en-US"/>
+          </a:p>
+        </p:txBody>
+      </p:sp>
+      <p:sp>
+        <p:nvSpPr>
+          <p:cNvPr id="3" name="內容版面配置區 2">
+            <a:extLst>
+              <a:ext uri="{FF2B5EF4-FFF2-40B4-BE49-F238E27FC236}">
+                <a16:creationId xmlns:a16="http://schemas.microsoft.com/office/drawing/2014/main" id="{6FF22F99-23F1-4CAE-9342-DAE71623276C}"/>
+              </a:ext>
+            </a:extLst>
+          </p:cNvPr>
+          <p:cNvSpPr>
+            <a:spLocks noGrp="1"/>
+          </p:cNvSpPr>
+          <p:nvPr>
+            <p:ph idx="1"/>
+          </p:nvPr>
+        </p:nvSpPr>
+        <p:spPr/>
+        <p:txBody>
+          <a:bodyPr/>
+          <a:lstStyle/>
+          <a:p>
+            <a:endParaRPr lang="zh-TW" altLang="en-US"/>
+          </a:p>
+        </p:txBody>
+      </p:sp>
+      <p:pic>
+        <p:nvPicPr>
+          <p:cNvPr id="7" name="圖片 6">
+            <a:extLst>
+              <a:ext uri="{FF2B5EF4-FFF2-40B4-BE49-F238E27FC236}">
+                <a16:creationId xmlns:a16="http://schemas.microsoft.com/office/drawing/2014/main" id="{823B3453-B4C9-48F6-986D-E51181D8B4A8}"/>
+              </a:ext>
+            </a:extLst>
+          </p:cNvPr>
+          <p:cNvPicPr>
+            <a:picLocks noChangeAspect="1"/>
+          </p:cNvPicPr>
+          <p:nvPr/>
+        </p:nvPicPr>
+        <p:blipFill>
+          <a:blip r:embed="rId2"/>
+          <a:stretch>
+            <a:fillRect/>
+          </a:stretch>
+        </p:blipFill>
+        <p:spPr>
+          <a:xfrm>
+            <a:off x="2064652" y="754986"/>
+            <a:ext cx="7586328" cy="4812096"/>
+          </a:xfrm>
+          <a:prstGeom prst="rect">
+            <a:avLst/>
+          </a:prstGeom>
+        </p:spPr>
+      </p:pic>
+    </p:spTree>
+    <p:extLst>
+      <p:ext uri="{BB962C8B-B14F-4D97-AF65-F5344CB8AC3E}">
+        <p14:creationId xmlns:p14="http://schemas.microsoft.com/office/powerpoint/2010/main" val="3020140773"/>
+      </p:ext>
+    </p:extLst>
+  </p:cSld>
+  <p:clrMapOvr>
+    <a:masterClrMapping/>
+  </p:clrMapOvr>
+</p:sld>
+</file>
+
+<file path=ppt/slides/slide17.xml><?xml version="1.0" encoding="utf-8"?>
+<p:sld xmlns:a="http://schemas.openxmlformats.org/drawingml/2006/main" xmlns:r="http://schemas.openxmlformats.org/officeDocument/2006/relationships" xmlns:p="http://schemas.openxmlformats.org/presentationml/2006/main">
+  <p:cSld>
+    <p:spTree>
+      <p:nvGrpSpPr>
+        <p:cNvPr id="1" name=""/>
+        <p:cNvGrpSpPr/>
+        <p:nvPr/>
+      </p:nvGrpSpPr>
+      <p:grpSpPr>
+        <a:xfrm>
+          <a:off x="0" y="0"/>
+          <a:ext cx="0" cy="0"/>
+          <a:chOff x="0" y="0"/>
+          <a:chExt cx="0" cy="0"/>
+        </a:xfrm>
+      </p:grpSpPr>
+      <p:sp>
+        <p:nvSpPr>
+          <p:cNvPr id="2" name="標題 1">
+            <a:extLst>
+              <a:ext uri="{FF2B5EF4-FFF2-40B4-BE49-F238E27FC236}">
                 <a16:creationId xmlns:a16="http://schemas.microsoft.com/office/drawing/2014/main" id="{87DBD4E5-2E32-4135-A3A9-BFC3B91E11F0}"/>
               </a:ext>
             </a:extLst>
@@ -5022,7 +5133,7 @@
 </p:sld>
 </file>
 
-<file path=ppt/slides/slide17.xml><?xml version="1.0" encoding="utf-8"?>
+<file path=ppt/slides/slide18.xml><?xml version="1.0" encoding="utf-8"?>
 <p:sld xmlns:a="http://schemas.openxmlformats.org/drawingml/2006/main" xmlns:r="http://schemas.openxmlformats.org/officeDocument/2006/relationships" xmlns:p="http://schemas.openxmlformats.org/presentationml/2006/main">
   <p:cSld>
     <p:spTree>

--- a/1224報告_NAudio.pptx
+++ b/1224報告_NAudio.pptx
@@ -5,27 +5,23 @@
     <p:sldMasterId id="2147483648" r:id="rId1"/>
   </p:sldMasterIdLst>
   <p:notesMasterIdLst>
-    <p:notesMasterId r:id="rId20"/>
+    <p:notesMasterId r:id="rId16"/>
   </p:notesMasterIdLst>
   <p:sldIdLst>
     <p:sldId id="256" r:id="rId2"/>
     <p:sldId id="269" r:id="rId3"/>
-    <p:sldId id="275" r:id="rId4"/>
-    <p:sldId id="267" r:id="rId5"/>
-    <p:sldId id="259" r:id="rId6"/>
-    <p:sldId id="260" r:id="rId7"/>
-    <p:sldId id="271" r:id="rId8"/>
-    <p:sldId id="273" r:id="rId9"/>
-    <p:sldId id="272" r:id="rId10"/>
-    <p:sldId id="258" r:id="rId11"/>
-    <p:sldId id="274" r:id="rId12"/>
-    <p:sldId id="270" r:id="rId13"/>
-    <p:sldId id="263" r:id="rId14"/>
-    <p:sldId id="268" r:id="rId15"/>
-    <p:sldId id="276" r:id="rId16"/>
-    <p:sldId id="277" r:id="rId17"/>
-    <p:sldId id="264" r:id="rId18"/>
-    <p:sldId id="262" r:id="rId19"/>
+    <p:sldId id="267" r:id="rId4"/>
+    <p:sldId id="259" r:id="rId5"/>
+    <p:sldId id="260" r:id="rId6"/>
+    <p:sldId id="271" r:id="rId7"/>
+    <p:sldId id="273" r:id="rId8"/>
+    <p:sldId id="258" r:id="rId9"/>
+    <p:sldId id="279" r:id="rId10"/>
+    <p:sldId id="278" r:id="rId11"/>
+    <p:sldId id="270" r:id="rId12"/>
+    <p:sldId id="277" r:id="rId13"/>
+    <p:sldId id="264" r:id="rId14"/>
+    <p:sldId id="262" r:id="rId15"/>
   </p:sldIdLst>
   <p:sldSz cx="12192000" cy="6858000"/>
   <p:notesSz cx="6858000" cy="9144000"/>
@@ -546,7 +542,7 @@
           <a:p>
             <a:fld id="{E285D06F-C5C6-4EC7-8C43-7BC9C8305506}" type="slidenum">
               <a:rPr lang="zh-TW" altLang="en-US" smtClean="0"/>
-              <a:t>6</a:t>
+              <a:t>5</a:t>
             </a:fld>
             <a:endParaRPr lang="zh-TW" altLang="en-US"/>
           </a:p>
@@ -3934,7 +3930,7 @@
           <p:cNvPr id="2" name="標題 1">
             <a:extLst>
               <a:ext uri="{FF2B5EF4-FFF2-40B4-BE49-F238E27FC236}">
-                <a16:creationId xmlns:a16="http://schemas.microsoft.com/office/drawing/2014/main" id="{EDAD5F66-2419-4BF2-8D37-B8A40101A49C}"/>
+                <a16:creationId xmlns:a16="http://schemas.microsoft.com/office/drawing/2014/main" id="{46B971A0-5E52-49A4-B85B-368FCBB134C0}"/>
               </a:ext>
             </a:extLst>
           </p:cNvPr>
@@ -3959,7 +3955,7 @@
           <p:cNvPr id="3" name="內容版面配置區 2">
             <a:extLst>
               <a:ext uri="{FF2B5EF4-FFF2-40B4-BE49-F238E27FC236}">
-                <a16:creationId xmlns:a16="http://schemas.microsoft.com/office/drawing/2014/main" id="{B2BF9814-0C9A-4CA3-9E34-80BEA822F22B}"/>
+                <a16:creationId xmlns:a16="http://schemas.microsoft.com/office/drawing/2014/main" id="{AC8DB95D-0DD2-4A07-B991-9E70095B1A81}"/>
               </a:ext>
             </a:extLst>
           </p:cNvPr>
@@ -3975,74 +3971,61 @@
           <a:bodyPr/>
           <a:lstStyle/>
           <a:p>
-            <a:endParaRPr lang="zh-TW" altLang="en-US" dirty="0"/>
+            <a:endParaRPr lang="zh-TW" altLang="en-US"/>
           </a:p>
         </p:txBody>
       </p:sp>
       <p:pic>
         <p:nvPicPr>
-          <p:cNvPr id="5" name="圖片 4">
-            <a:extLst>
-              <a:ext uri="{FF2B5EF4-FFF2-40B4-BE49-F238E27FC236}">
-                <a16:creationId xmlns:a16="http://schemas.microsoft.com/office/drawing/2014/main" id="{1D25E812-8D5E-4A4D-B71B-E34D229CEC5A}"/>
+          <p:cNvPr id="1026" name="Picture 2">
+            <a:extLst>
+              <a:ext uri="{FF2B5EF4-FFF2-40B4-BE49-F238E27FC236}">
+                <a16:creationId xmlns:a16="http://schemas.microsoft.com/office/drawing/2014/main" id="{D163C3E4-9B7C-4DF6-872C-BBAB83D66D55}"/>
               </a:ext>
             </a:extLst>
           </p:cNvPr>
           <p:cNvPicPr>
-            <a:picLocks noChangeAspect="1"/>
+            <a:picLocks noChangeAspect="1" noChangeArrowheads="1"/>
           </p:cNvPicPr>
           <p:nvPr/>
         </p:nvPicPr>
         <p:blipFill>
-          <a:blip r:embed="rId2"/>
+          <a:blip r:embed="rId2">
+            <a:extLst>
+              <a:ext uri="{28A0092B-C50C-407E-A947-70E740481C1C}">
+                <a14:useLocalDpi xmlns:a14="http://schemas.microsoft.com/office/drawing/2010/main" val="0"/>
+              </a:ext>
+            </a:extLst>
+          </a:blip>
+          <a:srcRect/>
           <a:stretch>
             <a:fillRect/>
           </a:stretch>
         </p:blipFill>
-        <p:spPr>
+        <p:spPr bwMode="auto">
           <a:xfrm>
-            <a:off x="451140" y="134471"/>
-            <a:ext cx="6859620" cy="4926454"/>
+            <a:off x="0" y="168275"/>
+            <a:ext cx="12192000" cy="6521450"/>
           </a:xfrm>
           <a:prstGeom prst="rect">
             <a:avLst/>
           </a:prstGeom>
-        </p:spPr>
-      </p:pic>
-      <p:pic>
-        <p:nvPicPr>
-          <p:cNvPr id="8" name="圖片 7">
-            <a:extLst>
-              <a:ext uri="{FF2B5EF4-FFF2-40B4-BE49-F238E27FC236}">
-                <a16:creationId xmlns:a16="http://schemas.microsoft.com/office/drawing/2014/main" id="{31DD6903-BBD2-40C6-8CA7-CE8920E4AB16}"/>
-              </a:ext>
-            </a:extLst>
-          </p:cNvPr>
-          <p:cNvPicPr>
-            <a:picLocks noChangeAspect="1"/>
-          </p:cNvPicPr>
-          <p:nvPr/>
-        </p:nvPicPr>
-        <p:blipFill>
-          <a:blip r:embed="rId3"/>
-          <a:stretch>
-            <a:fillRect/>
-          </a:stretch>
-        </p:blipFill>
-        <p:spPr>
-          <a:xfrm>
-            <a:off x="3293431" y="5103482"/>
-            <a:ext cx="8034657" cy="1389393"/>
-          </a:xfrm>
-          <a:prstGeom prst="rect">
-            <a:avLst/>
-          </a:prstGeom>
+          <a:noFill/>
+          <a:extLst>
+            <a:ext uri="{909E8E84-426E-40DD-AFC4-6F175D3DCCD1}">
+              <a14:hiddenFill xmlns:a14="http://schemas.microsoft.com/office/drawing/2010/main">
+                <a:solidFill>
+                  <a:srgbClr val="FFFFFF"/>
+                </a:solidFill>
+              </a14:hiddenFill>
+            </a:ext>
+          </a:extLst>
         </p:spPr>
       </p:pic>
     </p:spTree>
     <p:extLst>
       <p:ext uri="{BB962C8B-B14F-4D97-AF65-F5344CB8AC3E}">
-        <p14:creationId xmlns:p14="http://schemas.microsoft.com/office/powerpoint/2010/main" val="4156640487"/>
+        <p14:creationId xmlns:p14="http://schemas.microsoft.com/office/powerpoint/2010/main" val="115006346"/>
       </p:ext>
     </p:extLst>
   </p:cSld>
@@ -4074,116 +4057,6 @@
           <p:cNvPr id="2" name="標題 1">
             <a:extLst>
               <a:ext uri="{FF2B5EF4-FFF2-40B4-BE49-F238E27FC236}">
-                <a16:creationId xmlns:a16="http://schemas.microsoft.com/office/drawing/2014/main" id="{EB780416-4C22-4DC3-BD32-489193CC2B19}"/>
-              </a:ext>
-            </a:extLst>
-          </p:cNvPr>
-          <p:cNvSpPr>
-            <a:spLocks noGrp="1"/>
-          </p:cNvSpPr>
-          <p:nvPr>
-            <p:ph type="title"/>
-          </p:nvPr>
-        </p:nvSpPr>
-        <p:spPr/>
-        <p:txBody>
-          <a:bodyPr/>
-          <a:lstStyle/>
-          <a:p>
-            <a:endParaRPr lang="zh-TW" altLang="en-US"/>
-          </a:p>
-        </p:txBody>
-      </p:sp>
-      <p:sp>
-        <p:nvSpPr>
-          <p:cNvPr id="3" name="內容版面配置區 2">
-            <a:extLst>
-              <a:ext uri="{FF2B5EF4-FFF2-40B4-BE49-F238E27FC236}">
-                <a16:creationId xmlns:a16="http://schemas.microsoft.com/office/drawing/2014/main" id="{D9AF8F58-6600-45DE-BE5A-CF7A4DAEEF59}"/>
-              </a:ext>
-            </a:extLst>
-          </p:cNvPr>
-          <p:cNvSpPr>
-            <a:spLocks noGrp="1"/>
-          </p:cNvSpPr>
-          <p:nvPr>
-            <p:ph idx="1"/>
-          </p:nvPr>
-        </p:nvSpPr>
-        <p:spPr/>
-        <p:txBody>
-          <a:bodyPr/>
-          <a:lstStyle/>
-          <a:p>
-            <a:endParaRPr lang="zh-TW" altLang="en-US"/>
-          </a:p>
-        </p:txBody>
-      </p:sp>
-      <p:pic>
-        <p:nvPicPr>
-          <p:cNvPr id="5" name="圖片 4">
-            <a:extLst>
-              <a:ext uri="{FF2B5EF4-FFF2-40B4-BE49-F238E27FC236}">
-                <a16:creationId xmlns:a16="http://schemas.microsoft.com/office/drawing/2014/main" id="{C3B1B544-7BD6-4DE2-A75B-DD290EFBD6CE}"/>
-              </a:ext>
-            </a:extLst>
-          </p:cNvPr>
-          <p:cNvPicPr>
-            <a:picLocks noChangeAspect="1"/>
-          </p:cNvPicPr>
-          <p:nvPr/>
-        </p:nvPicPr>
-        <p:blipFill>
-          <a:blip r:embed="rId2"/>
-          <a:stretch>
-            <a:fillRect/>
-          </a:stretch>
-        </p:blipFill>
-        <p:spPr>
-          <a:xfrm>
-            <a:off x="2236117" y="324784"/>
-            <a:ext cx="7562306" cy="5777213"/>
-          </a:xfrm>
-          <a:prstGeom prst="rect">
-            <a:avLst/>
-          </a:prstGeom>
-        </p:spPr>
-      </p:pic>
-    </p:spTree>
-    <p:extLst>
-      <p:ext uri="{BB962C8B-B14F-4D97-AF65-F5344CB8AC3E}">
-        <p14:creationId xmlns:p14="http://schemas.microsoft.com/office/powerpoint/2010/main" val="1123486672"/>
-      </p:ext>
-    </p:extLst>
-  </p:cSld>
-  <p:clrMapOvr>
-    <a:masterClrMapping/>
-  </p:clrMapOvr>
-</p:sld>
-</file>
-
-<file path=ppt/slides/slide12.xml><?xml version="1.0" encoding="utf-8"?>
-<p:sld xmlns:a="http://schemas.openxmlformats.org/drawingml/2006/main" xmlns:r="http://schemas.openxmlformats.org/officeDocument/2006/relationships" xmlns:p="http://schemas.openxmlformats.org/presentationml/2006/main">
-  <p:cSld>
-    <p:spTree>
-      <p:nvGrpSpPr>
-        <p:cNvPr id="1" name=""/>
-        <p:cNvGrpSpPr/>
-        <p:nvPr/>
-      </p:nvGrpSpPr>
-      <p:grpSpPr>
-        <a:xfrm>
-          <a:off x="0" y="0"/>
-          <a:ext cx="0" cy="0"/>
-          <a:chOff x="0" y="0"/>
-          <a:chExt cx="0" cy="0"/>
-        </a:xfrm>
-      </p:grpSpPr>
-      <p:sp>
-        <p:nvSpPr>
-          <p:cNvPr id="2" name="標題 1">
-            <a:extLst>
-              <a:ext uri="{FF2B5EF4-FFF2-40B4-BE49-F238E27FC236}">
                 <a16:creationId xmlns:a16="http://schemas.microsoft.com/office/drawing/2014/main" id="{4DD70468-AC48-4450-8B5D-392E2876A209}"/>
               </a:ext>
             </a:extLst>
@@ -4258,8 +4131,8 @@
         </p:blipFill>
         <p:spPr bwMode="auto">
           <a:xfrm>
-            <a:off x="2495550" y="1503134"/>
-            <a:ext cx="7200900" cy="3851731"/>
+            <a:off x="0" y="168275"/>
+            <a:ext cx="12192000" cy="6521449"/>
           </a:xfrm>
           <a:prstGeom prst="rect">
             <a:avLst/>
@@ -4289,7 +4162,7 @@
 </p:sld>
 </file>
 
-<file path=ppt/slides/slide13.xml><?xml version="1.0" encoding="utf-8"?>
+<file path=ppt/slides/slide12.xml><?xml version="1.0" encoding="utf-8"?>
 <p:sld xmlns:a="http://schemas.openxmlformats.org/drawingml/2006/main" xmlns:r="http://schemas.openxmlformats.org/officeDocument/2006/relationships" xmlns:p="http://schemas.openxmlformats.org/presentationml/2006/main">
   <p:cSld>
     <p:spTree>
@@ -4311,7 +4184,7 @@
           <p:cNvPr id="2" name="標題 1">
             <a:extLst>
               <a:ext uri="{FF2B5EF4-FFF2-40B4-BE49-F238E27FC236}">
-                <a16:creationId xmlns:a16="http://schemas.microsoft.com/office/drawing/2014/main" id="{E7E9A6EF-D5E9-4101-9B16-17517F362168}"/>
+                <a16:creationId xmlns:a16="http://schemas.microsoft.com/office/drawing/2014/main" id="{28C0EAC7-D825-4FB0-9CF9-E033065915CC}"/>
               </a:ext>
             </a:extLst>
           </p:cNvPr>
@@ -4336,7 +4209,7 @@
           <p:cNvPr id="3" name="內容版面配置區 2">
             <a:extLst>
               <a:ext uri="{FF2B5EF4-FFF2-40B4-BE49-F238E27FC236}">
-                <a16:creationId xmlns:a16="http://schemas.microsoft.com/office/drawing/2014/main" id="{876FE73D-C8ED-455D-A6FF-1F8F22627C61}"/>
+                <a16:creationId xmlns:a16="http://schemas.microsoft.com/office/drawing/2014/main" id="{6FF22F99-23F1-4CAE-9342-DAE71623276C}"/>
               </a:ext>
             </a:extLst>
           </p:cNvPr>
@@ -4358,10 +4231,10 @@
       </p:sp>
       <p:pic>
         <p:nvPicPr>
-          <p:cNvPr id="5" name="圖片 4">
-            <a:extLst>
-              <a:ext uri="{FF2B5EF4-FFF2-40B4-BE49-F238E27FC236}">
-                <a16:creationId xmlns:a16="http://schemas.microsoft.com/office/drawing/2014/main" id="{E17BCAE2-AA64-42BF-8EC9-C2B875455C16}"/>
+          <p:cNvPr id="7" name="圖片 6">
+            <a:extLst>
+              <a:ext uri="{FF2B5EF4-FFF2-40B4-BE49-F238E27FC236}">
+                <a16:creationId xmlns:a16="http://schemas.microsoft.com/office/drawing/2014/main" id="{823B3453-B4C9-48F6-986D-E51181D8B4A8}"/>
               </a:ext>
             </a:extLst>
           </p:cNvPr>
@@ -4378,316 +4251,8 @@
         </p:blipFill>
         <p:spPr>
           <a:xfrm>
-            <a:off x="1691307" y="564305"/>
-            <a:ext cx="8809385" cy="5560272"/>
-          </a:xfrm>
-          <a:prstGeom prst="rect">
-            <a:avLst/>
-          </a:prstGeom>
-        </p:spPr>
-      </p:pic>
-    </p:spTree>
-    <p:extLst>
-      <p:ext uri="{BB962C8B-B14F-4D97-AF65-F5344CB8AC3E}">
-        <p14:creationId xmlns:p14="http://schemas.microsoft.com/office/powerpoint/2010/main" val="757734258"/>
-      </p:ext>
-    </p:extLst>
-  </p:cSld>
-  <p:clrMapOvr>
-    <a:masterClrMapping/>
-  </p:clrMapOvr>
-</p:sld>
-</file>
-
-<file path=ppt/slides/slide14.xml><?xml version="1.0" encoding="utf-8"?>
-<p:sld xmlns:a="http://schemas.openxmlformats.org/drawingml/2006/main" xmlns:r="http://schemas.openxmlformats.org/officeDocument/2006/relationships" xmlns:p="http://schemas.openxmlformats.org/presentationml/2006/main">
-  <p:cSld>
-    <p:spTree>
-      <p:nvGrpSpPr>
-        <p:cNvPr id="1" name=""/>
-        <p:cNvGrpSpPr/>
-        <p:nvPr/>
-      </p:nvGrpSpPr>
-      <p:grpSpPr>
-        <a:xfrm>
-          <a:off x="0" y="0"/>
-          <a:ext cx="0" cy="0"/>
-          <a:chOff x="0" y="0"/>
-          <a:chExt cx="0" cy="0"/>
-        </a:xfrm>
-      </p:grpSpPr>
-      <p:sp>
-        <p:nvSpPr>
-          <p:cNvPr id="2" name="標題 1">
-            <a:extLst>
-              <a:ext uri="{FF2B5EF4-FFF2-40B4-BE49-F238E27FC236}">
-                <a16:creationId xmlns:a16="http://schemas.microsoft.com/office/drawing/2014/main" id="{9952968D-F04B-4DC2-ADFB-BD0B6491EE48}"/>
-              </a:ext>
-            </a:extLst>
-          </p:cNvPr>
-          <p:cNvSpPr>
-            <a:spLocks noGrp="1"/>
-          </p:cNvSpPr>
-          <p:nvPr>
-            <p:ph type="title"/>
-          </p:nvPr>
-        </p:nvSpPr>
-        <p:spPr/>
-        <p:txBody>
-          <a:bodyPr/>
-          <a:lstStyle/>
-          <a:p>
-            <a:endParaRPr lang="zh-TW" altLang="en-US"/>
-          </a:p>
-        </p:txBody>
-      </p:sp>
-      <p:pic>
-        <p:nvPicPr>
-          <p:cNvPr id="5" name="內容版面配置區 4">
-            <a:extLst>
-              <a:ext uri="{FF2B5EF4-FFF2-40B4-BE49-F238E27FC236}">
-                <a16:creationId xmlns:a16="http://schemas.microsoft.com/office/drawing/2014/main" id="{3E12488D-DDBD-42D6-9F16-6839755798D4}"/>
-              </a:ext>
-            </a:extLst>
-          </p:cNvPr>
-          <p:cNvPicPr>
-            <a:picLocks noGrp="1" noChangeAspect="1"/>
-          </p:cNvPicPr>
-          <p:nvPr>
-            <p:ph idx="1"/>
-          </p:nvPr>
-        </p:nvPicPr>
-        <p:blipFill rotWithShape="1">
-          <a:blip r:embed="rId2">
-            <a:extLst>
-              <a:ext uri="{28A0092B-C50C-407E-A947-70E740481C1C}">
-                <a14:useLocalDpi xmlns:a14="http://schemas.microsoft.com/office/drawing/2010/main" val="0"/>
-              </a:ext>
-            </a:extLst>
-          </a:blip>
-          <a:srcRect l="296" t="390" b="-1"/>
-          <a:stretch/>
-        </p:blipFill>
-        <p:spPr>
-          <a:xfrm>
-            <a:off x="1459148" y="510702"/>
-            <a:ext cx="9301295" cy="5786494"/>
-          </a:xfrm>
-        </p:spPr>
-      </p:pic>
-    </p:spTree>
-    <p:extLst>
-      <p:ext uri="{BB962C8B-B14F-4D97-AF65-F5344CB8AC3E}">
-        <p14:creationId xmlns:p14="http://schemas.microsoft.com/office/powerpoint/2010/main" val="101459410"/>
-      </p:ext>
-    </p:extLst>
-  </p:cSld>
-  <p:clrMapOvr>
-    <a:masterClrMapping/>
-  </p:clrMapOvr>
-</p:sld>
-</file>
-
-<file path=ppt/slides/slide15.xml><?xml version="1.0" encoding="utf-8"?>
-<p:sld xmlns:a="http://schemas.openxmlformats.org/drawingml/2006/main" xmlns:r="http://schemas.openxmlformats.org/officeDocument/2006/relationships" xmlns:p="http://schemas.openxmlformats.org/presentationml/2006/main">
-  <p:cSld>
-    <p:spTree>
-      <p:nvGrpSpPr>
-        <p:cNvPr id="1" name=""/>
-        <p:cNvGrpSpPr/>
-        <p:nvPr/>
-      </p:nvGrpSpPr>
-      <p:grpSpPr>
-        <a:xfrm>
-          <a:off x="0" y="0"/>
-          <a:ext cx="0" cy="0"/>
-          <a:chOff x="0" y="0"/>
-          <a:chExt cx="0" cy="0"/>
-        </a:xfrm>
-      </p:grpSpPr>
-      <p:sp>
-        <p:nvSpPr>
-          <p:cNvPr id="2" name="標題 1">
-            <a:extLst>
-              <a:ext uri="{FF2B5EF4-FFF2-40B4-BE49-F238E27FC236}">
-                <a16:creationId xmlns:a16="http://schemas.microsoft.com/office/drawing/2014/main" id="{9E41BC16-39D1-44CE-A804-37119988FCF7}"/>
-              </a:ext>
-            </a:extLst>
-          </p:cNvPr>
-          <p:cNvSpPr>
-            <a:spLocks noGrp="1"/>
-          </p:cNvSpPr>
-          <p:nvPr>
-            <p:ph type="title"/>
-          </p:nvPr>
-        </p:nvSpPr>
-        <p:spPr/>
-        <p:txBody>
-          <a:bodyPr/>
-          <a:lstStyle/>
-          <a:p>
-            <a:endParaRPr lang="zh-TW" altLang="en-US"/>
-          </a:p>
-        </p:txBody>
-      </p:sp>
-      <p:sp>
-        <p:nvSpPr>
-          <p:cNvPr id="3" name="內容版面配置區 2">
-            <a:extLst>
-              <a:ext uri="{FF2B5EF4-FFF2-40B4-BE49-F238E27FC236}">
-                <a16:creationId xmlns:a16="http://schemas.microsoft.com/office/drawing/2014/main" id="{29AD569C-ED92-43D0-AEA7-357816502C51}"/>
-              </a:ext>
-            </a:extLst>
-          </p:cNvPr>
-          <p:cNvSpPr>
-            <a:spLocks noGrp="1"/>
-          </p:cNvSpPr>
-          <p:nvPr>
-            <p:ph idx="1"/>
-          </p:nvPr>
-        </p:nvSpPr>
-        <p:spPr/>
-        <p:txBody>
-          <a:bodyPr/>
-          <a:lstStyle/>
-          <a:p>
-            <a:endParaRPr lang="zh-TW" altLang="en-US"/>
-          </a:p>
-        </p:txBody>
-      </p:sp>
-      <p:pic>
-        <p:nvPicPr>
-          <p:cNvPr id="7" name="圖片 6">
-            <a:extLst>
-              <a:ext uri="{FF2B5EF4-FFF2-40B4-BE49-F238E27FC236}">
-                <a16:creationId xmlns:a16="http://schemas.microsoft.com/office/drawing/2014/main" id="{767234CD-85E9-4965-82E8-56D5CECA2342}"/>
-              </a:ext>
-            </a:extLst>
-          </p:cNvPr>
-          <p:cNvPicPr>
-            <a:picLocks noChangeAspect="1"/>
-          </p:cNvPicPr>
-          <p:nvPr/>
-        </p:nvPicPr>
-        <p:blipFill rotWithShape="1">
-          <a:blip r:embed="rId2"/>
-          <a:srcRect l="123" r="-1"/>
-          <a:stretch/>
-        </p:blipFill>
-        <p:spPr>
-          <a:xfrm>
-            <a:off x="838200" y="556296"/>
-            <a:ext cx="10515600" cy="5745408"/>
-          </a:xfrm>
-          <a:prstGeom prst="rect">
-            <a:avLst/>
-          </a:prstGeom>
-        </p:spPr>
-      </p:pic>
-    </p:spTree>
-    <p:extLst>
-      <p:ext uri="{BB962C8B-B14F-4D97-AF65-F5344CB8AC3E}">
-        <p14:creationId xmlns:p14="http://schemas.microsoft.com/office/powerpoint/2010/main" val="221754085"/>
-      </p:ext>
-    </p:extLst>
-  </p:cSld>
-  <p:clrMapOvr>
-    <a:masterClrMapping/>
-  </p:clrMapOvr>
-</p:sld>
-</file>
-
-<file path=ppt/slides/slide16.xml><?xml version="1.0" encoding="utf-8"?>
-<p:sld xmlns:a="http://schemas.openxmlformats.org/drawingml/2006/main" xmlns:r="http://schemas.openxmlformats.org/officeDocument/2006/relationships" xmlns:p="http://schemas.openxmlformats.org/presentationml/2006/main">
-  <p:cSld>
-    <p:spTree>
-      <p:nvGrpSpPr>
-        <p:cNvPr id="1" name=""/>
-        <p:cNvGrpSpPr/>
-        <p:nvPr/>
-      </p:nvGrpSpPr>
-      <p:grpSpPr>
-        <a:xfrm>
-          <a:off x="0" y="0"/>
-          <a:ext cx="0" cy="0"/>
-          <a:chOff x="0" y="0"/>
-          <a:chExt cx="0" cy="0"/>
-        </a:xfrm>
-      </p:grpSpPr>
-      <p:sp>
-        <p:nvSpPr>
-          <p:cNvPr id="2" name="標題 1">
-            <a:extLst>
-              <a:ext uri="{FF2B5EF4-FFF2-40B4-BE49-F238E27FC236}">
-                <a16:creationId xmlns:a16="http://schemas.microsoft.com/office/drawing/2014/main" id="{28C0EAC7-D825-4FB0-9CF9-E033065915CC}"/>
-              </a:ext>
-            </a:extLst>
-          </p:cNvPr>
-          <p:cNvSpPr>
-            <a:spLocks noGrp="1"/>
-          </p:cNvSpPr>
-          <p:nvPr>
-            <p:ph type="title"/>
-          </p:nvPr>
-        </p:nvSpPr>
-        <p:spPr/>
-        <p:txBody>
-          <a:bodyPr/>
-          <a:lstStyle/>
-          <a:p>
-            <a:endParaRPr lang="zh-TW" altLang="en-US"/>
-          </a:p>
-        </p:txBody>
-      </p:sp>
-      <p:sp>
-        <p:nvSpPr>
-          <p:cNvPr id="3" name="內容版面配置區 2">
-            <a:extLst>
-              <a:ext uri="{FF2B5EF4-FFF2-40B4-BE49-F238E27FC236}">
-                <a16:creationId xmlns:a16="http://schemas.microsoft.com/office/drawing/2014/main" id="{6FF22F99-23F1-4CAE-9342-DAE71623276C}"/>
-              </a:ext>
-            </a:extLst>
-          </p:cNvPr>
-          <p:cNvSpPr>
-            <a:spLocks noGrp="1"/>
-          </p:cNvSpPr>
-          <p:nvPr>
-            <p:ph idx="1"/>
-          </p:nvPr>
-        </p:nvSpPr>
-        <p:spPr/>
-        <p:txBody>
-          <a:bodyPr/>
-          <a:lstStyle/>
-          <a:p>
-            <a:endParaRPr lang="zh-TW" altLang="en-US"/>
-          </a:p>
-        </p:txBody>
-      </p:sp>
-      <p:pic>
-        <p:nvPicPr>
-          <p:cNvPr id="7" name="圖片 6">
-            <a:extLst>
-              <a:ext uri="{FF2B5EF4-FFF2-40B4-BE49-F238E27FC236}">
-                <a16:creationId xmlns:a16="http://schemas.microsoft.com/office/drawing/2014/main" id="{823B3453-B4C9-48F6-986D-E51181D8B4A8}"/>
-              </a:ext>
-            </a:extLst>
-          </p:cNvPr>
-          <p:cNvPicPr>
-            <a:picLocks noChangeAspect="1"/>
-          </p:cNvPicPr>
-          <p:nvPr/>
-        </p:nvPicPr>
-        <p:blipFill>
-          <a:blip r:embed="rId2"/>
-          <a:stretch>
-            <a:fillRect/>
-          </a:stretch>
-        </p:blipFill>
-        <p:spPr>
-          <a:xfrm>
-            <a:off x="2064652" y="754986"/>
-            <a:ext cx="7586328" cy="4812096"/>
+            <a:off x="1095935" y="257401"/>
+            <a:ext cx="10000129" cy="6343198"/>
           </a:xfrm>
           <a:prstGeom prst="rect">
             <a:avLst/>
@@ -4707,7 +4272,7 @@
 </p:sld>
 </file>
 
-<file path=ppt/slides/slide17.xml><?xml version="1.0" encoding="utf-8"?>
+<file path=ppt/slides/slide13.xml><?xml version="1.0" encoding="utf-8"?>
 <p:sld xmlns:a="http://schemas.openxmlformats.org/drawingml/2006/main" xmlns:r="http://schemas.openxmlformats.org/officeDocument/2006/relationships" xmlns:p="http://schemas.openxmlformats.org/presentationml/2006/main">
   <p:cSld>
     <p:spTree>
@@ -5133,7 +4698,7 @@
 </p:sld>
 </file>
 
-<file path=ppt/slides/slide18.xml><?xml version="1.0" encoding="utf-8"?>
+<file path=ppt/slides/slide14.xml><?xml version="1.0" encoding="utf-8"?>
 <p:sld xmlns:a="http://schemas.openxmlformats.org/drawingml/2006/main" xmlns:r="http://schemas.openxmlformats.org/officeDocument/2006/relationships" xmlns:p="http://schemas.openxmlformats.org/presentationml/2006/main">
   <p:cSld>
     <p:spTree>
@@ -5554,7 +5119,7 @@
           <a:lstStyle/>
           <a:p>
             <a:r>
-              <a:rPr lang="zh-TW" altLang="en-US" dirty="0">
+              <a:rPr lang="zh-TW" altLang="en-US" b="1" dirty="0">
                 <a:latin typeface="標楷體" panose="03000509000000000000" pitchFamily="65" charset="-120"/>
                 <a:ea typeface="標楷體" panose="03000509000000000000" pitchFamily="65" charset="-120"/>
               </a:rPr>
@@ -5595,6 +5160,36 @@
           </a:p>
         </p:txBody>
       </p:sp>
+      <p:pic>
+        <p:nvPicPr>
+          <p:cNvPr id="8" name="圖片 7">
+            <a:extLst>
+              <a:ext uri="{FF2B5EF4-FFF2-40B4-BE49-F238E27FC236}">
+                <a16:creationId xmlns:a16="http://schemas.microsoft.com/office/drawing/2014/main" id="{EBD1B938-DBA6-4B72-9630-CFDCF0E10490}"/>
+              </a:ext>
+            </a:extLst>
+          </p:cNvPr>
+          <p:cNvPicPr>
+            <a:picLocks noChangeAspect="1"/>
+          </p:cNvPicPr>
+          <p:nvPr/>
+        </p:nvPicPr>
+        <p:blipFill>
+          <a:blip r:embed="rId2"/>
+          <a:stretch>
+            <a:fillRect/>
+          </a:stretch>
+        </p:blipFill>
+        <p:spPr>
+          <a:xfrm>
+            <a:off x="2684929" y="2655421"/>
+            <a:ext cx="6822141" cy="3837454"/>
+          </a:xfrm>
+          <a:prstGeom prst="rect">
+            <a:avLst/>
+          </a:prstGeom>
+        </p:spPr>
+      </p:pic>
     </p:spTree>
     <p:extLst>
       <p:ext uri="{BB962C8B-B14F-4D97-AF65-F5344CB8AC3E}">
@@ -5609,116 +5204,6 @@
 </file>
 
 <file path=ppt/slides/slide3.xml><?xml version="1.0" encoding="utf-8"?>
-<p:sld xmlns:a="http://schemas.openxmlformats.org/drawingml/2006/main" xmlns:r="http://schemas.openxmlformats.org/officeDocument/2006/relationships" xmlns:p="http://schemas.openxmlformats.org/presentationml/2006/main">
-  <p:cSld>
-    <p:spTree>
-      <p:nvGrpSpPr>
-        <p:cNvPr id="1" name=""/>
-        <p:cNvGrpSpPr/>
-        <p:nvPr/>
-      </p:nvGrpSpPr>
-      <p:grpSpPr>
-        <a:xfrm>
-          <a:off x="0" y="0"/>
-          <a:ext cx="0" cy="0"/>
-          <a:chOff x="0" y="0"/>
-          <a:chExt cx="0" cy="0"/>
-        </a:xfrm>
-      </p:grpSpPr>
-      <p:sp>
-        <p:nvSpPr>
-          <p:cNvPr id="2" name="標題 1">
-            <a:extLst>
-              <a:ext uri="{FF2B5EF4-FFF2-40B4-BE49-F238E27FC236}">
-                <a16:creationId xmlns:a16="http://schemas.microsoft.com/office/drawing/2014/main" id="{3DD17195-ACBA-43F9-BEC2-268D5145B465}"/>
-              </a:ext>
-            </a:extLst>
-          </p:cNvPr>
-          <p:cNvSpPr>
-            <a:spLocks noGrp="1"/>
-          </p:cNvSpPr>
-          <p:nvPr>
-            <p:ph type="title"/>
-          </p:nvPr>
-        </p:nvSpPr>
-        <p:spPr/>
-        <p:txBody>
-          <a:bodyPr/>
-          <a:lstStyle/>
-          <a:p>
-            <a:endParaRPr lang="zh-TW" altLang="en-US"/>
-          </a:p>
-        </p:txBody>
-      </p:sp>
-      <p:sp>
-        <p:nvSpPr>
-          <p:cNvPr id="3" name="內容版面配置區 2">
-            <a:extLst>
-              <a:ext uri="{FF2B5EF4-FFF2-40B4-BE49-F238E27FC236}">
-                <a16:creationId xmlns:a16="http://schemas.microsoft.com/office/drawing/2014/main" id="{AE3E89AB-59A7-45E8-827D-20F4A4434439}"/>
-              </a:ext>
-            </a:extLst>
-          </p:cNvPr>
-          <p:cNvSpPr>
-            <a:spLocks noGrp="1"/>
-          </p:cNvSpPr>
-          <p:nvPr>
-            <p:ph idx="1"/>
-          </p:nvPr>
-        </p:nvSpPr>
-        <p:spPr/>
-        <p:txBody>
-          <a:bodyPr/>
-          <a:lstStyle/>
-          <a:p>
-            <a:endParaRPr lang="zh-TW" altLang="en-US"/>
-          </a:p>
-        </p:txBody>
-      </p:sp>
-      <p:pic>
-        <p:nvPicPr>
-          <p:cNvPr id="4" name="圖片 3">
-            <a:extLst>
-              <a:ext uri="{FF2B5EF4-FFF2-40B4-BE49-F238E27FC236}">
-                <a16:creationId xmlns:a16="http://schemas.microsoft.com/office/drawing/2014/main" id="{C8861B61-F9A5-4CCA-88DD-0B04E81C62BE}"/>
-              </a:ext>
-            </a:extLst>
-          </p:cNvPr>
-          <p:cNvPicPr>
-            <a:picLocks noChangeAspect="1"/>
-          </p:cNvPicPr>
-          <p:nvPr/>
-        </p:nvPicPr>
-        <p:blipFill>
-          <a:blip r:embed="rId2"/>
-          <a:stretch>
-            <a:fillRect/>
-          </a:stretch>
-        </p:blipFill>
-        <p:spPr>
-          <a:xfrm>
-            <a:off x="5396753" y="1724585"/>
-            <a:ext cx="6060141" cy="3408829"/>
-          </a:xfrm>
-          <a:prstGeom prst="rect">
-            <a:avLst/>
-          </a:prstGeom>
-        </p:spPr>
-      </p:pic>
-    </p:spTree>
-    <p:extLst>
-      <p:ext uri="{BB962C8B-B14F-4D97-AF65-F5344CB8AC3E}">
-        <p14:creationId xmlns:p14="http://schemas.microsoft.com/office/powerpoint/2010/main" val="765999463"/>
-      </p:ext>
-    </p:extLst>
-  </p:cSld>
-  <p:clrMapOvr>
-    <a:masterClrMapping/>
-  </p:clrMapOvr>
-</p:sld>
-</file>
-
-<file path=ppt/slides/slide4.xml><?xml version="1.0" encoding="utf-8"?>
 <p:sld xmlns:a="http://schemas.openxmlformats.org/drawingml/2006/main" xmlns:r="http://schemas.openxmlformats.org/officeDocument/2006/relationships" xmlns:p="http://schemas.openxmlformats.org/presentationml/2006/main">
   <p:cSld>
     <p:spTree>
@@ -5809,7 +5294,7 @@
 </p:sld>
 </file>
 
-<file path=ppt/slides/slide5.xml><?xml version="1.0" encoding="utf-8"?>
+<file path=ppt/slides/slide4.xml><?xml version="1.0" encoding="utf-8"?>
 <p:sld xmlns:a="http://schemas.openxmlformats.org/drawingml/2006/main" xmlns:r="http://schemas.openxmlformats.org/officeDocument/2006/relationships" xmlns:p="http://schemas.openxmlformats.org/presentationml/2006/main">
   <p:cSld>
     <p:spTree>
@@ -5857,8 +5342,8 @@
           </a:p>
         </p:txBody>
       </p:sp>
-      <mc:AlternateContent xmlns:mc="http://schemas.openxmlformats.org/markup-compatibility/2006" xmlns:a14="http://schemas.microsoft.com/office/drawing/2010/main">
-        <mc:Choice Requires="a14">
+      <mc:AlternateContent xmlns:mc="http://schemas.openxmlformats.org/markup-compatibility/2006">
+        <mc:Choice xmlns:a14="http://schemas.microsoft.com/office/drawing/2010/main" Requires="a14">
           <p:sp>
             <p:nvSpPr>
               <p:cNvPr id="3" name="內容版面配置區 2">
@@ -6058,7 +5543,7 @@
                     <a:latin typeface="標楷體" panose="03000509000000000000" pitchFamily="65" charset="-120"/>
                     <a:ea typeface="標楷體" panose="03000509000000000000" pitchFamily="65" charset="-120"/>
                   </a:rPr>
-                  <a:t>每個八度大小都是 </a:t>
+                  <a:t>每個八度大小定義為 </a:t>
                 </a:r>
                 <a:r>
                   <a:rPr lang="en-US" altLang="zh-TW" dirty="0">
@@ -6138,7 +5623,7 @@
             </p:txBody>
           </p:sp>
         </mc:Choice>
-        <mc:Fallback xmlns="">
+        <mc:Fallback>
           <p:sp>
             <p:nvSpPr>
               <p:cNvPr id="3" name="內容版面配置區 2">
@@ -6787,7 +6272,7 @@
 </p:sld>
 </file>
 
-<file path=ppt/slides/slide6.xml><?xml version="1.0" encoding="utf-8"?>
+<file path=ppt/slides/slide5.xml><?xml version="1.0" encoding="utf-8"?>
 <p:sld xmlns:a="http://schemas.openxmlformats.org/drawingml/2006/main" xmlns:r="http://schemas.openxmlformats.org/officeDocument/2006/relationships" xmlns:p="http://schemas.openxmlformats.org/presentationml/2006/main">
   <p:cSld>
     <p:spTree>
@@ -7196,7 +6681,7 @@
 </p:sld>
 </file>
 
-<file path=ppt/slides/slide7.xml><?xml version="1.0" encoding="utf-8"?>
+<file path=ppt/slides/slide6.xml><?xml version="1.0" encoding="utf-8"?>
 <p:sld xmlns:a="http://schemas.openxmlformats.org/drawingml/2006/main" xmlns:r="http://schemas.openxmlformats.org/officeDocument/2006/relationships" xmlns:p="http://schemas.openxmlformats.org/presentationml/2006/main">
   <p:cSld>
     <p:spTree>
@@ -7596,7 +7081,7 @@
 </p:sld>
 </file>
 
-<file path=ppt/slides/slide8.xml><?xml version="1.0" encoding="utf-8"?>
+<file path=ppt/slides/slide7.xml><?xml version="1.0" encoding="utf-8"?>
 <p:sld xmlns:a="http://schemas.openxmlformats.org/drawingml/2006/main" xmlns:r="http://schemas.openxmlformats.org/officeDocument/2006/relationships" xmlns:p="http://schemas.openxmlformats.org/presentationml/2006/main">
   <p:cSld>
     <p:spTree>
@@ -7736,7 +7221,7 @@
 </p:sld>
 </file>
 
-<file path=ppt/slides/slide9.xml><?xml version="1.0" encoding="utf-8"?>
+<file path=ppt/slides/slide8.xml><?xml version="1.0" encoding="utf-8"?>
 <p:sld xmlns:a="http://schemas.openxmlformats.org/drawingml/2006/main" xmlns:r="http://schemas.openxmlformats.org/officeDocument/2006/relationships" xmlns:p="http://schemas.openxmlformats.org/presentationml/2006/main">
   <p:cSld>
     <p:spTree>
@@ -7758,7 +7243,7 @@
           <p:cNvPr id="2" name="標題 1">
             <a:extLst>
               <a:ext uri="{FF2B5EF4-FFF2-40B4-BE49-F238E27FC236}">
-                <a16:creationId xmlns:a16="http://schemas.microsoft.com/office/drawing/2014/main" id="{E8C04DB5-0143-4226-83F7-1AB279605FBF}"/>
+                <a16:creationId xmlns:a16="http://schemas.microsoft.com/office/drawing/2014/main" id="{EDAD5F66-2419-4BF2-8D37-B8A40101A49C}"/>
               </a:ext>
             </a:extLst>
           </p:cNvPr>
@@ -7783,7 +7268,7 @@
           <p:cNvPr id="3" name="內容版面配置區 2">
             <a:extLst>
               <a:ext uri="{FF2B5EF4-FFF2-40B4-BE49-F238E27FC236}">
-                <a16:creationId xmlns:a16="http://schemas.microsoft.com/office/drawing/2014/main" id="{37131981-7D87-4D9A-9C89-6F8888A43B01}"/>
+                <a16:creationId xmlns:a16="http://schemas.microsoft.com/office/drawing/2014/main" id="{B2BF9814-0C9A-4CA3-9E34-80BEA822F22B}"/>
               </a:ext>
             </a:extLst>
           </p:cNvPr>
@@ -7803,14 +7288,74 @@
           </a:p>
         </p:txBody>
       </p:sp>
-      <mc:AlternateContent xmlns:mc="http://schemas.openxmlformats.org/markup-compatibility/2006" xmlns:a14="http://schemas.microsoft.com/office/drawing/2010/main">
-        <mc:Choice Requires="a14">
+      <p:pic>
+        <p:nvPicPr>
+          <p:cNvPr id="8" name="圖片 7">
+            <a:extLst>
+              <a:ext uri="{FF2B5EF4-FFF2-40B4-BE49-F238E27FC236}">
+                <a16:creationId xmlns:a16="http://schemas.microsoft.com/office/drawing/2014/main" id="{31DD6903-BBD2-40C6-8CA7-CE8920E4AB16}"/>
+              </a:ext>
+            </a:extLst>
+          </p:cNvPr>
+          <p:cNvPicPr>
+            <a:picLocks noChangeAspect="1"/>
+          </p:cNvPicPr>
+          <p:nvPr/>
+        </p:nvPicPr>
+        <p:blipFill>
+          <a:blip r:embed="rId2"/>
+          <a:stretch>
+            <a:fillRect/>
+          </a:stretch>
+        </p:blipFill>
+        <p:spPr>
+          <a:xfrm>
+            <a:off x="2078671" y="203175"/>
+            <a:ext cx="8034657" cy="1389393"/>
+          </a:xfrm>
+          <a:prstGeom prst="rect">
+            <a:avLst/>
+          </a:prstGeom>
+        </p:spPr>
+      </p:pic>
+      <p:pic>
+        <p:nvPicPr>
+          <p:cNvPr id="6" name="圖片 5">
+            <a:extLst>
+              <a:ext uri="{FF2B5EF4-FFF2-40B4-BE49-F238E27FC236}">
+                <a16:creationId xmlns:a16="http://schemas.microsoft.com/office/drawing/2014/main" id="{D9F75CA6-F5FA-4B12-B663-C63E427D359E}"/>
+              </a:ext>
+            </a:extLst>
+          </p:cNvPr>
+          <p:cNvPicPr>
+            <a:picLocks noChangeAspect="1"/>
+          </p:cNvPicPr>
+          <p:nvPr/>
+        </p:nvPicPr>
+        <p:blipFill>
+          <a:blip r:embed="rId3"/>
+          <a:stretch>
+            <a:fillRect/>
+          </a:stretch>
+        </p:blipFill>
+        <p:spPr>
+          <a:xfrm>
+            <a:off x="470647" y="1690688"/>
+            <a:ext cx="6360460" cy="4859065"/>
+          </a:xfrm>
+          <a:prstGeom prst="rect">
+            <a:avLst/>
+          </a:prstGeom>
+        </p:spPr>
+      </p:pic>
+      <mc:AlternateContent xmlns:mc="http://schemas.openxmlformats.org/markup-compatibility/2006">
+        <mc:Choice xmlns:a14="http://schemas.microsoft.com/office/drawing/2010/main" Requires="a14">
           <p:sp>
             <p:nvSpPr>
-              <p:cNvPr id="6" name="文字方塊 5">
+              <p:cNvPr id="7" name="文字方塊 6">
                 <a:extLst>
                   <a:ext uri="{FF2B5EF4-FFF2-40B4-BE49-F238E27FC236}">
-                    <a16:creationId xmlns:a16="http://schemas.microsoft.com/office/drawing/2014/main" id="{2BA635D2-6EDC-4331-A905-824C6A62AF8E}"/>
+                    <a16:creationId xmlns:a16="http://schemas.microsoft.com/office/drawing/2014/main" id="{9DE05A29-9AF8-44FD-8F20-DE0DB0A51AC0}"/>
                   </a:ext>
                 </a:extLst>
               </p:cNvPr>
@@ -7990,13 +7535,13 @@
             </p:txBody>
           </p:sp>
         </mc:Choice>
-        <mc:Fallback xmlns="">
+        <mc:Fallback>
           <p:sp>
             <p:nvSpPr>
-              <p:cNvPr id="6" name="文字方塊 5">
+              <p:cNvPr id="7" name="文字方塊 6">
                 <a:extLst>
                   <a:ext uri="{FF2B5EF4-FFF2-40B4-BE49-F238E27FC236}">
-                    <a16:creationId xmlns:a16="http://schemas.microsoft.com/office/drawing/2014/main" id="{2BA635D2-6EDC-4331-A905-824C6A62AF8E}"/>
+                    <a16:creationId xmlns:a16="http://schemas.microsoft.com/office/drawing/2014/main" id="{9DE05A29-9AF8-44FD-8F20-DE0DB0A51AC0}"/>
                   </a:ext>
                 </a:extLst>
               </p:cNvPr>
@@ -8014,7 +7559,7 @@
                 <a:avLst/>
               </a:prstGeom>
               <a:blipFill>
-                <a:blip r:embed="rId2"/>
+                <a:blip r:embed="rId4"/>
                 <a:stretch>
                   <a:fillRect/>
                 </a:stretch>
@@ -8035,42 +7580,12 @@
           </p:sp>
         </mc:Fallback>
       </mc:AlternateContent>
-      <p:pic>
-        <p:nvPicPr>
-          <p:cNvPr id="26" name="圖片 25">
-            <a:extLst>
-              <a:ext uri="{FF2B5EF4-FFF2-40B4-BE49-F238E27FC236}">
-                <a16:creationId xmlns:a16="http://schemas.microsoft.com/office/drawing/2014/main" id="{900DDCE1-7D56-42CE-889C-D7DD408AC5B4}"/>
-              </a:ext>
-            </a:extLst>
-          </p:cNvPr>
-          <p:cNvPicPr>
-            <a:picLocks noChangeAspect="1"/>
-          </p:cNvPicPr>
-          <p:nvPr/>
-        </p:nvPicPr>
-        <p:blipFill>
-          <a:blip r:embed="rId3"/>
-          <a:stretch>
-            <a:fillRect/>
-          </a:stretch>
-        </p:blipFill>
-        <p:spPr>
-          <a:xfrm>
-            <a:off x="629014" y="393700"/>
-            <a:ext cx="7410087" cy="5423718"/>
-          </a:xfrm>
-          <a:prstGeom prst="rect">
-            <a:avLst/>
-          </a:prstGeom>
-        </p:spPr>
-      </p:pic>
       <p:cxnSp>
         <p:nvCxnSpPr>
-          <p:cNvPr id="8" name="直線單箭頭接點 7">
-            <a:extLst>
-              <a:ext uri="{FF2B5EF4-FFF2-40B4-BE49-F238E27FC236}">
-                <a16:creationId xmlns:a16="http://schemas.microsoft.com/office/drawing/2014/main" id="{66161AAC-BF2A-4009-89A5-FD59AA392DA6}"/>
+          <p:cNvPr id="9" name="直線單箭頭接點 8">
+            <a:extLst>
+              <a:ext uri="{FF2B5EF4-FFF2-40B4-BE49-F238E27FC236}">
+                <a16:creationId xmlns:a16="http://schemas.microsoft.com/office/drawing/2014/main" id="{AEE55984-D891-4CBD-A98A-66FB26006073}"/>
               </a:ext>
             </a:extLst>
           </p:cNvPr>
@@ -8081,8 +7596,8 @@
         </p:nvCxnSpPr>
         <p:spPr>
           <a:xfrm flipH="1" flipV="1">
-            <a:off x="7191375" y="1962150"/>
-            <a:ext cx="1695453" cy="1876426"/>
+            <a:off x="6624918" y="3182471"/>
+            <a:ext cx="2261911" cy="656106"/>
           </a:xfrm>
           <a:prstGeom prst="straightConnector1">
             <a:avLst/>
@@ -8112,7 +7627,134 @@
     </p:spTree>
     <p:extLst>
       <p:ext uri="{BB962C8B-B14F-4D97-AF65-F5344CB8AC3E}">
-        <p14:creationId xmlns:p14="http://schemas.microsoft.com/office/powerpoint/2010/main" val="4112697832"/>
+        <p14:creationId xmlns:p14="http://schemas.microsoft.com/office/powerpoint/2010/main" val="4156640487"/>
+      </p:ext>
+    </p:extLst>
+  </p:cSld>
+  <p:clrMapOvr>
+    <a:masterClrMapping/>
+  </p:clrMapOvr>
+</p:sld>
+</file>
+
+<file path=ppt/slides/slide9.xml><?xml version="1.0" encoding="utf-8"?>
+<p:sld xmlns:a="http://schemas.openxmlformats.org/drawingml/2006/main" xmlns:r="http://schemas.openxmlformats.org/officeDocument/2006/relationships" xmlns:p="http://schemas.openxmlformats.org/presentationml/2006/main">
+  <p:cSld>
+    <p:spTree>
+      <p:nvGrpSpPr>
+        <p:cNvPr id="1" name=""/>
+        <p:cNvGrpSpPr/>
+        <p:nvPr/>
+      </p:nvGrpSpPr>
+      <p:grpSpPr>
+        <a:xfrm>
+          <a:off x="0" y="0"/>
+          <a:ext cx="0" cy="0"/>
+          <a:chOff x="0" y="0"/>
+          <a:chExt cx="0" cy="0"/>
+        </a:xfrm>
+      </p:grpSpPr>
+      <p:sp>
+        <p:nvSpPr>
+          <p:cNvPr id="2" name="標題 1">
+            <a:extLst>
+              <a:ext uri="{FF2B5EF4-FFF2-40B4-BE49-F238E27FC236}">
+                <a16:creationId xmlns:a16="http://schemas.microsoft.com/office/drawing/2014/main" id="{D05096A6-4923-4348-B26B-78CFE68890C8}"/>
+              </a:ext>
+            </a:extLst>
+          </p:cNvPr>
+          <p:cNvSpPr>
+            <a:spLocks noGrp="1"/>
+          </p:cNvSpPr>
+          <p:nvPr>
+            <p:ph type="title"/>
+          </p:nvPr>
+        </p:nvSpPr>
+        <p:spPr/>
+        <p:txBody>
+          <a:bodyPr/>
+          <a:lstStyle/>
+          <a:p>
+            <a:endParaRPr lang="zh-TW" altLang="en-US"/>
+          </a:p>
+        </p:txBody>
+      </p:sp>
+      <p:sp>
+        <p:nvSpPr>
+          <p:cNvPr id="3" name="內容版面配置區 2">
+            <a:extLst>
+              <a:ext uri="{FF2B5EF4-FFF2-40B4-BE49-F238E27FC236}">
+                <a16:creationId xmlns:a16="http://schemas.microsoft.com/office/drawing/2014/main" id="{20CDB611-30F6-4482-9D5E-483293E6F372}"/>
+              </a:ext>
+            </a:extLst>
+          </p:cNvPr>
+          <p:cNvSpPr>
+            <a:spLocks noGrp="1"/>
+          </p:cNvSpPr>
+          <p:nvPr>
+            <p:ph idx="1"/>
+          </p:nvPr>
+        </p:nvSpPr>
+        <p:spPr/>
+        <p:txBody>
+          <a:bodyPr/>
+          <a:lstStyle/>
+          <a:p>
+            <a:endParaRPr lang="zh-TW" altLang="en-US"/>
+          </a:p>
+        </p:txBody>
+      </p:sp>
+      <p:pic>
+        <p:nvPicPr>
+          <p:cNvPr id="2050" name="Picture 2">
+            <a:extLst>
+              <a:ext uri="{FF2B5EF4-FFF2-40B4-BE49-F238E27FC236}">
+                <a16:creationId xmlns:a16="http://schemas.microsoft.com/office/drawing/2014/main" id="{7A6081CA-A64D-4B93-9663-0A6CA5F75F41}"/>
+              </a:ext>
+            </a:extLst>
+          </p:cNvPr>
+          <p:cNvPicPr>
+            <a:picLocks noChangeAspect="1" noChangeArrowheads="1"/>
+          </p:cNvPicPr>
+          <p:nvPr/>
+        </p:nvPicPr>
+        <p:blipFill>
+          <a:blip r:embed="rId2">
+            <a:extLst>
+              <a:ext uri="{28A0092B-C50C-407E-A947-70E740481C1C}">
+                <a14:useLocalDpi xmlns:a14="http://schemas.microsoft.com/office/drawing/2010/main" val="0"/>
+              </a:ext>
+            </a:extLst>
+          </a:blip>
+          <a:srcRect/>
+          <a:stretch>
+            <a:fillRect/>
+          </a:stretch>
+        </p:blipFill>
+        <p:spPr bwMode="auto">
+          <a:xfrm>
+            <a:off x="0" y="169863"/>
+            <a:ext cx="12192000" cy="6516687"/>
+          </a:xfrm>
+          <a:prstGeom prst="rect">
+            <a:avLst/>
+          </a:prstGeom>
+          <a:noFill/>
+          <a:extLst>
+            <a:ext uri="{909E8E84-426E-40DD-AFC4-6F175D3DCCD1}">
+              <a14:hiddenFill xmlns:a14="http://schemas.microsoft.com/office/drawing/2010/main">
+                <a:solidFill>
+                  <a:srgbClr val="FFFFFF"/>
+                </a:solidFill>
+              </a14:hiddenFill>
+            </a:ext>
+          </a:extLst>
+        </p:spPr>
+      </p:pic>
+    </p:spTree>
+    <p:extLst>
+      <p:ext uri="{BB962C8B-B14F-4D97-AF65-F5344CB8AC3E}">
+        <p14:creationId xmlns:p14="http://schemas.microsoft.com/office/powerpoint/2010/main" val="849360849"/>
       </p:ext>
     </p:extLst>
   </p:cSld>

--- a/1224報告_NAudio.pptx
+++ b/1224報告_NAudio.pptx
@@ -5,23 +5,22 @@
     <p:sldMasterId id="2147483648" r:id="rId1"/>
   </p:sldMasterIdLst>
   <p:notesMasterIdLst>
-    <p:notesMasterId r:id="rId16"/>
+    <p:notesMasterId r:id="rId15"/>
   </p:notesMasterIdLst>
   <p:sldIdLst>
     <p:sldId id="256" r:id="rId2"/>
-    <p:sldId id="269" r:id="rId3"/>
-    <p:sldId id="267" r:id="rId4"/>
-    <p:sldId id="259" r:id="rId5"/>
-    <p:sldId id="260" r:id="rId6"/>
-    <p:sldId id="271" r:id="rId7"/>
-    <p:sldId id="273" r:id="rId8"/>
-    <p:sldId id="258" r:id="rId9"/>
-    <p:sldId id="279" r:id="rId10"/>
-    <p:sldId id="278" r:id="rId11"/>
-    <p:sldId id="270" r:id="rId12"/>
-    <p:sldId id="277" r:id="rId13"/>
-    <p:sldId id="264" r:id="rId14"/>
-    <p:sldId id="262" r:id="rId15"/>
+    <p:sldId id="267" r:id="rId3"/>
+    <p:sldId id="259" r:id="rId4"/>
+    <p:sldId id="260" r:id="rId5"/>
+    <p:sldId id="271" r:id="rId6"/>
+    <p:sldId id="273" r:id="rId7"/>
+    <p:sldId id="258" r:id="rId8"/>
+    <p:sldId id="279" r:id="rId9"/>
+    <p:sldId id="278" r:id="rId10"/>
+    <p:sldId id="270" r:id="rId11"/>
+    <p:sldId id="277" r:id="rId12"/>
+    <p:sldId id="264" r:id="rId13"/>
+    <p:sldId id="262" r:id="rId14"/>
   </p:sldIdLst>
   <p:sldSz cx="12192000" cy="6858000"/>
   <p:notesSz cx="6858000" cy="9144000"/>
@@ -210,7 +209,7 @@
           <a:p>
             <a:fld id="{6413CF5F-F7FE-4C60-8BAA-96CD33FF18AC}" type="datetimeFigureOut">
               <a:rPr lang="zh-TW" altLang="en-US" smtClean="0"/>
-              <a:t>2024/12/30</a:t>
+              <a:t>2024/12/31</a:t>
             </a:fld>
             <a:endParaRPr lang="zh-TW" altLang="en-US"/>
           </a:p>
@@ -521,6 +520,355 @@
           <a:bodyPr/>
           <a:lstStyle/>
           <a:p>
+            <a:r>
+              <a:rPr lang="zh-TW" altLang="en-US" dirty="0"/>
+              <a:t>用到：</a:t>
+            </a:r>
+            <a:br>
+              <a:rPr lang="en-US" altLang="zh-TW" dirty="0"/>
+            </a:br>
+            <a:r>
+              <a:rPr lang="en-US" altLang="zh-TW" dirty="0"/>
+              <a:t>1.</a:t>
+            </a:r>
+            <a:r>
+              <a:rPr lang="zh-TW" altLang="en-US" dirty="0"/>
+              <a:t> </a:t>
+            </a:r>
+            <a:r>
+              <a:rPr lang="en-US" altLang="zh-TW" dirty="0" err="1"/>
+              <a:t>WaveInEvent</a:t>
+            </a:r>
+            <a:endParaRPr lang="en-US" altLang="zh-TW" dirty="0"/>
+          </a:p>
+          <a:p>
+            <a:r>
+              <a:rPr lang="en-US" altLang="zh-TW" dirty="0"/>
+              <a:t>2.</a:t>
+            </a:r>
+            <a:r>
+              <a:rPr lang="zh-TW" altLang="en-US" dirty="0"/>
+              <a:t> </a:t>
+            </a:r>
+            <a:r>
+              <a:rPr lang="en-US" altLang="zh-TW" dirty="0" err="1"/>
+              <a:t>WaveOutEvent</a:t>
+            </a:r>
+            <a:endParaRPr lang="en-US" altLang="zh-TW" dirty="0"/>
+          </a:p>
+          <a:p>
+            <a:r>
+              <a:rPr lang="en-US" altLang="zh-TW" dirty="0"/>
+              <a:t>3. </a:t>
+            </a:r>
+            <a:r>
+              <a:rPr lang="en-US" altLang="zh-TW" dirty="0" err="1"/>
+              <a:t>BufferedWaveProvider</a:t>
+            </a:r>
+            <a:endParaRPr lang="zh-TW" altLang="en-US" dirty="0"/>
+          </a:p>
+        </p:txBody>
+      </p:sp>
+      <p:sp>
+        <p:nvSpPr>
+          <p:cNvPr id="4" name="投影片編號版面配置區 3"/>
+          <p:cNvSpPr>
+            <a:spLocks noGrp="1"/>
+          </p:cNvSpPr>
+          <p:nvPr>
+            <p:ph type="sldNum" sz="quarter" idx="5"/>
+          </p:nvPr>
+        </p:nvSpPr>
+        <p:spPr/>
+        <p:txBody>
+          <a:bodyPr/>
+          <a:lstStyle/>
+          <a:p>
+            <a:fld id="{E285D06F-C5C6-4EC7-8C43-7BC9C8305506}" type="slidenum">
+              <a:rPr lang="zh-TW" altLang="en-US" smtClean="0"/>
+              <a:t>2</a:t>
+            </a:fld>
+            <a:endParaRPr lang="zh-TW" altLang="en-US"/>
+          </a:p>
+        </p:txBody>
+      </p:sp>
+    </p:spTree>
+    <p:extLst>
+      <p:ext uri="{BB962C8B-B14F-4D97-AF65-F5344CB8AC3E}">
+        <p14:creationId xmlns:p14="http://schemas.microsoft.com/office/powerpoint/2010/main" val="316656512"/>
+      </p:ext>
+    </p:extLst>
+  </p:cSld>
+  <p:clrMapOvr>
+    <a:masterClrMapping/>
+  </p:clrMapOvr>
+</p:notes>
+</file>
+
+<file path=ppt/notesSlides/notesSlide2.xml><?xml version="1.0" encoding="utf-8"?>
+<p:notes xmlns:a="http://schemas.openxmlformats.org/drawingml/2006/main" xmlns:r="http://schemas.openxmlformats.org/officeDocument/2006/relationships" xmlns:p="http://schemas.openxmlformats.org/presentationml/2006/main">
+  <p:cSld>
+    <p:spTree>
+      <p:nvGrpSpPr>
+        <p:cNvPr id="1" name=""/>
+        <p:cNvGrpSpPr/>
+        <p:nvPr/>
+      </p:nvGrpSpPr>
+      <p:grpSpPr>
+        <a:xfrm>
+          <a:off x="0" y="0"/>
+          <a:ext cx="0" cy="0"/>
+          <a:chOff x="0" y="0"/>
+          <a:chExt cx="0" cy="0"/>
+        </a:xfrm>
+      </p:grpSpPr>
+      <p:sp>
+        <p:nvSpPr>
+          <p:cNvPr id="2" name="投影片影像版面配置區 1"/>
+          <p:cNvSpPr>
+            <a:spLocks noGrp="1" noRot="1" noChangeAspect="1"/>
+          </p:cNvSpPr>
+          <p:nvPr>
+            <p:ph type="sldImg"/>
+          </p:nvPr>
+        </p:nvSpPr>
+        <p:spPr/>
+      </p:sp>
+      <p:sp>
+        <p:nvSpPr>
+          <p:cNvPr id="3" name="備忘稿版面配置區 2"/>
+          <p:cNvSpPr>
+            <a:spLocks noGrp="1"/>
+          </p:cNvSpPr>
+          <p:nvPr>
+            <p:ph type="body" idx="1"/>
+          </p:nvPr>
+        </p:nvSpPr>
+        <p:spPr/>
+        <p:txBody>
+          <a:bodyPr/>
+          <a:lstStyle/>
+          <a:p>
+            <a:r>
+              <a:rPr lang="en-US" altLang="zh-TW" dirty="0"/>
+              <a:t>p</a:t>
+            </a:r>
+            <a:r>
+              <a:rPr lang="zh-TW" altLang="en-US" dirty="0"/>
+              <a:t>公式為</a:t>
+            </a:r>
+            <a:r>
+              <a:rPr lang="en-US" altLang="zh-TW" dirty="0"/>
+              <a:t>MIDI</a:t>
+            </a:r>
+            <a:r>
+              <a:rPr lang="zh-TW" altLang="en-US" dirty="0"/>
+              <a:t>所提出的標準協定公式</a:t>
+            </a:r>
+            <a:endParaRPr lang="en-US" altLang="zh-TW" dirty="0"/>
+          </a:p>
+          <a:p>
+            <a:r>
+              <a:rPr lang="en-US" altLang="zh-TW" dirty="0"/>
+              <a:t>12</a:t>
+            </a:r>
+            <a:r>
+              <a:rPr lang="zh-TW" altLang="en-US" dirty="0"/>
+              <a:t>平均律的起源為人耳的分辨率和諧度</a:t>
+            </a:r>
+          </a:p>
+        </p:txBody>
+      </p:sp>
+      <p:sp>
+        <p:nvSpPr>
+          <p:cNvPr id="4" name="投影片編號版面配置區 3"/>
+          <p:cNvSpPr>
+            <a:spLocks noGrp="1"/>
+          </p:cNvSpPr>
+          <p:nvPr>
+            <p:ph type="sldNum" sz="quarter" idx="5"/>
+          </p:nvPr>
+        </p:nvSpPr>
+        <p:spPr/>
+        <p:txBody>
+          <a:bodyPr/>
+          <a:lstStyle/>
+          <a:p>
+            <a:fld id="{E285D06F-C5C6-4EC7-8C43-7BC9C8305506}" type="slidenum">
+              <a:rPr lang="zh-TW" altLang="en-US" smtClean="0"/>
+              <a:t>3</a:t>
+            </a:fld>
+            <a:endParaRPr lang="zh-TW" altLang="en-US"/>
+          </a:p>
+        </p:txBody>
+      </p:sp>
+    </p:spTree>
+    <p:extLst>
+      <p:ext uri="{BB962C8B-B14F-4D97-AF65-F5344CB8AC3E}">
+        <p14:creationId xmlns:p14="http://schemas.microsoft.com/office/powerpoint/2010/main" val="1997850165"/>
+      </p:ext>
+    </p:extLst>
+  </p:cSld>
+  <p:clrMapOvr>
+    <a:masterClrMapping/>
+  </p:clrMapOvr>
+</p:notes>
+</file>
+
+<file path=ppt/notesSlides/notesSlide3.xml><?xml version="1.0" encoding="utf-8"?>
+<p:notes xmlns:a="http://schemas.openxmlformats.org/drawingml/2006/main" xmlns:r="http://schemas.openxmlformats.org/officeDocument/2006/relationships" xmlns:p="http://schemas.openxmlformats.org/presentationml/2006/main">
+  <p:cSld>
+    <p:spTree>
+      <p:nvGrpSpPr>
+        <p:cNvPr id="1" name=""/>
+        <p:cNvGrpSpPr/>
+        <p:nvPr/>
+      </p:nvGrpSpPr>
+      <p:grpSpPr>
+        <a:xfrm>
+          <a:off x="0" y="0"/>
+          <a:ext cx="0" cy="0"/>
+          <a:chOff x="0" y="0"/>
+          <a:chExt cx="0" cy="0"/>
+        </a:xfrm>
+      </p:grpSpPr>
+      <p:sp>
+        <p:nvSpPr>
+          <p:cNvPr id="2" name="投影片影像版面配置區 1"/>
+          <p:cNvSpPr>
+            <a:spLocks noGrp="1" noRot="1" noChangeAspect="1"/>
+          </p:cNvSpPr>
+          <p:nvPr>
+            <p:ph type="sldImg"/>
+          </p:nvPr>
+        </p:nvSpPr>
+        <p:spPr/>
+      </p:sp>
+      <p:sp>
+        <p:nvSpPr>
+          <p:cNvPr id="3" name="備忘稿版面配置區 2"/>
+          <p:cNvSpPr>
+            <a:spLocks noGrp="1"/>
+          </p:cNvSpPr>
+          <p:nvPr>
+            <p:ph type="body" idx="1"/>
+          </p:nvPr>
+        </p:nvSpPr>
+        <p:spPr/>
+        <p:txBody>
+          <a:bodyPr/>
+          <a:lstStyle/>
+          <a:p>
+            <a:r>
+              <a:rPr lang="en-US" altLang="zh-TW" dirty="0"/>
+              <a:t>#</a:t>
+            </a:r>
+            <a:r>
+              <a:rPr lang="zh-TW" altLang="en-US" dirty="0"/>
+              <a:t>：</a:t>
+            </a:r>
+            <a:r>
+              <a:rPr lang="en-US" altLang="zh-TW" dirty="0"/>
+              <a:t>Sharpe</a:t>
+            </a:r>
+          </a:p>
+          <a:p>
+            <a:r>
+              <a:rPr lang="en-US" altLang="zh-TW" dirty="0"/>
+              <a:t>b</a:t>
+            </a:r>
+            <a:r>
+              <a:rPr lang="zh-TW" altLang="en-US" dirty="0"/>
+              <a:t>：</a:t>
+            </a:r>
+            <a:r>
+              <a:rPr lang="en-US" altLang="zh-TW" dirty="0"/>
+              <a:t>Flat</a:t>
+            </a:r>
+            <a:endParaRPr lang="zh-TW" altLang="en-US" dirty="0"/>
+          </a:p>
+        </p:txBody>
+      </p:sp>
+      <p:sp>
+        <p:nvSpPr>
+          <p:cNvPr id="4" name="投影片編號版面配置區 3"/>
+          <p:cNvSpPr>
+            <a:spLocks noGrp="1"/>
+          </p:cNvSpPr>
+          <p:nvPr>
+            <p:ph type="sldNum" sz="quarter" idx="5"/>
+          </p:nvPr>
+        </p:nvSpPr>
+        <p:spPr/>
+        <p:txBody>
+          <a:bodyPr/>
+          <a:lstStyle/>
+          <a:p>
+            <a:fld id="{E285D06F-C5C6-4EC7-8C43-7BC9C8305506}" type="slidenum">
+              <a:rPr lang="zh-TW" altLang="en-US" smtClean="0"/>
+              <a:t>4</a:t>
+            </a:fld>
+            <a:endParaRPr lang="zh-TW" altLang="en-US"/>
+          </a:p>
+        </p:txBody>
+      </p:sp>
+    </p:spTree>
+    <p:extLst>
+      <p:ext uri="{BB962C8B-B14F-4D97-AF65-F5344CB8AC3E}">
+        <p14:creationId xmlns:p14="http://schemas.microsoft.com/office/powerpoint/2010/main" val="1342549106"/>
+      </p:ext>
+    </p:extLst>
+  </p:cSld>
+  <p:clrMapOvr>
+    <a:masterClrMapping/>
+  </p:clrMapOvr>
+</p:notes>
+</file>
+
+<file path=ppt/notesSlides/notesSlide4.xml><?xml version="1.0" encoding="utf-8"?>
+<p:notes xmlns:a="http://schemas.openxmlformats.org/drawingml/2006/main" xmlns:r="http://schemas.openxmlformats.org/officeDocument/2006/relationships" xmlns:p="http://schemas.openxmlformats.org/presentationml/2006/main">
+  <p:cSld>
+    <p:spTree>
+      <p:nvGrpSpPr>
+        <p:cNvPr id="1" name=""/>
+        <p:cNvGrpSpPr/>
+        <p:nvPr/>
+      </p:nvGrpSpPr>
+      <p:grpSpPr>
+        <a:xfrm>
+          <a:off x="0" y="0"/>
+          <a:ext cx="0" cy="0"/>
+          <a:chOff x="0" y="0"/>
+          <a:chExt cx="0" cy="0"/>
+        </a:xfrm>
+      </p:grpSpPr>
+      <p:sp>
+        <p:nvSpPr>
+          <p:cNvPr id="2" name="投影片影像版面配置區 1"/>
+          <p:cNvSpPr>
+            <a:spLocks noGrp="1" noRot="1" noChangeAspect="1"/>
+          </p:cNvSpPr>
+          <p:nvPr>
+            <p:ph type="sldImg"/>
+          </p:nvPr>
+        </p:nvSpPr>
+        <p:spPr/>
+      </p:sp>
+      <p:sp>
+        <p:nvSpPr>
+          <p:cNvPr id="3" name="備忘稿版面配置區 2"/>
+          <p:cNvSpPr>
+            <a:spLocks noGrp="1"/>
+          </p:cNvSpPr>
+          <p:nvPr>
+            <p:ph type="body" idx="1"/>
+          </p:nvPr>
+        </p:nvSpPr>
+        <p:spPr/>
+        <p:txBody>
+          <a:bodyPr/>
+          <a:lstStyle/>
+          <a:p>
             <a:endParaRPr lang="zh-TW" altLang="en-US" dirty="0"/>
           </a:p>
         </p:txBody>
@@ -551,7 +899,458 @@
     </p:spTree>
     <p:extLst>
       <p:ext uri="{BB962C8B-B14F-4D97-AF65-F5344CB8AC3E}">
-        <p14:creationId xmlns:p14="http://schemas.microsoft.com/office/powerpoint/2010/main" val="1342549106"/>
+        <p14:creationId xmlns:p14="http://schemas.microsoft.com/office/powerpoint/2010/main" val="3482085598"/>
+      </p:ext>
+    </p:extLst>
+  </p:cSld>
+  <p:clrMapOvr>
+    <a:masterClrMapping/>
+  </p:clrMapOvr>
+</p:notes>
+</file>
+
+<file path=ppt/notesSlides/notesSlide5.xml><?xml version="1.0" encoding="utf-8"?>
+<p:notes xmlns:a="http://schemas.openxmlformats.org/drawingml/2006/main" xmlns:r="http://schemas.openxmlformats.org/officeDocument/2006/relationships" xmlns:p="http://schemas.openxmlformats.org/presentationml/2006/main">
+  <p:cSld>
+    <p:spTree>
+      <p:nvGrpSpPr>
+        <p:cNvPr id="1" name=""/>
+        <p:cNvGrpSpPr/>
+        <p:nvPr/>
+      </p:nvGrpSpPr>
+      <p:grpSpPr>
+        <a:xfrm>
+          <a:off x="0" y="0"/>
+          <a:ext cx="0" cy="0"/>
+          <a:chOff x="0" y="0"/>
+          <a:chExt cx="0" cy="0"/>
+        </a:xfrm>
+      </p:grpSpPr>
+      <p:sp>
+        <p:nvSpPr>
+          <p:cNvPr id="2" name="投影片影像版面配置區 1"/>
+          <p:cNvSpPr>
+            <a:spLocks noGrp="1" noRot="1" noChangeAspect="1"/>
+          </p:cNvSpPr>
+          <p:nvPr>
+            <p:ph type="sldImg"/>
+          </p:nvPr>
+        </p:nvSpPr>
+        <p:spPr/>
+      </p:sp>
+      <p:sp>
+        <p:nvSpPr>
+          <p:cNvPr id="3" name="備忘稿版面配置區 2"/>
+          <p:cNvSpPr>
+            <a:spLocks noGrp="1"/>
+          </p:cNvSpPr>
+          <p:nvPr>
+            <p:ph type="body" idx="1"/>
+          </p:nvPr>
+        </p:nvSpPr>
+        <p:spPr/>
+        <p:txBody>
+          <a:bodyPr/>
+          <a:lstStyle/>
+          <a:p>
+            <a:r>
+              <a:rPr lang="zh-TW" altLang="en-US" dirty="0"/>
+              <a:t>處理邏輯</a:t>
+            </a:r>
+            <a:r>
+              <a:rPr lang="en-US" altLang="zh-TW" dirty="0"/>
+              <a:t>(</a:t>
+            </a:r>
+            <a:r>
+              <a:rPr lang="zh-TW" altLang="en-US" dirty="0"/>
+              <a:t>左</a:t>
+            </a:r>
+            <a:r>
+              <a:rPr lang="en-US" altLang="zh-TW" dirty="0"/>
+              <a:t>)</a:t>
+            </a:r>
+            <a:r>
+              <a:rPr lang="zh-TW" altLang="en-US" dirty="0"/>
+              <a:t>：</a:t>
+            </a:r>
+            <a:endParaRPr lang="en-US" altLang="zh-TW" dirty="0"/>
+          </a:p>
+          <a:p>
+            <a:r>
+              <a:rPr lang="zh-TW" altLang="en-US" dirty="0"/>
+              <a:t>將</a:t>
+            </a:r>
+            <a:r>
+              <a:rPr lang="en-US" altLang="zh-TW" dirty="0" err="1"/>
+              <a:t>WaveInEvent</a:t>
+            </a:r>
+            <a:r>
+              <a:rPr lang="zh-TW" altLang="en-US" dirty="0"/>
+              <a:t>測量到的</a:t>
+            </a:r>
+            <a:r>
+              <a:rPr lang="en-US" altLang="zh-TW" dirty="0"/>
+              <a:t>Frequency</a:t>
+            </a:r>
+            <a:r>
+              <a:rPr lang="zh-TW" altLang="en-US" dirty="0"/>
+              <a:t>傳給這個方法</a:t>
+            </a:r>
+            <a:br>
+              <a:rPr lang="en-US" altLang="zh-TW" dirty="0"/>
+            </a:br>
+            <a:r>
+              <a:rPr lang="zh-TW" altLang="en-US" dirty="0"/>
+              <a:t>這個方法會先</a:t>
+            </a:r>
+            <a:r>
+              <a:rPr lang="en-US" altLang="zh-TW" dirty="0"/>
+              <a:t>Foreach</a:t>
+            </a:r>
+            <a:r>
+              <a:rPr lang="zh-TW" altLang="en-US" dirty="0"/>
+              <a:t>整個基頻定義</a:t>
+            </a:r>
+            <a:endParaRPr lang="en-US" altLang="zh-TW" dirty="0"/>
+          </a:p>
+          <a:p>
+            <a:pPr>
+              <a:buFont typeface="Arial" panose="020B0604020202020204" pitchFamily="34" charset="0"/>
+              <a:buChar char="•"/>
+            </a:pPr>
+            <a:r>
+              <a:rPr lang="zh-TW" altLang="en-US" dirty="0"/>
+              <a:t>然後在把</a:t>
+            </a:r>
+            <a:r>
+              <a:rPr lang="en-US" altLang="zh-TW" dirty="0"/>
+              <a:t>Frequency</a:t>
+            </a:r>
+            <a:r>
+              <a:rPr lang="zh-TW" altLang="en-US" dirty="0"/>
+              <a:t>跟基頻</a:t>
+            </a:r>
+            <a:r>
+              <a:rPr lang="en-US" altLang="zh-TW" dirty="0"/>
+              <a:t>(</a:t>
+            </a:r>
+            <a:r>
+              <a:rPr lang="zh-TW" altLang="en-US" dirty="0"/>
+              <a:t>例如 </a:t>
+            </a:r>
+            <a:r>
+              <a:rPr lang="en-US" altLang="zh-TW" dirty="0"/>
+              <a:t>C0)</a:t>
+            </a:r>
+            <a:r>
+              <a:rPr lang="zh-TW" altLang="en-US" dirty="0"/>
+              <a:t>做音程差計算</a:t>
+            </a:r>
+            <a:br>
+              <a:rPr lang="en-US" altLang="zh-TW" dirty="0"/>
+            </a:br>
+            <a:r>
+              <a:rPr lang="zh-TW" altLang="en-US" dirty="0"/>
+              <a:t>找基頻定義的第一個 </a:t>
+            </a:r>
+            <a:r>
+              <a:rPr lang="en-US" altLang="zh-TW" dirty="0"/>
+              <a:t>key &amp; value pair  </a:t>
+            </a:r>
+            <a:r>
+              <a:rPr lang="zh-TW" altLang="en-US" dirty="0"/>
+              <a:t>如果音程差</a:t>
+            </a:r>
+            <a:r>
+              <a:rPr lang="en-US" altLang="zh-TW" dirty="0"/>
+              <a:t>&gt;50</a:t>
+            </a:r>
+            <a:r>
+              <a:rPr lang="zh-TW" altLang="en-US" dirty="0"/>
+              <a:t>或</a:t>
+            </a:r>
+            <a:r>
+              <a:rPr lang="en-US" altLang="zh-TW" dirty="0"/>
+              <a:t>&lt;-50</a:t>
+            </a:r>
+            <a:r>
+              <a:rPr lang="zh-TW" altLang="en-US" dirty="0"/>
+              <a:t>就將基頻翻倍跟下一個八度的音</a:t>
+            </a:r>
+            <a:r>
+              <a:rPr lang="en-US" altLang="zh-TW" dirty="0"/>
+              <a:t>(</a:t>
+            </a:r>
+            <a:r>
+              <a:rPr lang="zh-TW" altLang="en-US" dirty="0"/>
+              <a:t>例如 </a:t>
+            </a:r>
+            <a:r>
+              <a:rPr lang="en-US" altLang="zh-TW" dirty="0"/>
+              <a:t>C1)</a:t>
+            </a:r>
+            <a:r>
+              <a:rPr lang="zh-TW" altLang="en-US" dirty="0"/>
+              <a:t>做計算</a:t>
+            </a:r>
+            <a:br>
+              <a:rPr lang="en-US" altLang="zh-TW" dirty="0"/>
+            </a:br>
+            <a:r>
+              <a:rPr lang="zh-TW" altLang="en-US" dirty="0"/>
+              <a:t>直到找到音程差介於</a:t>
+            </a:r>
+            <a:r>
+              <a:rPr lang="en-US" altLang="zh-TW" dirty="0"/>
+              <a:t>-50~50</a:t>
+            </a:r>
+            <a:r>
+              <a:rPr lang="zh-TW" altLang="en-US" dirty="0"/>
+              <a:t>之間，即為找到該頻率</a:t>
+            </a:r>
+            <a:br>
+              <a:rPr lang="en-US" altLang="zh-TW" dirty="0"/>
+            </a:br>
+            <a:r>
+              <a:rPr lang="zh-TW" altLang="en-US" dirty="0"/>
+              <a:t>注意：先對比所有八度的同一音名，才會對比下一個音名</a:t>
+            </a:r>
+            <a:br>
+              <a:rPr lang="en-US" altLang="zh-TW" dirty="0"/>
+            </a:br>
+            <a:r>
+              <a:rPr lang="en-US" altLang="zh-TW" dirty="0"/>
+              <a:t>chat</a:t>
+            </a:r>
+            <a:r>
+              <a:rPr lang="zh-TW" altLang="en-US" dirty="0"/>
+              <a:t> </a:t>
+            </a:r>
+            <a:r>
+              <a:rPr lang="en-US" altLang="zh-TW" dirty="0" err="1"/>
+              <a:t>gpt</a:t>
+            </a:r>
+            <a:r>
+              <a:rPr lang="zh-TW" altLang="en-US" dirty="0"/>
+              <a:t> 給的</a:t>
+            </a:r>
+            <a:r>
+              <a:rPr lang="en-US" altLang="zh-TW" dirty="0"/>
+              <a:t>(</a:t>
+            </a:r>
+            <a:r>
+              <a:rPr lang="zh-TW" altLang="en-US" dirty="0"/>
+              <a:t>右</a:t>
+            </a:r>
+            <a:r>
+              <a:rPr lang="en-US" altLang="zh-TW" dirty="0"/>
+              <a:t>)</a:t>
+            </a:r>
+            <a:r>
+              <a:rPr lang="zh-TW" altLang="en-US" dirty="0"/>
+              <a:t>則相反</a:t>
+            </a:r>
+            <a:br>
+              <a:rPr lang="en-US" altLang="zh-TW" dirty="0"/>
+            </a:br>
+            <a:br>
+              <a:rPr lang="en-US" altLang="zh-TW" dirty="0"/>
+            </a:br>
+            <a:r>
+              <a:rPr lang="zh-TW" altLang="en-US" dirty="0"/>
+              <a:t>如果目標音頻較低：</a:t>
+            </a:r>
+            <a:br>
+              <a:rPr lang="en-US" altLang="zh-TW" dirty="0"/>
+            </a:br>
+            <a:r>
+              <a:rPr lang="zh-TW" altLang="en-US" b="1" dirty="0"/>
+              <a:t>方法 </a:t>
+            </a:r>
+            <a:r>
+              <a:rPr lang="en-US" altLang="zh-TW" b="1" dirty="0"/>
+              <a:t>1</a:t>
+            </a:r>
+            <a:r>
+              <a:rPr lang="zh-TW" altLang="en-US" dirty="0"/>
+              <a:t>（先找八度）更快，因為它能快速退出外層八度循環。</a:t>
+            </a:r>
+          </a:p>
+          <a:p>
+            <a:pPr>
+              <a:buFont typeface="Arial" panose="020B0604020202020204" pitchFamily="34" charset="0"/>
+              <a:buNone/>
+            </a:pPr>
+            <a:r>
+              <a:rPr lang="zh-TW" altLang="en-US" b="1" dirty="0"/>
+              <a:t>方法 </a:t>
+            </a:r>
+            <a:r>
+              <a:rPr lang="en-US" altLang="zh-TW" b="1" dirty="0"/>
+              <a:t>2</a:t>
+            </a:r>
+            <a:r>
+              <a:rPr lang="zh-TW" altLang="en-US" dirty="0"/>
+              <a:t>（先找音）會先遍歷完整個音名集合，可能多做一些不必要的計算。</a:t>
+            </a:r>
+          </a:p>
+          <a:p>
+            <a:pPr>
+              <a:buFont typeface="Arial" panose="020B0604020202020204" pitchFamily="34" charset="0"/>
+              <a:buNone/>
+            </a:pPr>
+            <a:r>
+              <a:rPr lang="zh-TW" altLang="en-US" dirty="0"/>
+              <a:t>如果目標音頻較高：</a:t>
+            </a:r>
+            <a:br>
+              <a:rPr lang="en-US" altLang="zh-TW" dirty="0"/>
+            </a:br>
+            <a:r>
+              <a:rPr lang="zh-TW" altLang="en-US" b="1" dirty="0"/>
+              <a:t>方法 </a:t>
+            </a:r>
+            <a:r>
+              <a:rPr lang="en-US" altLang="zh-TW" b="1" dirty="0"/>
+              <a:t>2</a:t>
+            </a:r>
+            <a:r>
+              <a:rPr lang="zh-TW" altLang="en-US" dirty="0"/>
+              <a:t> 可能稍快，因為它能快速遍歷較高音頻的八度集合。</a:t>
+            </a:r>
+          </a:p>
+          <a:p>
+            <a:endParaRPr lang="zh-TW" altLang="en-US" dirty="0"/>
+          </a:p>
+        </p:txBody>
+      </p:sp>
+      <p:sp>
+        <p:nvSpPr>
+          <p:cNvPr id="4" name="投影片編號版面配置區 3"/>
+          <p:cNvSpPr>
+            <a:spLocks noGrp="1"/>
+          </p:cNvSpPr>
+          <p:nvPr>
+            <p:ph type="sldNum" sz="quarter" idx="5"/>
+          </p:nvPr>
+        </p:nvSpPr>
+        <p:spPr/>
+        <p:txBody>
+          <a:bodyPr/>
+          <a:lstStyle/>
+          <a:p>
+            <a:fld id="{E285D06F-C5C6-4EC7-8C43-7BC9C8305506}" type="slidenum">
+              <a:rPr lang="zh-TW" altLang="en-US" smtClean="0"/>
+              <a:t>7</a:t>
+            </a:fld>
+            <a:endParaRPr lang="zh-TW" altLang="en-US"/>
+          </a:p>
+        </p:txBody>
+      </p:sp>
+    </p:spTree>
+    <p:extLst>
+      <p:ext uri="{BB962C8B-B14F-4D97-AF65-F5344CB8AC3E}">
+        <p14:creationId xmlns:p14="http://schemas.microsoft.com/office/powerpoint/2010/main" val="545592512"/>
+      </p:ext>
+    </p:extLst>
+  </p:cSld>
+  <p:clrMapOvr>
+    <a:masterClrMapping/>
+  </p:clrMapOvr>
+</p:notes>
+</file>
+
+<file path=ppt/notesSlides/notesSlide6.xml><?xml version="1.0" encoding="utf-8"?>
+<p:notes xmlns:a="http://schemas.openxmlformats.org/drawingml/2006/main" xmlns:r="http://schemas.openxmlformats.org/officeDocument/2006/relationships" xmlns:p="http://schemas.openxmlformats.org/presentationml/2006/main">
+  <p:cSld>
+    <p:spTree>
+      <p:nvGrpSpPr>
+        <p:cNvPr id="1" name=""/>
+        <p:cNvGrpSpPr/>
+        <p:nvPr/>
+      </p:nvGrpSpPr>
+      <p:grpSpPr>
+        <a:xfrm>
+          <a:off x="0" y="0"/>
+          <a:ext cx="0" cy="0"/>
+          <a:chOff x="0" y="0"/>
+          <a:chExt cx="0" cy="0"/>
+        </a:xfrm>
+      </p:grpSpPr>
+      <p:sp>
+        <p:nvSpPr>
+          <p:cNvPr id="2" name="投影片影像版面配置區 1"/>
+          <p:cNvSpPr>
+            <a:spLocks noGrp="1" noRot="1" noChangeAspect="1"/>
+          </p:cNvSpPr>
+          <p:nvPr>
+            <p:ph type="sldImg"/>
+          </p:nvPr>
+        </p:nvSpPr>
+        <p:spPr/>
+      </p:sp>
+      <p:sp>
+        <p:nvSpPr>
+          <p:cNvPr id="3" name="備忘稿版面配置區 2"/>
+          <p:cNvSpPr>
+            <a:spLocks noGrp="1"/>
+          </p:cNvSpPr>
+          <p:nvPr>
+            <p:ph type="body" idx="1"/>
+          </p:nvPr>
+        </p:nvSpPr>
+        <p:spPr/>
+        <p:txBody>
+          <a:bodyPr/>
+          <a:lstStyle/>
+          <a:p>
+            <a:r>
+              <a:rPr lang="zh-TW" altLang="en-US" dirty="0"/>
+              <a:t>音分範圍：</a:t>
+            </a:r>
+            <a:r>
+              <a:rPr lang="en-US" altLang="zh-TW" dirty="0"/>
+              <a:t>50</a:t>
+            </a:r>
+            <a:r>
+              <a:rPr lang="zh-TW" altLang="en-US" dirty="0"/>
+              <a:t> </a:t>
+            </a:r>
+            <a:r>
+              <a:rPr lang="en-US" altLang="zh-TW" dirty="0"/>
+              <a:t>cents</a:t>
+            </a:r>
+            <a:endParaRPr lang="zh-TW" altLang="en-US" dirty="0"/>
+          </a:p>
+        </p:txBody>
+      </p:sp>
+      <p:sp>
+        <p:nvSpPr>
+          <p:cNvPr id="4" name="投影片編號版面配置區 3"/>
+          <p:cNvSpPr>
+            <a:spLocks noGrp="1"/>
+          </p:cNvSpPr>
+          <p:nvPr>
+            <p:ph type="sldNum" sz="quarter" idx="5"/>
+          </p:nvPr>
+        </p:nvSpPr>
+        <p:spPr/>
+        <p:txBody>
+          <a:bodyPr/>
+          <a:lstStyle/>
+          <a:p>
+            <a:fld id="{E285D06F-C5C6-4EC7-8C43-7BC9C8305506}" type="slidenum">
+              <a:rPr lang="zh-TW" altLang="en-US" smtClean="0"/>
+              <a:t>12</a:t>
+            </a:fld>
+            <a:endParaRPr lang="zh-TW" altLang="en-US"/>
+          </a:p>
+        </p:txBody>
+      </p:sp>
+    </p:spTree>
+    <p:extLst>
+      <p:ext uri="{BB962C8B-B14F-4D97-AF65-F5344CB8AC3E}">
+        <p14:creationId xmlns:p14="http://schemas.microsoft.com/office/powerpoint/2010/main" val="1978316518"/>
       </p:ext>
     </p:extLst>
   </p:cSld>
@@ -708,7 +1507,7 @@
           <a:p>
             <a:fld id="{31822A52-CB54-4445-AC34-F501DA2D4712}" type="datetimeFigureOut">
               <a:rPr lang="zh-TW" altLang="en-US" smtClean="0"/>
-              <a:t>2024/12/30</a:t>
+              <a:t>2024/12/31</a:t>
             </a:fld>
             <a:endParaRPr lang="zh-TW" altLang="en-US"/>
           </a:p>
@@ -906,7 +1705,7 @@
           <a:p>
             <a:fld id="{31822A52-CB54-4445-AC34-F501DA2D4712}" type="datetimeFigureOut">
               <a:rPr lang="zh-TW" altLang="en-US" smtClean="0"/>
-              <a:t>2024/12/30</a:t>
+              <a:t>2024/12/31</a:t>
             </a:fld>
             <a:endParaRPr lang="zh-TW" altLang="en-US"/>
           </a:p>
@@ -1114,7 +1913,7 @@
           <a:p>
             <a:fld id="{31822A52-CB54-4445-AC34-F501DA2D4712}" type="datetimeFigureOut">
               <a:rPr lang="zh-TW" altLang="en-US" smtClean="0"/>
-              <a:t>2024/12/30</a:t>
+              <a:t>2024/12/31</a:t>
             </a:fld>
             <a:endParaRPr lang="zh-TW" altLang="en-US"/>
           </a:p>
@@ -1312,7 +2111,7 @@
           <a:p>
             <a:fld id="{31822A52-CB54-4445-AC34-F501DA2D4712}" type="datetimeFigureOut">
               <a:rPr lang="zh-TW" altLang="en-US" smtClean="0"/>
-              <a:t>2024/12/30</a:t>
+              <a:t>2024/12/31</a:t>
             </a:fld>
             <a:endParaRPr lang="zh-TW" altLang="en-US"/>
           </a:p>
@@ -1587,7 +2386,7 @@
           <a:p>
             <a:fld id="{31822A52-CB54-4445-AC34-F501DA2D4712}" type="datetimeFigureOut">
               <a:rPr lang="zh-TW" altLang="en-US" smtClean="0"/>
-              <a:t>2024/12/30</a:t>
+              <a:t>2024/12/31</a:t>
             </a:fld>
             <a:endParaRPr lang="zh-TW" altLang="en-US"/>
           </a:p>
@@ -1852,7 +2651,7 @@
           <a:p>
             <a:fld id="{31822A52-CB54-4445-AC34-F501DA2D4712}" type="datetimeFigureOut">
               <a:rPr lang="zh-TW" altLang="en-US" smtClean="0"/>
-              <a:t>2024/12/30</a:t>
+              <a:t>2024/12/31</a:t>
             </a:fld>
             <a:endParaRPr lang="zh-TW" altLang="en-US"/>
           </a:p>
@@ -2264,7 +3063,7 @@
           <a:p>
             <a:fld id="{31822A52-CB54-4445-AC34-F501DA2D4712}" type="datetimeFigureOut">
               <a:rPr lang="zh-TW" altLang="en-US" smtClean="0"/>
-              <a:t>2024/12/30</a:t>
+              <a:t>2024/12/31</a:t>
             </a:fld>
             <a:endParaRPr lang="zh-TW" altLang="en-US"/>
           </a:p>
@@ -2405,7 +3204,7 @@
           <a:p>
             <a:fld id="{31822A52-CB54-4445-AC34-F501DA2D4712}" type="datetimeFigureOut">
               <a:rPr lang="zh-TW" altLang="en-US" smtClean="0"/>
-              <a:t>2024/12/30</a:t>
+              <a:t>2024/12/31</a:t>
             </a:fld>
             <a:endParaRPr lang="zh-TW" altLang="en-US"/>
           </a:p>
@@ -2518,7 +3317,7 @@
           <a:p>
             <a:fld id="{31822A52-CB54-4445-AC34-F501DA2D4712}" type="datetimeFigureOut">
               <a:rPr lang="zh-TW" altLang="en-US" smtClean="0"/>
-              <a:t>2024/12/30</a:t>
+              <a:t>2024/12/31</a:t>
             </a:fld>
             <a:endParaRPr lang="zh-TW" altLang="en-US"/>
           </a:p>
@@ -2829,7 +3628,7 @@
           <a:p>
             <a:fld id="{31822A52-CB54-4445-AC34-F501DA2D4712}" type="datetimeFigureOut">
               <a:rPr lang="zh-TW" altLang="en-US" smtClean="0"/>
-              <a:t>2024/12/30</a:t>
+              <a:t>2024/12/31</a:t>
             </a:fld>
             <a:endParaRPr lang="zh-TW" altLang="en-US"/>
           </a:p>
@@ -3117,7 +3916,7 @@
           <a:p>
             <a:fld id="{31822A52-CB54-4445-AC34-F501DA2D4712}" type="datetimeFigureOut">
               <a:rPr lang="zh-TW" altLang="en-US" smtClean="0"/>
-              <a:t>2024/12/30</a:t>
+              <a:t>2024/12/31</a:t>
             </a:fld>
             <a:endParaRPr lang="zh-TW" altLang="en-US"/>
           </a:p>
@@ -3358,7 +4157,7 @@
           <a:p>
             <a:fld id="{31822A52-CB54-4445-AC34-F501DA2D4712}" type="datetimeFigureOut">
               <a:rPr lang="zh-TW" altLang="en-US" smtClean="0"/>
-              <a:t>2024/12/30</a:t>
+              <a:t>2024/12/31</a:t>
             </a:fld>
             <a:endParaRPr lang="zh-TW" altLang="en-US"/>
           </a:p>
@@ -3930,133 +4729,6 @@
           <p:cNvPr id="2" name="標題 1">
             <a:extLst>
               <a:ext uri="{FF2B5EF4-FFF2-40B4-BE49-F238E27FC236}">
-                <a16:creationId xmlns:a16="http://schemas.microsoft.com/office/drawing/2014/main" id="{46B971A0-5E52-49A4-B85B-368FCBB134C0}"/>
-              </a:ext>
-            </a:extLst>
-          </p:cNvPr>
-          <p:cNvSpPr>
-            <a:spLocks noGrp="1"/>
-          </p:cNvSpPr>
-          <p:nvPr>
-            <p:ph type="title"/>
-          </p:nvPr>
-        </p:nvSpPr>
-        <p:spPr/>
-        <p:txBody>
-          <a:bodyPr/>
-          <a:lstStyle/>
-          <a:p>
-            <a:endParaRPr lang="zh-TW" altLang="en-US"/>
-          </a:p>
-        </p:txBody>
-      </p:sp>
-      <p:sp>
-        <p:nvSpPr>
-          <p:cNvPr id="3" name="內容版面配置區 2">
-            <a:extLst>
-              <a:ext uri="{FF2B5EF4-FFF2-40B4-BE49-F238E27FC236}">
-                <a16:creationId xmlns:a16="http://schemas.microsoft.com/office/drawing/2014/main" id="{AC8DB95D-0DD2-4A07-B991-9E70095B1A81}"/>
-              </a:ext>
-            </a:extLst>
-          </p:cNvPr>
-          <p:cNvSpPr>
-            <a:spLocks noGrp="1"/>
-          </p:cNvSpPr>
-          <p:nvPr>
-            <p:ph idx="1"/>
-          </p:nvPr>
-        </p:nvSpPr>
-        <p:spPr/>
-        <p:txBody>
-          <a:bodyPr/>
-          <a:lstStyle/>
-          <a:p>
-            <a:endParaRPr lang="zh-TW" altLang="en-US"/>
-          </a:p>
-        </p:txBody>
-      </p:sp>
-      <p:pic>
-        <p:nvPicPr>
-          <p:cNvPr id="1026" name="Picture 2">
-            <a:extLst>
-              <a:ext uri="{FF2B5EF4-FFF2-40B4-BE49-F238E27FC236}">
-                <a16:creationId xmlns:a16="http://schemas.microsoft.com/office/drawing/2014/main" id="{D163C3E4-9B7C-4DF6-872C-BBAB83D66D55}"/>
-              </a:ext>
-            </a:extLst>
-          </p:cNvPr>
-          <p:cNvPicPr>
-            <a:picLocks noChangeAspect="1" noChangeArrowheads="1"/>
-          </p:cNvPicPr>
-          <p:nvPr/>
-        </p:nvPicPr>
-        <p:blipFill>
-          <a:blip r:embed="rId2">
-            <a:extLst>
-              <a:ext uri="{28A0092B-C50C-407E-A947-70E740481C1C}">
-                <a14:useLocalDpi xmlns:a14="http://schemas.microsoft.com/office/drawing/2010/main" val="0"/>
-              </a:ext>
-            </a:extLst>
-          </a:blip>
-          <a:srcRect/>
-          <a:stretch>
-            <a:fillRect/>
-          </a:stretch>
-        </p:blipFill>
-        <p:spPr bwMode="auto">
-          <a:xfrm>
-            <a:off x="0" y="168275"/>
-            <a:ext cx="12192000" cy="6521450"/>
-          </a:xfrm>
-          <a:prstGeom prst="rect">
-            <a:avLst/>
-          </a:prstGeom>
-          <a:noFill/>
-          <a:extLst>
-            <a:ext uri="{909E8E84-426E-40DD-AFC4-6F175D3DCCD1}">
-              <a14:hiddenFill xmlns:a14="http://schemas.microsoft.com/office/drawing/2010/main">
-                <a:solidFill>
-                  <a:srgbClr val="FFFFFF"/>
-                </a:solidFill>
-              </a14:hiddenFill>
-            </a:ext>
-          </a:extLst>
-        </p:spPr>
-      </p:pic>
-    </p:spTree>
-    <p:extLst>
-      <p:ext uri="{BB962C8B-B14F-4D97-AF65-F5344CB8AC3E}">
-        <p14:creationId xmlns:p14="http://schemas.microsoft.com/office/powerpoint/2010/main" val="115006346"/>
-      </p:ext>
-    </p:extLst>
-  </p:cSld>
-  <p:clrMapOvr>
-    <a:masterClrMapping/>
-  </p:clrMapOvr>
-</p:sld>
-</file>
-
-<file path=ppt/slides/slide11.xml><?xml version="1.0" encoding="utf-8"?>
-<p:sld xmlns:a="http://schemas.openxmlformats.org/drawingml/2006/main" xmlns:r="http://schemas.openxmlformats.org/officeDocument/2006/relationships" xmlns:p="http://schemas.openxmlformats.org/presentationml/2006/main">
-  <p:cSld>
-    <p:spTree>
-      <p:nvGrpSpPr>
-        <p:cNvPr id="1" name=""/>
-        <p:cNvGrpSpPr/>
-        <p:nvPr/>
-      </p:nvGrpSpPr>
-      <p:grpSpPr>
-        <a:xfrm>
-          <a:off x="0" y="0"/>
-          <a:ext cx="0" cy="0"/>
-          <a:chOff x="0" y="0"/>
-          <a:chExt cx="0" cy="0"/>
-        </a:xfrm>
-      </p:grpSpPr>
-      <p:sp>
-        <p:nvSpPr>
-          <p:cNvPr id="2" name="標題 1">
-            <a:extLst>
-              <a:ext uri="{FF2B5EF4-FFF2-40B4-BE49-F238E27FC236}">
                 <a16:creationId xmlns:a16="http://schemas.microsoft.com/office/drawing/2014/main" id="{4DD70468-AC48-4450-8B5D-392E2876A209}"/>
               </a:ext>
             </a:extLst>
@@ -4162,7 +4834,7 @@
 </p:sld>
 </file>
 
-<file path=ppt/slides/slide12.xml><?xml version="1.0" encoding="utf-8"?>
+<file path=ppt/slides/slide11.xml><?xml version="1.0" encoding="utf-8"?>
 <p:sld xmlns:a="http://schemas.openxmlformats.org/drawingml/2006/main" xmlns:r="http://schemas.openxmlformats.org/officeDocument/2006/relationships" xmlns:p="http://schemas.openxmlformats.org/presentationml/2006/main">
   <p:cSld>
     <p:spTree>
@@ -4225,16 +4897,16 @@
           <a:bodyPr/>
           <a:lstStyle/>
           <a:p>
-            <a:endParaRPr lang="zh-TW" altLang="en-US"/>
+            <a:endParaRPr lang="zh-TW" altLang="en-US" dirty="0"/>
           </a:p>
         </p:txBody>
       </p:sp>
       <p:pic>
         <p:nvPicPr>
-          <p:cNvPr id="7" name="圖片 6">
-            <a:extLst>
-              <a:ext uri="{FF2B5EF4-FFF2-40B4-BE49-F238E27FC236}">
-                <a16:creationId xmlns:a16="http://schemas.microsoft.com/office/drawing/2014/main" id="{823B3453-B4C9-48F6-986D-E51181D8B4A8}"/>
+          <p:cNvPr id="8" name="圖片 7">
+            <a:extLst>
+              <a:ext uri="{FF2B5EF4-FFF2-40B4-BE49-F238E27FC236}">
+                <a16:creationId xmlns:a16="http://schemas.microsoft.com/office/drawing/2014/main" id="{F1B410B8-6FEF-47EF-BD52-A35DFD3F835B}"/>
               </a:ext>
             </a:extLst>
           </p:cNvPr>
@@ -4251,8 +4923,97 @@
         </p:blipFill>
         <p:spPr>
           <a:xfrm>
-            <a:off x="1095935" y="257401"/>
-            <a:ext cx="10000129" cy="6343198"/>
+            <a:off x="6218076" y="2353797"/>
+            <a:ext cx="5379874" cy="2455722"/>
+          </a:xfrm>
+          <a:prstGeom prst="rect">
+            <a:avLst/>
+          </a:prstGeom>
+        </p:spPr>
+      </p:pic>
+      <p:pic>
+        <p:nvPicPr>
+          <p:cNvPr id="10" name="圖片 9">
+            <a:extLst>
+              <a:ext uri="{FF2B5EF4-FFF2-40B4-BE49-F238E27FC236}">
+                <a16:creationId xmlns:a16="http://schemas.microsoft.com/office/drawing/2014/main" id="{9E01122A-E924-4D43-B69E-8637B1D79746}"/>
+              </a:ext>
+            </a:extLst>
+          </p:cNvPr>
+          <p:cNvPicPr>
+            <a:picLocks noChangeAspect="1"/>
+          </p:cNvPicPr>
+          <p:nvPr/>
+        </p:nvPicPr>
+        <p:blipFill>
+          <a:blip r:embed="rId3"/>
+          <a:stretch>
+            <a:fillRect/>
+          </a:stretch>
+        </p:blipFill>
+        <p:spPr>
+          <a:xfrm>
+            <a:off x="6218076" y="570333"/>
+            <a:ext cx="5379874" cy="1542396"/>
+          </a:xfrm>
+          <a:prstGeom prst="rect">
+            <a:avLst/>
+          </a:prstGeom>
+        </p:spPr>
+      </p:pic>
+      <p:pic>
+        <p:nvPicPr>
+          <p:cNvPr id="12" name="圖片 11">
+            <a:extLst>
+              <a:ext uri="{FF2B5EF4-FFF2-40B4-BE49-F238E27FC236}">
+                <a16:creationId xmlns:a16="http://schemas.microsoft.com/office/drawing/2014/main" id="{758FBB89-4181-4E04-96F1-61ED03C39BDA}"/>
+              </a:ext>
+            </a:extLst>
+          </p:cNvPr>
+          <p:cNvPicPr>
+            <a:picLocks noChangeAspect="1"/>
+          </p:cNvPicPr>
+          <p:nvPr/>
+        </p:nvPicPr>
+        <p:blipFill>
+          <a:blip r:embed="rId4"/>
+          <a:stretch>
+            <a:fillRect/>
+          </a:stretch>
+        </p:blipFill>
+        <p:spPr>
+          <a:xfrm>
+            <a:off x="322729" y="1341531"/>
+            <a:ext cx="5726982" cy="3630958"/>
+          </a:xfrm>
+          <a:prstGeom prst="rect">
+            <a:avLst/>
+          </a:prstGeom>
+        </p:spPr>
+      </p:pic>
+      <p:pic>
+        <p:nvPicPr>
+          <p:cNvPr id="14" name="圖片 13">
+            <a:extLst>
+              <a:ext uri="{FF2B5EF4-FFF2-40B4-BE49-F238E27FC236}">
+                <a16:creationId xmlns:a16="http://schemas.microsoft.com/office/drawing/2014/main" id="{AFC2DC58-B2FE-46BE-838F-28A43E645454}"/>
+              </a:ext>
+            </a:extLst>
+          </p:cNvPr>
+          <p:cNvPicPr>
+            <a:picLocks noChangeAspect="1"/>
+          </p:cNvPicPr>
+          <p:nvPr/>
+        </p:nvPicPr>
+        <p:blipFill rotWithShape="1">
+          <a:blip r:embed="rId5"/>
+          <a:srcRect l="6274" t="26794" r="1241" b="8214"/>
+          <a:stretch/>
+        </p:blipFill>
+        <p:spPr>
+          <a:xfrm>
+            <a:off x="6218076" y="5125547"/>
+            <a:ext cx="5651195" cy="699528"/>
           </a:xfrm>
           <a:prstGeom prst="rect">
             <a:avLst/>
@@ -4272,7 +5033,7 @@
 </p:sld>
 </file>
 
-<file path=ppt/slides/slide13.xml><?xml version="1.0" encoding="utf-8"?>
+<file path=ppt/slides/slide12.xml><?xml version="1.0" encoding="utf-8"?>
 <p:sld xmlns:a="http://schemas.openxmlformats.org/drawingml/2006/main" xmlns:r="http://schemas.openxmlformats.org/officeDocument/2006/relationships" xmlns:p="http://schemas.openxmlformats.org/presentationml/2006/main">
   <p:cSld>
     <p:spTree>
@@ -4344,32 +5105,32 @@
         </p:spPr>
         <p:txBody>
           <a:bodyPr>
-            <a:normAutofit/>
+            <a:normAutofit fontScale="92500"/>
           </a:bodyPr>
           <a:lstStyle/>
           <a:p>
             <a:r>
-              <a:rPr lang="zh-TW" altLang="en-US" sz="2000" dirty="0">
+              <a:rPr lang="zh-TW" altLang="en-US" sz="2400" dirty="0">
                 <a:latin typeface="標楷體" panose="03000509000000000000" pitchFamily="65" charset="-120"/>
                 <a:ea typeface="標楷體" panose="03000509000000000000" pitchFamily="65" charset="-120"/>
               </a:rPr>
               <a:t>一般調音器的邏輯是一定的音分範圍內都算判斷準確，因為每個設備外放或是樂器的音會有些許泛音上的不同，非專業的收音設備可能會因為這些泛音而對不上標準音高頻率：</a:t>
             </a:r>
             <a:br>
-              <a:rPr lang="en-US" altLang="zh-TW" sz="2000" dirty="0">
+              <a:rPr lang="en-US" altLang="zh-TW" sz="2400" dirty="0">
                 <a:latin typeface="標楷體" panose="03000509000000000000" pitchFamily="65" charset="-120"/>
                 <a:ea typeface="標楷體" panose="03000509000000000000" pitchFamily="65" charset="-120"/>
               </a:rPr>
             </a:br>
             <a:r>
-              <a:rPr lang="zh-TW" altLang="en-US" sz="2000" dirty="0">
+              <a:rPr lang="zh-TW" altLang="en-US" sz="2400" dirty="0">
                 <a:latin typeface="標楷體" panose="03000509000000000000" pitchFamily="65" charset="-120"/>
                 <a:ea typeface="標楷體" panose="03000509000000000000" pitchFamily="65" charset="-120"/>
               </a:rPr>
               <a:t>例如 </a:t>
             </a:r>
             <a:r>
-              <a:rPr lang="en-US" altLang="zh-TW" sz="2000" dirty="0">
+              <a:rPr lang="en-US" altLang="zh-TW" sz="2400" dirty="0">
                 <a:latin typeface="Arial" panose="020B0604020202020204" pitchFamily="34" charset="0"/>
                 <a:ea typeface="標楷體" panose="03000509000000000000" pitchFamily="65" charset="-120"/>
                 <a:cs typeface="Arial" panose="020B0604020202020204" pitchFamily="34" charset="0"/>
@@ -4377,7 +5138,7 @@
               <a:t>A4 (440Hz)</a:t>
             </a:r>
             <a:r>
-              <a:rPr lang="zh-TW" altLang="en-US" sz="2000" dirty="0">
+              <a:rPr lang="zh-TW" altLang="en-US" sz="2400" dirty="0">
                 <a:latin typeface="Arial" panose="020B0604020202020204" pitchFamily="34" charset="0"/>
                 <a:ea typeface="標楷體" panose="03000509000000000000" pitchFamily="65" charset="-120"/>
                 <a:cs typeface="Arial" panose="020B0604020202020204" pitchFamily="34" charset="0"/>
@@ -4385,13 +5146,13 @@
               <a:t> </a:t>
             </a:r>
             <a:r>
-              <a:rPr lang="zh-TW" altLang="en-US" sz="2000" dirty="0">
+              <a:rPr lang="zh-TW" altLang="en-US" sz="2400" dirty="0">
                 <a:latin typeface="標楷體" panose="03000509000000000000" pitchFamily="65" charset="-120"/>
                 <a:ea typeface="標楷體" panose="03000509000000000000" pitchFamily="65" charset="-120"/>
               </a:rPr>
               <a:t>可能就會測到偏高或是偏低，即便是由標準鋼琴發出的音。</a:t>
             </a:r>
-            <a:endParaRPr lang="en-US" altLang="zh-TW" sz="2000" dirty="0">
+            <a:endParaRPr lang="en-US" altLang="zh-TW" sz="2400" dirty="0">
               <a:latin typeface="標楷體" panose="03000509000000000000" pitchFamily="65" charset="-120"/>
               <a:ea typeface="標楷體" panose="03000509000000000000" pitchFamily="65" charset="-120"/>
             </a:endParaRPr>
@@ -4401,14 +5162,14 @@
               <a:buNone/>
             </a:pPr>
             <a:r>
-              <a:rPr lang="zh-TW" altLang="en-US" sz="2000" dirty="0">
+              <a:rPr lang="zh-TW" altLang="en-US" sz="2400" dirty="0">
                 <a:latin typeface="標楷體" panose="03000509000000000000" pitchFamily="65" charset="-120"/>
                 <a:ea typeface="標楷體" panose="03000509000000000000" pitchFamily="65" charset="-120"/>
               </a:rPr>
               <a:t>  </a:t>
             </a:r>
             <a:r>
-              <a:rPr lang="en-US" altLang="zh-TW" sz="2000" dirty="0">
+              <a:rPr lang="en-US" altLang="zh-TW" sz="2400" dirty="0">
                 <a:latin typeface="Arial" panose="020B0604020202020204" pitchFamily="34" charset="0"/>
                 <a:ea typeface="標楷體" panose="03000509000000000000" pitchFamily="65" charset="-120"/>
                 <a:cs typeface="Arial" panose="020B0604020202020204" pitchFamily="34" charset="0"/>
@@ -4416,7 +5177,7 @@
               <a:t>(</a:t>
             </a:r>
             <a:r>
-              <a:rPr lang="zh-TW" altLang="en-US" sz="2000" dirty="0">
+              <a:rPr lang="zh-TW" altLang="en-US" sz="2400" dirty="0">
                 <a:latin typeface="Arial" panose="020B0604020202020204" pitchFamily="34" charset="0"/>
                 <a:ea typeface="標楷體" panose="03000509000000000000" pitchFamily="65" charset="-120"/>
                 <a:cs typeface="Arial" panose="020B0604020202020204" pitchFamily="34" charset="0"/>
@@ -4424,7 +5185,7 @@
               <a:t>用兩台手機交叉比對，</a:t>
             </a:r>
             <a:r>
-              <a:rPr lang="en-US" altLang="zh-TW" sz="2000" dirty="0">
+              <a:rPr lang="en-US" altLang="zh-TW" sz="2400" dirty="0">
                 <a:latin typeface="Arial" panose="020B0604020202020204" pitchFamily="34" charset="0"/>
                 <a:ea typeface="標楷體" panose="03000509000000000000" pitchFamily="65" charset="-120"/>
                 <a:cs typeface="Arial" panose="020B0604020202020204" pitchFamily="34" charset="0"/>
@@ -4432,7 +5193,7 @@
               <a:t>A</a:t>
             </a:r>
             <a:r>
-              <a:rPr lang="zh-TW" altLang="en-US" sz="2000" dirty="0">
+              <a:rPr lang="zh-TW" altLang="en-US" sz="2400" dirty="0">
                 <a:latin typeface="Arial" panose="020B0604020202020204" pitchFamily="34" charset="0"/>
                 <a:ea typeface="標楷體" panose="03000509000000000000" pitchFamily="65" charset="-120"/>
                 <a:cs typeface="Arial" panose="020B0604020202020204" pitchFamily="34" charset="0"/>
@@ -4440,7 +5201,7 @@
               <a:t>手機用鋼琴</a:t>
             </a:r>
             <a:r>
-              <a:rPr lang="en-US" altLang="zh-TW" sz="2000" dirty="0">
+              <a:rPr lang="en-US" altLang="zh-TW" sz="2400" dirty="0">
                 <a:latin typeface="Arial" panose="020B0604020202020204" pitchFamily="34" charset="0"/>
                 <a:ea typeface="標楷體" panose="03000509000000000000" pitchFamily="65" charset="-120"/>
                 <a:cs typeface="Arial" panose="020B0604020202020204" pitchFamily="34" charset="0"/>
@@ -4448,7 +5209,7 @@
               <a:t>APP</a:t>
             </a:r>
             <a:r>
-              <a:rPr lang="zh-TW" altLang="en-US" sz="2000" dirty="0">
+              <a:rPr lang="zh-TW" altLang="en-US" sz="2400" dirty="0">
                 <a:latin typeface="Arial" panose="020B0604020202020204" pitchFamily="34" charset="0"/>
                 <a:ea typeface="標楷體" panose="03000509000000000000" pitchFamily="65" charset="-120"/>
                 <a:cs typeface="Arial" panose="020B0604020202020204" pitchFamily="34" charset="0"/>
@@ -4456,7 +5217,7 @@
               <a:t>發出</a:t>
             </a:r>
             <a:r>
-              <a:rPr lang="en-US" altLang="zh-TW" sz="2000" dirty="0">
+              <a:rPr lang="en-US" altLang="zh-TW" sz="2400" dirty="0">
                 <a:latin typeface="Arial" panose="020B0604020202020204" pitchFamily="34" charset="0"/>
                 <a:ea typeface="標楷體" panose="03000509000000000000" pitchFamily="65" charset="-120"/>
                 <a:cs typeface="Arial" panose="020B0604020202020204" pitchFamily="34" charset="0"/>
@@ -4464,7 +5225,7 @@
               <a:t>A4</a:t>
             </a:r>
             <a:r>
-              <a:rPr lang="zh-TW" altLang="en-US" sz="2000" dirty="0">
+              <a:rPr lang="zh-TW" altLang="en-US" sz="2400" dirty="0">
                 <a:latin typeface="Arial" panose="020B0604020202020204" pitchFamily="34" charset="0"/>
                 <a:ea typeface="標楷體" panose="03000509000000000000" pitchFamily="65" charset="-120"/>
                 <a:cs typeface="Arial" panose="020B0604020202020204" pitchFamily="34" charset="0"/>
@@ -4472,7 +5233,7 @@
               <a:t>鍵，</a:t>
             </a:r>
             <a:r>
-              <a:rPr lang="en-US" altLang="zh-TW" sz="2000" dirty="0">
+              <a:rPr lang="en-US" altLang="zh-TW" sz="2400" dirty="0">
                 <a:latin typeface="Arial" panose="020B0604020202020204" pitchFamily="34" charset="0"/>
                 <a:ea typeface="標楷體" panose="03000509000000000000" pitchFamily="65" charset="-120"/>
                 <a:cs typeface="Arial" panose="020B0604020202020204" pitchFamily="34" charset="0"/>
@@ -4480,7 +5241,7 @@
               <a:t>B</a:t>
             </a:r>
             <a:r>
-              <a:rPr lang="zh-TW" altLang="en-US" sz="2000" dirty="0">
+              <a:rPr lang="zh-TW" altLang="en-US" sz="2400" dirty="0">
                 <a:latin typeface="Arial" panose="020B0604020202020204" pitchFamily="34" charset="0"/>
                 <a:ea typeface="標楷體" panose="03000509000000000000" pitchFamily="65" charset="-120"/>
                 <a:cs typeface="Arial" panose="020B0604020202020204" pitchFamily="34" charset="0"/>
@@ -4488,7 +5249,7 @@
               <a:t>手機測量到仍會高於</a:t>
             </a:r>
             <a:r>
-              <a:rPr lang="en-US" altLang="zh-TW" sz="2000" dirty="0">
+              <a:rPr lang="en-US" altLang="zh-TW" sz="2400" dirty="0">
                 <a:latin typeface="Arial" panose="020B0604020202020204" pitchFamily="34" charset="0"/>
                 <a:ea typeface="標楷體" panose="03000509000000000000" pitchFamily="65" charset="-120"/>
                 <a:cs typeface="Arial" panose="020B0604020202020204" pitchFamily="34" charset="0"/>
@@ -4496,7 +5257,7 @@
               <a:t>440Hz</a:t>
             </a:r>
             <a:r>
-              <a:rPr lang="zh-TW" altLang="en-US" sz="2000" dirty="0">
+              <a:rPr lang="zh-TW" altLang="en-US" sz="2400" dirty="0">
                 <a:latin typeface="Arial" panose="020B0604020202020204" pitchFamily="34" charset="0"/>
                 <a:ea typeface="標楷體" panose="03000509000000000000" pitchFamily="65" charset="-120"/>
                 <a:cs typeface="Arial" panose="020B0604020202020204" pitchFamily="34" charset="0"/>
@@ -4504,7 +5265,7 @@
               <a:t>一點</a:t>
             </a:r>
             <a:r>
-              <a:rPr lang="en-US" altLang="zh-TW" sz="2000" dirty="0">
+              <a:rPr lang="en-US" altLang="zh-TW" sz="2400" dirty="0">
                 <a:latin typeface="Arial" panose="020B0604020202020204" pitchFamily="34" charset="0"/>
                 <a:ea typeface="標楷體" panose="03000509000000000000" pitchFamily="65" charset="-120"/>
                 <a:cs typeface="Arial" panose="020B0604020202020204" pitchFamily="34" charset="0"/>
@@ -4514,28 +5275,28 @@
           </a:p>
           <a:p>
             <a:r>
-              <a:rPr lang="zh-TW" altLang="en-US" sz="2000" dirty="0">
+              <a:rPr lang="zh-TW" altLang="en-US" sz="2400" dirty="0">
                 <a:latin typeface="標楷體" panose="03000509000000000000" pitchFamily="65" charset="-120"/>
                 <a:ea typeface="標楷體" panose="03000509000000000000" pitchFamily="65" charset="-120"/>
               </a:rPr>
               <a:t>一般的麥克風，容易收到環境或是電腦發出的高頻</a:t>
             </a:r>
             <a:r>
-              <a:rPr lang="en-US" altLang="zh-TW" sz="2000" dirty="0">
+              <a:rPr lang="en-US" altLang="zh-TW" sz="2400" dirty="0">
                 <a:latin typeface="Consolas" panose="020B0609020204030204" pitchFamily="49" charset="0"/>
                 <a:ea typeface="標楷體" panose="03000509000000000000" pitchFamily="65" charset="-120"/>
               </a:rPr>
               <a:t>(</a:t>
             </a:r>
             <a:r>
-              <a:rPr lang="zh-TW" altLang="en-US" sz="2000" dirty="0">
+              <a:rPr lang="zh-TW" altLang="en-US" sz="2400" dirty="0">
                 <a:latin typeface="Consolas" panose="020B0609020204030204" pitchFamily="49" charset="0"/>
                 <a:ea typeface="標楷體" panose="03000509000000000000" pitchFamily="65" charset="-120"/>
               </a:rPr>
               <a:t>大約在第</a:t>
             </a:r>
             <a:r>
-              <a:rPr lang="en-US" altLang="zh-TW" sz="2000" dirty="0">
+              <a:rPr lang="en-US" altLang="zh-TW" sz="2400" dirty="0">
                 <a:latin typeface="Arial" panose="020B0604020202020204" pitchFamily="34" charset="0"/>
                 <a:ea typeface="標楷體" panose="03000509000000000000" pitchFamily="65" charset="-120"/>
                 <a:cs typeface="Arial" panose="020B0604020202020204" pitchFamily="34" charset="0"/>
@@ -4543,14 +5304,14 @@
               <a:t>6</a:t>
             </a:r>
             <a:r>
-              <a:rPr lang="zh-TW" altLang="en-US" sz="2000" dirty="0">
+              <a:rPr lang="zh-TW" altLang="en-US" sz="2400" dirty="0">
                 <a:latin typeface="Consolas" panose="020B0609020204030204" pitchFamily="49" charset="0"/>
                 <a:ea typeface="標楷體" panose="03000509000000000000" pitchFamily="65" charset="-120"/>
               </a:rPr>
               <a:t>、</a:t>
             </a:r>
             <a:r>
-              <a:rPr lang="en-US" altLang="zh-TW" sz="2000" dirty="0">
+              <a:rPr lang="en-US" altLang="zh-TW" sz="2400" dirty="0">
                 <a:latin typeface="Arial" panose="020B0604020202020204" pitchFamily="34" charset="0"/>
                 <a:ea typeface="標楷體" panose="03000509000000000000" pitchFamily="65" charset="-120"/>
                 <a:cs typeface="Arial" panose="020B0604020202020204" pitchFamily="34" charset="0"/>
@@ -4558,103 +5319,103 @@
               <a:t>7</a:t>
             </a:r>
             <a:r>
-              <a:rPr lang="zh-TW" altLang="en-US" sz="2000" dirty="0">
+              <a:rPr lang="zh-TW" altLang="en-US" sz="2400" dirty="0">
                 <a:latin typeface="Consolas" panose="020B0609020204030204" pitchFamily="49" charset="0"/>
                 <a:ea typeface="標楷體" panose="03000509000000000000" pitchFamily="65" charset="-120"/>
               </a:rPr>
               <a:t>組八度</a:t>
             </a:r>
             <a:r>
-              <a:rPr lang="en-US" altLang="zh-TW" sz="2000" dirty="0">
+              <a:rPr lang="en-US" altLang="zh-TW" sz="2400" dirty="0">
                 <a:latin typeface="Consolas" panose="020B0609020204030204" pitchFamily="49" charset="0"/>
                 <a:ea typeface="標楷體" panose="03000509000000000000" pitchFamily="65" charset="-120"/>
               </a:rPr>
               <a:t>)</a:t>
             </a:r>
             <a:r>
-              <a:rPr lang="zh-TW" altLang="en-US" sz="2000" dirty="0">
+              <a:rPr lang="zh-TW" altLang="en-US" sz="2400" dirty="0">
                 <a:latin typeface="Consolas" panose="020B0609020204030204" pitchFamily="49" charset="0"/>
                 <a:ea typeface="標楷體" panose="03000509000000000000" pitchFamily="65" charset="-120"/>
               </a:rPr>
               <a:t>，這一點需要用程式或是硬體本身進行濾波處理。</a:t>
             </a:r>
-            <a:endParaRPr lang="en-US" altLang="zh-TW" sz="2000" dirty="0">
+            <a:endParaRPr lang="en-US" altLang="zh-TW" sz="2400" dirty="0">
               <a:latin typeface="Consolas" panose="020B0609020204030204" pitchFamily="49" charset="0"/>
               <a:ea typeface="標楷體" panose="03000509000000000000" pitchFamily="65" charset="-120"/>
             </a:endParaRPr>
           </a:p>
           <a:p>
             <a:r>
-              <a:rPr lang="zh-TW" altLang="en-US" sz="2000" dirty="0">
+              <a:rPr lang="zh-TW" altLang="en-US" sz="2400" dirty="0">
                 <a:latin typeface="Consolas" panose="020B0609020204030204" pitchFamily="49" charset="0"/>
                 <a:ea typeface="標楷體" panose="03000509000000000000" pitchFamily="65" charset="-120"/>
               </a:rPr>
               <a:t>只要是自然發出的音頻</a:t>
             </a:r>
             <a:r>
-              <a:rPr lang="en-US" altLang="zh-TW" sz="2000" dirty="0">
+              <a:rPr lang="en-US" altLang="zh-TW" sz="2400" dirty="0">
                 <a:latin typeface="Consolas" panose="020B0609020204030204" pitchFamily="49" charset="0"/>
                 <a:ea typeface="標楷體" panose="03000509000000000000" pitchFamily="65" charset="-120"/>
               </a:rPr>
               <a:t>(</a:t>
             </a:r>
             <a:r>
-              <a:rPr lang="zh-TW" altLang="en-US" sz="2000" dirty="0">
+              <a:rPr lang="zh-TW" altLang="en-US" sz="2400" dirty="0">
                 <a:latin typeface="Consolas" panose="020B0609020204030204" pitchFamily="49" charset="0"/>
                 <a:ea typeface="標楷體" panose="03000509000000000000" pitchFamily="65" charset="-120"/>
               </a:rPr>
-              <a:t>不包含音叉</a:t>
-            </a:r>
-            <a:r>
-              <a:rPr lang="en-US" altLang="zh-TW" sz="2000" dirty="0">
+              <a:t>音叉除外</a:t>
+            </a:r>
+            <a:r>
+              <a:rPr lang="en-US" altLang="zh-TW" sz="2400" dirty="0">
                 <a:latin typeface="Consolas" panose="020B0609020204030204" pitchFamily="49" charset="0"/>
                 <a:ea typeface="標楷體" panose="03000509000000000000" pitchFamily="65" charset="-120"/>
               </a:rPr>
               <a:t>)</a:t>
             </a:r>
             <a:r>
-              <a:rPr lang="zh-TW" altLang="en-US" sz="2000" dirty="0">
+              <a:rPr lang="zh-TW" altLang="en-US" sz="2400" dirty="0">
                 <a:latin typeface="Consolas" panose="020B0609020204030204" pitchFamily="49" charset="0"/>
                 <a:ea typeface="標楷體" panose="03000509000000000000" pitchFamily="65" charset="-120"/>
               </a:rPr>
               <a:t>，就會有泛音列</a:t>
             </a:r>
             <a:r>
-              <a:rPr lang="en-US" altLang="zh-TW" sz="2000" dirty="0">
+              <a:rPr lang="en-US" altLang="zh-TW" sz="2400" dirty="0">
                 <a:latin typeface="Consolas" panose="020B0609020204030204" pitchFamily="49" charset="0"/>
                 <a:ea typeface="標楷體" panose="03000509000000000000" pitchFamily="65" charset="-120"/>
               </a:rPr>
               <a:t>(</a:t>
             </a:r>
             <a:r>
-              <a:rPr lang="zh-TW" altLang="en-US" sz="2000" dirty="0">
+              <a:rPr lang="zh-TW" altLang="en-US" sz="2400" dirty="0">
                 <a:latin typeface="Consolas" panose="020B0609020204030204" pitchFamily="49" charset="0"/>
                 <a:ea typeface="標楷體" panose="03000509000000000000" pitchFamily="65" charset="-120"/>
               </a:rPr>
               <a:t>形成駐波</a:t>
             </a:r>
             <a:r>
-              <a:rPr lang="en-US" altLang="zh-TW" sz="2000" dirty="0">
+              <a:rPr lang="en-US" altLang="zh-TW" sz="2400" dirty="0">
                 <a:latin typeface="Consolas" panose="020B0609020204030204" pitchFamily="49" charset="0"/>
                 <a:ea typeface="標楷體" panose="03000509000000000000" pitchFamily="65" charset="-120"/>
               </a:rPr>
               <a:t>)</a:t>
             </a:r>
             <a:r>
-              <a:rPr lang="zh-TW" altLang="en-US" sz="2000" dirty="0">
+              <a:rPr lang="zh-TW" altLang="en-US" sz="2400" dirty="0">
                 <a:latin typeface="Consolas" panose="020B0609020204030204" pitchFamily="49" charset="0"/>
                 <a:ea typeface="標楷體" panose="03000509000000000000" pitchFamily="65" charset="-120"/>
               </a:rPr>
               <a:t>，實際物體的泛音會受到材質的影響形成偏差音，而收音器也會受到泛音的影響而結果不同。</a:t>
             </a:r>
-            <a:endParaRPr lang="en-US" altLang="zh-TW" sz="2000" dirty="0">
+            <a:endParaRPr lang="en-US" altLang="zh-TW" sz="2400" dirty="0">
               <a:latin typeface="Consolas" panose="020B0609020204030204" pitchFamily="49" charset="0"/>
               <a:ea typeface="標楷體" panose="03000509000000000000" pitchFamily="65" charset="-120"/>
             </a:endParaRPr>
           </a:p>
           <a:p>
             <a:r>
-              <a:rPr lang="zh-TW" altLang="en-US" sz="2000" dirty="0">
+              <a:rPr lang="zh-TW" altLang="en-US" sz="2400" dirty="0">
                 <a:latin typeface="Arial" panose="020B0604020202020204" pitchFamily="34" charset="0"/>
                 <a:ea typeface="標楷體" panose="03000509000000000000" pitchFamily="65" charset="-120"/>
                 <a:cs typeface="Arial" panose="020B0604020202020204" pitchFamily="34" charset="0"/>
@@ -4662,7 +5423,7 @@
               <a:t>實際上要分析歌曲調性技術複雜，需涉及到傅立葉轉換</a:t>
             </a:r>
             <a:r>
-              <a:rPr lang="en-US" altLang="zh-TW" sz="2000" dirty="0">
+              <a:rPr lang="en-US" altLang="zh-TW" sz="2400" dirty="0">
                 <a:latin typeface="Arial" panose="020B0604020202020204" pitchFamily="34" charset="0"/>
                 <a:ea typeface="標楷體" panose="03000509000000000000" pitchFamily="65" charset="-120"/>
                 <a:cs typeface="Arial" panose="020B0604020202020204" pitchFamily="34" charset="0"/>
@@ -4670,14 +5431,14 @@
               <a:t>(Fourier transform, FT)</a:t>
             </a:r>
             <a:r>
-              <a:rPr lang="zh-TW" altLang="en-US" sz="2000" dirty="0">
+              <a:rPr lang="zh-TW" altLang="en-US" sz="2400" dirty="0">
                 <a:latin typeface="Arial" panose="020B0604020202020204" pitchFamily="34" charset="0"/>
                 <a:ea typeface="標楷體" panose="03000509000000000000" pitchFamily="65" charset="-120"/>
                 <a:cs typeface="Arial" panose="020B0604020202020204" pitchFamily="34" charset="0"/>
               </a:rPr>
               <a:t>。</a:t>
             </a:r>
-            <a:endParaRPr lang="en-US" altLang="zh-TW" sz="2000" dirty="0">
+            <a:endParaRPr lang="en-US" altLang="zh-TW" sz="2400" dirty="0">
               <a:latin typeface="Arial" panose="020B0604020202020204" pitchFamily="34" charset="0"/>
               <a:ea typeface="標楷體" panose="03000509000000000000" pitchFamily="65" charset="-120"/>
               <a:cs typeface="Arial" panose="020B0604020202020204" pitchFamily="34" charset="0"/>
@@ -4698,7 +5459,7 @@
 </p:sld>
 </file>
 
-<file path=ppt/slides/slide14.xml><?xml version="1.0" encoding="utf-8"?>
+<file path=ppt/slides/slide13.xml><?xml version="1.0" encoding="utf-8"?>
 <p:sld xmlns:a="http://schemas.openxmlformats.org/drawingml/2006/main" xmlns:r="http://schemas.openxmlformats.org/officeDocument/2006/relationships" xmlns:p="http://schemas.openxmlformats.org/presentationml/2006/main">
   <p:cSld>
     <p:spTree>
@@ -5102,7 +5863,7 @@
           <p:cNvPr id="2" name="標題 1">
             <a:extLst>
               <a:ext uri="{FF2B5EF4-FFF2-40B4-BE49-F238E27FC236}">
-                <a16:creationId xmlns:a16="http://schemas.microsoft.com/office/drawing/2014/main" id="{B4AB5F4C-0DE3-4D89-BF43-06D138968FD2}"/>
+                <a16:creationId xmlns:a16="http://schemas.microsoft.com/office/drawing/2014/main" id="{C34DC5B8-0A57-4772-8EF5-FF29245F6FCB}"/>
               </a:ext>
             </a:extLst>
           </p:cNvPr>
@@ -5123,49 +5884,17 @@
                 <a:latin typeface="標楷體" panose="03000509000000000000" pitchFamily="65" charset="-120"/>
                 <a:ea typeface="標楷體" panose="03000509000000000000" pitchFamily="65" charset="-120"/>
               </a:rPr>
-              <a:t>介紹</a:t>
-            </a:r>
-          </a:p>
-        </p:txBody>
-      </p:sp>
-      <p:sp>
-        <p:nvSpPr>
-          <p:cNvPr id="3" name="內容版面配置區 2">
-            <a:extLst>
-              <a:ext uri="{FF2B5EF4-FFF2-40B4-BE49-F238E27FC236}">
-                <a16:creationId xmlns:a16="http://schemas.microsoft.com/office/drawing/2014/main" id="{E005726F-2A5C-446C-9A3E-FFA71958BF3B}"/>
-              </a:ext>
-            </a:extLst>
-          </p:cNvPr>
-          <p:cNvSpPr>
-            <a:spLocks noGrp="1"/>
-          </p:cNvSpPr>
-          <p:nvPr>
-            <p:ph idx="1"/>
-          </p:nvPr>
-        </p:nvSpPr>
-        <p:spPr/>
-        <p:txBody>
-          <a:bodyPr/>
-          <a:lstStyle/>
-          <a:p>
-            <a:r>
-              <a:rPr lang="zh-TW" altLang="en-US" dirty="0">
-                <a:latin typeface="Arial" panose="020B0604020202020204" pitchFamily="34" charset="0"/>
-                <a:ea typeface="標楷體" panose="03000509000000000000" pitchFamily="65" charset="-120"/>
-                <a:cs typeface="Arial" panose="020B0604020202020204" pitchFamily="34" charset="0"/>
-              </a:rPr>
-              <a:t>生活中任何物理、化學現象都能以頻率表示，而聲音是頻率在大腦中的體現。</a:t>
+              <a:t>功能及應用</a:t>
             </a:r>
           </a:p>
         </p:txBody>
       </p:sp>
       <p:pic>
         <p:nvPicPr>
-          <p:cNvPr id="8" name="圖片 7">
-            <a:extLst>
-              <a:ext uri="{FF2B5EF4-FFF2-40B4-BE49-F238E27FC236}">
-                <a16:creationId xmlns:a16="http://schemas.microsoft.com/office/drawing/2014/main" id="{EBD1B938-DBA6-4B72-9630-CFDCF0E10490}"/>
+          <p:cNvPr id="13" name="圖片 12">
+            <a:extLst>
+              <a:ext uri="{FF2B5EF4-FFF2-40B4-BE49-F238E27FC236}">
+                <a16:creationId xmlns:a16="http://schemas.microsoft.com/office/drawing/2014/main" id="{AF94DD1B-CDA2-43E5-A806-5E8E63AA1FB1}"/>
               </a:ext>
             </a:extLst>
           </p:cNvPr>
@@ -5175,105 +5904,14 @@
           <p:nvPr/>
         </p:nvPicPr>
         <p:blipFill>
-          <a:blip r:embed="rId2"/>
+          <a:blip r:embed="rId3"/>
           <a:stretch>
             <a:fillRect/>
           </a:stretch>
         </p:blipFill>
         <p:spPr>
           <a:xfrm>
-            <a:off x="2684929" y="2655421"/>
-            <a:ext cx="6822141" cy="3837454"/>
-          </a:xfrm>
-          <a:prstGeom prst="rect">
-            <a:avLst/>
-          </a:prstGeom>
-        </p:spPr>
-      </p:pic>
-    </p:spTree>
-    <p:extLst>
-      <p:ext uri="{BB962C8B-B14F-4D97-AF65-F5344CB8AC3E}">
-        <p14:creationId xmlns:p14="http://schemas.microsoft.com/office/powerpoint/2010/main" val="404506946"/>
-      </p:ext>
-    </p:extLst>
-  </p:cSld>
-  <p:clrMapOvr>
-    <a:masterClrMapping/>
-  </p:clrMapOvr>
-</p:sld>
-</file>
-
-<file path=ppt/slides/slide3.xml><?xml version="1.0" encoding="utf-8"?>
-<p:sld xmlns:a="http://schemas.openxmlformats.org/drawingml/2006/main" xmlns:r="http://schemas.openxmlformats.org/officeDocument/2006/relationships" xmlns:p="http://schemas.openxmlformats.org/presentationml/2006/main">
-  <p:cSld>
-    <p:spTree>
-      <p:nvGrpSpPr>
-        <p:cNvPr id="1" name=""/>
-        <p:cNvGrpSpPr/>
-        <p:nvPr/>
-      </p:nvGrpSpPr>
-      <p:grpSpPr>
-        <a:xfrm>
-          <a:off x="0" y="0"/>
-          <a:ext cx="0" cy="0"/>
-          <a:chOff x="0" y="0"/>
-          <a:chExt cx="0" cy="0"/>
-        </a:xfrm>
-      </p:grpSpPr>
-      <p:sp>
-        <p:nvSpPr>
-          <p:cNvPr id="2" name="標題 1">
-            <a:extLst>
-              <a:ext uri="{FF2B5EF4-FFF2-40B4-BE49-F238E27FC236}">
-                <a16:creationId xmlns:a16="http://schemas.microsoft.com/office/drawing/2014/main" id="{C34DC5B8-0A57-4772-8EF5-FF29245F6FCB}"/>
-              </a:ext>
-            </a:extLst>
-          </p:cNvPr>
-          <p:cNvSpPr>
-            <a:spLocks noGrp="1"/>
-          </p:cNvSpPr>
-          <p:nvPr>
-            <p:ph type="title"/>
-          </p:nvPr>
-        </p:nvSpPr>
-        <p:spPr/>
-        <p:txBody>
-          <a:bodyPr/>
-          <a:lstStyle/>
-          <a:p>
-            <a:r>
-              <a:rPr lang="zh-TW" altLang="en-US" b="1" dirty="0">
-                <a:latin typeface="標楷體" panose="03000509000000000000" pitchFamily="65" charset="-120"/>
-                <a:ea typeface="標楷體" panose="03000509000000000000" pitchFamily="65" charset="-120"/>
-              </a:rPr>
-              <a:t>功能及應用</a:t>
-            </a:r>
-          </a:p>
-        </p:txBody>
-      </p:sp>
-      <p:pic>
-        <p:nvPicPr>
-          <p:cNvPr id="13" name="圖片 12">
-            <a:extLst>
-              <a:ext uri="{FF2B5EF4-FFF2-40B4-BE49-F238E27FC236}">
-                <a16:creationId xmlns:a16="http://schemas.microsoft.com/office/drawing/2014/main" id="{AF94DD1B-CDA2-43E5-A806-5E8E63AA1FB1}"/>
-              </a:ext>
-            </a:extLst>
-          </p:cNvPr>
-          <p:cNvPicPr>
-            <a:picLocks noChangeAspect="1"/>
-          </p:cNvPicPr>
-          <p:nvPr/>
-        </p:nvPicPr>
-        <p:blipFill>
-          <a:blip r:embed="rId2"/>
-          <a:stretch>
-            <a:fillRect/>
-          </a:stretch>
-        </p:blipFill>
-        <p:spPr>
-          <a:xfrm>
-            <a:off x="100635" y="1762124"/>
+            <a:off x="100635" y="1699369"/>
             <a:ext cx="11990729" cy="4191204"/>
           </a:xfrm>
           <a:prstGeom prst="rect">
@@ -5281,6 +5919,230 @@
           </a:prstGeom>
         </p:spPr>
       </p:pic>
+      <p:sp>
+        <p:nvSpPr>
+          <p:cNvPr id="5" name="矩形 4">
+            <a:extLst>
+              <a:ext uri="{FF2B5EF4-FFF2-40B4-BE49-F238E27FC236}">
+                <a16:creationId xmlns:a16="http://schemas.microsoft.com/office/drawing/2014/main" id="{726D89FB-0EDA-4185-A4D2-6B15B98A44D6}"/>
+              </a:ext>
+            </a:extLst>
+          </p:cNvPr>
+          <p:cNvSpPr/>
+          <p:nvPr/>
+        </p:nvSpPr>
+        <p:spPr>
+          <a:xfrm>
+            <a:off x="2757377" y="2349796"/>
+            <a:ext cx="1474381" cy="414669"/>
+          </a:xfrm>
+          <a:prstGeom prst="rect">
+            <a:avLst/>
+          </a:prstGeom>
+          <a:noFill/>
+          <a:ln w="38100" cap="flat" cmpd="sng" algn="ctr">
+            <a:solidFill>
+              <a:srgbClr val="FF0000">
+                <a:alpha val="70000"/>
+              </a:srgbClr>
+            </a:solidFill>
+            <a:prstDash val="solid"/>
+            <a:round/>
+            <a:headEnd type="none" w="med" len="med"/>
+            <a:tailEnd type="none" w="med" len="med"/>
+          </a:ln>
+        </p:spPr>
+        <p:style>
+          <a:lnRef idx="0">
+            <a:scrgbClr r="0" g="0" b="0"/>
+          </a:lnRef>
+          <a:fillRef idx="0">
+            <a:scrgbClr r="0" g="0" b="0"/>
+          </a:fillRef>
+          <a:effectRef idx="0">
+            <a:scrgbClr r="0" g="0" b="0"/>
+          </a:effectRef>
+          <a:fontRef idx="minor">
+            <a:schemeClr val="accent2"/>
+          </a:fontRef>
+        </p:style>
+        <p:txBody>
+          <a:bodyPr rtlCol="0" anchor="ctr"/>
+          <a:lstStyle/>
+          <a:p>
+            <a:pPr algn="ctr"/>
+            <a:endParaRPr lang="zh-TW" altLang="en-US"/>
+          </a:p>
+        </p:txBody>
+      </p:sp>
+      <p:sp>
+        <p:nvSpPr>
+          <p:cNvPr id="7" name="矩形 6">
+            <a:extLst>
+              <a:ext uri="{FF2B5EF4-FFF2-40B4-BE49-F238E27FC236}">
+                <a16:creationId xmlns:a16="http://schemas.microsoft.com/office/drawing/2014/main" id="{E21DC240-7DD6-46BC-A085-538E1AE428C9}"/>
+              </a:ext>
+            </a:extLst>
+          </p:cNvPr>
+          <p:cNvSpPr/>
+          <p:nvPr/>
+        </p:nvSpPr>
+        <p:spPr>
+          <a:xfrm>
+            <a:off x="2757377" y="2839072"/>
+            <a:ext cx="1867786" cy="414669"/>
+          </a:xfrm>
+          <a:prstGeom prst="rect">
+            <a:avLst/>
+          </a:prstGeom>
+          <a:noFill/>
+          <a:ln w="38100" cap="flat" cmpd="sng" algn="ctr">
+            <a:solidFill>
+              <a:srgbClr val="FF0000">
+                <a:alpha val="70000"/>
+              </a:srgbClr>
+            </a:solidFill>
+            <a:prstDash val="solid"/>
+            <a:round/>
+            <a:headEnd type="none" w="med" len="med"/>
+            <a:tailEnd type="none" w="med" len="med"/>
+          </a:ln>
+        </p:spPr>
+        <p:style>
+          <a:lnRef idx="0">
+            <a:scrgbClr r="0" g="0" b="0"/>
+          </a:lnRef>
+          <a:fillRef idx="0">
+            <a:scrgbClr r="0" g="0" b="0"/>
+          </a:fillRef>
+          <a:effectRef idx="0">
+            <a:scrgbClr r="0" g="0" b="0"/>
+          </a:effectRef>
+          <a:fontRef idx="minor">
+            <a:schemeClr val="accent2"/>
+          </a:fontRef>
+        </p:style>
+        <p:txBody>
+          <a:bodyPr rtlCol="0" anchor="ctr"/>
+          <a:lstStyle/>
+          <a:p>
+            <a:pPr algn="ctr"/>
+            <a:endParaRPr lang="zh-TW" altLang="en-US"/>
+          </a:p>
+        </p:txBody>
+      </p:sp>
+      <p:sp>
+        <p:nvSpPr>
+          <p:cNvPr id="8" name="矩形 7">
+            <a:extLst>
+              <a:ext uri="{FF2B5EF4-FFF2-40B4-BE49-F238E27FC236}">
+                <a16:creationId xmlns:a16="http://schemas.microsoft.com/office/drawing/2014/main" id="{DA926834-F6C2-4DD8-9072-1742595E31E5}"/>
+              </a:ext>
+            </a:extLst>
+          </p:cNvPr>
+          <p:cNvSpPr/>
+          <p:nvPr/>
+        </p:nvSpPr>
+        <p:spPr>
+          <a:xfrm>
+            <a:off x="2757376" y="3875546"/>
+            <a:ext cx="2962939" cy="414669"/>
+          </a:xfrm>
+          <a:prstGeom prst="rect">
+            <a:avLst/>
+          </a:prstGeom>
+          <a:noFill/>
+          <a:ln w="38100" cap="flat" cmpd="sng" algn="ctr">
+            <a:solidFill>
+              <a:srgbClr val="FF0000">
+                <a:alpha val="70000"/>
+              </a:srgbClr>
+            </a:solidFill>
+            <a:prstDash val="solid"/>
+            <a:round/>
+            <a:headEnd type="none" w="med" len="med"/>
+            <a:tailEnd type="none" w="med" len="med"/>
+          </a:ln>
+        </p:spPr>
+        <p:style>
+          <a:lnRef idx="0">
+            <a:scrgbClr r="0" g="0" b="0"/>
+          </a:lnRef>
+          <a:fillRef idx="0">
+            <a:scrgbClr r="0" g="0" b="0"/>
+          </a:fillRef>
+          <a:effectRef idx="0">
+            <a:scrgbClr r="0" g="0" b="0"/>
+          </a:effectRef>
+          <a:fontRef idx="minor">
+            <a:schemeClr val="accent2"/>
+          </a:fontRef>
+        </p:style>
+        <p:txBody>
+          <a:bodyPr rtlCol="0" anchor="ctr"/>
+          <a:lstStyle/>
+          <a:p>
+            <a:pPr algn="ctr"/>
+            <a:endParaRPr lang="zh-TW" altLang="en-US"/>
+          </a:p>
+        </p:txBody>
+      </p:sp>
+      <p:sp>
+        <p:nvSpPr>
+          <p:cNvPr id="9" name="矩形 8">
+            <a:extLst>
+              <a:ext uri="{FF2B5EF4-FFF2-40B4-BE49-F238E27FC236}">
+                <a16:creationId xmlns:a16="http://schemas.microsoft.com/office/drawing/2014/main" id="{4D4E21C6-E2E4-43ED-80B0-8F63DBCA32F0}"/>
+              </a:ext>
+            </a:extLst>
+          </p:cNvPr>
+          <p:cNvSpPr/>
+          <p:nvPr/>
+        </p:nvSpPr>
+        <p:spPr>
+          <a:xfrm>
+            <a:off x="2757377" y="4883059"/>
+            <a:ext cx="1658679" cy="414669"/>
+          </a:xfrm>
+          <a:prstGeom prst="rect">
+            <a:avLst/>
+          </a:prstGeom>
+          <a:noFill/>
+          <a:ln w="38100" cap="flat" cmpd="sng" algn="ctr">
+            <a:solidFill>
+              <a:srgbClr val="FF0000">
+                <a:alpha val="70000"/>
+              </a:srgbClr>
+            </a:solidFill>
+            <a:prstDash val="solid"/>
+            <a:round/>
+            <a:headEnd type="none" w="med" len="med"/>
+            <a:tailEnd type="none" w="med" len="med"/>
+          </a:ln>
+        </p:spPr>
+        <p:style>
+          <a:lnRef idx="0">
+            <a:scrgbClr r="0" g="0" b="0"/>
+          </a:lnRef>
+          <a:fillRef idx="0">
+            <a:scrgbClr r="0" g="0" b="0"/>
+          </a:fillRef>
+          <a:effectRef idx="0">
+            <a:scrgbClr r="0" g="0" b="0"/>
+          </a:effectRef>
+          <a:fontRef idx="minor">
+            <a:schemeClr val="accent2"/>
+          </a:fontRef>
+        </p:style>
+        <p:txBody>
+          <a:bodyPr rtlCol="0" anchor="ctr"/>
+          <a:lstStyle/>
+          <a:p>
+            <a:pPr algn="ctr"/>
+            <a:endParaRPr lang="zh-TW" altLang="en-US"/>
+          </a:p>
+        </p:txBody>
+      </p:sp>
     </p:spTree>
     <p:extLst>
       <p:ext uri="{BB962C8B-B14F-4D97-AF65-F5344CB8AC3E}">
@@ -5291,10 +6153,204 @@
   <p:clrMapOvr>
     <a:masterClrMapping/>
   </p:clrMapOvr>
+  <p:timing>
+    <p:tnLst>
+      <p:par>
+        <p:cTn id="1" dur="indefinite" restart="never" nodeType="tmRoot">
+          <p:childTnLst>
+            <p:seq concurrent="1" nextAc="seek">
+              <p:cTn id="2" dur="indefinite" nodeType="mainSeq">
+                <p:childTnLst>
+                  <p:par>
+                    <p:cTn id="3" fill="hold">
+                      <p:stCondLst>
+                        <p:cond delay="indefinite"/>
+                      </p:stCondLst>
+                      <p:childTnLst>
+                        <p:par>
+                          <p:cTn id="4" fill="hold">
+                            <p:stCondLst>
+                              <p:cond delay="0"/>
+                            </p:stCondLst>
+                            <p:childTnLst>
+                              <p:par>
+                                <p:cTn id="5" presetID="10" presetClass="entr" presetSubtype="0" fill="hold" grpId="0" nodeType="clickEffect">
+                                  <p:stCondLst>
+                                    <p:cond delay="0"/>
+                                  </p:stCondLst>
+                                  <p:childTnLst>
+                                    <p:set>
+                                      <p:cBhvr>
+                                        <p:cTn id="6" dur="1" fill="hold">
+                                          <p:stCondLst>
+                                            <p:cond delay="0"/>
+                                          </p:stCondLst>
+                                        </p:cTn>
+                                        <p:tgtEl>
+                                          <p:spTgt spid="5"/>
+                                        </p:tgtEl>
+                                        <p:attrNameLst>
+                                          <p:attrName>style.visibility</p:attrName>
+                                        </p:attrNameLst>
+                                      </p:cBhvr>
+                                      <p:to>
+                                        <p:strVal val="visible"/>
+                                      </p:to>
+                                    </p:set>
+                                    <p:animEffect transition="in" filter="fade">
+                                      <p:cBhvr>
+                                        <p:cTn id="7" dur="500"/>
+                                        <p:tgtEl>
+                                          <p:spTgt spid="5"/>
+                                        </p:tgtEl>
+                                      </p:cBhvr>
+                                    </p:animEffect>
+                                  </p:childTnLst>
+                                </p:cTn>
+                              </p:par>
+                              <p:par>
+                                <p:cTn id="8" presetID="10" presetClass="entr" presetSubtype="0" fill="hold" grpId="0" nodeType="withEffect">
+                                  <p:stCondLst>
+                                    <p:cond delay="0"/>
+                                  </p:stCondLst>
+                                  <p:childTnLst>
+                                    <p:set>
+                                      <p:cBhvr>
+                                        <p:cTn id="9" dur="1" fill="hold">
+                                          <p:stCondLst>
+                                            <p:cond delay="0"/>
+                                          </p:stCondLst>
+                                        </p:cTn>
+                                        <p:tgtEl>
+                                          <p:spTgt spid="7"/>
+                                        </p:tgtEl>
+                                        <p:attrNameLst>
+                                          <p:attrName>style.visibility</p:attrName>
+                                        </p:attrNameLst>
+                                      </p:cBhvr>
+                                      <p:to>
+                                        <p:strVal val="visible"/>
+                                      </p:to>
+                                    </p:set>
+                                    <p:animEffect transition="in" filter="fade">
+                                      <p:cBhvr>
+                                        <p:cTn id="10" dur="500"/>
+                                        <p:tgtEl>
+                                          <p:spTgt spid="7"/>
+                                        </p:tgtEl>
+                                      </p:cBhvr>
+                                    </p:animEffect>
+                                  </p:childTnLst>
+                                </p:cTn>
+                              </p:par>
+                              <p:par>
+                                <p:cTn id="11" presetID="10" presetClass="entr" presetSubtype="0" fill="hold" grpId="0" nodeType="withEffect">
+                                  <p:stCondLst>
+                                    <p:cond delay="0"/>
+                                  </p:stCondLst>
+                                  <p:childTnLst>
+                                    <p:set>
+                                      <p:cBhvr>
+                                        <p:cTn id="12" dur="1" fill="hold">
+                                          <p:stCondLst>
+                                            <p:cond delay="0"/>
+                                          </p:stCondLst>
+                                        </p:cTn>
+                                        <p:tgtEl>
+                                          <p:spTgt spid="8"/>
+                                        </p:tgtEl>
+                                        <p:attrNameLst>
+                                          <p:attrName>style.visibility</p:attrName>
+                                        </p:attrNameLst>
+                                      </p:cBhvr>
+                                      <p:to>
+                                        <p:strVal val="visible"/>
+                                      </p:to>
+                                    </p:set>
+                                    <p:animEffect transition="in" filter="fade">
+                                      <p:cBhvr>
+                                        <p:cTn id="13" dur="500"/>
+                                        <p:tgtEl>
+                                          <p:spTgt spid="8"/>
+                                        </p:tgtEl>
+                                      </p:cBhvr>
+                                    </p:animEffect>
+                                  </p:childTnLst>
+                                </p:cTn>
+                              </p:par>
+                              <p:par>
+                                <p:cTn id="14" presetID="10" presetClass="entr" presetSubtype="0" fill="hold" grpId="0" nodeType="withEffect">
+                                  <p:stCondLst>
+                                    <p:cond delay="0"/>
+                                  </p:stCondLst>
+                                  <p:childTnLst>
+                                    <p:set>
+                                      <p:cBhvr>
+                                        <p:cTn id="15" dur="1" fill="hold">
+                                          <p:stCondLst>
+                                            <p:cond delay="0"/>
+                                          </p:stCondLst>
+                                        </p:cTn>
+                                        <p:tgtEl>
+                                          <p:spTgt spid="9"/>
+                                        </p:tgtEl>
+                                        <p:attrNameLst>
+                                          <p:attrName>style.visibility</p:attrName>
+                                        </p:attrNameLst>
+                                      </p:cBhvr>
+                                      <p:to>
+                                        <p:strVal val="visible"/>
+                                      </p:to>
+                                    </p:set>
+                                    <p:animEffect transition="in" filter="fade">
+                                      <p:cBhvr>
+                                        <p:cTn id="16" dur="500"/>
+                                        <p:tgtEl>
+                                          <p:spTgt spid="9"/>
+                                        </p:tgtEl>
+                                      </p:cBhvr>
+                                    </p:animEffect>
+                                  </p:childTnLst>
+                                </p:cTn>
+                              </p:par>
+                            </p:childTnLst>
+                          </p:cTn>
+                        </p:par>
+                      </p:childTnLst>
+                    </p:cTn>
+                  </p:par>
+                </p:childTnLst>
+              </p:cTn>
+              <p:prevCondLst>
+                <p:cond evt="onPrev" delay="0">
+                  <p:tgtEl>
+                    <p:sldTgt/>
+                  </p:tgtEl>
+                </p:cond>
+              </p:prevCondLst>
+              <p:nextCondLst>
+                <p:cond evt="onNext" delay="0">
+                  <p:tgtEl>
+                    <p:sldTgt/>
+                  </p:tgtEl>
+                </p:cond>
+              </p:nextCondLst>
+            </p:seq>
+          </p:childTnLst>
+        </p:cTn>
+      </p:par>
+    </p:tnLst>
+    <p:bldLst>
+      <p:bldP spid="5" grpId="0" animBg="1"/>
+      <p:bldP spid="7" grpId="0" animBg="1"/>
+      <p:bldP spid="8" grpId="0" animBg="1"/>
+      <p:bldP spid="9" grpId="0" animBg="1"/>
+    </p:bldLst>
+  </p:timing>
 </p:sld>
 </file>
 
-<file path=ppt/slides/slide4.xml><?xml version="1.0" encoding="utf-8"?>
+<file path=ppt/slides/slide3.xml><?xml version="1.0" encoding="utf-8"?>
 <p:sld xmlns:a="http://schemas.openxmlformats.org/drawingml/2006/main" xmlns:r="http://schemas.openxmlformats.org/officeDocument/2006/relationships" xmlns:p="http://schemas.openxmlformats.org/presentationml/2006/main">
   <p:cSld>
     <p:spTree>
@@ -5423,7 +6479,7 @@
                     <a:latin typeface="Consolas" panose="020B0609020204030204" pitchFamily="49" charset="0"/>
                     <a:ea typeface="標楷體" panose="03000509000000000000" pitchFamily="65" charset="-120"/>
                   </a:rPr>
-                  <a:t>，即為每秒震動</a:t>
+                  <a:t>，即為每秒震動 </a:t>
                 </a:r>
                 <a:r>
                   <a:rPr lang="en-US" altLang="zh-TW" dirty="0">
@@ -5432,6 +6488,14 @@
                     <a:cs typeface="Arial" panose="020B0604020202020204" pitchFamily="34" charset="0"/>
                   </a:rPr>
                   <a:t>440</a:t>
+                </a:r>
+                <a:r>
+                  <a:rPr lang="zh-TW" altLang="en-US" dirty="0">
+                    <a:latin typeface="Arial" panose="020B0604020202020204" pitchFamily="34" charset="0"/>
+                    <a:ea typeface="標楷體" panose="03000509000000000000" pitchFamily="65" charset="-120"/>
+                    <a:cs typeface="Arial" panose="020B0604020202020204" pitchFamily="34" charset="0"/>
+                  </a:rPr>
+                  <a:t> </a:t>
                 </a:r>
                 <a:r>
                   <a:rPr lang="zh-TW" altLang="en-US" dirty="0">
@@ -5454,7 +6518,7 @@
                     <a:latin typeface="標楷體" panose="03000509000000000000" pitchFamily="65" charset="-120"/>
                     <a:ea typeface="標楷體" panose="03000509000000000000" pitchFamily="65" charset="-120"/>
                   </a:rPr>
-                  <a:t> 由以下方程式可得知</a:t>
+                  <a:t> 由以下方程式可以</a:t>
                 </a:r>
                 <a14:m>
                   <m:oMath xmlns:m="http://schemas.openxmlformats.org/officeDocument/2006/math">
@@ -5488,11 +6552,12 @@
                   </m:oMath>
                 </a14:m>
                 <a:r>
-                  <a:rPr lang="zh-TW" altLang="en-US" dirty="0">
-                    <a:latin typeface="標楷體" panose="03000509000000000000" pitchFamily="65" charset="-120"/>
+                  <a:rPr lang="en-US" altLang="zh-TW" dirty="0">
+                    <a:latin typeface="Arial" panose="020B0604020202020204" pitchFamily="34" charset="0"/>
                     <a:ea typeface="標楷體" panose="03000509000000000000" pitchFamily="65" charset="-120"/>
+                    <a:cs typeface="Arial" panose="020B0604020202020204" pitchFamily="34" charset="0"/>
                   </a:rPr>
-                  <a:t>這個音所對應的</a:t>
+                  <a:t>(</a:t>
                 </a:r>
                 <a14:m>
                   <m:oMath xmlns:m="http://schemas.openxmlformats.org/officeDocument/2006/math">
@@ -5511,19 +6576,20 @@
                   </m:oMath>
                 </a14:m>
                 <a:r>
-                  <a:rPr lang="zh-TW" altLang="en-US" dirty="0">
-                    <a:latin typeface="標楷體" panose="03000509000000000000" pitchFamily="65" charset="-120"/>
-                    <a:ea typeface="標楷體" panose="03000509000000000000" pitchFamily="65" charset="-120"/>
-                  </a:rPr>
-                  <a:t>為</a:t>
-                </a:r>
-                <a:r>
                   <a:rPr lang="en-US" altLang="zh-TW" dirty="0">
                     <a:latin typeface="Arial" panose="020B0604020202020204" pitchFamily="34" charset="0"/>
                     <a:ea typeface="標楷體" panose="03000509000000000000" pitchFamily="65" charset="-120"/>
                     <a:cs typeface="Arial" panose="020B0604020202020204" pitchFamily="34" charset="0"/>
                   </a:rPr>
-                  <a:t>69</a:t>
+                  <a:t>=69)</a:t>
+                </a:r>
+                <a:r>
+                  <a:rPr lang="zh-TW" altLang="en-US" dirty="0">
+                    <a:latin typeface="Arial" panose="020B0604020202020204" pitchFamily="34" charset="0"/>
+                    <a:ea typeface="標楷體" panose="03000509000000000000" pitchFamily="65" charset="-120"/>
+                    <a:cs typeface="Arial" panose="020B0604020202020204" pitchFamily="34" charset="0"/>
+                  </a:rPr>
+                  <a:t> 推算出整個線性音高空間</a:t>
                 </a:r>
                 <a:r>
                   <a:rPr lang="zh-TW" altLang="en-US" dirty="0">
@@ -5571,7 +6637,7 @@
                     <a:latin typeface="標楷體" panose="03000509000000000000" pitchFamily="65" charset="-120"/>
                     <a:ea typeface="標楷體" panose="03000509000000000000" pitchFamily="65" charset="-120"/>
                   </a:rPr>
-                  <a:t>每個半音之間相差一個音程。</a:t>
+                  <a:t>兩個半音相當於一個音程。</a:t>
                 </a:r>
                 <a:endParaRPr lang="en-US" altLang="zh-TW" dirty="0">
                   <a:latin typeface="標楷體" panose="03000509000000000000" pitchFamily="65" charset="-120"/>
@@ -5585,7 +6651,7 @@
                     <a:ea typeface="標楷體" panose="03000509000000000000" pitchFamily="65" charset="-120"/>
                     <a:cs typeface="Arial" panose="020B0604020202020204" pitchFamily="34" charset="0"/>
                   </a:rPr>
-                  <a:t>定義</a:t>
+                  <a:t>定義一個八度音程為</a:t>
                 </a:r>
                 <a:r>
                   <a:rPr lang="en-US" altLang="zh-TW" dirty="0">
@@ -5617,7 +6683,87 @@
                     <a:ea typeface="標楷體" panose="03000509000000000000" pitchFamily="65" charset="-120"/>
                     <a:cs typeface="Arial" panose="020B0604020202020204" pitchFamily="34" charset="0"/>
                   </a:rPr>
-                  <a:t>為一個八度音程</a:t>
+                  <a:t> </a:t>
+                </a:r>
+                <a:r>
+                  <a:rPr lang="en-US" altLang="zh-TW" dirty="0">
+                    <a:latin typeface="Arial" panose="020B0604020202020204" pitchFamily="34" charset="0"/>
+                    <a:ea typeface="標楷體" panose="03000509000000000000" pitchFamily="65" charset="-120"/>
+                    <a:cs typeface="Arial" panose="020B0604020202020204" pitchFamily="34" charset="0"/>
+                  </a:rPr>
+                  <a:t>(</a:t>
+                </a:r>
+                <a:r>
+                  <a:rPr lang="zh-TW" altLang="en-US" dirty="0">
+                    <a:latin typeface="Arial" panose="020B0604020202020204" pitchFamily="34" charset="0"/>
+                    <a:ea typeface="標楷體" panose="03000509000000000000" pitchFamily="65" charset="-120"/>
+                    <a:cs typeface="Arial" panose="020B0604020202020204" pitchFamily="34" charset="0"/>
+                  </a:rPr>
+                  <a:t>即 </a:t>
+                </a:r>
+                <a:r>
+                  <a:rPr lang="en-US" altLang="zh-TW" dirty="0">
+                    <a:latin typeface="Arial" panose="020B0604020202020204" pitchFamily="34" charset="0"/>
+                    <a:ea typeface="標楷體" panose="03000509000000000000" pitchFamily="65" charset="-120"/>
+                    <a:cs typeface="Arial" panose="020B0604020202020204" pitchFamily="34" charset="0"/>
+                  </a:rPr>
+                  <a:t>1</a:t>
+                </a:r>
+                <a:r>
+                  <a:rPr lang="zh-TW" altLang="en-US" dirty="0">
+                    <a:latin typeface="Arial" panose="020B0604020202020204" pitchFamily="34" charset="0"/>
+                    <a:ea typeface="標楷體" panose="03000509000000000000" pitchFamily="65" charset="-120"/>
+                    <a:cs typeface="Arial" panose="020B0604020202020204" pitchFamily="34" charset="0"/>
+                  </a:rPr>
+                  <a:t> 半音 </a:t>
+                </a:r>
+                <a:r>
+                  <a:rPr lang="en-US" altLang="zh-TW" dirty="0">
+                    <a:latin typeface="Arial" panose="020B0604020202020204" pitchFamily="34" charset="0"/>
+                    <a:ea typeface="標楷體" panose="03000509000000000000" pitchFamily="65" charset="-120"/>
+                    <a:cs typeface="Arial" panose="020B0604020202020204" pitchFamily="34" charset="0"/>
+                  </a:rPr>
+                  <a:t>=</a:t>
+                </a:r>
+                <a:r>
+                  <a:rPr lang="zh-TW" altLang="en-US" dirty="0">
+                    <a:latin typeface="Arial" panose="020B0604020202020204" pitchFamily="34" charset="0"/>
+                    <a:ea typeface="標楷體" panose="03000509000000000000" pitchFamily="65" charset="-120"/>
+                    <a:cs typeface="Arial" panose="020B0604020202020204" pitchFamily="34" charset="0"/>
+                  </a:rPr>
+                  <a:t> </a:t>
+                </a:r>
+                <a:r>
+                  <a:rPr lang="en-US" altLang="zh-TW" dirty="0">
+                    <a:latin typeface="Arial" panose="020B0604020202020204" pitchFamily="34" charset="0"/>
+                    <a:ea typeface="標楷體" panose="03000509000000000000" pitchFamily="65" charset="-120"/>
+                    <a:cs typeface="Arial" panose="020B0604020202020204" pitchFamily="34" charset="0"/>
+                  </a:rPr>
+                  <a:t>100</a:t>
+                </a:r>
+                <a:r>
+                  <a:rPr lang="zh-TW" altLang="en-US" dirty="0">
+                    <a:latin typeface="Arial" panose="020B0604020202020204" pitchFamily="34" charset="0"/>
+                    <a:ea typeface="標楷體" panose="03000509000000000000" pitchFamily="65" charset="-120"/>
+                    <a:cs typeface="Arial" panose="020B0604020202020204" pitchFamily="34" charset="0"/>
+                  </a:rPr>
+                  <a:t> 音分</a:t>
+                </a:r>
+                <a:r>
+                  <a:rPr lang="en-US" altLang="zh-TW" dirty="0">
+                    <a:latin typeface="Arial" panose="020B0604020202020204" pitchFamily="34" charset="0"/>
+                    <a:ea typeface="標楷體" panose="03000509000000000000" pitchFamily="65" charset="-120"/>
+                    <a:cs typeface="Arial" panose="020B0604020202020204" pitchFamily="34" charset="0"/>
+                  </a:rPr>
+                  <a:t>)</a:t>
+                </a:r>
+                <a:r>
+                  <a:rPr lang="zh-TW" altLang="en-US" dirty="0">
+                    <a:latin typeface="Arial" panose="020B0604020202020204" pitchFamily="34" charset="0"/>
+                    <a:ea typeface="標楷體" panose="03000509000000000000" pitchFamily="65" charset="-120"/>
+                    <a:cs typeface="Arial" panose="020B0604020202020204" pitchFamily="34" charset="0"/>
+                  </a:rPr>
+                  <a:t>。</a:t>
                 </a:r>
               </a:p>
             </p:txBody>
@@ -5642,7 +6788,7 @@
             </p:nvSpPr>
             <p:spPr>
               <a:blipFill>
-                <a:blip r:embed="rId2"/>
+                <a:blip r:embed="rId3"/>
                 <a:stretch>
                   <a:fillRect l="-1043" t="-2661"/>
                 </a:stretch>
@@ -5663,8 +6809,8 @@
           </p:sp>
         </mc:Fallback>
       </mc:AlternateContent>
-      <mc:AlternateContent xmlns:mc="http://schemas.openxmlformats.org/markup-compatibility/2006" xmlns:a14="http://schemas.microsoft.com/office/drawing/2010/main">
-        <mc:Choice Requires="a14">
+      <mc:AlternateContent xmlns:mc="http://schemas.openxmlformats.org/markup-compatibility/2006">
+        <mc:Choice xmlns:a14="http://schemas.microsoft.com/office/drawing/2010/main" Requires="a14">
           <p:sp>
             <p:nvSpPr>
               <p:cNvPr id="9" name="文字方塊 8">
@@ -5679,7 +6825,7 @@
             </p:nvSpPr>
             <p:spPr>
               <a:xfrm>
-                <a:off x="6565358" y="4469482"/>
+                <a:off x="1419426" y="5013882"/>
                 <a:ext cx="4676574" cy="561885"/>
               </a:xfrm>
               <a:prstGeom prst="rect">
@@ -5792,7 +6938,7 @@
             </p:txBody>
           </p:sp>
         </mc:Choice>
-        <mc:Fallback xmlns="">
+        <mc:Fallback>
           <p:sp>
             <p:nvSpPr>
               <p:cNvPr id="9" name="文字方塊 8">
@@ -5809,198 +6955,8 @@
             </p:nvSpPr>
             <p:spPr>
               <a:xfrm>
-                <a:off x="6565358" y="4469482"/>
+                <a:off x="1419426" y="5013882"/>
                 <a:ext cx="4676574" cy="561885"/>
-              </a:xfrm>
-              <a:prstGeom prst="rect">
-                <a:avLst/>
-              </a:prstGeom>
-              <a:blipFill>
-                <a:blip r:embed="rId3"/>
-                <a:stretch>
-                  <a:fillRect/>
-                </a:stretch>
-              </a:blipFill>
-            </p:spPr>
-            <p:txBody>
-              <a:bodyPr/>
-              <a:lstStyle/>
-              <a:p>
-                <a:r>
-                  <a:rPr lang="zh-TW" altLang="en-US">
-                    <a:noFill/>
-                  </a:rPr>
-                  <a:t> </a:t>
-                </a:r>
-              </a:p>
-            </p:txBody>
-          </p:sp>
-        </mc:Fallback>
-      </mc:AlternateContent>
-      <mc:AlternateContent xmlns:mc="http://schemas.openxmlformats.org/markup-compatibility/2006" xmlns:a14="http://schemas.microsoft.com/office/drawing/2010/main">
-        <mc:Choice Requires="a14">
-          <p:sp>
-            <p:nvSpPr>
-              <p:cNvPr id="10" name="文字方塊 9">
-                <a:extLst>
-                  <a:ext uri="{FF2B5EF4-FFF2-40B4-BE49-F238E27FC236}">
-                    <a16:creationId xmlns:a16="http://schemas.microsoft.com/office/drawing/2014/main" id="{3E5B5338-BD42-438F-873C-43680D3A112B}"/>
-                  </a:ext>
-                </a:extLst>
-              </p:cNvPr>
-              <p:cNvSpPr txBox="1"/>
-              <p:nvPr/>
-            </p:nvSpPr>
-            <p:spPr>
-              <a:xfrm>
-                <a:off x="7553529" y="5031367"/>
-                <a:ext cx="3800271" cy="922176"/>
-              </a:xfrm>
-              <a:prstGeom prst="rect">
-                <a:avLst/>
-              </a:prstGeom>
-              <a:noFill/>
-            </p:spPr>
-            <p:txBody>
-              <a:bodyPr wrap="none" rtlCol="0">
-                <a:spAutoFit/>
-              </a:bodyPr>
-              <a:lstStyle/>
-              <a:p>
-                <a:pPr/>
-                <a14:m>
-                  <m:oMathPara xmlns:m="http://schemas.openxmlformats.org/officeDocument/2006/math">
-                    <m:oMathParaPr>
-                      <m:jc m:val="centerGroup"/>
-                    </m:oMathParaPr>
-                    <m:oMath xmlns:m="http://schemas.openxmlformats.org/officeDocument/2006/math">
-                      <m:r>
-                        <a:rPr lang="zh-TW" altLang="en-US" sz="2400" i="1" dirty="0" smtClean="0">
-                          <a:latin typeface="Cambria Math" panose="02040503050406030204" pitchFamily="18" charset="0"/>
-                        </a:rPr>
-                        <m:t>𝑝</m:t>
-                      </m:r>
-                      <m:r>
-                        <a:rPr lang="zh-TW" altLang="en-US" sz="2400" i="0" dirty="0">
-                          <a:latin typeface="Cambria Math" panose="02040503050406030204" pitchFamily="18" charset="0"/>
-                        </a:rPr>
-                        <m:t>=69+12×</m:t>
-                      </m:r>
-                      <m:func>
-                        <m:funcPr>
-                          <m:ctrlPr>
-                            <a:rPr lang="zh-TW" altLang="en-US" sz="2400" i="1" dirty="0">
-                              <a:latin typeface="Cambria Math" panose="02040503050406030204" pitchFamily="18" charset="0"/>
-                            </a:rPr>
-                          </m:ctrlPr>
-                        </m:funcPr>
-                        <m:fName>
-                          <m:sSub>
-                            <m:sSubPr>
-                              <m:ctrlPr>
-                                <a:rPr lang="zh-TW" altLang="en-US" sz="2400" i="1" dirty="0">
-                                  <a:solidFill>
-                                    <a:srgbClr val="836967"/>
-                                  </a:solidFill>
-                                  <a:latin typeface="Cambria Math" panose="02040503050406030204" pitchFamily="18" charset="0"/>
-                                </a:rPr>
-                              </m:ctrlPr>
-                            </m:sSubPr>
-                            <m:e>
-                              <m:r>
-                                <m:rPr>
-                                  <m:sty m:val="p"/>
-                                </m:rPr>
-                                <a:rPr lang="zh-TW" altLang="en-US" sz="2400" i="0" dirty="0">
-                                  <a:latin typeface="Cambria Math" panose="02040503050406030204" pitchFamily="18" charset="0"/>
-                                </a:rPr>
-                                <m:t>log</m:t>
-                              </m:r>
-                            </m:e>
-                            <m:sub>
-                              <m:r>
-                                <a:rPr lang="zh-TW" altLang="en-US" sz="2400" i="0" dirty="0">
-                                  <a:latin typeface="Cambria Math" panose="02040503050406030204" pitchFamily="18" charset="0"/>
-                                </a:rPr>
-                                <m:t>2</m:t>
-                              </m:r>
-                            </m:sub>
-                          </m:sSub>
-                        </m:fName>
-                        <m:e>
-                          <m:d>
-                            <m:dPr>
-                              <m:ctrlPr>
-                                <a:rPr lang="zh-TW" altLang="en-US" sz="2400" i="1" dirty="0">
-                                  <a:solidFill>
-                                    <a:srgbClr val="836967"/>
-                                  </a:solidFill>
-                                  <a:latin typeface="Cambria Math" panose="02040503050406030204" pitchFamily="18" charset="0"/>
-                                </a:rPr>
-                              </m:ctrlPr>
-                            </m:dPr>
-                            <m:e>
-                              <m:f>
-                                <m:fPr>
-                                  <m:ctrlPr>
-                                    <a:rPr lang="zh-TW" altLang="en-US" sz="2400" i="1" dirty="0">
-                                      <a:solidFill>
-                                        <a:srgbClr val="836967"/>
-                                      </a:solidFill>
-                                      <a:latin typeface="Cambria Math" panose="02040503050406030204" pitchFamily="18" charset="0"/>
-                                    </a:rPr>
-                                  </m:ctrlPr>
-                                </m:fPr>
-                                <m:num>
-                                  <m:r>
-                                    <a:rPr lang="zh-TW" altLang="en-US" sz="2400" i="1" dirty="0">
-                                      <a:latin typeface="Cambria Math" panose="02040503050406030204" pitchFamily="18" charset="0"/>
-                                    </a:rPr>
-                                    <m:t>𝑓</m:t>
-                                  </m:r>
-                                </m:num>
-                                <m:den>
-                                  <m:r>
-                                    <a:rPr lang="zh-TW" altLang="en-US" sz="2400" i="0" dirty="0">
-                                      <a:latin typeface="Cambria Math" panose="02040503050406030204" pitchFamily="18" charset="0"/>
-                                    </a:rPr>
-                                    <m:t>440</m:t>
-                                  </m:r>
-                                </m:den>
-                              </m:f>
-                            </m:e>
-                          </m:d>
-                        </m:e>
-                      </m:func>
-                    </m:oMath>
-                  </m:oMathPara>
-                </a14:m>
-                <a:endParaRPr lang="zh-TW" altLang="en-US" sz="2400" dirty="0">
-                  <a:latin typeface="Consolas" panose="020B0609020204030204" pitchFamily="49" charset="0"/>
-                </a:endParaRPr>
-              </a:p>
-            </p:txBody>
-          </p:sp>
-        </mc:Choice>
-        <mc:Fallback xmlns="">
-          <p:sp>
-            <p:nvSpPr>
-              <p:cNvPr id="10" name="文字方塊 9">
-                <a:extLst>
-                  <a:ext uri="{FF2B5EF4-FFF2-40B4-BE49-F238E27FC236}">
-                    <a16:creationId xmlns:a16="http://schemas.microsoft.com/office/drawing/2014/main" id="{3E5B5338-BD42-438F-873C-43680D3A112B}"/>
-                  </a:ext>
-                </a:extLst>
-              </p:cNvPr>
-              <p:cNvSpPr txBox="1">
-                <a:spLocks noRot="1" noChangeAspect="1" noMove="1" noResize="1" noEditPoints="1" noAdjustHandles="1" noChangeArrowheads="1" noChangeShapeType="1" noTextEdit="1"/>
-              </p:cNvSpPr>
-              <p:nvPr/>
-            </p:nvSpPr>
-            <p:spPr>
-              <a:xfrm>
-                <a:off x="7553529" y="5031367"/>
-                <a:ext cx="3800271" cy="922176"/>
               </a:xfrm>
               <a:prstGeom prst="rect">
                 <a:avLst/>
@@ -6027,8 +6983,8 @@
           </p:sp>
         </mc:Fallback>
       </mc:AlternateContent>
-      <mc:AlternateContent xmlns:mc="http://schemas.openxmlformats.org/markup-compatibility/2006" xmlns:a14="http://schemas.microsoft.com/office/drawing/2010/main">
-        <mc:Choice Requires="a14">
+      <mc:AlternateContent xmlns:mc="http://schemas.openxmlformats.org/markup-compatibility/2006">
+        <mc:Choice xmlns:a14="http://schemas.microsoft.com/office/drawing/2010/main" Requires="a14">
           <p:sp>
             <p:nvSpPr>
               <p:cNvPr id="11" name="文字方塊 10">
@@ -6043,7 +6999,7 @@
             </p:nvSpPr>
             <p:spPr>
               <a:xfrm>
-                <a:off x="2291423" y="4879413"/>
+                <a:off x="6890317" y="4879904"/>
                 <a:ext cx="3030657" cy="829843"/>
               </a:xfrm>
               <a:prstGeom prst="rect">
@@ -6065,1331 +7021,10 @@
                     </m:oMathParaPr>
                     <m:oMath xmlns:m="http://schemas.openxmlformats.org/officeDocument/2006/math">
                       <m:r>
-                        <a:rPr lang="zh-TW" altLang="en-US" sz="2400" i="1" smtClean="0">
+                        <a:rPr lang="en-US" altLang="zh-TW" sz="2400" b="0" i="1" smtClean="0">
                           <a:latin typeface="Cambria Math" panose="02040503050406030204" pitchFamily="18" charset="0"/>
                         </a:rPr>
-                        <m:t>𝑛</m:t>
-                      </m:r>
-                      <m:r>
-                        <a:rPr lang="zh-TW" altLang="en-US" sz="2400" i="0">
-                          <a:latin typeface="Cambria Math" panose="02040503050406030204" pitchFamily="18" charset="0"/>
-                        </a:rPr>
-                        <m:t>=1200×</m:t>
-                      </m:r>
-                      <m:func>
-                        <m:funcPr>
-                          <m:ctrlPr>
-                            <a:rPr lang="zh-TW" altLang="en-US" sz="2400" i="1">
-                              <a:latin typeface="Cambria Math" panose="02040503050406030204" pitchFamily="18" charset="0"/>
-                            </a:rPr>
-                          </m:ctrlPr>
-                        </m:funcPr>
-                        <m:fName>
-                          <m:sSub>
-                            <m:sSubPr>
-                              <m:ctrlPr>
-                                <a:rPr lang="zh-TW" altLang="en-US" sz="2400" i="1">
-                                  <a:solidFill>
-                                    <a:srgbClr val="836967"/>
-                                  </a:solidFill>
-                                  <a:latin typeface="Cambria Math" panose="02040503050406030204" pitchFamily="18" charset="0"/>
-                                </a:rPr>
-                              </m:ctrlPr>
-                            </m:sSubPr>
-                            <m:e>
-                              <m:r>
-                                <m:rPr>
-                                  <m:sty m:val="p"/>
-                                </m:rPr>
-                                <a:rPr lang="zh-TW" altLang="en-US" sz="2400" i="0">
-                                  <a:latin typeface="Cambria Math" panose="02040503050406030204" pitchFamily="18" charset="0"/>
-                                </a:rPr>
-                                <m:t>log</m:t>
-                              </m:r>
-                            </m:e>
-                            <m:sub>
-                              <m:r>
-                                <a:rPr lang="zh-TW" altLang="en-US" sz="2400" i="0">
-                                  <a:latin typeface="Cambria Math" panose="02040503050406030204" pitchFamily="18" charset="0"/>
-                                </a:rPr>
-                                <m:t>2</m:t>
-                              </m:r>
-                            </m:sub>
-                          </m:sSub>
-                        </m:fName>
-                        <m:e>
-                          <m:d>
-                            <m:dPr>
-                              <m:ctrlPr>
-                                <a:rPr lang="zh-TW" altLang="en-US" sz="2400" i="1">
-                                  <a:solidFill>
-                                    <a:srgbClr val="836967"/>
-                                  </a:solidFill>
-                                  <a:latin typeface="Cambria Math" panose="02040503050406030204" pitchFamily="18" charset="0"/>
-                                </a:rPr>
-                              </m:ctrlPr>
-                            </m:dPr>
-                            <m:e>
-                              <m:f>
-                                <m:fPr>
-                                  <m:ctrlPr>
-                                    <a:rPr lang="zh-TW" altLang="en-US" sz="2400" i="1">
-                                      <a:solidFill>
-                                        <a:srgbClr val="836967"/>
-                                      </a:solidFill>
-                                      <a:latin typeface="Cambria Math" panose="02040503050406030204" pitchFamily="18" charset="0"/>
-                                    </a:rPr>
-                                  </m:ctrlPr>
-                                </m:fPr>
-                                <m:num>
-                                  <m:sSub>
-                                    <m:sSubPr>
-                                      <m:ctrlPr>
-                                        <a:rPr lang="zh-TW" altLang="en-US" sz="2400" i="1">
-                                          <a:solidFill>
-                                            <a:srgbClr val="836967"/>
-                                          </a:solidFill>
-                                          <a:latin typeface="Cambria Math" panose="02040503050406030204" pitchFamily="18" charset="0"/>
-                                        </a:rPr>
-                                      </m:ctrlPr>
-                                    </m:sSubPr>
-                                    <m:e>
-                                      <m:r>
-                                        <a:rPr lang="zh-TW" altLang="en-US" sz="2400" i="1">
-                                          <a:latin typeface="Cambria Math" panose="02040503050406030204" pitchFamily="18" charset="0"/>
-                                        </a:rPr>
-                                        <m:t>𝑓</m:t>
-                                      </m:r>
-                                    </m:e>
-                                    <m:sub>
-                                      <m:r>
-                                        <a:rPr lang="zh-TW" altLang="en-US" sz="2400" i="1">
-                                          <a:latin typeface="Cambria Math" panose="02040503050406030204" pitchFamily="18" charset="0"/>
-                                        </a:rPr>
-                                        <m:t>𝑎</m:t>
-                                      </m:r>
-                                    </m:sub>
-                                  </m:sSub>
-                                </m:num>
-                                <m:den>
-                                  <m:sSub>
-                                    <m:sSubPr>
-                                      <m:ctrlPr>
-                                        <a:rPr lang="zh-TW" altLang="en-US" sz="2400" i="1">
-                                          <a:solidFill>
-                                            <a:srgbClr val="836967"/>
-                                          </a:solidFill>
-                                          <a:latin typeface="Cambria Math" panose="02040503050406030204" pitchFamily="18" charset="0"/>
-                                        </a:rPr>
-                                      </m:ctrlPr>
-                                    </m:sSubPr>
-                                    <m:e>
-                                      <m:r>
-                                        <a:rPr lang="zh-TW" altLang="en-US" sz="2400" i="1">
-                                          <a:latin typeface="Cambria Math" panose="02040503050406030204" pitchFamily="18" charset="0"/>
-                                        </a:rPr>
-                                        <m:t>𝑓</m:t>
-                                      </m:r>
-                                    </m:e>
-                                    <m:sub>
-                                      <m:r>
-                                        <a:rPr lang="zh-TW" altLang="en-US" sz="2400" i="1">
-                                          <a:latin typeface="Cambria Math" panose="02040503050406030204" pitchFamily="18" charset="0"/>
-                                        </a:rPr>
-                                        <m:t>𝑏</m:t>
-                                      </m:r>
-                                    </m:sub>
-                                  </m:sSub>
-                                </m:den>
-                              </m:f>
-                            </m:e>
-                          </m:d>
-                        </m:e>
-                      </m:func>
-                    </m:oMath>
-                  </m:oMathPara>
-                </a14:m>
-                <a:endParaRPr lang="zh-TW" altLang="en-US" dirty="0"/>
-              </a:p>
-            </p:txBody>
-          </p:sp>
-        </mc:Choice>
-        <mc:Fallback xmlns="">
-          <p:sp>
-            <p:nvSpPr>
-              <p:cNvPr id="11" name="文字方塊 10">
-                <a:extLst>
-                  <a:ext uri="{FF2B5EF4-FFF2-40B4-BE49-F238E27FC236}">
-                    <a16:creationId xmlns:a16="http://schemas.microsoft.com/office/drawing/2014/main" id="{4B3FEC1E-03AF-4602-B5CA-B3ED711EEEFF}"/>
-                  </a:ext>
-                </a:extLst>
-              </p:cNvPr>
-              <p:cNvSpPr txBox="1">
-                <a:spLocks noRot="1" noChangeAspect="1" noMove="1" noResize="1" noEditPoints="1" noAdjustHandles="1" noChangeArrowheads="1" noChangeShapeType="1" noTextEdit="1"/>
-              </p:cNvSpPr>
-              <p:nvPr/>
-            </p:nvSpPr>
-            <p:spPr>
-              <a:xfrm>
-                <a:off x="2291423" y="4879413"/>
-                <a:ext cx="3030657" cy="829843"/>
-              </a:xfrm>
-              <a:prstGeom prst="rect">
-                <a:avLst/>
-              </a:prstGeom>
-              <a:blipFill>
-                <a:blip r:embed="rId5"/>
-                <a:stretch>
-                  <a:fillRect/>
-                </a:stretch>
-              </a:blipFill>
-            </p:spPr>
-            <p:txBody>
-              <a:bodyPr/>
-              <a:lstStyle/>
-              <a:p>
-                <a:r>
-                  <a:rPr lang="zh-TW" altLang="en-US">
-                    <a:noFill/>
-                  </a:rPr>
-                  <a:t> </a:t>
-                </a:r>
-              </a:p>
-            </p:txBody>
-          </p:sp>
-        </mc:Fallback>
-      </mc:AlternateContent>
-    </p:spTree>
-    <p:extLst>
-      <p:ext uri="{BB962C8B-B14F-4D97-AF65-F5344CB8AC3E}">
-        <p14:creationId xmlns:p14="http://schemas.microsoft.com/office/powerpoint/2010/main" val="1303041321"/>
-      </p:ext>
-    </p:extLst>
-  </p:cSld>
-  <p:clrMapOvr>
-    <a:masterClrMapping/>
-  </p:clrMapOvr>
-</p:sld>
-</file>
-
-<file path=ppt/slides/slide5.xml><?xml version="1.0" encoding="utf-8"?>
-<p:sld xmlns:a="http://schemas.openxmlformats.org/drawingml/2006/main" xmlns:r="http://schemas.openxmlformats.org/officeDocument/2006/relationships" xmlns:p="http://schemas.openxmlformats.org/presentationml/2006/main">
-  <p:cSld>
-    <p:spTree>
-      <p:nvGrpSpPr>
-        <p:cNvPr id="1" name=""/>
-        <p:cNvGrpSpPr/>
-        <p:nvPr/>
-      </p:nvGrpSpPr>
-      <p:grpSpPr>
-        <a:xfrm>
-          <a:off x="0" y="0"/>
-          <a:ext cx="0" cy="0"/>
-          <a:chOff x="0" y="0"/>
-          <a:chExt cx="0" cy="0"/>
-        </a:xfrm>
-      </p:grpSpPr>
-      <p:pic>
-        <p:nvPicPr>
-          <p:cNvPr id="4098" name="Picture 2">
-            <a:extLst>
-              <a:ext uri="{FF2B5EF4-FFF2-40B4-BE49-F238E27FC236}">
-                <a16:creationId xmlns:a16="http://schemas.microsoft.com/office/drawing/2014/main" id="{A9DAA703-06E0-45BE-909D-672217DDCEF7}"/>
-              </a:ext>
-            </a:extLst>
-          </p:cNvPr>
-          <p:cNvPicPr>
-            <a:picLocks noChangeAspect="1" noChangeArrowheads="1"/>
-          </p:cNvPicPr>
-          <p:nvPr/>
-        </p:nvPicPr>
-        <p:blipFill>
-          <a:blip r:embed="rId3">
-            <a:extLst>
-              <a:ext uri="{28A0092B-C50C-407E-A947-70E740481C1C}">
-                <a14:useLocalDpi xmlns:a14="http://schemas.microsoft.com/office/drawing/2010/main" val="0"/>
-              </a:ext>
-            </a:extLst>
-          </a:blip>
-          <a:srcRect/>
-          <a:stretch>
-            <a:fillRect/>
-          </a:stretch>
-        </p:blipFill>
-        <p:spPr bwMode="auto">
-          <a:xfrm>
-            <a:off x="6158815" y="2094166"/>
-            <a:ext cx="5615946" cy="1513583"/>
-          </a:xfrm>
-          <a:prstGeom prst="rect">
-            <a:avLst/>
-          </a:prstGeom>
-          <a:noFill/>
-          <a:extLst>
-            <a:ext uri="{909E8E84-426E-40DD-AFC4-6F175D3DCCD1}">
-              <a14:hiddenFill xmlns:a14="http://schemas.microsoft.com/office/drawing/2010/main">
-                <a:solidFill>
-                  <a:srgbClr val="FFFFFF"/>
-                </a:solidFill>
-              </a14:hiddenFill>
-            </a:ext>
-          </a:extLst>
-        </p:spPr>
-      </p:pic>
-      <mc:AlternateContent xmlns:mc="http://schemas.openxmlformats.org/markup-compatibility/2006" xmlns:a14="http://schemas.microsoft.com/office/drawing/2010/main">
-        <mc:Choice Requires="a14">
-          <p:sp>
-            <p:nvSpPr>
-              <p:cNvPr id="8" name="文字方塊 7">
-                <a:extLst>
-                  <a:ext uri="{FF2B5EF4-FFF2-40B4-BE49-F238E27FC236}">
-                    <a16:creationId xmlns:a16="http://schemas.microsoft.com/office/drawing/2014/main" id="{21643FED-07D7-4A12-986C-B07FA308904E}"/>
-                  </a:ext>
-                </a:extLst>
-              </p:cNvPr>
-              <p:cNvSpPr txBox="1"/>
-              <p:nvPr/>
-            </p:nvSpPr>
-            <p:spPr>
-              <a:xfrm>
-                <a:off x="6783265" y="1273102"/>
-                <a:ext cx="4335451" cy="369332"/>
-              </a:xfrm>
-              <a:prstGeom prst="rect">
-                <a:avLst/>
-              </a:prstGeom>
-              <a:noFill/>
-            </p:spPr>
-            <p:txBody>
-              <a:bodyPr wrap="square" lIns="0" tIns="0" rIns="0" bIns="0" rtlCol="0">
-                <a:spAutoFit/>
-              </a:bodyPr>
-              <a:lstStyle/>
-              <a:p>
-                <a14:m>
-                  <m:oMath xmlns:m="http://schemas.openxmlformats.org/officeDocument/2006/math">
-                    <m:r>
-                      <a:rPr lang="zh-TW" altLang="en-US" sz="2400" i="1" smtClean="0">
-                        <a:latin typeface="Cambria Math" panose="02040503050406030204" pitchFamily="18" charset="0"/>
-                      </a:rPr>
-                      <m:t>𝐶𝑏</m:t>
-                    </m:r>
-                    <m:r>
-                      <a:rPr lang="en-US" altLang="zh-TW" sz="2400" i="1">
-                        <a:latin typeface="Cambria Math" panose="02040503050406030204" pitchFamily="18" charset="0"/>
-                      </a:rPr>
-                      <m:t>4</m:t>
-                    </m:r>
-                    <m:r>
-                      <a:rPr lang="zh-TW" altLang="en-US" sz="2400" i="1">
-                        <a:latin typeface="Cambria Math" panose="02040503050406030204" pitchFamily="18" charset="0"/>
-                      </a:rPr>
-                      <m:t> </m:t>
-                    </m:r>
-                  </m:oMath>
-                </a14:m>
-                <a:r>
-                  <a:rPr lang="en-US" altLang="zh-TW" sz="2400" dirty="0">
-                    <a:latin typeface="Consolas" panose="020B0609020204030204" pitchFamily="49" charset="0"/>
-                    <a:ea typeface="標楷體" panose="03000509000000000000" pitchFamily="65" charset="-120"/>
-                  </a:rPr>
-                  <a:t>:</a:t>
-                </a:r>
-                <a:r>
-                  <a:rPr lang="zh-TW" altLang="en-US" sz="2400" dirty="0">
-                    <a:latin typeface="Consolas" panose="020B0609020204030204" pitchFamily="49" charset="0"/>
-                    <a:ea typeface="標楷體" panose="03000509000000000000" pitchFamily="65" charset="-120"/>
-                  </a:rPr>
-                  <a:t> 代表</a:t>
-                </a:r>
-                <a:r>
-                  <a:rPr lang="en-US" altLang="zh-TW" sz="2400" dirty="0">
-                    <a:latin typeface="Arial" panose="020B0604020202020204" pitchFamily="34" charset="0"/>
-                    <a:ea typeface="標楷體" panose="03000509000000000000" pitchFamily="65" charset="-120"/>
-                    <a:cs typeface="Arial" panose="020B0604020202020204" pitchFamily="34" charset="0"/>
-                  </a:rPr>
-                  <a:t>C4</a:t>
-                </a:r>
-                <a:r>
-                  <a:rPr lang="zh-TW" altLang="en-US" sz="2400" dirty="0">
-                    <a:latin typeface="Consolas" panose="020B0609020204030204" pitchFamily="49" charset="0"/>
-                    <a:ea typeface="標楷體" panose="03000509000000000000" pitchFamily="65" charset="-120"/>
-                  </a:rPr>
-                  <a:t>這個音高降半音 </a:t>
-                </a:r>
-              </a:p>
-            </p:txBody>
-          </p:sp>
-        </mc:Choice>
-        <mc:Fallback xmlns="">
-          <p:sp>
-            <p:nvSpPr>
-              <p:cNvPr id="8" name="文字方塊 7">
-                <a:extLst>
-                  <a:ext uri="{FF2B5EF4-FFF2-40B4-BE49-F238E27FC236}">
-                    <a16:creationId xmlns:a16="http://schemas.microsoft.com/office/drawing/2014/main" id="{21643FED-07D7-4A12-986C-B07FA308904E}"/>
-                  </a:ext>
-                </a:extLst>
-              </p:cNvPr>
-              <p:cNvSpPr txBox="1">
-                <a:spLocks noRot="1" noChangeAspect="1" noMove="1" noResize="1" noEditPoints="1" noAdjustHandles="1" noChangeArrowheads="1" noChangeShapeType="1" noTextEdit="1"/>
-              </p:cNvSpPr>
-              <p:nvPr/>
-            </p:nvSpPr>
-            <p:spPr>
-              <a:xfrm>
-                <a:off x="6783265" y="1273102"/>
-                <a:ext cx="4335451" cy="369332"/>
-              </a:xfrm>
-              <a:prstGeom prst="rect">
-                <a:avLst/>
-              </a:prstGeom>
-              <a:blipFill>
-                <a:blip r:embed="rId5"/>
-                <a:stretch>
-                  <a:fillRect l="-2532" t="-28333" b="-50000"/>
-                </a:stretch>
-              </a:blipFill>
-            </p:spPr>
-            <p:txBody>
-              <a:bodyPr/>
-              <a:lstStyle/>
-              <a:p>
-                <a:r>
-                  <a:rPr lang="zh-TW" altLang="en-US">
-                    <a:noFill/>
-                  </a:rPr>
-                  <a:t> </a:t>
-                </a:r>
-              </a:p>
-            </p:txBody>
-          </p:sp>
-        </mc:Fallback>
-      </mc:AlternateContent>
-      <mc:AlternateContent xmlns:mc="http://schemas.openxmlformats.org/markup-compatibility/2006" xmlns:a14="http://schemas.microsoft.com/office/drawing/2010/main">
-        <mc:Choice Requires="a14">
-          <p:sp>
-            <p:nvSpPr>
-              <p:cNvPr id="10" name="文字方塊 9">
-                <a:extLst>
-                  <a:ext uri="{FF2B5EF4-FFF2-40B4-BE49-F238E27FC236}">
-                    <a16:creationId xmlns:a16="http://schemas.microsoft.com/office/drawing/2014/main" id="{F569E197-6A37-4FFA-A110-3DBE3271A53C}"/>
-                  </a:ext>
-                </a:extLst>
-              </p:cNvPr>
-              <p:cNvSpPr txBox="1"/>
-              <p:nvPr/>
-            </p:nvSpPr>
-            <p:spPr>
-              <a:xfrm>
-                <a:off x="6783264" y="857556"/>
-                <a:ext cx="4335451" cy="369332"/>
-              </a:xfrm>
-              <a:prstGeom prst="rect">
-                <a:avLst/>
-              </a:prstGeom>
-              <a:noFill/>
-            </p:spPr>
-            <p:txBody>
-              <a:bodyPr wrap="square" lIns="0" tIns="0" rIns="0" bIns="0" rtlCol="0">
-                <a:spAutoFit/>
-              </a:bodyPr>
-              <a:lstStyle/>
-              <a:p>
-                <a14:m>
-                  <m:oMath xmlns:m="http://schemas.openxmlformats.org/officeDocument/2006/math">
-                    <m:r>
-                      <a:rPr lang="zh-TW" altLang="en-US" sz="2400" i="1" smtClean="0">
-                        <a:latin typeface="Cambria Math" panose="02040503050406030204" pitchFamily="18" charset="0"/>
-                      </a:rPr>
-                      <m:t>𝐶</m:t>
-                    </m:r>
-                    <m:r>
-                      <a:rPr lang="en-US" altLang="zh-TW" sz="2400" i="1">
-                        <a:latin typeface="Cambria Math" panose="02040503050406030204" pitchFamily="18" charset="0"/>
-                      </a:rPr>
-                      <m:t>#</m:t>
-                    </m:r>
-                    <m:r>
-                      <a:rPr lang="en-US" altLang="zh-TW" sz="2400" i="1" smtClean="0">
-                        <a:latin typeface="Cambria Math" panose="02040503050406030204" pitchFamily="18" charset="0"/>
-                      </a:rPr>
-                      <m:t>4</m:t>
-                    </m:r>
-                    <m:r>
-                      <a:rPr lang="zh-TW" altLang="en-US" sz="2400" i="1">
-                        <a:latin typeface="Cambria Math" panose="02040503050406030204" pitchFamily="18" charset="0"/>
-                      </a:rPr>
-                      <m:t> </m:t>
-                    </m:r>
-                  </m:oMath>
-                </a14:m>
-                <a:r>
-                  <a:rPr lang="en-US" altLang="zh-TW" sz="2400" dirty="0">
-                    <a:latin typeface="Consolas" panose="020B0609020204030204" pitchFamily="49" charset="0"/>
-                    <a:ea typeface="標楷體" panose="03000509000000000000" pitchFamily="65" charset="-120"/>
-                  </a:rPr>
-                  <a:t>:</a:t>
-                </a:r>
-                <a:r>
-                  <a:rPr lang="zh-TW" altLang="en-US" sz="2400" dirty="0">
-                    <a:latin typeface="Consolas" panose="020B0609020204030204" pitchFamily="49" charset="0"/>
-                    <a:ea typeface="標楷體" panose="03000509000000000000" pitchFamily="65" charset="-120"/>
-                  </a:rPr>
-                  <a:t> 代表</a:t>
-                </a:r>
-                <a:r>
-                  <a:rPr lang="en-US" altLang="zh-TW" sz="2400" dirty="0">
-                    <a:latin typeface="Arial" panose="020B0604020202020204" pitchFamily="34" charset="0"/>
-                    <a:ea typeface="標楷體" panose="03000509000000000000" pitchFamily="65" charset="-120"/>
-                    <a:cs typeface="Arial" panose="020B0604020202020204" pitchFamily="34" charset="0"/>
-                  </a:rPr>
-                  <a:t>C4</a:t>
-                </a:r>
-                <a:r>
-                  <a:rPr lang="zh-TW" altLang="en-US" sz="2400" dirty="0">
-                    <a:latin typeface="Consolas" panose="020B0609020204030204" pitchFamily="49" charset="0"/>
-                    <a:ea typeface="標楷體" panose="03000509000000000000" pitchFamily="65" charset="-120"/>
-                  </a:rPr>
-                  <a:t>這個音高升半音 </a:t>
-                </a:r>
-              </a:p>
-            </p:txBody>
-          </p:sp>
-        </mc:Choice>
-        <mc:Fallback xmlns="">
-          <p:sp>
-            <p:nvSpPr>
-              <p:cNvPr id="10" name="文字方塊 9">
-                <a:extLst>
-                  <a:ext uri="{FF2B5EF4-FFF2-40B4-BE49-F238E27FC236}">
-                    <a16:creationId xmlns:a16="http://schemas.microsoft.com/office/drawing/2014/main" id="{F569E197-6A37-4FFA-A110-3DBE3271A53C}"/>
-                  </a:ext>
-                </a:extLst>
-              </p:cNvPr>
-              <p:cNvSpPr txBox="1">
-                <a:spLocks noRot="1" noChangeAspect="1" noMove="1" noResize="1" noEditPoints="1" noAdjustHandles="1" noChangeArrowheads="1" noChangeShapeType="1" noTextEdit="1"/>
-              </p:cNvSpPr>
-              <p:nvPr/>
-            </p:nvSpPr>
-            <p:spPr>
-              <a:xfrm>
-                <a:off x="6783264" y="857556"/>
-                <a:ext cx="4335451" cy="369332"/>
-              </a:xfrm>
-              <a:prstGeom prst="rect">
-                <a:avLst/>
-              </a:prstGeom>
-              <a:blipFill>
-                <a:blip r:embed="rId6"/>
-                <a:stretch>
-                  <a:fillRect l="-2532" t="-28333" b="-50000"/>
-                </a:stretch>
-              </a:blipFill>
-            </p:spPr>
-            <p:txBody>
-              <a:bodyPr/>
-              <a:lstStyle/>
-              <a:p>
-                <a:r>
-                  <a:rPr lang="zh-TW" altLang="en-US">
-                    <a:noFill/>
-                  </a:rPr>
-                  <a:t> </a:t>
-                </a:r>
-              </a:p>
-            </p:txBody>
-          </p:sp>
-        </mc:Fallback>
-      </mc:AlternateContent>
-      <p:pic>
-        <p:nvPicPr>
-          <p:cNvPr id="11" name="圖片 10">
-            <a:extLst>
-              <a:ext uri="{FF2B5EF4-FFF2-40B4-BE49-F238E27FC236}">
-                <a16:creationId xmlns:a16="http://schemas.microsoft.com/office/drawing/2014/main" id="{E187AC0F-1A69-41D0-8304-16DE2582C26D}"/>
-              </a:ext>
-            </a:extLst>
-          </p:cNvPr>
-          <p:cNvPicPr>
-            <a:picLocks noChangeAspect="1"/>
-          </p:cNvPicPr>
-          <p:nvPr/>
-        </p:nvPicPr>
-        <p:blipFill>
-          <a:blip r:embed="rId7">
-            <a:extLst>
-              <a:ext uri="{28A0092B-C50C-407E-A947-70E740481C1C}">
-                <a14:useLocalDpi xmlns:a14="http://schemas.microsoft.com/office/drawing/2010/main" val="0"/>
-              </a:ext>
-            </a:extLst>
-          </a:blip>
-          <a:stretch>
-            <a:fillRect/>
-          </a:stretch>
-        </p:blipFill>
-        <p:spPr>
-          <a:xfrm>
-            <a:off x="1836501" y="4484071"/>
-            <a:ext cx="8518998" cy="2373929"/>
-          </a:xfrm>
-          <a:prstGeom prst="rect">
-            <a:avLst/>
-          </a:prstGeom>
-        </p:spPr>
-      </p:pic>
-      <p:pic>
-        <p:nvPicPr>
-          <p:cNvPr id="9" name="圖片 8">
-            <a:extLst>
-              <a:ext uri="{FF2B5EF4-FFF2-40B4-BE49-F238E27FC236}">
-                <a16:creationId xmlns:a16="http://schemas.microsoft.com/office/drawing/2014/main" id="{5B4B8FE9-ECDB-427D-9AEE-E216B3F333A7}"/>
-              </a:ext>
-            </a:extLst>
-          </p:cNvPr>
-          <p:cNvPicPr>
-            <a:picLocks noChangeAspect="1"/>
-          </p:cNvPicPr>
-          <p:nvPr/>
-        </p:nvPicPr>
-        <p:blipFill>
-          <a:blip r:embed="rId8"/>
-          <a:stretch>
-            <a:fillRect/>
-          </a:stretch>
-        </p:blipFill>
-        <p:spPr>
-          <a:xfrm>
-            <a:off x="95704" y="110573"/>
-            <a:ext cx="6266161" cy="4280452"/>
-          </a:xfrm>
-          <a:prstGeom prst="rect">
-            <a:avLst/>
-          </a:prstGeom>
-        </p:spPr>
-      </p:pic>
-    </p:spTree>
-    <p:extLst>
-      <p:ext uri="{BB962C8B-B14F-4D97-AF65-F5344CB8AC3E}">
-        <p14:creationId xmlns:p14="http://schemas.microsoft.com/office/powerpoint/2010/main" val="984300874"/>
-      </p:ext>
-    </p:extLst>
-  </p:cSld>
-  <p:clrMapOvr>
-    <a:masterClrMapping/>
-  </p:clrMapOvr>
-</p:sld>
-</file>
-
-<file path=ppt/slides/slide6.xml><?xml version="1.0" encoding="utf-8"?>
-<p:sld xmlns:a="http://schemas.openxmlformats.org/drawingml/2006/main" xmlns:r="http://schemas.openxmlformats.org/officeDocument/2006/relationships" xmlns:p="http://schemas.openxmlformats.org/presentationml/2006/main">
-  <p:cSld>
-    <p:spTree>
-      <p:nvGrpSpPr>
-        <p:cNvPr id="1" name=""/>
-        <p:cNvGrpSpPr/>
-        <p:nvPr/>
-      </p:nvGrpSpPr>
-      <p:grpSpPr>
-        <a:xfrm>
-          <a:off x="0" y="0"/>
-          <a:ext cx="0" cy="0"/>
-          <a:chOff x="0" y="0"/>
-          <a:chExt cx="0" cy="0"/>
-        </a:xfrm>
-      </p:grpSpPr>
-      <p:sp>
-        <p:nvSpPr>
-          <p:cNvPr id="2" name="標題 1">
-            <a:extLst>
-              <a:ext uri="{FF2B5EF4-FFF2-40B4-BE49-F238E27FC236}">
-                <a16:creationId xmlns:a16="http://schemas.microsoft.com/office/drawing/2014/main" id="{0727AA2B-FF89-42CE-B9E5-F2C8F9CDE2A5}"/>
-              </a:ext>
-            </a:extLst>
-          </p:cNvPr>
-          <p:cNvSpPr>
-            <a:spLocks noGrp="1"/>
-          </p:cNvSpPr>
-          <p:nvPr>
-            <p:ph type="title"/>
-          </p:nvPr>
-        </p:nvSpPr>
-        <p:spPr/>
-        <p:txBody>
-          <a:bodyPr/>
-          <a:lstStyle/>
-          <a:p>
-            <a:r>
-              <a:rPr lang="zh-TW" altLang="en-US" b="1" dirty="0">
-                <a:latin typeface="Arial" panose="020B0604020202020204" pitchFamily="34" charset="0"/>
-                <a:ea typeface="標楷體" panose="03000509000000000000" pitchFamily="65" charset="-120"/>
-                <a:cs typeface="Arial" panose="020B0604020202020204" pitchFamily="34" charset="0"/>
-              </a:rPr>
-              <a:t>泛音列</a:t>
-            </a:r>
-            <a:r>
-              <a:rPr lang="en-US" altLang="zh-TW" b="1" dirty="0">
-                <a:latin typeface="Arial" panose="020B0604020202020204" pitchFamily="34" charset="0"/>
-                <a:ea typeface="標楷體" panose="03000509000000000000" pitchFamily="65" charset="-120"/>
-                <a:cs typeface="Arial" panose="020B0604020202020204" pitchFamily="34" charset="0"/>
-              </a:rPr>
-              <a:t>(Harmonic series)</a:t>
-            </a:r>
-            <a:endParaRPr lang="zh-TW" altLang="en-US" b="1" dirty="0">
-              <a:latin typeface="Arial" panose="020B0604020202020204" pitchFamily="34" charset="0"/>
-              <a:ea typeface="標楷體" panose="03000509000000000000" pitchFamily="65" charset="-120"/>
-              <a:cs typeface="Arial" panose="020B0604020202020204" pitchFamily="34" charset="0"/>
-            </a:endParaRPr>
-          </a:p>
-        </p:txBody>
-      </p:sp>
-      <p:sp>
-        <p:nvSpPr>
-          <p:cNvPr id="3" name="內容版面配置區 2">
-            <a:extLst>
-              <a:ext uri="{FF2B5EF4-FFF2-40B4-BE49-F238E27FC236}">
-                <a16:creationId xmlns:a16="http://schemas.microsoft.com/office/drawing/2014/main" id="{D0A5B91E-9772-4F8E-BFEF-EB9492AC550D}"/>
-              </a:ext>
-            </a:extLst>
-          </p:cNvPr>
-          <p:cNvSpPr>
-            <a:spLocks noGrp="1"/>
-          </p:cNvSpPr>
-          <p:nvPr>
-            <p:ph idx="1"/>
-          </p:nvPr>
-        </p:nvSpPr>
-        <p:spPr/>
-        <p:txBody>
-          <a:bodyPr>
-            <a:normAutofit/>
-          </a:bodyPr>
-          <a:lstStyle/>
-          <a:p>
-            <a:r>
-              <a:rPr lang="zh-TW" altLang="en-US" sz="2400" dirty="0">
-                <a:latin typeface="Arial" panose="020B0604020202020204" pitchFamily="34" charset="0"/>
-                <a:ea typeface="標楷體" panose="03000509000000000000" pitchFamily="65" charset="-120"/>
-                <a:cs typeface="Arial" panose="020B0604020202020204" pitchFamily="34" charset="0"/>
-              </a:rPr>
-              <a:t>發聲體除了會整體震動</a:t>
-            </a:r>
-            <a:r>
-              <a:rPr lang="en-US" altLang="zh-TW" sz="2400" dirty="0">
-                <a:latin typeface="Arial" panose="020B0604020202020204" pitchFamily="34" charset="0"/>
-                <a:ea typeface="標楷體" panose="03000509000000000000" pitchFamily="65" charset="-120"/>
-                <a:cs typeface="Arial" panose="020B0604020202020204" pitchFamily="34" charset="0"/>
-              </a:rPr>
-              <a:t>(</a:t>
-            </a:r>
-            <a:r>
-              <a:rPr lang="zh-TW" altLang="en-US" sz="2400" dirty="0">
-                <a:latin typeface="Arial" panose="020B0604020202020204" pitchFamily="34" charset="0"/>
-                <a:ea typeface="標楷體" panose="03000509000000000000" pitchFamily="65" charset="-120"/>
-                <a:cs typeface="Arial" panose="020B0604020202020204" pitchFamily="34" charset="0"/>
-              </a:rPr>
-              <a:t>基音</a:t>
-            </a:r>
-            <a:r>
-              <a:rPr lang="en-US" altLang="zh-TW" sz="2400" dirty="0">
-                <a:latin typeface="Arial" panose="020B0604020202020204" pitchFamily="34" charset="0"/>
-                <a:ea typeface="標楷體" panose="03000509000000000000" pitchFamily="65" charset="-120"/>
-                <a:cs typeface="Arial" panose="020B0604020202020204" pitchFamily="34" charset="0"/>
-              </a:rPr>
-              <a:t>)</a:t>
-            </a:r>
-            <a:r>
-              <a:rPr lang="zh-TW" altLang="en-US" sz="2400" dirty="0">
-                <a:latin typeface="Arial" panose="020B0604020202020204" pitchFamily="34" charset="0"/>
-                <a:ea typeface="標楷體" panose="03000509000000000000" pitchFamily="65" charset="-120"/>
-                <a:cs typeface="Arial" panose="020B0604020202020204" pitchFamily="34" charset="0"/>
-              </a:rPr>
-              <a:t>外還會部份震動</a:t>
-            </a:r>
-            <a:endParaRPr lang="en-US" altLang="zh-TW" sz="2400" dirty="0">
-              <a:latin typeface="Arial" panose="020B0604020202020204" pitchFamily="34" charset="0"/>
-              <a:ea typeface="標楷體" panose="03000509000000000000" pitchFamily="65" charset="-120"/>
-              <a:cs typeface="Arial" panose="020B0604020202020204" pitchFamily="34" charset="0"/>
-            </a:endParaRPr>
-          </a:p>
-          <a:p>
-            <a:pPr marL="0" indent="0">
-              <a:buNone/>
-            </a:pPr>
-            <a:r>
-              <a:rPr lang="en-US" altLang="zh-TW" sz="2400" dirty="0">
-                <a:latin typeface="Arial" panose="020B0604020202020204" pitchFamily="34" charset="0"/>
-                <a:ea typeface="標楷體" panose="03000509000000000000" pitchFamily="65" charset="-120"/>
-                <a:cs typeface="Arial" panose="020B0604020202020204" pitchFamily="34" charset="0"/>
-              </a:rPr>
-              <a:t>(</a:t>
-            </a:r>
-            <a:r>
-              <a:rPr lang="zh-TW" altLang="en-US" sz="2400" dirty="0">
-                <a:latin typeface="Arial" panose="020B0604020202020204" pitchFamily="34" charset="0"/>
-                <a:ea typeface="標楷體" panose="03000509000000000000" pitchFamily="65" charset="-120"/>
-                <a:cs typeface="Arial" panose="020B0604020202020204" pitchFamily="34" charset="0"/>
-              </a:rPr>
-              <a:t>音叉除外</a:t>
-            </a:r>
-            <a:r>
-              <a:rPr lang="en-US" altLang="zh-TW" sz="2400" dirty="0">
-                <a:latin typeface="Arial" panose="020B0604020202020204" pitchFamily="34" charset="0"/>
-                <a:ea typeface="標楷體" panose="03000509000000000000" pitchFamily="65" charset="-120"/>
-                <a:cs typeface="Arial" panose="020B0604020202020204" pitchFamily="34" charset="0"/>
-              </a:rPr>
-              <a:t>)</a:t>
-            </a:r>
-            <a:r>
-              <a:rPr lang="zh-TW" altLang="en-US" sz="2400" dirty="0">
-                <a:latin typeface="Arial" panose="020B0604020202020204" pitchFamily="34" charset="0"/>
-                <a:ea typeface="標楷體" panose="03000509000000000000" pitchFamily="65" charset="-120"/>
-                <a:cs typeface="Arial" panose="020B0604020202020204" pitchFamily="34" charset="0"/>
-              </a:rPr>
-              <a:t>，這些微小的分段震動就會形成泛音</a:t>
-            </a:r>
-            <a:endParaRPr lang="en-US" altLang="zh-TW" sz="2400" dirty="0">
-              <a:latin typeface="Arial" panose="020B0604020202020204" pitchFamily="34" charset="0"/>
-              <a:ea typeface="標楷體" panose="03000509000000000000" pitchFamily="65" charset="-120"/>
-              <a:cs typeface="Arial" panose="020B0604020202020204" pitchFamily="34" charset="0"/>
-            </a:endParaRPr>
-          </a:p>
-          <a:p>
-            <a:pPr marL="0" indent="0">
-              <a:buNone/>
-            </a:pPr>
-            <a:r>
-              <a:rPr lang="zh-TW" altLang="en-US" sz="2400" dirty="0">
-                <a:latin typeface="Arial" panose="020B0604020202020204" pitchFamily="34" charset="0"/>
-                <a:ea typeface="標楷體" panose="03000509000000000000" pitchFamily="65" charset="-120"/>
-                <a:cs typeface="Arial" panose="020B0604020202020204" pitchFamily="34" charset="0"/>
-              </a:rPr>
-              <a:t>列</a:t>
-            </a:r>
-            <a:endParaRPr lang="en-US" altLang="zh-TW" sz="2400" dirty="0">
-              <a:latin typeface="Arial" panose="020B0604020202020204" pitchFamily="34" charset="0"/>
-              <a:ea typeface="標楷體" panose="03000509000000000000" pitchFamily="65" charset="-120"/>
-              <a:cs typeface="Arial" panose="020B0604020202020204" pitchFamily="34" charset="0"/>
-            </a:endParaRPr>
-          </a:p>
-          <a:p>
-            <a:r>
-              <a:rPr lang="zh-TW" altLang="en-US" sz="2400" dirty="0">
-                <a:latin typeface="Arial" panose="020B0604020202020204" pitchFamily="34" charset="0"/>
-                <a:ea typeface="標楷體" panose="03000509000000000000" pitchFamily="65" charset="-120"/>
-                <a:cs typeface="Arial" panose="020B0604020202020204" pitchFamily="34" charset="0"/>
-              </a:rPr>
-              <a:t>音色的成因</a:t>
-            </a:r>
-            <a:r>
-              <a:rPr lang="en-US" altLang="zh-TW" sz="2400" dirty="0">
-                <a:latin typeface="Arial" panose="020B0604020202020204" pitchFamily="34" charset="0"/>
-                <a:ea typeface="標楷體" panose="03000509000000000000" pitchFamily="65" charset="-120"/>
-                <a:cs typeface="Arial" panose="020B0604020202020204" pitchFamily="34" charset="0"/>
-              </a:rPr>
-              <a:t>(</a:t>
-            </a:r>
-            <a:r>
-              <a:rPr lang="zh-TW" altLang="en-US" sz="2400" dirty="0">
-                <a:latin typeface="Arial" panose="020B0604020202020204" pitchFamily="34" charset="0"/>
-                <a:ea typeface="標楷體" panose="03000509000000000000" pitchFamily="65" charset="-120"/>
-                <a:cs typeface="Arial" panose="020B0604020202020204" pitchFamily="34" charset="0"/>
-              </a:rPr>
-              <a:t>泛音 </a:t>
-            </a:r>
-            <a:r>
-              <a:rPr lang="en-US" altLang="zh-TW" sz="2400" dirty="0">
-                <a:latin typeface="Arial" panose="020B0604020202020204" pitchFamily="34" charset="0"/>
-                <a:ea typeface="標楷體" panose="03000509000000000000" pitchFamily="65" charset="-120"/>
-                <a:cs typeface="Arial" panose="020B0604020202020204" pitchFamily="34" charset="0"/>
-              </a:rPr>
-              <a:t>+</a:t>
-            </a:r>
-            <a:r>
-              <a:rPr lang="zh-TW" altLang="en-US" sz="2400" dirty="0">
-                <a:latin typeface="Arial" panose="020B0604020202020204" pitchFamily="34" charset="0"/>
-                <a:ea typeface="標楷體" panose="03000509000000000000" pitchFamily="65" charset="-120"/>
-                <a:cs typeface="Arial" panose="020B0604020202020204" pitchFamily="34" charset="0"/>
-              </a:rPr>
-              <a:t> 偏差音</a:t>
-            </a:r>
-            <a:r>
-              <a:rPr lang="en-US" altLang="zh-TW" sz="2400" dirty="0">
-                <a:latin typeface="Arial" panose="020B0604020202020204" pitchFamily="34" charset="0"/>
-                <a:ea typeface="標楷體" panose="03000509000000000000" pitchFamily="65" charset="-120"/>
-                <a:cs typeface="Arial" panose="020B0604020202020204" pitchFamily="34" charset="0"/>
-              </a:rPr>
-              <a:t>)</a:t>
-            </a:r>
-          </a:p>
-          <a:p>
-            <a:pPr marL="0" indent="0">
-              <a:buNone/>
-            </a:pPr>
-            <a:r>
-              <a:rPr lang="zh-TW" altLang="en-US" sz="2400" dirty="0">
-                <a:latin typeface="Arial" panose="020B0604020202020204" pitchFamily="34" charset="0"/>
-                <a:ea typeface="標楷體" panose="03000509000000000000" pitchFamily="65" charset="-120"/>
-                <a:cs typeface="Arial" panose="020B0604020202020204" pitchFamily="34" charset="0"/>
-              </a:rPr>
-              <a:t>   </a:t>
-            </a:r>
-            <a:r>
-              <a:rPr lang="en-US" altLang="zh-TW" sz="2400" dirty="0">
-                <a:latin typeface="Arial" panose="020B0604020202020204" pitchFamily="34" charset="0"/>
-                <a:ea typeface="標楷體" panose="03000509000000000000" pitchFamily="65" charset="-120"/>
-                <a:cs typeface="Arial" panose="020B0604020202020204" pitchFamily="34" charset="0"/>
-              </a:rPr>
-              <a:t>(ex: </a:t>
-            </a:r>
-            <a:r>
-              <a:rPr lang="zh-TW" altLang="en-US" sz="2400" dirty="0">
-                <a:latin typeface="Arial" panose="020B0604020202020204" pitchFamily="34" charset="0"/>
-                <a:ea typeface="標楷體" panose="03000509000000000000" pitchFamily="65" charset="-120"/>
-                <a:cs typeface="Arial" panose="020B0604020202020204" pitchFamily="34" charset="0"/>
-              </a:rPr>
-              <a:t>鋼琴有高音更高，低音更低的特性</a:t>
-            </a:r>
-            <a:r>
-              <a:rPr lang="en-US" altLang="zh-TW" sz="2400" dirty="0">
-                <a:latin typeface="Arial" panose="020B0604020202020204" pitchFamily="34" charset="0"/>
-                <a:ea typeface="標楷體" panose="03000509000000000000" pitchFamily="65" charset="-120"/>
-                <a:cs typeface="Arial" panose="020B0604020202020204" pitchFamily="34" charset="0"/>
-              </a:rPr>
-              <a:t>)</a:t>
-            </a:r>
-          </a:p>
-          <a:p>
-            <a:r>
-              <a:rPr lang="zh-TW" altLang="en-US" sz="2400" dirty="0">
-                <a:latin typeface="Arial" panose="020B0604020202020204" pitchFamily="34" charset="0"/>
-                <a:ea typeface="標楷體" panose="03000509000000000000" pitchFamily="65" charset="-120"/>
-                <a:cs typeface="Arial" panose="020B0604020202020204" pitchFamily="34" charset="0"/>
-              </a:rPr>
-              <a:t>基頻的整數倍</a:t>
-            </a:r>
-            <a:r>
-              <a:rPr lang="en-US" altLang="zh-TW" sz="2400" dirty="0">
-                <a:latin typeface="Arial" panose="020B0604020202020204" pitchFamily="34" charset="0"/>
-                <a:ea typeface="標楷體" panose="03000509000000000000" pitchFamily="65" charset="-120"/>
-                <a:cs typeface="Arial" panose="020B0604020202020204" pitchFamily="34" charset="0"/>
-              </a:rPr>
-              <a:t>(2,</a:t>
-            </a:r>
-            <a:r>
-              <a:rPr lang="zh-TW" altLang="en-US" sz="2400" dirty="0">
-                <a:latin typeface="Arial" panose="020B0604020202020204" pitchFamily="34" charset="0"/>
-                <a:ea typeface="標楷體" panose="03000509000000000000" pitchFamily="65" charset="-120"/>
-                <a:cs typeface="Arial" panose="020B0604020202020204" pitchFamily="34" charset="0"/>
-              </a:rPr>
-              <a:t> </a:t>
-            </a:r>
-            <a:r>
-              <a:rPr lang="en-US" altLang="zh-TW" sz="2400" dirty="0">
-                <a:latin typeface="Arial" panose="020B0604020202020204" pitchFamily="34" charset="0"/>
-                <a:ea typeface="標楷體" panose="03000509000000000000" pitchFamily="65" charset="-120"/>
-                <a:cs typeface="Arial" panose="020B0604020202020204" pitchFamily="34" charset="0"/>
-              </a:rPr>
-              <a:t>3,</a:t>
-            </a:r>
-            <a:r>
-              <a:rPr lang="zh-TW" altLang="en-US" sz="2400" dirty="0">
-                <a:latin typeface="Arial" panose="020B0604020202020204" pitchFamily="34" charset="0"/>
-                <a:ea typeface="標楷體" panose="03000509000000000000" pitchFamily="65" charset="-120"/>
-                <a:cs typeface="Arial" panose="020B0604020202020204" pitchFamily="34" charset="0"/>
-              </a:rPr>
-              <a:t> </a:t>
-            </a:r>
-            <a:r>
-              <a:rPr lang="en-US" altLang="zh-TW" sz="2400" dirty="0">
-                <a:latin typeface="Arial" panose="020B0604020202020204" pitchFamily="34" charset="0"/>
-                <a:ea typeface="標楷體" panose="03000509000000000000" pitchFamily="65" charset="-120"/>
-                <a:cs typeface="Arial" panose="020B0604020202020204" pitchFamily="34" charset="0"/>
-              </a:rPr>
-              <a:t>4, 5,…)</a:t>
-            </a:r>
-          </a:p>
-          <a:p>
-            <a:r>
-              <a:rPr lang="zh-TW" altLang="en-US" sz="2400" dirty="0">
-                <a:latin typeface="Arial" panose="020B0604020202020204" pitchFamily="34" charset="0"/>
-                <a:ea typeface="標楷體" panose="03000509000000000000" pitchFamily="65" charset="-120"/>
-                <a:cs typeface="Arial" panose="020B0604020202020204" pitchFamily="34" charset="0"/>
-              </a:rPr>
-              <a:t>人的大腦會自動解析基頻為音高，泛音列為音色</a:t>
-            </a:r>
-          </a:p>
-        </p:txBody>
-      </p:sp>
-      <p:pic>
-        <p:nvPicPr>
-          <p:cNvPr id="1028" name="Picture 4" descr="undefined">
-            <a:extLst>
-              <a:ext uri="{FF2B5EF4-FFF2-40B4-BE49-F238E27FC236}">
-                <a16:creationId xmlns:a16="http://schemas.microsoft.com/office/drawing/2014/main" id="{9ED7A301-E4E7-45C9-86E1-27B016537DCC}"/>
-              </a:ext>
-            </a:extLst>
-          </p:cNvPr>
-          <p:cNvPicPr>
-            <a:picLocks noChangeAspect="1" noChangeArrowheads="1"/>
-          </p:cNvPicPr>
-          <p:nvPr/>
-        </p:nvPicPr>
-        <p:blipFill>
-          <a:blip r:embed="rId2">
-            <a:extLst>
-              <a:ext uri="{28A0092B-C50C-407E-A947-70E740481C1C}">
-                <a14:useLocalDpi xmlns:a14="http://schemas.microsoft.com/office/drawing/2010/main" val="0"/>
-              </a:ext>
-            </a:extLst>
-          </a:blip>
-          <a:srcRect/>
-          <a:stretch>
-            <a:fillRect/>
-          </a:stretch>
-        </p:blipFill>
-        <p:spPr bwMode="auto">
-          <a:xfrm>
-            <a:off x="7668442" y="1728788"/>
-            <a:ext cx="3685358" cy="3835400"/>
-          </a:xfrm>
-          <a:prstGeom prst="rect">
-            <a:avLst/>
-          </a:prstGeom>
-          <a:noFill/>
-          <a:extLst>
-            <a:ext uri="{909E8E84-426E-40DD-AFC4-6F175D3DCCD1}">
-              <a14:hiddenFill xmlns:a14="http://schemas.microsoft.com/office/drawing/2010/main">
-                <a:solidFill>
-                  <a:srgbClr val="FFFFFF"/>
-                </a:solidFill>
-              </a14:hiddenFill>
-            </a:ext>
-          </a:extLst>
-        </p:spPr>
-      </p:pic>
-    </p:spTree>
-    <p:extLst>
-      <p:ext uri="{BB962C8B-B14F-4D97-AF65-F5344CB8AC3E}">
-        <p14:creationId xmlns:p14="http://schemas.microsoft.com/office/powerpoint/2010/main" val="886742972"/>
-      </p:ext>
-    </p:extLst>
-  </p:cSld>
-  <p:clrMapOvr>
-    <a:masterClrMapping/>
-  </p:clrMapOvr>
-</p:sld>
-</file>
-
-<file path=ppt/slides/slide7.xml><?xml version="1.0" encoding="utf-8"?>
-<p:sld xmlns:a="http://schemas.openxmlformats.org/drawingml/2006/main" xmlns:r="http://schemas.openxmlformats.org/officeDocument/2006/relationships" xmlns:p="http://schemas.openxmlformats.org/presentationml/2006/main">
-  <p:cSld>
-    <p:spTree>
-      <p:nvGrpSpPr>
-        <p:cNvPr id="1" name=""/>
-        <p:cNvGrpSpPr/>
-        <p:nvPr/>
-      </p:nvGrpSpPr>
-      <p:grpSpPr>
-        <a:xfrm>
-          <a:off x="0" y="0"/>
-          <a:ext cx="0" cy="0"/>
-          <a:chOff x="0" y="0"/>
-          <a:chExt cx="0" cy="0"/>
-        </a:xfrm>
-      </p:grpSpPr>
-      <p:sp>
-        <p:nvSpPr>
-          <p:cNvPr id="2" name="標題 1">
-            <a:extLst>
-              <a:ext uri="{FF2B5EF4-FFF2-40B4-BE49-F238E27FC236}">
-                <a16:creationId xmlns:a16="http://schemas.microsoft.com/office/drawing/2014/main" id="{200AD999-551A-4870-9B41-82B9E184FB0B}"/>
-              </a:ext>
-            </a:extLst>
-          </p:cNvPr>
-          <p:cNvSpPr>
-            <a:spLocks noGrp="1"/>
-          </p:cNvSpPr>
-          <p:nvPr>
-            <p:ph type="title"/>
-          </p:nvPr>
-        </p:nvSpPr>
-        <p:spPr/>
-        <p:txBody>
-          <a:bodyPr/>
-          <a:lstStyle/>
-          <a:p>
-            <a:endParaRPr lang="zh-TW" altLang="en-US"/>
-          </a:p>
-        </p:txBody>
-      </p:sp>
-      <p:pic>
-        <p:nvPicPr>
-          <p:cNvPr id="5" name="圖片 4">
-            <a:extLst>
-              <a:ext uri="{FF2B5EF4-FFF2-40B4-BE49-F238E27FC236}">
-                <a16:creationId xmlns:a16="http://schemas.microsoft.com/office/drawing/2014/main" id="{54B29FF2-468A-46AF-8609-7F5ED81C8728}"/>
-              </a:ext>
-            </a:extLst>
-          </p:cNvPr>
-          <p:cNvPicPr>
-            <a:picLocks noChangeAspect="1"/>
-          </p:cNvPicPr>
-          <p:nvPr/>
-        </p:nvPicPr>
-        <p:blipFill>
-          <a:blip r:embed="rId2"/>
-          <a:stretch>
-            <a:fillRect/>
-          </a:stretch>
-        </p:blipFill>
-        <p:spPr>
-          <a:xfrm>
-            <a:off x="1267043" y="776286"/>
-            <a:ext cx="9657911" cy="503239"/>
-          </a:xfrm>
-          <a:prstGeom prst="rect">
-            <a:avLst/>
-          </a:prstGeom>
-        </p:spPr>
-      </p:pic>
-      <p:sp>
-        <p:nvSpPr>
-          <p:cNvPr id="11" name="內容版面配置區 10">
-            <a:extLst>
-              <a:ext uri="{FF2B5EF4-FFF2-40B4-BE49-F238E27FC236}">
-                <a16:creationId xmlns:a16="http://schemas.microsoft.com/office/drawing/2014/main" id="{FF535D7D-8804-4DC8-A5AB-622156FADF9A}"/>
-              </a:ext>
-            </a:extLst>
-          </p:cNvPr>
-          <p:cNvSpPr>
-            <a:spLocks noGrp="1"/>
-          </p:cNvSpPr>
-          <p:nvPr>
-            <p:ph idx="1"/>
-          </p:nvPr>
-        </p:nvSpPr>
-        <p:spPr/>
-        <p:txBody>
-          <a:bodyPr/>
-          <a:lstStyle/>
-          <a:p>
-            <a:endParaRPr lang="zh-TW" altLang="en-US"/>
-          </a:p>
-        </p:txBody>
-      </p:sp>
-      <p:pic>
-        <p:nvPicPr>
-          <p:cNvPr id="15" name="圖片 14">
-            <a:extLst>
-              <a:ext uri="{FF2B5EF4-FFF2-40B4-BE49-F238E27FC236}">
-                <a16:creationId xmlns:a16="http://schemas.microsoft.com/office/drawing/2014/main" id="{4BCA8551-CAFF-4993-9762-DB3EAFEE5A01}"/>
-              </a:ext>
-            </a:extLst>
-          </p:cNvPr>
-          <p:cNvPicPr>
-            <a:picLocks noChangeAspect="1"/>
-          </p:cNvPicPr>
-          <p:nvPr/>
-        </p:nvPicPr>
-        <p:blipFill>
-          <a:blip r:embed="rId3"/>
-          <a:stretch>
-            <a:fillRect/>
-          </a:stretch>
-        </p:blipFill>
-        <p:spPr>
-          <a:xfrm>
-            <a:off x="2297898" y="1528761"/>
-            <a:ext cx="7596203" cy="5034897"/>
-          </a:xfrm>
-          <a:prstGeom prst="rect">
-            <a:avLst/>
-          </a:prstGeom>
-        </p:spPr>
-      </p:pic>
-    </p:spTree>
-    <p:extLst>
-      <p:ext uri="{BB962C8B-B14F-4D97-AF65-F5344CB8AC3E}">
-        <p14:creationId xmlns:p14="http://schemas.microsoft.com/office/powerpoint/2010/main" val="1360144289"/>
-      </p:ext>
-    </p:extLst>
-  </p:cSld>
-  <p:clrMapOvr>
-    <a:masterClrMapping/>
-  </p:clrMapOvr>
-</p:sld>
-</file>
-
-<file path=ppt/slides/slide8.xml><?xml version="1.0" encoding="utf-8"?>
-<p:sld xmlns:a="http://schemas.openxmlformats.org/drawingml/2006/main" xmlns:r="http://schemas.openxmlformats.org/officeDocument/2006/relationships" xmlns:p="http://schemas.openxmlformats.org/presentationml/2006/main">
-  <p:cSld>
-    <p:spTree>
-      <p:nvGrpSpPr>
-        <p:cNvPr id="1" name=""/>
-        <p:cNvGrpSpPr/>
-        <p:nvPr/>
-      </p:nvGrpSpPr>
-      <p:grpSpPr>
-        <a:xfrm>
-          <a:off x="0" y="0"/>
-          <a:ext cx="0" cy="0"/>
-          <a:chOff x="0" y="0"/>
-          <a:chExt cx="0" cy="0"/>
-        </a:xfrm>
-      </p:grpSpPr>
-      <p:sp>
-        <p:nvSpPr>
-          <p:cNvPr id="2" name="標題 1">
-            <a:extLst>
-              <a:ext uri="{FF2B5EF4-FFF2-40B4-BE49-F238E27FC236}">
-                <a16:creationId xmlns:a16="http://schemas.microsoft.com/office/drawing/2014/main" id="{EDAD5F66-2419-4BF2-8D37-B8A40101A49C}"/>
-              </a:ext>
-            </a:extLst>
-          </p:cNvPr>
-          <p:cNvSpPr>
-            <a:spLocks noGrp="1"/>
-          </p:cNvSpPr>
-          <p:nvPr>
-            <p:ph type="title"/>
-          </p:nvPr>
-        </p:nvSpPr>
-        <p:spPr/>
-        <p:txBody>
-          <a:bodyPr/>
-          <a:lstStyle/>
-          <a:p>
-            <a:endParaRPr lang="zh-TW" altLang="en-US"/>
-          </a:p>
-        </p:txBody>
-      </p:sp>
-      <p:sp>
-        <p:nvSpPr>
-          <p:cNvPr id="3" name="內容版面配置區 2">
-            <a:extLst>
-              <a:ext uri="{FF2B5EF4-FFF2-40B4-BE49-F238E27FC236}">
-                <a16:creationId xmlns:a16="http://schemas.microsoft.com/office/drawing/2014/main" id="{B2BF9814-0C9A-4CA3-9E34-80BEA822F22B}"/>
-              </a:ext>
-            </a:extLst>
-          </p:cNvPr>
-          <p:cNvSpPr>
-            <a:spLocks noGrp="1"/>
-          </p:cNvSpPr>
-          <p:nvPr>
-            <p:ph idx="1"/>
-          </p:nvPr>
-        </p:nvSpPr>
-        <p:spPr/>
-        <p:txBody>
-          <a:bodyPr/>
-          <a:lstStyle/>
-          <a:p>
-            <a:endParaRPr lang="zh-TW" altLang="en-US" dirty="0"/>
-          </a:p>
-        </p:txBody>
-      </p:sp>
-      <p:pic>
-        <p:nvPicPr>
-          <p:cNvPr id="8" name="圖片 7">
-            <a:extLst>
-              <a:ext uri="{FF2B5EF4-FFF2-40B4-BE49-F238E27FC236}">
-                <a16:creationId xmlns:a16="http://schemas.microsoft.com/office/drawing/2014/main" id="{31DD6903-BBD2-40C6-8CA7-CE8920E4AB16}"/>
-              </a:ext>
-            </a:extLst>
-          </p:cNvPr>
-          <p:cNvPicPr>
-            <a:picLocks noChangeAspect="1"/>
-          </p:cNvPicPr>
-          <p:nvPr/>
-        </p:nvPicPr>
-        <p:blipFill>
-          <a:blip r:embed="rId2"/>
-          <a:stretch>
-            <a:fillRect/>
-          </a:stretch>
-        </p:blipFill>
-        <p:spPr>
-          <a:xfrm>
-            <a:off x="2078671" y="203175"/>
-            <a:ext cx="8034657" cy="1389393"/>
-          </a:xfrm>
-          <a:prstGeom prst="rect">
-            <a:avLst/>
-          </a:prstGeom>
-        </p:spPr>
-      </p:pic>
-      <p:pic>
-        <p:nvPicPr>
-          <p:cNvPr id="6" name="圖片 5">
-            <a:extLst>
-              <a:ext uri="{FF2B5EF4-FFF2-40B4-BE49-F238E27FC236}">
-                <a16:creationId xmlns:a16="http://schemas.microsoft.com/office/drawing/2014/main" id="{D9F75CA6-F5FA-4B12-B663-C63E427D359E}"/>
-              </a:ext>
-            </a:extLst>
-          </p:cNvPr>
-          <p:cNvPicPr>
-            <a:picLocks noChangeAspect="1"/>
-          </p:cNvPicPr>
-          <p:nvPr/>
-        </p:nvPicPr>
-        <p:blipFill>
-          <a:blip r:embed="rId3"/>
-          <a:stretch>
-            <a:fillRect/>
-          </a:stretch>
-        </p:blipFill>
-        <p:spPr>
-          <a:xfrm>
-            <a:off x="470647" y="1690688"/>
-            <a:ext cx="6360460" cy="4859065"/>
-          </a:xfrm>
-          <a:prstGeom prst="rect">
-            <a:avLst/>
-          </a:prstGeom>
-        </p:spPr>
-      </p:pic>
-      <mc:AlternateContent xmlns:mc="http://schemas.openxmlformats.org/markup-compatibility/2006">
-        <mc:Choice xmlns:a14="http://schemas.microsoft.com/office/drawing/2010/main" Requires="a14">
-          <p:sp>
-            <p:nvSpPr>
-              <p:cNvPr id="7" name="文字方塊 6">
-                <a:extLst>
-                  <a:ext uri="{FF2B5EF4-FFF2-40B4-BE49-F238E27FC236}">
-                    <a16:creationId xmlns:a16="http://schemas.microsoft.com/office/drawing/2014/main" id="{9DE05A29-9AF8-44FD-8F20-DE0DB0A51AC0}"/>
-                  </a:ext>
-                </a:extLst>
-              </p:cNvPr>
-              <p:cNvSpPr txBox="1"/>
-              <p:nvPr/>
-            </p:nvSpPr>
-            <p:spPr>
-              <a:xfrm>
-                <a:off x="8443928" y="3771899"/>
-                <a:ext cx="3030657" cy="829843"/>
-              </a:xfrm>
-              <a:prstGeom prst="rect">
-                <a:avLst/>
-              </a:prstGeom>
-              <a:noFill/>
-            </p:spPr>
-            <p:txBody>
-              <a:bodyPr wrap="square" lIns="0" tIns="0" rIns="0" bIns="0" rtlCol="0">
-                <a:spAutoFit/>
-              </a:bodyPr>
-              <a:lstStyle/>
-              <a:p>
-                <a:pPr/>
-                <a14:m>
-                  <m:oMathPara xmlns:m="http://schemas.openxmlformats.org/officeDocument/2006/math">
-                    <m:oMathParaPr>
-                      <m:jc m:val="centerGroup"/>
-                    </m:oMathParaPr>
-                    <m:oMath xmlns:m="http://schemas.openxmlformats.org/officeDocument/2006/math">
-                      <m:r>
-                        <a:rPr lang="zh-TW" altLang="en-US" sz="2400" i="1" smtClean="0">
-                          <a:latin typeface="Cambria Math" panose="02040503050406030204" pitchFamily="18" charset="0"/>
-                        </a:rPr>
-                        <m:t>𝑛</m:t>
+                        <m:t>𝑑𝑓</m:t>
                       </m:r>
                       <m:r>
                         <a:rPr lang="zh-TW" altLang="en-US" sz="2400" i="0">
@@ -7538,10 +7173,10 @@
         <mc:Fallback>
           <p:sp>
             <p:nvSpPr>
-              <p:cNvPr id="7" name="文字方塊 6">
+              <p:cNvPr id="11" name="文字方塊 10">
                 <a:extLst>
                   <a:ext uri="{FF2B5EF4-FFF2-40B4-BE49-F238E27FC236}">
-                    <a16:creationId xmlns:a16="http://schemas.microsoft.com/office/drawing/2014/main" id="{9DE05A29-9AF8-44FD-8F20-DE0DB0A51AC0}"/>
+                    <a16:creationId xmlns:a16="http://schemas.microsoft.com/office/drawing/2014/main" id="{4B3FEC1E-03AF-4602-B5CA-B3ED711EEEFF}"/>
                   </a:ext>
                 </a:extLst>
               </p:cNvPr>
@@ -7552,14 +7187,14 @@
             </p:nvSpPr>
             <p:spPr>
               <a:xfrm>
-                <a:off x="8443928" y="3771899"/>
+                <a:off x="6890317" y="4879904"/>
                 <a:ext cx="3030657" cy="829843"/>
               </a:xfrm>
               <a:prstGeom prst="rect">
                 <a:avLst/>
               </a:prstGeom>
               <a:blipFill>
-                <a:blip r:embed="rId4"/>
+                <a:blip r:embed="rId5"/>
                 <a:stretch>
                   <a:fillRect/>
                 </a:stretch>
@@ -7580,6 +7215,1498 @@
           </p:sp>
         </mc:Fallback>
       </mc:AlternateContent>
+    </p:spTree>
+    <p:extLst>
+      <p:ext uri="{BB962C8B-B14F-4D97-AF65-F5344CB8AC3E}">
+        <p14:creationId xmlns:p14="http://schemas.microsoft.com/office/powerpoint/2010/main" val="1303041321"/>
+      </p:ext>
+    </p:extLst>
+  </p:cSld>
+  <p:clrMapOvr>
+    <a:masterClrMapping/>
+  </p:clrMapOvr>
+</p:sld>
+</file>
+
+<file path=ppt/slides/slide4.xml><?xml version="1.0" encoding="utf-8"?>
+<p:sld xmlns:a="http://schemas.openxmlformats.org/drawingml/2006/main" xmlns:r="http://schemas.openxmlformats.org/officeDocument/2006/relationships" xmlns:p="http://schemas.openxmlformats.org/presentationml/2006/main">
+  <p:cSld>
+    <p:spTree>
+      <p:nvGrpSpPr>
+        <p:cNvPr id="1" name=""/>
+        <p:cNvGrpSpPr/>
+        <p:nvPr/>
+      </p:nvGrpSpPr>
+      <p:grpSpPr>
+        <a:xfrm>
+          <a:off x="0" y="0"/>
+          <a:ext cx="0" cy="0"/>
+          <a:chOff x="0" y="0"/>
+          <a:chExt cx="0" cy="0"/>
+        </a:xfrm>
+      </p:grpSpPr>
+      <p:pic>
+        <p:nvPicPr>
+          <p:cNvPr id="4098" name="Picture 2">
+            <a:extLst>
+              <a:ext uri="{FF2B5EF4-FFF2-40B4-BE49-F238E27FC236}">
+                <a16:creationId xmlns:a16="http://schemas.microsoft.com/office/drawing/2014/main" id="{A9DAA703-06E0-45BE-909D-672217DDCEF7}"/>
+              </a:ext>
+            </a:extLst>
+          </p:cNvPr>
+          <p:cNvPicPr>
+            <a:picLocks noChangeAspect="1" noChangeArrowheads="1"/>
+          </p:cNvPicPr>
+          <p:nvPr/>
+        </p:nvPicPr>
+        <p:blipFill>
+          <a:blip r:embed="rId3">
+            <a:extLst>
+              <a:ext uri="{28A0092B-C50C-407E-A947-70E740481C1C}">
+                <a14:useLocalDpi xmlns:a14="http://schemas.microsoft.com/office/drawing/2010/main" val="0"/>
+              </a:ext>
+            </a:extLst>
+          </a:blip>
+          <a:srcRect/>
+          <a:stretch>
+            <a:fillRect/>
+          </a:stretch>
+        </p:blipFill>
+        <p:spPr bwMode="auto">
+          <a:xfrm>
+            <a:off x="6409830" y="2094166"/>
+            <a:ext cx="5615946" cy="1513583"/>
+          </a:xfrm>
+          <a:prstGeom prst="rect">
+            <a:avLst/>
+          </a:prstGeom>
+          <a:noFill/>
+          <a:extLst>
+            <a:ext uri="{909E8E84-426E-40DD-AFC4-6F175D3DCCD1}">
+              <a14:hiddenFill xmlns:a14="http://schemas.microsoft.com/office/drawing/2010/main">
+                <a:solidFill>
+                  <a:srgbClr val="FFFFFF"/>
+                </a:solidFill>
+              </a14:hiddenFill>
+            </a:ext>
+          </a:extLst>
+        </p:spPr>
+      </p:pic>
+      <mc:AlternateContent xmlns:mc="http://schemas.openxmlformats.org/markup-compatibility/2006">
+        <mc:Choice xmlns:a14="http://schemas.microsoft.com/office/drawing/2010/main" Requires="a14">
+          <p:sp>
+            <p:nvSpPr>
+              <p:cNvPr id="8" name="文字方塊 7">
+                <a:extLst>
+                  <a:ext uri="{FF2B5EF4-FFF2-40B4-BE49-F238E27FC236}">
+                    <a16:creationId xmlns:a16="http://schemas.microsoft.com/office/drawing/2014/main" id="{21643FED-07D7-4A12-986C-B07FA308904E}"/>
+                  </a:ext>
+                </a:extLst>
+              </p:cNvPr>
+              <p:cNvSpPr txBox="1"/>
+              <p:nvPr/>
+            </p:nvSpPr>
+            <p:spPr>
+              <a:xfrm>
+                <a:off x="7052210" y="1273102"/>
+                <a:ext cx="4512262" cy="369332"/>
+              </a:xfrm>
+              <a:prstGeom prst="rect">
+                <a:avLst/>
+              </a:prstGeom>
+              <a:noFill/>
+            </p:spPr>
+            <p:txBody>
+              <a:bodyPr wrap="square" lIns="0" tIns="0" rIns="0" bIns="0" rtlCol="0">
+                <a:spAutoFit/>
+              </a:bodyPr>
+              <a:lstStyle/>
+              <a:p>
+                <a14:m>
+                  <m:oMath xmlns:m="http://schemas.openxmlformats.org/officeDocument/2006/math">
+                    <m:r>
+                      <a:rPr lang="zh-TW" altLang="en-US" sz="2400" i="1" smtClean="0">
+                        <a:latin typeface="Cambria Math" panose="02040503050406030204" pitchFamily="18" charset="0"/>
+                      </a:rPr>
+                      <m:t>𝐶𝑏</m:t>
+                    </m:r>
+                    <m:r>
+                      <a:rPr lang="en-US" altLang="zh-TW" sz="2400" i="1">
+                        <a:latin typeface="Cambria Math" panose="02040503050406030204" pitchFamily="18" charset="0"/>
+                      </a:rPr>
+                      <m:t>4</m:t>
+                    </m:r>
+                    <m:r>
+                      <a:rPr lang="zh-TW" altLang="en-US" sz="2400" i="1">
+                        <a:latin typeface="Cambria Math" panose="02040503050406030204" pitchFamily="18" charset="0"/>
+                      </a:rPr>
+                      <m:t> </m:t>
+                    </m:r>
+                  </m:oMath>
+                </a14:m>
+                <a:r>
+                  <a:rPr lang="en-US" altLang="zh-TW" sz="2400" dirty="0">
+                    <a:latin typeface="Consolas" panose="020B0609020204030204" pitchFamily="49" charset="0"/>
+                    <a:ea typeface="標楷體" panose="03000509000000000000" pitchFamily="65" charset="-120"/>
+                  </a:rPr>
+                  <a:t>:</a:t>
+                </a:r>
+                <a:r>
+                  <a:rPr lang="zh-TW" altLang="en-US" sz="2400" dirty="0">
+                    <a:latin typeface="Consolas" panose="020B0609020204030204" pitchFamily="49" charset="0"/>
+                    <a:ea typeface="標楷體" panose="03000509000000000000" pitchFamily="65" charset="-120"/>
+                  </a:rPr>
+                  <a:t> 代表</a:t>
+                </a:r>
+                <a:r>
+                  <a:rPr lang="en-US" altLang="zh-TW" sz="2400" dirty="0">
+                    <a:latin typeface="Arial" panose="020B0604020202020204" pitchFamily="34" charset="0"/>
+                    <a:ea typeface="標楷體" panose="03000509000000000000" pitchFamily="65" charset="-120"/>
+                    <a:cs typeface="Arial" panose="020B0604020202020204" pitchFamily="34" charset="0"/>
+                  </a:rPr>
+                  <a:t>C4</a:t>
+                </a:r>
+                <a:r>
+                  <a:rPr lang="zh-TW" altLang="en-US" sz="2400" dirty="0">
+                    <a:latin typeface="Consolas" panose="020B0609020204030204" pitchFamily="49" charset="0"/>
+                    <a:ea typeface="標楷體" panose="03000509000000000000" pitchFamily="65" charset="-120"/>
+                  </a:rPr>
+                  <a:t>這個音高降半音。 </a:t>
+                </a:r>
+              </a:p>
+            </p:txBody>
+          </p:sp>
+        </mc:Choice>
+        <mc:Fallback>
+          <p:sp>
+            <p:nvSpPr>
+              <p:cNvPr id="8" name="文字方塊 7">
+                <a:extLst>
+                  <a:ext uri="{FF2B5EF4-FFF2-40B4-BE49-F238E27FC236}">
+                    <a16:creationId xmlns:a16="http://schemas.microsoft.com/office/drawing/2014/main" id="{21643FED-07D7-4A12-986C-B07FA308904E}"/>
+                  </a:ext>
+                </a:extLst>
+              </p:cNvPr>
+              <p:cNvSpPr txBox="1">
+                <a:spLocks noRot="1" noChangeAspect="1" noMove="1" noResize="1" noEditPoints="1" noAdjustHandles="1" noChangeArrowheads="1" noChangeShapeType="1" noTextEdit="1"/>
+              </p:cNvSpPr>
+              <p:nvPr/>
+            </p:nvSpPr>
+            <p:spPr>
+              <a:xfrm>
+                <a:off x="7052210" y="1273102"/>
+                <a:ext cx="4512262" cy="369332"/>
+              </a:xfrm>
+              <a:prstGeom prst="rect">
+                <a:avLst/>
+              </a:prstGeom>
+              <a:blipFill>
+                <a:blip r:embed="rId4"/>
+                <a:stretch>
+                  <a:fillRect l="-2432" t="-28333" r="-676" b="-50000"/>
+                </a:stretch>
+              </a:blipFill>
+            </p:spPr>
+            <p:txBody>
+              <a:bodyPr/>
+              <a:lstStyle/>
+              <a:p>
+                <a:r>
+                  <a:rPr lang="zh-TW" altLang="en-US">
+                    <a:noFill/>
+                  </a:rPr>
+                  <a:t> </a:t>
+                </a:r>
+              </a:p>
+            </p:txBody>
+          </p:sp>
+        </mc:Fallback>
+      </mc:AlternateContent>
+      <mc:AlternateContent xmlns:mc="http://schemas.openxmlformats.org/markup-compatibility/2006">
+        <mc:Choice xmlns:a14="http://schemas.microsoft.com/office/drawing/2010/main" Requires="a14">
+          <p:sp>
+            <p:nvSpPr>
+              <p:cNvPr id="10" name="文字方塊 9">
+                <a:extLst>
+                  <a:ext uri="{FF2B5EF4-FFF2-40B4-BE49-F238E27FC236}">
+                    <a16:creationId xmlns:a16="http://schemas.microsoft.com/office/drawing/2014/main" id="{F569E197-6A37-4FFA-A110-3DBE3271A53C}"/>
+                  </a:ext>
+                </a:extLst>
+              </p:cNvPr>
+              <p:cNvSpPr txBox="1"/>
+              <p:nvPr/>
+            </p:nvSpPr>
+            <p:spPr>
+              <a:xfrm>
+                <a:off x="7052208" y="857556"/>
+                <a:ext cx="4512263" cy="369332"/>
+              </a:xfrm>
+              <a:prstGeom prst="rect">
+                <a:avLst/>
+              </a:prstGeom>
+              <a:noFill/>
+            </p:spPr>
+            <p:txBody>
+              <a:bodyPr wrap="square" lIns="0" tIns="0" rIns="0" bIns="0" rtlCol="0">
+                <a:spAutoFit/>
+              </a:bodyPr>
+              <a:lstStyle/>
+              <a:p>
+                <a14:m>
+                  <m:oMath xmlns:m="http://schemas.openxmlformats.org/officeDocument/2006/math">
+                    <m:r>
+                      <a:rPr lang="zh-TW" altLang="en-US" sz="2400" i="1" smtClean="0">
+                        <a:latin typeface="Cambria Math" panose="02040503050406030204" pitchFamily="18" charset="0"/>
+                      </a:rPr>
+                      <m:t>𝐶</m:t>
+                    </m:r>
+                    <m:r>
+                      <a:rPr lang="en-US" altLang="zh-TW" sz="2400" i="1">
+                        <a:latin typeface="Cambria Math" panose="02040503050406030204" pitchFamily="18" charset="0"/>
+                      </a:rPr>
+                      <m:t>#</m:t>
+                    </m:r>
+                    <m:r>
+                      <a:rPr lang="en-US" altLang="zh-TW" sz="2400" i="1" smtClean="0">
+                        <a:latin typeface="Cambria Math" panose="02040503050406030204" pitchFamily="18" charset="0"/>
+                      </a:rPr>
+                      <m:t>4</m:t>
+                    </m:r>
+                    <m:r>
+                      <a:rPr lang="zh-TW" altLang="en-US" sz="2400" i="1">
+                        <a:latin typeface="Cambria Math" panose="02040503050406030204" pitchFamily="18" charset="0"/>
+                      </a:rPr>
+                      <m:t> </m:t>
+                    </m:r>
+                  </m:oMath>
+                </a14:m>
+                <a:r>
+                  <a:rPr lang="en-US" altLang="zh-TW" sz="2400" dirty="0">
+                    <a:latin typeface="Consolas" panose="020B0609020204030204" pitchFamily="49" charset="0"/>
+                    <a:ea typeface="標楷體" panose="03000509000000000000" pitchFamily="65" charset="-120"/>
+                  </a:rPr>
+                  <a:t>:</a:t>
+                </a:r>
+                <a:r>
+                  <a:rPr lang="zh-TW" altLang="en-US" sz="2400" dirty="0">
+                    <a:latin typeface="Consolas" panose="020B0609020204030204" pitchFamily="49" charset="0"/>
+                    <a:ea typeface="標楷體" panose="03000509000000000000" pitchFamily="65" charset="-120"/>
+                  </a:rPr>
+                  <a:t> 代表</a:t>
+                </a:r>
+                <a:r>
+                  <a:rPr lang="en-US" altLang="zh-TW" sz="2400" dirty="0">
+                    <a:latin typeface="Arial" panose="020B0604020202020204" pitchFamily="34" charset="0"/>
+                    <a:ea typeface="標楷體" panose="03000509000000000000" pitchFamily="65" charset="-120"/>
+                    <a:cs typeface="Arial" panose="020B0604020202020204" pitchFamily="34" charset="0"/>
+                  </a:rPr>
+                  <a:t>C4</a:t>
+                </a:r>
+                <a:r>
+                  <a:rPr lang="zh-TW" altLang="en-US" sz="2400" dirty="0">
+                    <a:latin typeface="Consolas" panose="020B0609020204030204" pitchFamily="49" charset="0"/>
+                    <a:ea typeface="標楷體" panose="03000509000000000000" pitchFamily="65" charset="-120"/>
+                  </a:rPr>
+                  <a:t>這個音高升半音。 </a:t>
+                </a:r>
+              </a:p>
+            </p:txBody>
+          </p:sp>
+        </mc:Choice>
+        <mc:Fallback>
+          <p:sp>
+            <p:nvSpPr>
+              <p:cNvPr id="10" name="文字方塊 9">
+                <a:extLst>
+                  <a:ext uri="{FF2B5EF4-FFF2-40B4-BE49-F238E27FC236}">
+                    <a16:creationId xmlns:a16="http://schemas.microsoft.com/office/drawing/2014/main" id="{F569E197-6A37-4FFA-A110-3DBE3271A53C}"/>
+                  </a:ext>
+                </a:extLst>
+              </p:cNvPr>
+              <p:cNvSpPr txBox="1">
+                <a:spLocks noRot="1" noChangeAspect="1" noMove="1" noResize="1" noEditPoints="1" noAdjustHandles="1" noChangeArrowheads="1" noChangeShapeType="1" noTextEdit="1"/>
+              </p:cNvSpPr>
+              <p:nvPr/>
+            </p:nvSpPr>
+            <p:spPr>
+              <a:xfrm>
+                <a:off x="7052208" y="857556"/>
+                <a:ext cx="4512263" cy="369332"/>
+              </a:xfrm>
+              <a:prstGeom prst="rect">
+                <a:avLst/>
+              </a:prstGeom>
+              <a:blipFill>
+                <a:blip r:embed="rId5"/>
+                <a:stretch>
+                  <a:fillRect l="-2432" t="-28333" r="-1486" b="-50000"/>
+                </a:stretch>
+              </a:blipFill>
+            </p:spPr>
+            <p:txBody>
+              <a:bodyPr/>
+              <a:lstStyle/>
+              <a:p>
+                <a:r>
+                  <a:rPr lang="zh-TW" altLang="en-US">
+                    <a:noFill/>
+                  </a:rPr>
+                  <a:t> </a:t>
+                </a:r>
+              </a:p>
+            </p:txBody>
+          </p:sp>
+        </mc:Fallback>
+      </mc:AlternateContent>
+      <p:pic>
+        <p:nvPicPr>
+          <p:cNvPr id="11" name="圖片 10">
+            <a:extLst>
+              <a:ext uri="{FF2B5EF4-FFF2-40B4-BE49-F238E27FC236}">
+                <a16:creationId xmlns:a16="http://schemas.microsoft.com/office/drawing/2014/main" id="{E187AC0F-1A69-41D0-8304-16DE2582C26D}"/>
+              </a:ext>
+            </a:extLst>
+          </p:cNvPr>
+          <p:cNvPicPr>
+            <a:picLocks noChangeAspect="1"/>
+          </p:cNvPicPr>
+          <p:nvPr/>
+        </p:nvPicPr>
+        <p:blipFill>
+          <a:blip r:embed="rId6">
+            <a:extLst>
+              <a:ext uri="{28A0092B-C50C-407E-A947-70E740481C1C}">
+                <a14:useLocalDpi xmlns:a14="http://schemas.microsoft.com/office/drawing/2010/main" val="0"/>
+              </a:ext>
+            </a:extLst>
+          </a:blip>
+          <a:stretch>
+            <a:fillRect/>
+          </a:stretch>
+        </p:blipFill>
+        <p:spPr>
+          <a:xfrm>
+            <a:off x="1836501" y="4484071"/>
+            <a:ext cx="8518998" cy="2373929"/>
+          </a:xfrm>
+          <a:prstGeom prst="rect">
+            <a:avLst/>
+          </a:prstGeom>
+        </p:spPr>
+      </p:pic>
+      <p:pic>
+        <p:nvPicPr>
+          <p:cNvPr id="9" name="圖片 8">
+            <a:extLst>
+              <a:ext uri="{FF2B5EF4-FFF2-40B4-BE49-F238E27FC236}">
+                <a16:creationId xmlns:a16="http://schemas.microsoft.com/office/drawing/2014/main" id="{5B4B8FE9-ECDB-427D-9AEE-E216B3F333A7}"/>
+              </a:ext>
+            </a:extLst>
+          </p:cNvPr>
+          <p:cNvPicPr>
+            <a:picLocks noChangeAspect="1"/>
+          </p:cNvPicPr>
+          <p:nvPr/>
+        </p:nvPicPr>
+        <p:blipFill>
+          <a:blip r:embed="rId7"/>
+          <a:stretch>
+            <a:fillRect/>
+          </a:stretch>
+        </p:blipFill>
+        <p:spPr>
+          <a:xfrm>
+            <a:off x="346721" y="110573"/>
+            <a:ext cx="6266161" cy="4280452"/>
+          </a:xfrm>
+          <a:prstGeom prst="rect">
+            <a:avLst/>
+          </a:prstGeom>
+        </p:spPr>
+      </p:pic>
+      <p:pic>
+        <p:nvPicPr>
+          <p:cNvPr id="7" name="圖片 6">
+            <a:extLst>
+              <a:ext uri="{FF2B5EF4-FFF2-40B4-BE49-F238E27FC236}">
+                <a16:creationId xmlns:a16="http://schemas.microsoft.com/office/drawing/2014/main" id="{BA6D1106-09D6-4430-9986-D99F45EE46FA}"/>
+              </a:ext>
+            </a:extLst>
+          </p:cNvPr>
+          <p:cNvPicPr>
+            <a:picLocks noChangeAspect="1"/>
+          </p:cNvPicPr>
+          <p:nvPr/>
+        </p:nvPicPr>
+        <p:blipFill>
+          <a:blip r:embed="rId8"/>
+          <a:stretch>
+            <a:fillRect/>
+          </a:stretch>
+        </p:blipFill>
+        <p:spPr>
+          <a:xfrm>
+            <a:off x="1506559" y="421778"/>
+            <a:ext cx="9178882" cy="5163120"/>
+          </a:xfrm>
+          <a:prstGeom prst="rect">
+            <a:avLst/>
+          </a:prstGeom>
+        </p:spPr>
+      </p:pic>
+    </p:spTree>
+    <p:extLst>
+      <p:ext uri="{BB962C8B-B14F-4D97-AF65-F5344CB8AC3E}">
+        <p14:creationId xmlns:p14="http://schemas.microsoft.com/office/powerpoint/2010/main" val="984300874"/>
+      </p:ext>
+    </p:extLst>
+  </p:cSld>
+  <p:clrMapOvr>
+    <a:masterClrMapping/>
+  </p:clrMapOvr>
+  <p:timing>
+    <p:tnLst>
+      <p:par>
+        <p:cTn id="1" dur="indefinite" restart="never" nodeType="tmRoot">
+          <p:childTnLst>
+            <p:seq concurrent="1" nextAc="seek">
+              <p:cTn id="2" dur="indefinite" nodeType="mainSeq">
+                <p:childTnLst>
+                  <p:par>
+                    <p:cTn id="3" fill="hold">
+                      <p:stCondLst>
+                        <p:cond delay="indefinite"/>
+                      </p:stCondLst>
+                      <p:childTnLst>
+                        <p:par>
+                          <p:cTn id="4" fill="hold">
+                            <p:stCondLst>
+                              <p:cond delay="0"/>
+                            </p:stCondLst>
+                            <p:childTnLst>
+                              <p:par>
+                                <p:cTn id="5" presetID="2" presetClass="entr" presetSubtype="4" fill="hold" nodeType="clickEffect">
+                                  <p:stCondLst>
+                                    <p:cond delay="0"/>
+                                  </p:stCondLst>
+                                  <p:childTnLst>
+                                    <p:set>
+                                      <p:cBhvr>
+                                        <p:cTn id="6" dur="1" fill="hold">
+                                          <p:stCondLst>
+                                            <p:cond delay="0"/>
+                                          </p:stCondLst>
+                                        </p:cTn>
+                                        <p:tgtEl>
+                                          <p:spTgt spid="7"/>
+                                        </p:tgtEl>
+                                        <p:attrNameLst>
+                                          <p:attrName>style.visibility</p:attrName>
+                                        </p:attrNameLst>
+                                      </p:cBhvr>
+                                      <p:to>
+                                        <p:strVal val="visible"/>
+                                      </p:to>
+                                    </p:set>
+                                    <p:anim calcmode="lin" valueType="num">
+                                      <p:cBhvr additive="base">
+                                        <p:cTn id="7" dur="500" fill="hold"/>
+                                        <p:tgtEl>
+                                          <p:spTgt spid="7"/>
+                                        </p:tgtEl>
+                                        <p:attrNameLst>
+                                          <p:attrName>ppt_x</p:attrName>
+                                        </p:attrNameLst>
+                                      </p:cBhvr>
+                                      <p:tavLst>
+                                        <p:tav tm="0">
+                                          <p:val>
+                                            <p:strVal val="#ppt_x"/>
+                                          </p:val>
+                                        </p:tav>
+                                        <p:tav tm="100000">
+                                          <p:val>
+                                            <p:strVal val="#ppt_x"/>
+                                          </p:val>
+                                        </p:tav>
+                                      </p:tavLst>
+                                    </p:anim>
+                                    <p:anim calcmode="lin" valueType="num">
+                                      <p:cBhvr additive="base">
+                                        <p:cTn id="8" dur="500" fill="hold"/>
+                                        <p:tgtEl>
+                                          <p:spTgt spid="7"/>
+                                        </p:tgtEl>
+                                        <p:attrNameLst>
+                                          <p:attrName>ppt_y</p:attrName>
+                                        </p:attrNameLst>
+                                      </p:cBhvr>
+                                      <p:tavLst>
+                                        <p:tav tm="0">
+                                          <p:val>
+                                            <p:strVal val="1+#ppt_h/2"/>
+                                          </p:val>
+                                        </p:tav>
+                                        <p:tav tm="100000">
+                                          <p:val>
+                                            <p:strVal val="#ppt_y"/>
+                                          </p:val>
+                                        </p:tav>
+                                      </p:tavLst>
+                                    </p:anim>
+                                  </p:childTnLst>
+                                </p:cTn>
+                              </p:par>
+                            </p:childTnLst>
+                          </p:cTn>
+                        </p:par>
+                      </p:childTnLst>
+                    </p:cTn>
+                  </p:par>
+                </p:childTnLst>
+              </p:cTn>
+              <p:prevCondLst>
+                <p:cond evt="onPrev" delay="0">
+                  <p:tgtEl>
+                    <p:sldTgt/>
+                  </p:tgtEl>
+                </p:cond>
+              </p:prevCondLst>
+              <p:nextCondLst>
+                <p:cond evt="onNext" delay="0">
+                  <p:tgtEl>
+                    <p:sldTgt/>
+                  </p:tgtEl>
+                </p:cond>
+              </p:nextCondLst>
+            </p:seq>
+          </p:childTnLst>
+        </p:cTn>
+      </p:par>
+    </p:tnLst>
+  </p:timing>
+</p:sld>
+</file>
+
+<file path=ppt/slides/slide5.xml><?xml version="1.0" encoding="utf-8"?>
+<p:sld xmlns:a="http://schemas.openxmlformats.org/drawingml/2006/main" xmlns:r="http://schemas.openxmlformats.org/officeDocument/2006/relationships" xmlns:p="http://schemas.openxmlformats.org/presentationml/2006/main">
+  <p:cSld>
+    <p:spTree>
+      <p:nvGrpSpPr>
+        <p:cNvPr id="1" name=""/>
+        <p:cNvGrpSpPr/>
+        <p:nvPr/>
+      </p:nvGrpSpPr>
+      <p:grpSpPr>
+        <a:xfrm>
+          <a:off x="0" y="0"/>
+          <a:ext cx="0" cy="0"/>
+          <a:chOff x="0" y="0"/>
+          <a:chExt cx="0" cy="0"/>
+        </a:xfrm>
+      </p:grpSpPr>
+      <p:sp>
+        <p:nvSpPr>
+          <p:cNvPr id="2" name="標題 1">
+            <a:extLst>
+              <a:ext uri="{FF2B5EF4-FFF2-40B4-BE49-F238E27FC236}">
+                <a16:creationId xmlns:a16="http://schemas.microsoft.com/office/drawing/2014/main" id="{0727AA2B-FF89-42CE-B9E5-F2C8F9CDE2A5}"/>
+              </a:ext>
+            </a:extLst>
+          </p:cNvPr>
+          <p:cNvSpPr>
+            <a:spLocks noGrp="1"/>
+          </p:cNvSpPr>
+          <p:nvPr>
+            <p:ph type="title"/>
+          </p:nvPr>
+        </p:nvSpPr>
+        <p:spPr/>
+        <p:txBody>
+          <a:bodyPr/>
+          <a:lstStyle/>
+          <a:p>
+            <a:r>
+              <a:rPr lang="zh-TW" altLang="en-US" b="1" dirty="0">
+                <a:latin typeface="Arial" panose="020B0604020202020204" pitchFamily="34" charset="0"/>
+                <a:ea typeface="標楷體" panose="03000509000000000000" pitchFamily="65" charset="-120"/>
+                <a:cs typeface="Arial" panose="020B0604020202020204" pitchFamily="34" charset="0"/>
+              </a:rPr>
+              <a:t>泛音列</a:t>
+            </a:r>
+            <a:r>
+              <a:rPr lang="en-US" altLang="zh-TW" b="1" dirty="0">
+                <a:latin typeface="Arial" panose="020B0604020202020204" pitchFamily="34" charset="0"/>
+                <a:ea typeface="標楷體" panose="03000509000000000000" pitchFamily="65" charset="-120"/>
+                <a:cs typeface="Arial" panose="020B0604020202020204" pitchFamily="34" charset="0"/>
+              </a:rPr>
+              <a:t>(Harmonic series)</a:t>
+            </a:r>
+            <a:endParaRPr lang="zh-TW" altLang="en-US" b="1" dirty="0">
+              <a:latin typeface="Arial" panose="020B0604020202020204" pitchFamily="34" charset="0"/>
+              <a:ea typeface="標楷體" panose="03000509000000000000" pitchFamily="65" charset="-120"/>
+              <a:cs typeface="Arial" panose="020B0604020202020204" pitchFamily="34" charset="0"/>
+            </a:endParaRPr>
+          </a:p>
+        </p:txBody>
+      </p:sp>
+      <p:sp>
+        <p:nvSpPr>
+          <p:cNvPr id="3" name="內容版面配置區 2">
+            <a:extLst>
+              <a:ext uri="{FF2B5EF4-FFF2-40B4-BE49-F238E27FC236}">
+                <a16:creationId xmlns:a16="http://schemas.microsoft.com/office/drawing/2014/main" id="{D0A5B91E-9772-4F8E-BFEF-EB9492AC550D}"/>
+              </a:ext>
+            </a:extLst>
+          </p:cNvPr>
+          <p:cNvSpPr>
+            <a:spLocks noGrp="1"/>
+          </p:cNvSpPr>
+          <p:nvPr>
+            <p:ph idx="1"/>
+          </p:nvPr>
+        </p:nvSpPr>
+        <p:spPr/>
+        <p:txBody>
+          <a:bodyPr>
+            <a:normAutofit/>
+          </a:bodyPr>
+          <a:lstStyle/>
+          <a:p>
+            <a:r>
+              <a:rPr lang="zh-TW" altLang="en-US" sz="2400" dirty="0">
+                <a:latin typeface="Arial" panose="020B0604020202020204" pitchFamily="34" charset="0"/>
+                <a:ea typeface="標楷體" panose="03000509000000000000" pitchFamily="65" charset="-120"/>
+                <a:cs typeface="Arial" panose="020B0604020202020204" pitchFamily="34" charset="0"/>
+              </a:rPr>
+              <a:t>發聲體除了會整體震動</a:t>
+            </a:r>
+            <a:r>
+              <a:rPr lang="en-US" altLang="zh-TW" sz="2400" dirty="0">
+                <a:latin typeface="Arial" panose="020B0604020202020204" pitchFamily="34" charset="0"/>
+                <a:ea typeface="標楷體" panose="03000509000000000000" pitchFamily="65" charset="-120"/>
+                <a:cs typeface="Arial" panose="020B0604020202020204" pitchFamily="34" charset="0"/>
+              </a:rPr>
+              <a:t>(</a:t>
+            </a:r>
+            <a:r>
+              <a:rPr lang="zh-TW" altLang="en-US" sz="2400" dirty="0">
+                <a:latin typeface="Arial" panose="020B0604020202020204" pitchFamily="34" charset="0"/>
+                <a:ea typeface="標楷體" panose="03000509000000000000" pitchFamily="65" charset="-120"/>
+                <a:cs typeface="Arial" panose="020B0604020202020204" pitchFamily="34" charset="0"/>
+              </a:rPr>
+              <a:t>基音</a:t>
+            </a:r>
+            <a:r>
+              <a:rPr lang="en-US" altLang="zh-TW" sz="2400" dirty="0">
+                <a:latin typeface="Arial" panose="020B0604020202020204" pitchFamily="34" charset="0"/>
+                <a:ea typeface="標楷體" panose="03000509000000000000" pitchFamily="65" charset="-120"/>
+                <a:cs typeface="Arial" panose="020B0604020202020204" pitchFamily="34" charset="0"/>
+              </a:rPr>
+              <a:t>)</a:t>
+            </a:r>
+            <a:r>
+              <a:rPr lang="zh-TW" altLang="en-US" sz="2400" dirty="0">
+                <a:latin typeface="Arial" panose="020B0604020202020204" pitchFamily="34" charset="0"/>
+                <a:ea typeface="標楷體" panose="03000509000000000000" pitchFamily="65" charset="-120"/>
+                <a:cs typeface="Arial" panose="020B0604020202020204" pitchFamily="34" charset="0"/>
+              </a:rPr>
+              <a:t>外還會部份震動</a:t>
+            </a:r>
+            <a:endParaRPr lang="en-US" altLang="zh-TW" sz="2400" dirty="0">
+              <a:latin typeface="Arial" panose="020B0604020202020204" pitchFamily="34" charset="0"/>
+              <a:ea typeface="標楷體" panose="03000509000000000000" pitchFamily="65" charset="-120"/>
+              <a:cs typeface="Arial" panose="020B0604020202020204" pitchFamily="34" charset="0"/>
+            </a:endParaRPr>
+          </a:p>
+          <a:p>
+            <a:pPr marL="0" indent="0">
+              <a:buNone/>
+            </a:pPr>
+            <a:r>
+              <a:rPr lang="en-US" altLang="zh-TW" sz="2400" dirty="0">
+                <a:latin typeface="Arial" panose="020B0604020202020204" pitchFamily="34" charset="0"/>
+                <a:ea typeface="標楷體" panose="03000509000000000000" pitchFamily="65" charset="-120"/>
+                <a:cs typeface="Arial" panose="020B0604020202020204" pitchFamily="34" charset="0"/>
+              </a:rPr>
+              <a:t>(</a:t>
+            </a:r>
+            <a:r>
+              <a:rPr lang="zh-TW" altLang="en-US" sz="2400" dirty="0">
+                <a:latin typeface="Arial" panose="020B0604020202020204" pitchFamily="34" charset="0"/>
+                <a:ea typeface="標楷體" panose="03000509000000000000" pitchFamily="65" charset="-120"/>
+                <a:cs typeface="Arial" panose="020B0604020202020204" pitchFamily="34" charset="0"/>
+              </a:rPr>
+              <a:t>音叉除外</a:t>
+            </a:r>
+            <a:r>
+              <a:rPr lang="en-US" altLang="zh-TW" sz="2400" dirty="0">
+                <a:latin typeface="Arial" panose="020B0604020202020204" pitchFamily="34" charset="0"/>
+                <a:ea typeface="標楷體" panose="03000509000000000000" pitchFamily="65" charset="-120"/>
+                <a:cs typeface="Arial" panose="020B0604020202020204" pitchFamily="34" charset="0"/>
+              </a:rPr>
+              <a:t>)</a:t>
+            </a:r>
+            <a:r>
+              <a:rPr lang="zh-TW" altLang="en-US" sz="2400" dirty="0">
+                <a:latin typeface="Arial" panose="020B0604020202020204" pitchFamily="34" charset="0"/>
+                <a:ea typeface="標楷體" panose="03000509000000000000" pitchFamily="65" charset="-120"/>
+                <a:cs typeface="Arial" panose="020B0604020202020204" pitchFamily="34" charset="0"/>
+              </a:rPr>
+              <a:t>，這些微小的分段震動就會形成泛音</a:t>
+            </a:r>
+            <a:endParaRPr lang="en-US" altLang="zh-TW" sz="2400" dirty="0">
+              <a:latin typeface="Arial" panose="020B0604020202020204" pitchFamily="34" charset="0"/>
+              <a:ea typeface="標楷體" panose="03000509000000000000" pitchFamily="65" charset="-120"/>
+              <a:cs typeface="Arial" panose="020B0604020202020204" pitchFamily="34" charset="0"/>
+            </a:endParaRPr>
+          </a:p>
+          <a:p>
+            <a:pPr marL="0" indent="0">
+              <a:buNone/>
+            </a:pPr>
+            <a:r>
+              <a:rPr lang="zh-TW" altLang="en-US" sz="2400" dirty="0">
+                <a:latin typeface="Arial" panose="020B0604020202020204" pitchFamily="34" charset="0"/>
+                <a:ea typeface="標楷體" panose="03000509000000000000" pitchFamily="65" charset="-120"/>
+                <a:cs typeface="Arial" panose="020B0604020202020204" pitchFamily="34" charset="0"/>
+              </a:rPr>
+              <a:t>列。</a:t>
+            </a:r>
+            <a:endParaRPr lang="en-US" altLang="zh-TW" sz="2400" dirty="0">
+              <a:latin typeface="Arial" panose="020B0604020202020204" pitchFamily="34" charset="0"/>
+              <a:ea typeface="標楷體" panose="03000509000000000000" pitchFamily="65" charset="-120"/>
+              <a:cs typeface="Arial" panose="020B0604020202020204" pitchFamily="34" charset="0"/>
+            </a:endParaRPr>
+          </a:p>
+          <a:p>
+            <a:r>
+              <a:rPr lang="zh-TW" altLang="en-US" sz="2400" dirty="0">
+                <a:latin typeface="Arial" panose="020B0604020202020204" pitchFamily="34" charset="0"/>
+                <a:ea typeface="標楷體" panose="03000509000000000000" pitchFamily="65" charset="-120"/>
+                <a:cs typeface="Arial" panose="020B0604020202020204" pitchFamily="34" charset="0"/>
+              </a:rPr>
+              <a:t>音色的成因</a:t>
+            </a:r>
+            <a:r>
+              <a:rPr lang="en-US" altLang="zh-TW" sz="2400" dirty="0">
+                <a:latin typeface="Arial" panose="020B0604020202020204" pitchFamily="34" charset="0"/>
+                <a:ea typeface="標楷體" panose="03000509000000000000" pitchFamily="65" charset="-120"/>
+                <a:cs typeface="Arial" panose="020B0604020202020204" pitchFamily="34" charset="0"/>
+              </a:rPr>
+              <a:t>(</a:t>
+            </a:r>
+            <a:r>
+              <a:rPr lang="zh-TW" altLang="en-US" sz="2400" dirty="0">
+                <a:latin typeface="Arial" panose="020B0604020202020204" pitchFamily="34" charset="0"/>
+                <a:ea typeface="標楷體" panose="03000509000000000000" pitchFamily="65" charset="-120"/>
+                <a:cs typeface="Arial" panose="020B0604020202020204" pitchFamily="34" charset="0"/>
+              </a:rPr>
+              <a:t>泛音 </a:t>
+            </a:r>
+            <a:r>
+              <a:rPr lang="en-US" altLang="zh-TW" sz="2400" dirty="0">
+                <a:latin typeface="Arial" panose="020B0604020202020204" pitchFamily="34" charset="0"/>
+                <a:ea typeface="標楷體" panose="03000509000000000000" pitchFamily="65" charset="-120"/>
+                <a:cs typeface="Arial" panose="020B0604020202020204" pitchFamily="34" charset="0"/>
+              </a:rPr>
+              <a:t>+</a:t>
+            </a:r>
+            <a:r>
+              <a:rPr lang="zh-TW" altLang="en-US" sz="2400" dirty="0">
+                <a:latin typeface="Arial" panose="020B0604020202020204" pitchFamily="34" charset="0"/>
+                <a:ea typeface="標楷體" panose="03000509000000000000" pitchFamily="65" charset="-120"/>
+                <a:cs typeface="Arial" panose="020B0604020202020204" pitchFamily="34" charset="0"/>
+              </a:rPr>
+              <a:t> 偏差音</a:t>
+            </a:r>
+            <a:r>
+              <a:rPr lang="en-US" altLang="zh-TW" sz="2400" dirty="0">
+                <a:latin typeface="Arial" panose="020B0604020202020204" pitchFamily="34" charset="0"/>
+                <a:ea typeface="標楷體" panose="03000509000000000000" pitchFamily="65" charset="-120"/>
+                <a:cs typeface="Arial" panose="020B0604020202020204" pitchFamily="34" charset="0"/>
+              </a:rPr>
+              <a:t>)</a:t>
+            </a:r>
+            <a:r>
+              <a:rPr lang="zh-TW" altLang="en-US" sz="2400" dirty="0">
+                <a:latin typeface="Arial" panose="020B0604020202020204" pitchFamily="34" charset="0"/>
+                <a:ea typeface="標楷體" panose="03000509000000000000" pitchFamily="65" charset="-120"/>
+                <a:cs typeface="Arial" panose="020B0604020202020204" pitchFamily="34" charset="0"/>
+              </a:rPr>
+              <a:t>。</a:t>
+            </a:r>
+            <a:endParaRPr lang="en-US" altLang="zh-TW" sz="2400" dirty="0">
+              <a:latin typeface="Arial" panose="020B0604020202020204" pitchFamily="34" charset="0"/>
+              <a:ea typeface="標楷體" panose="03000509000000000000" pitchFamily="65" charset="-120"/>
+              <a:cs typeface="Arial" panose="020B0604020202020204" pitchFamily="34" charset="0"/>
+            </a:endParaRPr>
+          </a:p>
+          <a:p>
+            <a:pPr marL="0" indent="0">
+              <a:buNone/>
+            </a:pPr>
+            <a:r>
+              <a:rPr lang="zh-TW" altLang="en-US" sz="2400" dirty="0">
+                <a:latin typeface="Arial" panose="020B0604020202020204" pitchFamily="34" charset="0"/>
+                <a:ea typeface="標楷體" panose="03000509000000000000" pitchFamily="65" charset="-120"/>
+                <a:cs typeface="Arial" panose="020B0604020202020204" pitchFamily="34" charset="0"/>
+              </a:rPr>
+              <a:t>   </a:t>
+            </a:r>
+            <a:r>
+              <a:rPr lang="en-US" altLang="zh-TW" sz="2400" dirty="0">
+                <a:latin typeface="Arial" panose="020B0604020202020204" pitchFamily="34" charset="0"/>
+                <a:ea typeface="標楷體" panose="03000509000000000000" pitchFamily="65" charset="-120"/>
+                <a:cs typeface="Arial" panose="020B0604020202020204" pitchFamily="34" charset="0"/>
+              </a:rPr>
+              <a:t>(ex: </a:t>
+            </a:r>
+            <a:r>
+              <a:rPr lang="zh-TW" altLang="en-US" sz="2400" dirty="0">
+                <a:latin typeface="Arial" panose="020B0604020202020204" pitchFamily="34" charset="0"/>
+                <a:ea typeface="標楷體" panose="03000509000000000000" pitchFamily="65" charset="-120"/>
+                <a:cs typeface="Arial" panose="020B0604020202020204" pitchFamily="34" charset="0"/>
+              </a:rPr>
+              <a:t>鋼琴有高音更高，低音更低的特性</a:t>
+            </a:r>
+            <a:r>
+              <a:rPr lang="en-US" altLang="zh-TW" sz="2400" dirty="0">
+                <a:latin typeface="Arial" panose="020B0604020202020204" pitchFamily="34" charset="0"/>
+                <a:ea typeface="標楷體" panose="03000509000000000000" pitchFamily="65" charset="-120"/>
+                <a:cs typeface="Arial" panose="020B0604020202020204" pitchFamily="34" charset="0"/>
+              </a:rPr>
+              <a:t>)</a:t>
+            </a:r>
+          </a:p>
+          <a:p>
+            <a:r>
+              <a:rPr lang="zh-TW" altLang="en-US" sz="2400" dirty="0">
+                <a:latin typeface="Arial" panose="020B0604020202020204" pitchFamily="34" charset="0"/>
+                <a:ea typeface="標楷體" panose="03000509000000000000" pitchFamily="65" charset="-120"/>
+                <a:cs typeface="Arial" panose="020B0604020202020204" pitchFamily="34" charset="0"/>
+              </a:rPr>
+              <a:t>基頻的整數倍</a:t>
+            </a:r>
+            <a:r>
+              <a:rPr lang="en-US" altLang="zh-TW" sz="2400" dirty="0">
+                <a:latin typeface="Arial" panose="020B0604020202020204" pitchFamily="34" charset="0"/>
+                <a:ea typeface="標楷體" panose="03000509000000000000" pitchFamily="65" charset="-120"/>
+                <a:cs typeface="Arial" panose="020B0604020202020204" pitchFamily="34" charset="0"/>
+              </a:rPr>
+              <a:t>(2,</a:t>
+            </a:r>
+            <a:r>
+              <a:rPr lang="zh-TW" altLang="en-US" sz="2400" dirty="0">
+                <a:latin typeface="Arial" panose="020B0604020202020204" pitchFamily="34" charset="0"/>
+                <a:ea typeface="標楷體" panose="03000509000000000000" pitchFamily="65" charset="-120"/>
+                <a:cs typeface="Arial" panose="020B0604020202020204" pitchFamily="34" charset="0"/>
+              </a:rPr>
+              <a:t> </a:t>
+            </a:r>
+            <a:r>
+              <a:rPr lang="en-US" altLang="zh-TW" sz="2400" dirty="0">
+                <a:latin typeface="Arial" panose="020B0604020202020204" pitchFamily="34" charset="0"/>
+                <a:ea typeface="標楷體" panose="03000509000000000000" pitchFamily="65" charset="-120"/>
+                <a:cs typeface="Arial" panose="020B0604020202020204" pitchFamily="34" charset="0"/>
+              </a:rPr>
+              <a:t>3,</a:t>
+            </a:r>
+            <a:r>
+              <a:rPr lang="zh-TW" altLang="en-US" sz="2400" dirty="0">
+                <a:latin typeface="Arial" panose="020B0604020202020204" pitchFamily="34" charset="0"/>
+                <a:ea typeface="標楷體" panose="03000509000000000000" pitchFamily="65" charset="-120"/>
+                <a:cs typeface="Arial" panose="020B0604020202020204" pitchFamily="34" charset="0"/>
+              </a:rPr>
+              <a:t> </a:t>
+            </a:r>
+            <a:r>
+              <a:rPr lang="en-US" altLang="zh-TW" sz="2400" dirty="0">
+                <a:latin typeface="Arial" panose="020B0604020202020204" pitchFamily="34" charset="0"/>
+                <a:ea typeface="標楷體" panose="03000509000000000000" pitchFamily="65" charset="-120"/>
+                <a:cs typeface="Arial" panose="020B0604020202020204" pitchFamily="34" charset="0"/>
+              </a:rPr>
+              <a:t>4, 5,…)</a:t>
+            </a:r>
+            <a:r>
+              <a:rPr lang="zh-TW" altLang="en-US" sz="2400" dirty="0">
+                <a:latin typeface="Arial" panose="020B0604020202020204" pitchFamily="34" charset="0"/>
+                <a:ea typeface="標楷體" panose="03000509000000000000" pitchFamily="65" charset="-120"/>
+                <a:cs typeface="Arial" panose="020B0604020202020204" pitchFamily="34" charset="0"/>
+              </a:rPr>
+              <a:t>。</a:t>
+            </a:r>
+            <a:endParaRPr lang="en-US" altLang="zh-TW" sz="2400" dirty="0">
+              <a:latin typeface="Arial" panose="020B0604020202020204" pitchFamily="34" charset="0"/>
+              <a:ea typeface="標楷體" panose="03000509000000000000" pitchFamily="65" charset="-120"/>
+              <a:cs typeface="Arial" panose="020B0604020202020204" pitchFamily="34" charset="0"/>
+            </a:endParaRPr>
+          </a:p>
+          <a:p>
+            <a:r>
+              <a:rPr lang="zh-TW" altLang="en-US" sz="2400" dirty="0">
+                <a:latin typeface="Arial" panose="020B0604020202020204" pitchFamily="34" charset="0"/>
+                <a:ea typeface="標楷體" panose="03000509000000000000" pitchFamily="65" charset="-120"/>
+                <a:cs typeface="Arial" panose="020B0604020202020204" pitchFamily="34" charset="0"/>
+              </a:rPr>
+              <a:t>人的大腦會自動解析基頻為音高，泛音列為音色。</a:t>
+            </a:r>
+            <a:endParaRPr lang="en-US" altLang="zh-TW" sz="2400" dirty="0">
+              <a:latin typeface="Arial" panose="020B0604020202020204" pitchFamily="34" charset="0"/>
+              <a:ea typeface="標楷體" panose="03000509000000000000" pitchFamily="65" charset="-120"/>
+              <a:cs typeface="Arial" panose="020B0604020202020204" pitchFamily="34" charset="0"/>
+            </a:endParaRPr>
+          </a:p>
+          <a:p>
+            <a:r>
+              <a:rPr lang="zh-TW" altLang="en-US" sz="2400" b="1" dirty="0">
+                <a:latin typeface="Arial" panose="020B0604020202020204" pitchFamily="34" charset="0"/>
+                <a:ea typeface="標楷體" panose="03000509000000000000" pitchFamily="65" charset="-120"/>
+                <a:cs typeface="Arial" panose="020B0604020202020204" pitchFamily="34" charset="0"/>
+              </a:rPr>
+              <a:t>測量音頻有可能會受到泛音及偏差音的影響。</a:t>
+            </a:r>
+          </a:p>
+        </p:txBody>
+      </p:sp>
+      <p:pic>
+        <p:nvPicPr>
+          <p:cNvPr id="1028" name="Picture 4" descr="undefined">
+            <a:extLst>
+              <a:ext uri="{FF2B5EF4-FFF2-40B4-BE49-F238E27FC236}">
+                <a16:creationId xmlns:a16="http://schemas.microsoft.com/office/drawing/2014/main" id="{9ED7A301-E4E7-45C9-86E1-27B016537DCC}"/>
+              </a:ext>
+            </a:extLst>
+          </p:cNvPr>
+          <p:cNvPicPr>
+            <a:picLocks noChangeAspect="1" noChangeArrowheads="1"/>
+          </p:cNvPicPr>
+          <p:nvPr/>
+        </p:nvPicPr>
+        <p:blipFill>
+          <a:blip r:embed="rId3">
+            <a:extLst>
+              <a:ext uri="{28A0092B-C50C-407E-A947-70E740481C1C}">
+                <a14:useLocalDpi xmlns:a14="http://schemas.microsoft.com/office/drawing/2010/main" val="0"/>
+              </a:ext>
+            </a:extLst>
+          </a:blip>
+          <a:srcRect/>
+          <a:stretch>
+            <a:fillRect/>
+          </a:stretch>
+        </p:blipFill>
+        <p:spPr bwMode="auto">
+          <a:xfrm>
+            <a:off x="8085220" y="1728787"/>
+            <a:ext cx="3268579" cy="4351338"/>
+          </a:xfrm>
+          <a:prstGeom prst="rect">
+            <a:avLst/>
+          </a:prstGeom>
+          <a:noFill/>
+          <a:extLst>
+            <a:ext uri="{909E8E84-426E-40DD-AFC4-6F175D3DCCD1}">
+              <a14:hiddenFill xmlns:a14="http://schemas.microsoft.com/office/drawing/2010/main">
+                <a:solidFill>
+                  <a:srgbClr val="FFFFFF"/>
+                </a:solidFill>
+              </a14:hiddenFill>
+            </a:ext>
+          </a:extLst>
+        </p:spPr>
+      </p:pic>
+    </p:spTree>
+    <p:extLst>
+      <p:ext uri="{BB962C8B-B14F-4D97-AF65-F5344CB8AC3E}">
+        <p14:creationId xmlns:p14="http://schemas.microsoft.com/office/powerpoint/2010/main" val="886742972"/>
+      </p:ext>
+    </p:extLst>
+  </p:cSld>
+  <p:clrMapOvr>
+    <a:masterClrMapping/>
+  </p:clrMapOvr>
+</p:sld>
+</file>
+
+<file path=ppt/slides/slide6.xml><?xml version="1.0" encoding="utf-8"?>
+<p:sld xmlns:a="http://schemas.openxmlformats.org/drawingml/2006/main" xmlns:r="http://schemas.openxmlformats.org/officeDocument/2006/relationships" xmlns:p="http://schemas.openxmlformats.org/presentationml/2006/main">
+  <p:cSld>
+    <p:spTree>
+      <p:nvGrpSpPr>
+        <p:cNvPr id="1" name=""/>
+        <p:cNvGrpSpPr/>
+        <p:nvPr/>
+      </p:nvGrpSpPr>
+      <p:grpSpPr>
+        <a:xfrm>
+          <a:off x="0" y="0"/>
+          <a:ext cx="0" cy="0"/>
+          <a:chOff x="0" y="0"/>
+          <a:chExt cx="0" cy="0"/>
+        </a:xfrm>
+      </p:grpSpPr>
+      <p:sp>
+        <p:nvSpPr>
+          <p:cNvPr id="2" name="標題 1">
+            <a:extLst>
+              <a:ext uri="{FF2B5EF4-FFF2-40B4-BE49-F238E27FC236}">
+                <a16:creationId xmlns:a16="http://schemas.microsoft.com/office/drawing/2014/main" id="{200AD999-551A-4870-9B41-82B9E184FB0B}"/>
+              </a:ext>
+            </a:extLst>
+          </p:cNvPr>
+          <p:cNvSpPr>
+            <a:spLocks noGrp="1"/>
+          </p:cNvSpPr>
+          <p:nvPr>
+            <p:ph type="title"/>
+          </p:nvPr>
+        </p:nvSpPr>
+        <p:spPr/>
+        <p:txBody>
+          <a:bodyPr/>
+          <a:lstStyle/>
+          <a:p>
+            <a:endParaRPr lang="zh-TW" altLang="en-US"/>
+          </a:p>
+        </p:txBody>
+      </p:sp>
+      <p:sp>
+        <p:nvSpPr>
+          <p:cNvPr id="11" name="內容版面配置區 10">
+            <a:extLst>
+              <a:ext uri="{FF2B5EF4-FFF2-40B4-BE49-F238E27FC236}">
+                <a16:creationId xmlns:a16="http://schemas.microsoft.com/office/drawing/2014/main" id="{FF535D7D-8804-4DC8-A5AB-622156FADF9A}"/>
+              </a:ext>
+            </a:extLst>
+          </p:cNvPr>
+          <p:cNvSpPr>
+            <a:spLocks noGrp="1"/>
+          </p:cNvSpPr>
+          <p:nvPr>
+            <p:ph idx="1"/>
+          </p:nvPr>
+        </p:nvSpPr>
+        <p:spPr/>
+        <p:txBody>
+          <a:bodyPr/>
+          <a:lstStyle/>
+          <a:p>
+            <a:endParaRPr lang="zh-TW" altLang="en-US"/>
+          </a:p>
+        </p:txBody>
+      </p:sp>
+      <p:pic>
+        <p:nvPicPr>
+          <p:cNvPr id="15" name="圖片 14">
+            <a:extLst>
+              <a:ext uri="{FF2B5EF4-FFF2-40B4-BE49-F238E27FC236}">
+                <a16:creationId xmlns:a16="http://schemas.microsoft.com/office/drawing/2014/main" id="{4BCA8551-CAFF-4993-9762-DB3EAFEE5A01}"/>
+              </a:ext>
+            </a:extLst>
+          </p:cNvPr>
+          <p:cNvPicPr>
+            <a:picLocks noChangeAspect="1"/>
+          </p:cNvPicPr>
+          <p:nvPr/>
+        </p:nvPicPr>
+        <p:blipFill rotWithShape="1">
+          <a:blip r:embed="rId2"/>
+          <a:srcRect t="7490"/>
+          <a:stretch/>
+        </p:blipFill>
+        <p:spPr>
+          <a:xfrm>
+            <a:off x="2340522" y="1918738"/>
+            <a:ext cx="7510956" cy="4605545"/>
+          </a:xfrm>
+          <a:prstGeom prst="rect">
+            <a:avLst/>
+          </a:prstGeom>
+        </p:spPr>
+      </p:pic>
+      <p:pic>
+        <p:nvPicPr>
+          <p:cNvPr id="4" name="圖片 3">
+            <a:extLst>
+              <a:ext uri="{FF2B5EF4-FFF2-40B4-BE49-F238E27FC236}">
+                <a16:creationId xmlns:a16="http://schemas.microsoft.com/office/drawing/2014/main" id="{1B2119D0-3CF2-4D72-97B1-7EEF958C2188}"/>
+              </a:ext>
+            </a:extLst>
+          </p:cNvPr>
+          <p:cNvPicPr>
+            <a:picLocks noChangeAspect="1"/>
+          </p:cNvPicPr>
+          <p:nvPr/>
+        </p:nvPicPr>
+        <p:blipFill>
+          <a:blip r:embed="rId3"/>
+          <a:stretch>
+            <a:fillRect/>
+          </a:stretch>
+        </p:blipFill>
+        <p:spPr>
+          <a:xfrm>
+            <a:off x="557172" y="293409"/>
+            <a:ext cx="11077656" cy="1562111"/>
+          </a:xfrm>
+          <a:prstGeom prst="rect">
+            <a:avLst/>
+          </a:prstGeom>
+        </p:spPr>
+      </p:pic>
+    </p:spTree>
+    <p:extLst>
+      <p:ext uri="{BB962C8B-B14F-4D97-AF65-F5344CB8AC3E}">
+        <p14:creationId xmlns:p14="http://schemas.microsoft.com/office/powerpoint/2010/main" val="1360144289"/>
+      </p:ext>
+    </p:extLst>
+  </p:cSld>
+  <p:clrMapOvr>
+    <a:masterClrMapping/>
+  </p:clrMapOvr>
+</p:sld>
+</file>
+
+<file path=ppt/slides/slide7.xml><?xml version="1.0" encoding="utf-8"?>
+<p:sld xmlns:a="http://schemas.openxmlformats.org/drawingml/2006/main" xmlns:r="http://schemas.openxmlformats.org/officeDocument/2006/relationships" xmlns:p="http://schemas.openxmlformats.org/presentationml/2006/main">
+  <p:cSld>
+    <p:spTree>
+      <p:nvGrpSpPr>
+        <p:cNvPr id="1" name=""/>
+        <p:cNvGrpSpPr/>
+        <p:nvPr/>
+      </p:nvGrpSpPr>
+      <p:grpSpPr>
+        <a:xfrm>
+          <a:off x="0" y="0"/>
+          <a:ext cx="0" cy="0"/>
+          <a:chOff x="0" y="0"/>
+          <a:chExt cx="0" cy="0"/>
+        </a:xfrm>
+      </p:grpSpPr>
+      <p:pic>
+        <p:nvPicPr>
+          <p:cNvPr id="37" name="圖片 36">
+            <a:extLst>
+              <a:ext uri="{FF2B5EF4-FFF2-40B4-BE49-F238E27FC236}">
+                <a16:creationId xmlns:a16="http://schemas.microsoft.com/office/drawing/2014/main" id="{867B3574-BEB7-4978-B815-F42C44BFAD4A}"/>
+              </a:ext>
+            </a:extLst>
+          </p:cNvPr>
+          <p:cNvPicPr>
+            <a:picLocks noChangeAspect="1"/>
+          </p:cNvPicPr>
+          <p:nvPr/>
+        </p:nvPicPr>
+        <p:blipFill>
+          <a:blip r:embed="rId3"/>
+          <a:stretch>
+            <a:fillRect/>
+          </a:stretch>
+        </p:blipFill>
+        <p:spPr>
+          <a:xfrm>
+            <a:off x="6248237" y="1683277"/>
+            <a:ext cx="5417210" cy="4937878"/>
+          </a:xfrm>
+          <a:prstGeom prst="rect">
+            <a:avLst/>
+          </a:prstGeom>
+        </p:spPr>
+      </p:pic>
+      <p:pic>
+        <p:nvPicPr>
+          <p:cNvPr id="35" name="圖片 34">
+            <a:extLst>
+              <a:ext uri="{FF2B5EF4-FFF2-40B4-BE49-F238E27FC236}">
+                <a16:creationId xmlns:a16="http://schemas.microsoft.com/office/drawing/2014/main" id="{0E1B36FE-BE96-4216-BD9B-A22B40BD676B}"/>
+              </a:ext>
+            </a:extLst>
+          </p:cNvPr>
+          <p:cNvPicPr>
+            <a:picLocks noChangeAspect="1"/>
+          </p:cNvPicPr>
+          <p:nvPr/>
+        </p:nvPicPr>
+        <p:blipFill>
+          <a:blip r:embed="rId4"/>
+          <a:stretch>
+            <a:fillRect/>
+          </a:stretch>
+        </p:blipFill>
+        <p:spPr>
+          <a:xfrm>
+            <a:off x="526553" y="1683277"/>
+            <a:ext cx="4956289" cy="4937878"/>
+          </a:xfrm>
+          <a:prstGeom prst="rect">
+            <a:avLst/>
+          </a:prstGeom>
+        </p:spPr>
+      </p:pic>
+      <mc:AlternateContent xmlns:mc="http://schemas.openxmlformats.org/markup-compatibility/2006">
+        <mc:Choice xmlns:a14="http://schemas.microsoft.com/office/drawing/2010/main" Requires="a14">
+          <p:sp>
+            <p:nvSpPr>
+              <p:cNvPr id="7" name="文字方塊 6">
+                <a:extLst>
+                  <a:ext uri="{FF2B5EF4-FFF2-40B4-BE49-F238E27FC236}">
+                    <a16:creationId xmlns:a16="http://schemas.microsoft.com/office/drawing/2014/main" id="{9DE05A29-9AF8-44FD-8F20-DE0DB0A51AC0}"/>
+                  </a:ext>
+                </a:extLst>
+              </p:cNvPr>
+              <p:cNvSpPr txBox="1"/>
+              <p:nvPr/>
+            </p:nvSpPr>
+            <p:spPr>
+              <a:xfrm>
+                <a:off x="7680501" y="334330"/>
+                <a:ext cx="4471569" cy="1106521"/>
+              </a:xfrm>
+              <a:prstGeom prst="rect">
+                <a:avLst/>
+              </a:prstGeom>
+              <a:noFill/>
+            </p:spPr>
+            <p:txBody>
+              <a:bodyPr wrap="square" lIns="0" tIns="0" rIns="0" bIns="0" rtlCol="0">
+                <a:spAutoFit/>
+              </a:bodyPr>
+              <a:lstStyle/>
+              <a:p>
+                <a:pPr/>
+                <a14:m>
+                  <m:oMathPara xmlns:m="http://schemas.openxmlformats.org/officeDocument/2006/math">
+                    <m:oMathParaPr>
+                      <m:jc m:val="centerGroup"/>
+                    </m:oMathParaPr>
+                    <m:oMath xmlns:m="http://schemas.openxmlformats.org/officeDocument/2006/math">
+                      <m:r>
+                        <a:rPr lang="en-US" altLang="zh-TW" sz="3200" b="0" i="1" smtClean="0">
+                          <a:latin typeface="Cambria Math" panose="02040503050406030204" pitchFamily="18" charset="0"/>
+                        </a:rPr>
+                        <m:t>𝑑𝑓</m:t>
+                      </m:r>
+                      <m:r>
+                        <a:rPr lang="zh-TW" altLang="en-US" sz="3200" i="0">
+                          <a:latin typeface="Cambria Math" panose="02040503050406030204" pitchFamily="18" charset="0"/>
+                        </a:rPr>
+                        <m:t>=1200×</m:t>
+                      </m:r>
+                      <m:func>
+                        <m:funcPr>
+                          <m:ctrlPr>
+                            <a:rPr lang="zh-TW" altLang="en-US" sz="3200" i="1">
+                              <a:latin typeface="Cambria Math" panose="02040503050406030204" pitchFamily="18" charset="0"/>
+                            </a:rPr>
+                          </m:ctrlPr>
+                        </m:funcPr>
+                        <m:fName>
+                          <m:sSub>
+                            <m:sSubPr>
+                              <m:ctrlPr>
+                                <a:rPr lang="zh-TW" altLang="en-US" sz="3200" i="1">
+                                  <a:solidFill>
+                                    <a:srgbClr val="836967"/>
+                                  </a:solidFill>
+                                  <a:latin typeface="Cambria Math" panose="02040503050406030204" pitchFamily="18" charset="0"/>
+                                </a:rPr>
+                              </m:ctrlPr>
+                            </m:sSubPr>
+                            <m:e>
+                              <m:r>
+                                <m:rPr>
+                                  <m:sty m:val="p"/>
+                                </m:rPr>
+                                <a:rPr lang="zh-TW" altLang="en-US" sz="3200" i="0">
+                                  <a:latin typeface="Cambria Math" panose="02040503050406030204" pitchFamily="18" charset="0"/>
+                                </a:rPr>
+                                <m:t>log</m:t>
+                              </m:r>
+                            </m:e>
+                            <m:sub>
+                              <m:r>
+                                <a:rPr lang="zh-TW" altLang="en-US" sz="3200" i="0">
+                                  <a:latin typeface="Cambria Math" panose="02040503050406030204" pitchFamily="18" charset="0"/>
+                                </a:rPr>
+                                <m:t>2</m:t>
+                              </m:r>
+                            </m:sub>
+                          </m:sSub>
+                        </m:fName>
+                        <m:e>
+                          <m:d>
+                            <m:dPr>
+                              <m:ctrlPr>
+                                <a:rPr lang="zh-TW" altLang="en-US" sz="3200" i="1">
+                                  <a:solidFill>
+                                    <a:srgbClr val="836967"/>
+                                  </a:solidFill>
+                                  <a:latin typeface="Cambria Math" panose="02040503050406030204" pitchFamily="18" charset="0"/>
+                                </a:rPr>
+                              </m:ctrlPr>
+                            </m:dPr>
+                            <m:e>
+                              <m:f>
+                                <m:fPr>
+                                  <m:ctrlPr>
+                                    <a:rPr lang="zh-TW" altLang="en-US" sz="3200" i="1">
+                                      <a:solidFill>
+                                        <a:srgbClr val="836967"/>
+                                      </a:solidFill>
+                                      <a:latin typeface="Cambria Math" panose="02040503050406030204" pitchFamily="18" charset="0"/>
+                                    </a:rPr>
+                                  </m:ctrlPr>
+                                </m:fPr>
+                                <m:num>
+                                  <m:sSub>
+                                    <m:sSubPr>
+                                      <m:ctrlPr>
+                                        <a:rPr lang="zh-TW" altLang="en-US" sz="3200" i="1">
+                                          <a:solidFill>
+                                            <a:srgbClr val="836967"/>
+                                          </a:solidFill>
+                                          <a:latin typeface="Cambria Math" panose="02040503050406030204" pitchFamily="18" charset="0"/>
+                                        </a:rPr>
+                                      </m:ctrlPr>
+                                    </m:sSubPr>
+                                    <m:e>
+                                      <m:r>
+                                        <a:rPr lang="zh-TW" altLang="en-US" sz="3200" i="1">
+                                          <a:latin typeface="Cambria Math" panose="02040503050406030204" pitchFamily="18" charset="0"/>
+                                        </a:rPr>
+                                        <m:t>𝑓</m:t>
+                                      </m:r>
+                                    </m:e>
+                                    <m:sub>
+                                      <m:r>
+                                        <a:rPr lang="zh-TW" altLang="en-US" sz="3200" i="1">
+                                          <a:latin typeface="Cambria Math" panose="02040503050406030204" pitchFamily="18" charset="0"/>
+                                        </a:rPr>
+                                        <m:t>𝑎</m:t>
+                                      </m:r>
+                                    </m:sub>
+                                  </m:sSub>
+                                </m:num>
+                                <m:den>
+                                  <m:sSub>
+                                    <m:sSubPr>
+                                      <m:ctrlPr>
+                                        <a:rPr lang="zh-TW" altLang="en-US" sz="3200" i="1">
+                                          <a:solidFill>
+                                            <a:srgbClr val="836967"/>
+                                          </a:solidFill>
+                                          <a:latin typeface="Cambria Math" panose="02040503050406030204" pitchFamily="18" charset="0"/>
+                                        </a:rPr>
+                                      </m:ctrlPr>
+                                    </m:sSubPr>
+                                    <m:e>
+                                      <m:r>
+                                        <a:rPr lang="zh-TW" altLang="en-US" sz="3200" i="1">
+                                          <a:latin typeface="Cambria Math" panose="02040503050406030204" pitchFamily="18" charset="0"/>
+                                        </a:rPr>
+                                        <m:t>𝑓</m:t>
+                                      </m:r>
+                                    </m:e>
+                                    <m:sub>
+                                      <m:r>
+                                        <a:rPr lang="zh-TW" altLang="en-US" sz="3200" i="1">
+                                          <a:latin typeface="Cambria Math" panose="02040503050406030204" pitchFamily="18" charset="0"/>
+                                        </a:rPr>
+                                        <m:t>𝑏</m:t>
+                                      </m:r>
+                                    </m:sub>
+                                  </m:sSub>
+                                </m:den>
+                              </m:f>
+                            </m:e>
+                          </m:d>
+                        </m:e>
+                      </m:func>
+                    </m:oMath>
+                  </m:oMathPara>
+                </a14:m>
+                <a:endParaRPr lang="zh-TW" altLang="en-US" dirty="0"/>
+              </a:p>
+            </p:txBody>
+          </p:sp>
+        </mc:Choice>
+        <mc:Fallback>
+          <p:sp>
+            <p:nvSpPr>
+              <p:cNvPr id="7" name="文字方塊 6">
+                <a:extLst>
+                  <a:ext uri="{FF2B5EF4-FFF2-40B4-BE49-F238E27FC236}">
+                    <a16:creationId xmlns:a16="http://schemas.microsoft.com/office/drawing/2014/main" id="{9DE05A29-9AF8-44FD-8F20-DE0DB0A51AC0}"/>
+                  </a:ext>
+                </a:extLst>
+              </p:cNvPr>
+              <p:cNvSpPr txBox="1">
+                <a:spLocks noRot="1" noChangeAspect="1" noMove="1" noResize="1" noEditPoints="1" noAdjustHandles="1" noChangeArrowheads="1" noChangeShapeType="1" noTextEdit="1"/>
+              </p:cNvSpPr>
+              <p:nvPr/>
+            </p:nvSpPr>
+            <p:spPr>
+              <a:xfrm>
+                <a:off x="7680501" y="334330"/>
+                <a:ext cx="4471569" cy="1106521"/>
+              </a:xfrm>
+              <a:prstGeom prst="rect">
+                <a:avLst/>
+              </a:prstGeom>
+              <a:blipFill>
+                <a:blip r:embed="rId5"/>
+                <a:stretch>
+                  <a:fillRect b="-552"/>
+                </a:stretch>
+              </a:blipFill>
+            </p:spPr>
+            <p:txBody>
+              <a:bodyPr/>
+              <a:lstStyle/>
+              <a:p>
+                <a:r>
+                  <a:rPr lang="zh-TW" altLang="en-US">
+                    <a:noFill/>
+                  </a:rPr>
+                  <a:t> </a:t>
+                </a:r>
+              </a:p>
+            </p:txBody>
+          </p:sp>
+        </mc:Fallback>
+      </mc:AlternateContent>
+      <p:pic>
+        <p:nvPicPr>
+          <p:cNvPr id="5" name="圖片 4">
+            <a:extLst>
+              <a:ext uri="{FF2B5EF4-FFF2-40B4-BE49-F238E27FC236}">
+                <a16:creationId xmlns:a16="http://schemas.microsoft.com/office/drawing/2014/main" id="{268E1E4E-6EFC-46E9-A3FE-D548CD7520C3}"/>
+              </a:ext>
+            </a:extLst>
+          </p:cNvPr>
+          <p:cNvPicPr>
+            <a:picLocks noChangeAspect="1"/>
+          </p:cNvPicPr>
+          <p:nvPr/>
+        </p:nvPicPr>
+        <p:blipFill>
+          <a:blip r:embed="rId6"/>
+          <a:stretch>
+            <a:fillRect/>
+          </a:stretch>
+        </p:blipFill>
+        <p:spPr>
+          <a:xfrm>
+            <a:off x="227118" y="139873"/>
+            <a:ext cx="7396425" cy="1495436"/>
+          </a:xfrm>
+          <a:prstGeom prst="rect">
+            <a:avLst/>
+          </a:prstGeom>
+        </p:spPr>
+      </p:pic>
       <p:cxnSp>
         <p:nvCxnSpPr>
           <p:cNvPr id="9" name="直線單箭頭接點 8">
@@ -7595,17 +8722,67 @@
           <p:nvPr/>
         </p:nvCxnSpPr>
         <p:spPr>
-          <a:xfrm flipH="1" flipV="1">
-            <a:off x="6624918" y="3182471"/>
-            <a:ext cx="2261911" cy="656106"/>
+          <a:xfrm flipH="1">
+            <a:off x="7442791" y="1318437"/>
+            <a:ext cx="1839435" cy="1493996"/>
           </a:xfrm>
           <a:prstGeom prst="straightConnector1">
             <a:avLst/>
           </a:prstGeom>
-          <a:ln w="76200">
+          <a:ln w="50800">
             <a:solidFill>
-              <a:srgbClr val="FF0000"/>
+              <a:srgbClr val="FF0000">
+                <a:alpha val="70000"/>
+              </a:srgbClr>
             </a:solidFill>
+            <a:prstDash val="sysDash"/>
+            <a:tailEnd type="triangle"/>
+          </a:ln>
+        </p:spPr>
+        <p:style>
+          <a:lnRef idx="3">
+            <a:schemeClr val="accent2"/>
+          </a:lnRef>
+          <a:fillRef idx="0">
+            <a:schemeClr val="accent2"/>
+          </a:fillRef>
+          <a:effectRef idx="2">
+            <a:schemeClr val="accent2"/>
+          </a:effectRef>
+          <a:fontRef idx="minor">
+            <a:schemeClr val="tx1"/>
+          </a:fontRef>
+        </p:style>
+      </p:cxnSp>
+      <p:cxnSp>
+        <p:nvCxnSpPr>
+          <p:cNvPr id="23" name="直線單箭頭接點 22">
+            <a:extLst>
+              <a:ext uri="{FF2B5EF4-FFF2-40B4-BE49-F238E27FC236}">
+                <a16:creationId xmlns:a16="http://schemas.microsoft.com/office/drawing/2014/main" id="{C6C76807-39A4-4CDA-8AFE-380364A24236}"/>
+              </a:ext>
+            </a:extLst>
+          </p:cNvPr>
+          <p:cNvCxnSpPr>
+            <a:cxnSpLocks/>
+          </p:cNvCxnSpPr>
+          <p:nvPr/>
+        </p:nvCxnSpPr>
+        <p:spPr>
+          <a:xfrm flipH="1">
+            <a:off x="1616149" y="1318436"/>
+            <a:ext cx="7666078" cy="1493997"/>
+          </a:xfrm>
+          <a:prstGeom prst="straightConnector1">
+            <a:avLst/>
+          </a:prstGeom>
+          <a:ln w="50800">
+            <a:solidFill>
+              <a:srgbClr val="FF0000">
+                <a:alpha val="70000"/>
+              </a:srgbClr>
+            </a:solidFill>
+            <a:prstDash val="sysDash"/>
             <a:tailEnd type="triangle"/>
           </a:ln>
         </p:spPr>
@@ -7637,6 +8814,96 @@
 </p:sld>
 </file>
 
+<file path=ppt/slides/slide8.xml><?xml version="1.0" encoding="utf-8"?>
+<p:sld xmlns:a="http://schemas.openxmlformats.org/drawingml/2006/main" xmlns:r="http://schemas.openxmlformats.org/officeDocument/2006/relationships" xmlns:p="http://schemas.openxmlformats.org/presentationml/2006/main">
+  <p:cSld>
+    <p:spTree>
+      <p:nvGrpSpPr>
+        <p:cNvPr id="1" name=""/>
+        <p:cNvGrpSpPr/>
+        <p:nvPr/>
+      </p:nvGrpSpPr>
+      <p:grpSpPr>
+        <a:xfrm>
+          <a:off x="0" y="0"/>
+          <a:ext cx="0" cy="0"/>
+          <a:chOff x="0" y="0"/>
+          <a:chExt cx="0" cy="0"/>
+        </a:xfrm>
+      </p:grpSpPr>
+      <p:sp>
+        <p:nvSpPr>
+          <p:cNvPr id="2" name="標題 1">
+            <a:extLst>
+              <a:ext uri="{FF2B5EF4-FFF2-40B4-BE49-F238E27FC236}">
+                <a16:creationId xmlns:a16="http://schemas.microsoft.com/office/drawing/2014/main" id="{D05096A6-4923-4348-B26B-78CFE68890C8}"/>
+              </a:ext>
+            </a:extLst>
+          </p:cNvPr>
+          <p:cNvSpPr>
+            <a:spLocks noGrp="1"/>
+          </p:cNvSpPr>
+          <p:nvPr>
+            <p:ph type="title"/>
+          </p:nvPr>
+        </p:nvSpPr>
+        <p:spPr/>
+        <p:txBody>
+          <a:bodyPr/>
+          <a:lstStyle/>
+          <a:p>
+            <a:endParaRPr lang="zh-TW" altLang="en-US"/>
+          </a:p>
+        </p:txBody>
+      </p:sp>
+      <p:pic>
+        <p:nvPicPr>
+          <p:cNvPr id="5" name="內容版面配置區 4">
+            <a:extLst>
+              <a:ext uri="{FF2B5EF4-FFF2-40B4-BE49-F238E27FC236}">
+                <a16:creationId xmlns:a16="http://schemas.microsoft.com/office/drawing/2014/main" id="{A4CA5B60-8C29-49C5-93C2-0455E10C2AFD}"/>
+              </a:ext>
+            </a:extLst>
+          </p:cNvPr>
+          <p:cNvPicPr>
+            <a:picLocks noGrp="1" noChangeAspect="1"/>
+          </p:cNvPicPr>
+          <p:nvPr>
+            <p:ph idx="1"/>
+          </p:nvPr>
+        </p:nvPicPr>
+        <p:blipFill>
+          <a:blip r:embed="rId2">
+            <a:extLst>
+              <a:ext uri="{28A0092B-C50C-407E-A947-70E740481C1C}">
+                <a14:useLocalDpi xmlns:a14="http://schemas.microsoft.com/office/drawing/2010/main" val="0"/>
+              </a:ext>
+            </a:extLst>
+          </a:blip>
+          <a:stretch>
+            <a:fillRect/>
+          </a:stretch>
+        </p:blipFill>
+        <p:spPr>
+          <a:xfrm>
+            <a:off x="0" y="170688"/>
+            <a:ext cx="12192000" cy="6516624"/>
+          </a:xfrm>
+        </p:spPr>
+      </p:pic>
+    </p:spTree>
+    <p:extLst>
+      <p:ext uri="{BB962C8B-B14F-4D97-AF65-F5344CB8AC3E}">
+        <p14:creationId xmlns:p14="http://schemas.microsoft.com/office/powerpoint/2010/main" val="849360849"/>
+      </p:ext>
+    </p:extLst>
+  </p:cSld>
+  <p:clrMapOvr>
+    <a:masterClrMapping/>
+  </p:clrMapOvr>
+</p:sld>
+</file>
+
 <file path=ppt/slides/slide9.xml><?xml version="1.0" encoding="utf-8"?>
 <p:sld xmlns:a="http://schemas.openxmlformats.org/drawingml/2006/main" xmlns:r="http://schemas.openxmlformats.org/officeDocument/2006/relationships" xmlns:p="http://schemas.openxmlformats.org/presentationml/2006/main">
   <p:cSld>
@@ -7659,7 +8926,7 @@
           <p:cNvPr id="2" name="標題 1">
             <a:extLst>
               <a:ext uri="{FF2B5EF4-FFF2-40B4-BE49-F238E27FC236}">
-                <a16:creationId xmlns:a16="http://schemas.microsoft.com/office/drawing/2014/main" id="{D05096A6-4923-4348-B26B-78CFE68890C8}"/>
+                <a16:creationId xmlns:a16="http://schemas.microsoft.com/office/drawing/2014/main" id="{46B971A0-5E52-49A4-B85B-368FCBB134C0}"/>
               </a:ext>
             </a:extLst>
           </p:cNvPr>
@@ -7684,7 +8951,7 @@
           <p:cNvPr id="3" name="內容版面配置區 2">
             <a:extLst>
               <a:ext uri="{FF2B5EF4-FFF2-40B4-BE49-F238E27FC236}">
-                <a16:creationId xmlns:a16="http://schemas.microsoft.com/office/drawing/2014/main" id="{20CDB611-30F6-4482-9D5E-483293E6F372}"/>
+                <a16:creationId xmlns:a16="http://schemas.microsoft.com/office/drawing/2014/main" id="{AC8DB95D-0DD2-4A07-B991-9E70095B1A81}"/>
               </a:ext>
             </a:extLst>
           </p:cNvPr>
@@ -7706,10 +8973,10 @@
       </p:sp>
       <p:pic>
         <p:nvPicPr>
-          <p:cNvPr id="2050" name="Picture 2">
-            <a:extLst>
-              <a:ext uri="{FF2B5EF4-FFF2-40B4-BE49-F238E27FC236}">
-                <a16:creationId xmlns:a16="http://schemas.microsoft.com/office/drawing/2014/main" id="{7A6081CA-A64D-4B93-9663-0A6CA5F75F41}"/>
+          <p:cNvPr id="1026" name="Picture 2">
+            <a:extLst>
+              <a:ext uri="{FF2B5EF4-FFF2-40B4-BE49-F238E27FC236}">
+                <a16:creationId xmlns:a16="http://schemas.microsoft.com/office/drawing/2014/main" id="{D163C3E4-9B7C-4DF6-872C-BBAB83D66D55}"/>
               </a:ext>
             </a:extLst>
           </p:cNvPr>
@@ -7733,8 +9000,8 @@
         </p:blipFill>
         <p:spPr bwMode="auto">
           <a:xfrm>
-            <a:off x="0" y="169863"/>
-            <a:ext cx="12192000" cy="6516687"/>
+            <a:off x="0" y="168275"/>
+            <a:ext cx="12192000" cy="6521450"/>
           </a:xfrm>
           <a:prstGeom prst="rect">
             <a:avLst/>
@@ -7754,7 +9021,7 @@
     </p:spTree>
     <p:extLst>
       <p:ext uri="{BB962C8B-B14F-4D97-AF65-F5344CB8AC3E}">
-        <p14:creationId xmlns:p14="http://schemas.microsoft.com/office/powerpoint/2010/main" val="849360849"/>
+        <p14:creationId xmlns:p14="http://schemas.microsoft.com/office/powerpoint/2010/main" val="115006346"/>
       </p:ext>
     </p:extLst>
   </p:cSld>

--- a/1224報告_NAudio.pptx
+++ b/1224報告_NAudio.pptx
@@ -209,7 +209,7 @@
           <a:p>
             <a:fld id="{6413CF5F-F7FE-4C60-8BAA-96CD33FF18AC}" type="datetimeFigureOut">
               <a:rPr lang="zh-TW" altLang="en-US" smtClean="0"/>
-              <a:t>2024/12/31</a:t>
+              <a:t>2025/1/2</a:t>
             </a:fld>
             <a:endParaRPr lang="zh-TW" altLang="en-US"/>
           </a:p>
@@ -522,50 +522,43 @@
           <a:p>
             <a:r>
               <a:rPr lang="zh-TW" altLang="en-US" dirty="0"/>
-              <a:t>用到：</a:t>
+              <a:t>原本是想做關於能分析歌曲調性的技術</a:t>
             </a:r>
             <a:br>
               <a:rPr lang="en-US" altLang="zh-TW" dirty="0"/>
             </a:br>
             <a:r>
+              <a:rPr lang="zh-TW" altLang="en-US" dirty="0"/>
+              <a:t>但發現涉及到的技術頗複雜</a:t>
+            </a:r>
+            <a:r>
               <a:rPr lang="en-US" altLang="zh-TW" dirty="0"/>
-              <a:t>1.</a:t>
-            </a:r>
+              <a:t>(FT)</a:t>
+            </a:r>
+            <a:br>
+              <a:rPr lang="en-US" altLang="zh-TW" dirty="0"/>
+            </a:br>
             <a:r>
               <a:rPr lang="zh-TW" altLang="en-US" dirty="0"/>
-              <a:t> </a:t>
-            </a:r>
-            <a:r>
-              <a:rPr lang="en-US" altLang="zh-TW" dirty="0" err="1"/>
-              <a:t>WaveInEvent</a:t>
+              <a:t>數學能力退步了</a:t>
+            </a:r>
+            <a:r>
+              <a:rPr lang="en-US" altLang="zh-TW" dirty="0"/>
+              <a:t>XD</a:t>
+            </a:r>
+          </a:p>
+          <a:p>
+            <a:r>
+              <a:rPr lang="zh-TW" altLang="en-US" dirty="0"/>
+              <a:t>所以改為做分析單一音頻高低</a:t>
             </a:r>
             <a:endParaRPr lang="en-US" altLang="zh-TW" dirty="0"/>
           </a:p>
           <a:p>
             <a:r>
-              <a:rPr lang="en-US" altLang="zh-TW" dirty="0"/>
-              <a:t>2.</a:t>
-            </a:r>
-            <a:r>
               <a:rPr lang="zh-TW" altLang="en-US" dirty="0"/>
-              <a:t> </a:t>
-            </a:r>
-            <a:r>
-              <a:rPr lang="en-US" altLang="zh-TW" dirty="0" err="1"/>
-              <a:t>WaveOutEvent</a:t>
-            </a:r>
-            <a:endParaRPr lang="en-US" altLang="zh-TW" dirty="0"/>
-          </a:p>
-          <a:p>
-            <a:r>
-              <a:rPr lang="en-US" altLang="zh-TW" dirty="0"/>
-              <a:t>3. </a:t>
-            </a:r>
-            <a:r>
-              <a:rPr lang="en-US" altLang="zh-TW" dirty="0" err="1"/>
-              <a:t>BufferedWaveProvider</a:t>
-            </a:r>
-            <a:endParaRPr lang="zh-TW" altLang="en-US" dirty="0"/>
+              <a:t>以及音頻播放功能</a:t>
+            </a:r>
           </a:p>
         </p:txBody>
       </p:sp>
@@ -586,7 +579,7 @@
           <a:p>
             <a:fld id="{E285D06F-C5C6-4EC7-8C43-7BC9C8305506}" type="slidenum">
               <a:rPr lang="zh-TW" altLang="en-US" smtClean="0"/>
-              <a:t>2</a:t>
+              <a:t>1</a:t>
             </a:fld>
             <a:endParaRPr lang="zh-TW" altLang="en-US"/>
           </a:p>
@@ -595,7 +588,7 @@
     </p:spTree>
     <p:extLst>
       <p:ext uri="{BB962C8B-B14F-4D97-AF65-F5344CB8AC3E}">
-        <p14:creationId xmlns:p14="http://schemas.microsoft.com/office/powerpoint/2010/main" val="316656512"/>
+        <p14:creationId xmlns:p14="http://schemas.microsoft.com/office/powerpoint/2010/main" val="1023816260"/>
       </p:ext>
     </p:extLst>
   </p:cSld>
@@ -650,32 +643,97 @@
           <a:lstStyle/>
           <a:p>
             <a:r>
+              <a:rPr lang="zh-TW" altLang="en-US" dirty="0"/>
+              <a:t>用到：</a:t>
+            </a:r>
+            <a:br>
               <a:rPr lang="en-US" altLang="zh-TW" dirty="0"/>
-              <a:t>p</a:t>
+            </a:br>
+            <a:r>
+              <a:rPr lang="en-US" altLang="zh-TW" dirty="0"/>
+              <a:t>1.</a:t>
             </a:r>
             <a:r>
               <a:rPr lang="zh-TW" altLang="en-US" dirty="0"/>
-              <a:t>公式為</a:t>
+              <a:t> </a:t>
+            </a:r>
+            <a:r>
+              <a:rPr lang="en-US" altLang="zh-TW" dirty="0" err="1"/>
+              <a:t>WaveInEvent</a:t>
+            </a:r>
+            <a:r>
+              <a:rPr lang="zh-TW" altLang="en-US" dirty="0"/>
+              <a:t> </a:t>
             </a:r>
             <a:r>
               <a:rPr lang="en-US" altLang="zh-TW" dirty="0"/>
-              <a:t>MIDI</a:t>
+              <a:t>(</a:t>
             </a:r>
             <a:r>
               <a:rPr lang="zh-TW" altLang="en-US" dirty="0"/>
-              <a:t>所提出的標準協定公式</a:t>
-            </a:r>
-            <a:endParaRPr lang="en-US" altLang="zh-TW" dirty="0"/>
-          </a:p>
-          <a:p>
+              <a:t>收音</a:t>
+            </a:r>
             <a:r>
               <a:rPr lang="en-US" altLang="zh-TW" dirty="0"/>
-              <a:t>12</a:t>
+              <a:t>)</a:t>
+            </a:r>
+          </a:p>
+          <a:p>
+            <a:r>
+              <a:rPr lang="en-US" altLang="zh-TW" dirty="0"/>
+              <a:t>2.</a:t>
             </a:r>
             <a:r>
               <a:rPr lang="zh-TW" altLang="en-US" dirty="0"/>
-              <a:t>平均律的起源為人耳的分辨率和諧度</a:t>
-            </a:r>
+              <a:t> </a:t>
+            </a:r>
+            <a:r>
+              <a:rPr lang="en-US" altLang="zh-TW" dirty="0" err="1"/>
+              <a:t>WaveOutEvent</a:t>
+            </a:r>
+            <a:r>
+              <a:rPr lang="zh-TW" altLang="en-US" dirty="0"/>
+              <a:t> </a:t>
+            </a:r>
+            <a:r>
+              <a:rPr lang="en-US" altLang="zh-TW" dirty="0"/>
+              <a:t>(</a:t>
+            </a:r>
+            <a:r>
+              <a:rPr lang="zh-TW" altLang="en-US" dirty="0"/>
+              <a:t>放音</a:t>
+            </a:r>
+            <a:r>
+              <a:rPr lang="en-US" altLang="zh-TW" dirty="0"/>
+              <a:t>)</a:t>
+            </a:r>
+          </a:p>
+          <a:p>
+            <a:r>
+              <a:rPr lang="en-US" altLang="zh-TW" dirty="0"/>
+              <a:t>3. </a:t>
+            </a:r>
+            <a:r>
+              <a:rPr lang="en-US" altLang="zh-TW" dirty="0" err="1"/>
+              <a:t>BufferedWaveProvider</a:t>
+            </a:r>
+            <a:r>
+              <a:rPr lang="zh-TW" altLang="en-US" dirty="0"/>
+              <a:t> </a:t>
+            </a:r>
+            <a:r>
+              <a:rPr lang="en-US" altLang="zh-TW" dirty="0"/>
+              <a:t>(</a:t>
+            </a:r>
+            <a:r>
+              <a:rPr lang="zh-TW" altLang="en-US" dirty="0"/>
+              <a:t>即時緩衝區</a:t>
+            </a:r>
+            <a:r>
+              <a:rPr lang="en-US" altLang="zh-TW" dirty="0"/>
+              <a:t>)</a:t>
+            </a:r>
+            <a:endParaRPr lang="zh-TW" altLang="en-US" dirty="0"/>
           </a:p>
         </p:txBody>
       </p:sp>
@@ -696,7 +754,7 @@
           <a:p>
             <a:fld id="{E285D06F-C5C6-4EC7-8C43-7BC9C8305506}" type="slidenum">
               <a:rPr lang="zh-TW" altLang="en-US" smtClean="0"/>
-              <a:t>3</a:t>
+              <a:t>2</a:t>
             </a:fld>
             <a:endParaRPr lang="zh-TW" altLang="en-US"/>
           </a:p>
@@ -705,7 +763,7 @@
     </p:spTree>
     <p:extLst>
       <p:ext uri="{BB962C8B-B14F-4D97-AF65-F5344CB8AC3E}">
-        <p14:creationId xmlns:p14="http://schemas.microsoft.com/office/powerpoint/2010/main" val="1997850165"/>
+        <p14:creationId xmlns:p14="http://schemas.microsoft.com/office/powerpoint/2010/main" val="316656512"/>
       </p:ext>
     </p:extLst>
   </p:cSld>
@@ -761,31 +819,132 @@
           <a:p>
             <a:r>
               <a:rPr lang="en-US" altLang="zh-TW" dirty="0"/>
-              <a:t>#</a:t>
+              <a:t>p</a:t>
             </a:r>
             <a:r>
               <a:rPr lang="zh-TW" altLang="en-US" dirty="0"/>
-              <a:t>：</a:t>
+              <a:t>公式為</a:t>
             </a:r>
             <a:r>
               <a:rPr lang="en-US" altLang="zh-TW" dirty="0"/>
-              <a:t>Sharpe</a:t>
-            </a:r>
+              <a:t>MIDI</a:t>
+            </a:r>
+            <a:r>
+              <a:rPr lang="zh-TW" altLang="en-US" dirty="0"/>
+              <a:t>所提出的標準協定公式</a:t>
+            </a:r>
+            <a:endParaRPr lang="en-US" altLang="zh-TW" dirty="0"/>
           </a:p>
           <a:p>
             <a:r>
               <a:rPr lang="en-US" altLang="zh-TW" dirty="0"/>
-              <a:t>b</a:t>
+              <a:t>12</a:t>
             </a:r>
             <a:r>
               <a:rPr lang="zh-TW" altLang="en-US" dirty="0"/>
-              <a:t>：</a:t>
-            </a:r>
-            <a:r>
+              <a:t>平均律的起源為人耳的分辨率和諧度</a:t>
+            </a:r>
+            <a:br>
               <a:rPr lang="en-US" altLang="zh-TW" dirty="0"/>
-              <a:t>Flat</a:t>
-            </a:r>
-            <a:endParaRPr lang="zh-TW" altLang="en-US" dirty="0"/>
+            </a:br>
+            <a:r>
+              <a:rPr lang="zh-TW" altLang="en-US" dirty="0"/>
+              <a:t>同樣聽</a:t>
+            </a:r>
+            <a:r>
+              <a:rPr lang="en-US" altLang="zh-TW" dirty="0"/>
+              <a:t>A3(220</a:t>
+            </a:r>
+            <a:r>
+              <a:rPr lang="zh-TW" altLang="en-US" dirty="0"/>
+              <a:t> </a:t>
+            </a:r>
+            <a:r>
+              <a:rPr lang="en-US" altLang="zh-TW" dirty="0"/>
+              <a:t>Hz), A4(440 Hz), A5(880</a:t>
+            </a:r>
+            <a:r>
+              <a:rPr lang="zh-TW" altLang="en-US" dirty="0"/>
+              <a:t> </a:t>
+            </a:r>
+            <a:r>
+              <a:rPr lang="en-US" altLang="zh-TW" dirty="0"/>
+              <a:t>Hz)</a:t>
+            </a:r>
+          </a:p>
+          <a:p>
+            <a:r>
+              <a:rPr lang="zh-TW" altLang="en-US" dirty="0"/>
+              <a:t>會發現雖然</a:t>
+            </a:r>
+            <a:r>
+              <a:rPr lang="en-US" altLang="zh-TW" dirty="0"/>
+              <a:t>A3-A4, A4-A5</a:t>
+            </a:r>
+            <a:r>
+              <a:rPr lang="zh-TW" altLang="en-US" dirty="0"/>
+              <a:t>聽起來音程差似乎是一樣的都是差八度</a:t>
+            </a:r>
+            <a:endParaRPr lang="en-US" altLang="zh-TW" dirty="0"/>
+          </a:p>
+          <a:p>
+            <a:r>
+              <a:rPr lang="zh-TW" altLang="en-US" dirty="0"/>
+              <a:t>但實際上</a:t>
+            </a:r>
+            <a:r>
+              <a:rPr lang="en-US" altLang="zh-TW" dirty="0"/>
+              <a:t>A4-A5</a:t>
+            </a:r>
+            <a:r>
+              <a:rPr lang="zh-TW" altLang="en-US" dirty="0"/>
+              <a:t>的頻率差是</a:t>
+            </a:r>
+            <a:r>
+              <a:rPr lang="en-US" altLang="zh-TW" dirty="0"/>
+              <a:t>A3-A4</a:t>
+            </a:r>
+            <a:r>
+              <a:rPr lang="zh-TW" altLang="en-US" dirty="0"/>
+              <a:t>的兩倍</a:t>
+            </a:r>
+            <a:br>
+              <a:rPr lang="en-US" altLang="zh-TW" dirty="0"/>
+            </a:br>
+            <a:r>
+              <a:rPr lang="zh-TW" altLang="en-US" dirty="0"/>
+              <a:t>也就是說在單位時間如果想要讓音高聽起來是線性升高</a:t>
+            </a:r>
+            <a:endParaRPr lang="en-US" altLang="zh-TW" dirty="0"/>
+          </a:p>
+          <a:p>
+            <a:r>
+              <a:rPr lang="zh-TW" altLang="en-US" dirty="0"/>
+              <a:t>則頻率要對數增加</a:t>
+            </a:r>
+            <a:br>
+              <a:rPr lang="en-US" altLang="zh-TW" dirty="0"/>
+            </a:br>
+            <a:r>
+              <a:rPr lang="zh-TW" altLang="en-US" dirty="0"/>
+              <a:t>簡單來說  </a:t>
+            </a:r>
+            <a:r>
+              <a:rPr lang="en-US" altLang="zh-TW" dirty="0"/>
+              <a:t>“</a:t>
+            </a:r>
+            <a:r>
+              <a:rPr lang="zh-TW" altLang="en-US" dirty="0"/>
+              <a:t>十二平均律</a:t>
+            </a:r>
+            <a:r>
+              <a:rPr lang="en-US" altLang="zh-TW" dirty="0"/>
+              <a:t>”</a:t>
+            </a:r>
+            <a:r>
+              <a:rPr lang="zh-TW" altLang="en-US" dirty="0"/>
+              <a:t>是人耳感知力，物理學，數學之間和諧的結果，也使移調操作變得方便</a:t>
+            </a:r>
           </a:p>
         </p:txBody>
       </p:sp>
@@ -806,7 +965,7 @@
           <a:p>
             <a:fld id="{E285D06F-C5C6-4EC7-8C43-7BC9C8305506}" type="slidenum">
               <a:rPr lang="zh-TW" altLang="en-US" smtClean="0"/>
-              <a:t>4</a:t>
+              <a:t>3</a:t>
             </a:fld>
             <a:endParaRPr lang="zh-TW" altLang="en-US"/>
           </a:p>
@@ -815,7 +974,7 @@
     </p:spTree>
     <p:extLst>
       <p:ext uri="{BB962C8B-B14F-4D97-AF65-F5344CB8AC3E}">
-        <p14:creationId xmlns:p14="http://schemas.microsoft.com/office/powerpoint/2010/main" val="1342549106"/>
+        <p14:creationId xmlns:p14="http://schemas.microsoft.com/office/powerpoint/2010/main" val="1997850165"/>
       </p:ext>
     </p:extLst>
   </p:cSld>
@@ -869,6 +1028,32 @@
           <a:bodyPr/>
           <a:lstStyle/>
           <a:p>
+            <a:r>
+              <a:rPr lang="en-US" altLang="zh-TW" dirty="0"/>
+              <a:t>#</a:t>
+            </a:r>
+            <a:r>
+              <a:rPr lang="zh-TW" altLang="en-US" dirty="0"/>
+              <a:t>：</a:t>
+            </a:r>
+            <a:r>
+              <a:rPr lang="en-US" altLang="zh-TW" dirty="0"/>
+              <a:t>Sharpe</a:t>
+            </a:r>
+          </a:p>
+          <a:p>
+            <a:r>
+              <a:rPr lang="en-US" altLang="zh-TW" dirty="0"/>
+              <a:t>b</a:t>
+            </a:r>
+            <a:r>
+              <a:rPr lang="zh-TW" altLang="en-US" dirty="0"/>
+              <a:t>：</a:t>
+            </a:r>
+            <a:r>
+              <a:rPr lang="en-US" altLang="zh-TW" dirty="0"/>
+              <a:t>Flat</a:t>
+            </a:r>
             <a:endParaRPr lang="zh-TW" altLang="en-US" dirty="0"/>
           </a:p>
         </p:txBody>
@@ -890,7 +1075,7 @@
           <a:p>
             <a:fld id="{E285D06F-C5C6-4EC7-8C43-7BC9C8305506}" type="slidenum">
               <a:rPr lang="zh-TW" altLang="en-US" smtClean="0"/>
-              <a:t>5</a:t>
+              <a:t>4</a:t>
             </a:fld>
             <a:endParaRPr lang="zh-TW" altLang="en-US"/>
           </a:p>
@@ -899,7 +1084,7 @@
     </p:spTree>
     <p:extLst>
       <p:ext uri="{BB962C8B-B14F-4D97-AF65-F5344CB8AC3E}">
-        <p14:creationId xmlns:p14="http://schemas.microsoft.com/office/powerpoint/2010/main" val="3482085598"/>
+        <p14:creationId xmlns:p14="http://schemas.microsoft.com/office/powerpoint/2010/main" val="1342549106"/>
       </p:ext>
     </p:extLst>
   </p:cSld>
@@ -954,6 +1139,298 @@
           <a:lstStyle/>
           <a:p>
             <a:r>
+              <a:rPr lang="zh-TW" altLang="en-US" sz="1200" dirty="0">
+                <a:latin typeface="Arial" panose="020B0604020202020204" pitchFamily="34" charset="0"/>
+                <a:ea typeface="標楷體" panose="03000509000000000000" pitchFamily="65" charset="-120"/>
+                <a:cs typeface="Arial" panose="020B0604020202020204" pitchFamily="34" charset="0"/>
+              </a:rPr>
+              <a:t>實際物體發出的泛音不會剛好是基頻整數倍</a:t>
+            </a:r>
+            <a:br>
+              <a:rPr lang="en-US" altLang="zh-TW" sz="1200" dirty="0">
+                <a:latin typeface="Arial" panose="020B0604020202020204" pitchFamily="34" charset="0"/>
+                <a:ea typeface="標楷體" panose="03000509000000000000" pitchFamily="65" charset="-120"/>
+                <a:cs typeface="Arial" panose="020B0604020202020204" pitchFamily="34" charset="0"/>
+              </a:rPr>
+            </a:br>
+            <a:r>
+              <a:rPr lang="zh-TW" altLang="en-US" sz="1200" dirty="0">
+                <a:latin typeface="Arial" panose="020B0604020202020204" pitchFamily="34" charset="0"/>
+                <a:ea typeface="標楷體" panose="03000509000000000000" pitchFamily="65" charset="-120"/>
+                <a:cs typeface="Arial" panose="020B0604020202020204" pitchFamily="34" charset="0"/>
+              </a:rPr>
+              <a:t>會受到材質，物理特性影響</a:t>
+            </a:r>
+            <a:br>
+              <a:rPr lang="en-US" altLang="zh-TW" sz="1200" dirty="0">
+                <a:latin typeface="Arial" panose="020B0604020202020204" pitchFamily="34" charset="0"/>
+                <a:ea typeface="標楷體" panose="03000509000000000000" pitchFamily="65" charset="-120"/>
+                <a:cs typeface="Arial" panose="020B0604020202020204" pitchFamily="34" charset="0"/>
+              </a:rPr>
+            </a:br>
+            <a:r>
+              <a:rPr lang="en-US" altLang="zh-TW" sz="1200" dirty="0">
+                <a:latin typeface="Arial" panose="020B0604020202020204" pitchFamily="34" charset="0"/>
+                <a:ea typeface="標楷體" panose="03000509000000000000" pitchFamily="65" charset="-120"/>
+                <a:cs typeface="Arial" panose="020B0604020202020204" pitchFamily="34" charset="0"/>
+              </a:rPr>
+              <a:t>ex: </a:t>
+            </a:r>
+            <a:r>
+              <a:rPr lang="zh-TW" altLang="en-US" sz="1200" dirty="0">
+                <a:latin typeface="Arial" panose="020B0604020202020204" pitchFamily="34" charset="0"/>
+                <a:ea typeface="標楷體" panose="03000509000000000000" pitchFamily="65" charset="-120"/>
+                <a:cs typeface="Arial" panose="020B0604020202020204" pitchFamily="34" charset="0"/>
+              </a:rPr>
+              <a:t>鋼琴有高音更高，低音更低的特性</a:t>
+            </a:r>
+            <a:endParaRPr lang="zh-TW" altLang="en-US" dirty="0"/>
+          </a:p>
+        </p:txBody>
+      </p:sp>
+      <p:sp>
+        <p:nvSpPr>
+          <p:cNvPr id="4" name="投影片編號版面配置區 3"/>
+          <p:cNvSpPr>
+            <a:spLocks noGrp="1"/>
+          </p:cNvSpPr>
+          <p:nvPr>
+            <p:ph type="sldNum" sz="quarter" idx="5"/>
+          </p:nvPr>
+        </p:nvSpPr>
+        <p:spPr/>
+        <p:txBody>
+          <a:bodyPr/>
+          <a:lstStyle/>
+          <a:p>
+            <a:fld id="{E285D06F-C5C6-4EC7-8C43-7BC9C8305506}" type="slidenum">
+              <a:rPr lang="zh-TW" altLang="en-US" smtClean="0"/>
+              <a:t>5</a:t>
+            </a:fld>
+            <a:endParaRPr lang="zh-TW" altLang="en-US"/>
+          </a:p>
+        </p:txBody>
+      </p:sp>
+    </p:spTree>
+    <p:extLst>
+      <p:ext uri="{BB962C8B-B14F-4D97-AF65-F5344CB8AC3E}">
+        <p14:creationId xmlns:p14="http://schemas.microsoft.com/office/powerpoint/2010/main" val="3482085598"/>
+      </p:ext>
+    </p:extLst>
+  </p:cSld>
+  <p:clrMapOvr>
+    <a:masterClrMapping/>
+  </p:clrMapOvr>
+</p:notes>
+</file>
+
+<file path=ppt/notesSlides/notesSlide6.xml><?xml version="1.0" encoding="utf-8"?>
+<p:notes xmlns:a="http://schemas.openxmlformats.org/drawingml/2006/main" xmlns:r="http://schemas.openxmlformats.org/officeDocument/2006/relationships" xmlns:p="http://schemas.openxmlformats.org/presentationml/2006/main">
+  <p:cSld>
+    <p:spTree>
+      <p:nvGrpSpPr>
+        <p:cNvPr id="1" name=""/>
+        <p:cNvGrpSpPr/>
+        <p:nvPr/>
+      </p:nvGrpSpPr>
+      <p:grpSpPr>
+        <a:xfrm>
+          <a:off x="0" y="0"/>
+          <a:ext cx="0" cy="0"/>
+          <a:chOff x="0" y="0"/>
+          <a:chExt cx="0" cy="0"/>
+        </a:xfrm>
+      </p:grpSpPr>
+      <p:sp>
+        <p:nvSpPr>
+          <p:cNvPr id="2" name="投影片影像版面配置區 1"/>
+          <p:cNvSpPr>
+            <a:spLocks noGrp="1" noRot="1" noChangeAspect="1"/>
+          </p:cNvSpPr>
+          <p:nvPr>
+            <p:ph type="sldImg"/>
+          </p:nvPr>
+        </p:nvSpPr>
+        <p:spPr/>
+      </p:sp>
+      <p:sp>
+        <p:nvSpPr>
+          <p:cNvPr id="3" name="備忘稿版面配置區 2"/>
+          <p:cNvSpPr>
+            <a:spLocks noGrp="1"/>
+          </p:cNvSpPr>
+          <p:nvPr>
+            <p:ph type="body" idx="1"/>
+          </p:nvPr>
+        </p:nvSpPr>
+        <p:spPr/>
+        <p:txBody>
+          <a:bodyPr/>
+          <a:lstStyle/>
+          <a:p>
+            <a:r>
+              <a:rPr lang="en-US" altLang="zh-TW" dirty="0" err="1"/>
+              <a:t>GetCapabilities</a:t>
+            </a:r>
+            <a:r>
+              <a:rPr lang="zh-TW" altLang="en-US" dirty="0"/>
+              <a:t>：這個方法</a:t>
+            </a:r>
+            <a:r>
+              <a:rPr lang="en-US" altLang="zh-TW" dirty="0"/>
+              <a:t>return</a:t>
+            </a:r>
+            <a:r>
+              <a:rPr lang="zh-TW" altLang="en-US" dirty="0"/>
+              <a:t>目前電腦有哪些收音設備</a:t>
+            </a:r>
+            <a:endParaRPr lang="en-US" altLang="zh-TW" dirty="0"/>
+          </a:p>
+          <a:p>
+            <a:r>
+              <a:rPr lang="en-US" altLang="zh-TW" dirty="0" err="1"/>
+              <a:t>WaveInEvent</a:t>
+            </a:r>
+            <a:r>
+              <a:rPr lang="zh-TW" altLang="en-US" dirty="0"/>
+              <a:t>：傳入收音設備</a:t>
+            </a:r>
+            <a:r>
+              <a:rPr lang="en-US" altLang="zh-TW" dirty="0"/>
+              <a:t>Index</a:t>
+            </a:r>
+            <a:r>
+              <a:rPr lang="zh-TW" altLang="en-US" dirty="0"/>
+              <a:t>值建立收音物件</a:t>
+            </a:r>
+            <a:endParaRPr lang="en-US" altLang="zh-TW" dirty="0"/>
+          </a:p>
+          <a:p>
+            <a:r>
+              <a:rPr lang="en-US" altLang="zh-TW" dirty="0" err="1"/>
+              <a:t>WaveFormat</a:t>
+            </a:r>
+            <a:r>
+              <a:rPr lang="zh-TW" altLang="en-US" dirty="0"/>
+              <a:t>：設定收音格式</a:t>
+            </a:r>
+            <a:br>
+              <a:rPr lang="en-US" altLang="zh-TW" dirty="0"/>
+            </a:br>
+            <a:r>
+              <a:rPr lang="en-US" altLang="zh-TW" dirty="0" err="1"/>
+              <a:t>DataAvailable</a:t>
+            </a:r>
+            <a:r>
+              <a:rPr lang="zh-TW" altLang="en-US" dirty="0"/>
+              <a:t>：訂閱自訂分析頻率方法</a:t>
+            </a:r>
+            <a:endParaRPr lang="en-US" altLang="zh-TW" dirty="0"/>
+          </a:p>
+          <a:p>
+            <a:r>
+              <a:rPr lang="en-US" altLang="zh-TW" dirty="0" err="1"/>
+              <a:t>bwProvider</a:t>
+            </a:r>
+            <a:r>
+              <a:rPr lang="zh-TW" altLang="en-US" dirty="0"/>
+              <a:t>：緩衝區 可限制收音位元區塊大小</a:t>
+            </a:r>
+            <a:endParaRPr lang="en-US" altLang="zh-TW" dirty="0"/>
+          </a:p>
+          <a:p>
+            <a:r>
+              <a:rPr lang="en-US" altLang="zh-TW" dirty="0" err="1"/>
+              <a:t>StartRecording</a:t>
+            </a:r>
+            <a:r>
+              <a:rPr lang="zh-TW" altLang="en-US" dirty="0"/>
+              <a:t>：執行所有訂閱方法</a:t>
+            </a:r>
+          </a:p>
+        </p:txBody>
+      </p:sp>
+      <p:sp>
+        <p:nvSpPr>
+          <p:cNvPr id="4" name="投影片編號版面配置區 3"/>
+          <p:cNvSpPr>
+            <a:spLocks noGrp="1"/>
+          </p:cNvSpPr>
+          <p:nvPr>
+            <p:ph type="sldNum" sz="quarter" idx="5"/>
+          </p:nvPr>
+        </p:nvSpPr>
+        <p:spPr/>
+        <p:txBody>
+          <a:bodyPr/>
+          <a:lstStyle/>
+          <a:p>
+            <a:fld id="{E285D06F-C5C6-4EC7-8C43-7BC9C8305506}" type="slidenum">
+              <a:rPr lang="zh-TW" altLang="en-US" smtClean="0"/>
+              <a:t>6</a:t>
+            </a:fld>
+            <a:endParaRPr lang="zh-TW" altLang="en-US"/>
+          </a:p>
+        </p:txBody>
+      </p:sp>
+    </p:spTree>
+    <p:extLst>
+      <p:ext uri="{BB962C8B-B14F-4D97-AF65-F5344CB8AC3E}">
+        <p14:creationId xmlns:p14="http://schemas.microsoft.com/office/powerpoint/2010/main" val="98591788"/>
+      </p:ext>
+    </p:extLst>
+  </p:cSld>
+  <p:clrMapOvr>
+    <a:masterClrMapping/>
+  </p:clrMapOvr>
+</p:notes>
+</file>
+
+<file path=ppt/notesSlides/notesSlide7.xml><?xml version="1.0" encoding="utf-8"?>
+<p:notes xmlns:a="http://schemas.openxmlformats.org/drawingml/2006/main" xmlns:r="http://schemas.openxmlformats.org/officeDocument/2006/relationships" xmlns:p="http://schemas.openxmlformats.org/presentationml/2006/main">
+  <p:cSld>
+    <p:spTree>
+      <p:nvGrpSpPr>
+        <p:cNvPr id="1" name=""/>
+        <p:cNvGrpSpPr/>
+        <p:nvPr/>
+      </p:nvGrpSpPr>
+      <p:grpSpPr>
+        <a:xfrm>
+          <a:off x="0" y="0"/>
+          <a:ext cx="0" cy="0"/>
+          <a:chOff x="0" y="0"/>
+          <a:chExt cx="0" cy="0"/>
+        </a:xfrm>
+      </p:grpSpPr>
+      <p:sp>
+        <p:nvSpPr>
+          <p:cNvPr id="2" name="投影片影像版面配置區 1"/>
+          <p:cNvSpPr>
+            <a:spLocks noGrp="1" noRot="1" noChangeAspect="1"/>
+          </p:cNvSpPr>
+          <p:nvPr>
+            <p:ph type="sldImg"/>
+          </p:nvPr>
+        </p:nvSpPr>
+        <p:spPr/>
+      </p:sp>
+      <p:sp>
+        <p:nvSpPr>
+          <p:cNvPr id="3" name="備忘稿版面配置區 2"/>
+          <p:cNvSpPr>
+            <a:spLocks noGrp="1"/>
+          </p:cNvSpPr>
+          <p:nvPr>
+            <p:ph type="body" idx="1"/>
+          </p:nvPr>
+        </p:nvSpPr>
+        <p:spPr/>
+        <p:txBody>
+          <a:bodyPr/>
+          <a:lstStyle/>
+          <a:p>
+            <a:r>
               <a:rPr lang="zh-TW" altLang="en-US" dirty="0"/>
               <a:t>處理邏輯</a:t>
             </a:r>
@@ -1260,7 +1737,137 @@
 </p:notes>
 </file>
 
-<file path=ppt/notesSlides/notesSlide6.xml><?xml version="1.0" encoding="utf-8"?>
+<file path=ppt/notesSlides/notesSlide8.xml><?xml version="1.0" encoding="utf-8"?>
+<p:notes xmlns:a="http://schemas.openxmlformats.org/drawingml/2006/main" xmlns:r="http://schemas.openxmlformats.org/officeDocument/2006/relationships" xmlns:p="http://schemas.openxmlformats.org/presentationml/2006/main">
+  <p:cSld>
+    <p:spTree>
+      <p:nvGrpSpPr>
+        <p:cNvPr id="1" name=""/>
+        <p:cNvGrpSpPr/>
+        <p:nvPr/>
+      </p:nvGrpSpPr>
+      <p:grpSpPr>
+        <a:xfrm>
+          <a:off x="0" y="0"/>
+          <a:ext cx="0" cy="0"/>
+          <a:chOff x="0" y="0"/>
+          <a:chExt cx="0" cy="0"/>
+        </a:xfrm>
+      </p:grpSpPr>
+      <p:sp>
+        <p:nvSpPr>
+          <p:cNvPr id="2" name="投影片影像版面配置區 1"/>
+          <p:cNvSpPr>
+            <a:spLocks noGrp="1" noRot="1" noChangeAspect="1"/>
+          </p:cNvSpPr>
+          <p:nvPr>
+            <p:ph type="sldImg"/>
+          </p:nvPr>
+        </p:nvSpPr>
+        <p:spPr/>
+      </p:sp>
+      <p:sp>
+        <p:nvSpPr>
+          <p:cNvPr id="3" name="備忘稿版面配置區 2"/>
+          <p:cNvSpPr>
+            <a:spLocks noGrp="1"/>
+          </p:cNvSpPr>
+          <p:nvPr>
+            <p:ph type="body" idx="1"/>
+          </p:nvPr>
+        </p:nvSpPr>
+        <p:spPr/>
+        <p:txBody>
+          <a:bodyPr/>
+          <a:lstStyle/>
+          <a:p>
+            <a:r>
+              <a:rPr lang="en-US" altLang="zh-TW" dirty="0" err="1"/>
+              <a:t>WaveOutEvent</a:t>
+            </a:r>
+            <a:r>
+              <a:rPr lang="zh-TW" altLang="en-US" dirty="0"/>
+              <a:t>：傳入放音設備</a:t>
+            </a:r>
+            <a:r>
+              <a:rPr lang="en-US" altLang="zh-TW" dirty="0"/>
+              <a:t>index</a:t>
+            </a:r>
+            <a:r>
+              <a:rPr lang="zh-TW" altLang="en-US" dirty="0"/>
+              <a:t>值建立放音物件</a:t>
+            </a:r>
+            <a:endParaRPr lang="en-US" altLang="zh-TW" dirty="0"/>
+          </a:p>
+          <a:p>
+            <a:r>
+              <a:rPr lang="en-US" altLang="zh-TW" dirty="0" err="1"/>
+              <a:t>SignalGenerator</a:t>
+            </a:r>
+            <a:r>
+              <a:rPr lang="zh-TW" altLang="en-US" dirty="0"/>
+              <a:t>：訊號產生器</a:t>
+            </a:r>
+            <a:r>
+              <a:rPr lang="en-US" altLang="zh-TW" dirty="0"/>
+              <a:t>, </a:t>
+            </a:r>
+            <a:r>
+              <a:rPr lang="zh-TW" altLang="en-US" dirty="0"/>
+              <a:t>設定波型</a:t>
+            </a:r>
+            <a:endParaRPr lang="en-US" altLang="zh-TW" dirty="0"/>
+          </a:p>
+          <a:p>
+            <a:r>
+              <a:rPr lang="en-US" altLang="zh-TW" dirty="0" err="1"/>
+              <a:t>fn</a:t>
+            </a:r>
+            <a:r>
+              <a:rPr lang="en-US" altLang="zh-TW" dirty="0"/>
+              <a:t> = f0 * 2^n</a:t>
+            </a:r>
+            <a:endParaRPr lang="zh-TW" altLang="en-US" dirty="0"/>
+          </a:p>
+        </p:txBody>
+      </p:sp>
+      <p:sp>
+        <p:nvSpPr>
+          <p:cNvPr id="4" name="投影片編號版面配置區 3"/>
+          <p:cNvSpPr>
+            <a:spLocks noGrp="1"/>
+          </p:cNvSpPr>
+          <p:nvPr>
+            <p:ph type="sldNum" sz="quarter" idx="5"/>
+          </p:nvPr>
+        </p:nvSpPr>
+        <p:spPr/>
+        <p:txBody>
+          <a:bodyPr/>
+          <a:lstStyle/>
+          <a:p>
+            <a:fld id="{E285D06F-C5C6-4EC7-8C43-7BC9C8305506}" type="slidenum">
+              <a:rPr lang="zh-TW" altLang="en-US" smtClean="0"/>
+              <a:t>11</a:t>
+            </a:fld>
+            <a:endParaRPr lang="zh-TW" altLang="en-US"/>
+          </a:p>
+        </p:txBody>
+      </p:sp>
+    </p:spTree>
+    <p:extLst>
+      <p:ext uri="{BB962C8B-B14F-4D97-AF65-F5344CB8AC3E}">
+        <p14:creationId xmlns:p14="http://schemas.microsoft.com/office/powerpoint/2010/main" val="3225734016"/>
+      </p:ext>
+    </p:extLst>
+  </p:cSld>
+  <p:clrMapOvr>
+    <a:masterClrMapping/>
+  </p:clrMapOvr>
+</p:notes>
+</file>
+
+<file path=ppt/notesSlides/notesSlide9.xml><?xml version="1.0" encoding="utf-8"?>
 <p:notes xmlns:a="http://schemas.openxmlformats.org/drawingml/2006/main" xmlns:r="http://schemas.openxmlformats.org/officeDocument/2006/relationships" xmlns:p="http://schemas.openxmlformats.org/presentationml/2006/main">
   <p:cSld>
     <p:spTree>
@@ -1507,7 +2114,7 @@
           <a:p>
             <a:fld id="{31822A52-CB54-4445-AC34-F501DA2D4712}" type="datetimeFigureOut">
               <a:rPr lang="zh-TW" altLang="en-US" smtClean="0"/>
-              <a:t>2024/12/31</a:t>
+              <a:t>2025/1/2</a:t>
             </a:fld>
             <a:endParaRPr lang="zh-TW" altLang="en-US"/>
           </a:p>
@@ -1705,7 +2312,7 @@
           <a:p>
             <a:fld id="{31822A52-CB54-4445-AC34-F501DA2D4712}" type="datetimeFigureOut">
               <a:rPr lang="zh-TW" altLang="en-US" smtClean="0"/>
-              <a:t>2024/12/31</a:t>
+              <a:t>2025/1/2</a:t>
             </a:fld>
             <a:endParaRPr lang="zh-TW" altLang="en-US"/>
           </a:p>
@@ -1913,7 +2520,7 @@
           <a:p>
             <a:fld id="{31822A52-CB54-4445-AC34-F501DA2D4712}" type="datetimeFigureOut">
               <a:rPr lang="zh-TW" altLang="en-US" smtClean="0"/>
-              <a:t>2024/12/31</a:t>
+              <a:t>2025/1/2</a:t>
             </a:fld>
             <a:endParaRPr lang="zh-TW" altLang="en-US"/>
           </a:p>
@@ -2111,7 +2718,7 @@
           <a:p>
             <a:fld id="{31822A52-CB54-4445-AC34-F501DA2D4712}" type="datetimeFigureOut">
               <a:rPr lang="zh-TW" altLang="en-US" smtClean="0"/>
-              <a:t>2024/12/31</a:t>
+              <a:t>2025/1/2</a:t>
             </a:fld>
             <a:endParaRPr lang="zh-TW" altLang="en-US"/>
           </a:p>
@@ -2386,7 +2993,7 @@
           <a:p>
             <a:fld id="{31822A52-CB54-4445-AC34-F501DA2D4712}" type="datetimeFigureOut">
               <a:rPr lang="zh-TW" altLang="en-US" smtClean="0"/>
-              <a:t>2024/12/31</a:t>
+              <a:t>2025/1/2</a:t>
             </a:fld>
             <a:endParaRPr lang="zh-TW" altLang="en-US"/>
           </a:p>
@@ -2651,7 +3258,7 @@
           <a:p>
             <a:fld id="{31822A52-CB54-4445-AC34-F501DA2D4712}" type="datetimeFigureOut">
               <a:rPr lang="zh-TW" altLang="en-US" smtClean="0"/>
-              <a:t>2024/12/31</a:t>
+              <a:t>2025/1/2</a:t>
             </a:fld>
             <a:endParaRPr lang="zh-TW" altLang="en-US"/>
           </a:p>
@@ -3063,7 +3670,7 @@
           <a:p>
             <a:fld id="{31822A52-CB54-4445-AC34-F501DA2D4712}" type="datetimeFigureOut">
               <a:rPr lang="zh-TW" altLang="en-US" smtClean="0"/>
-              <a:t>2024/12/31</a:t>
+              <a:t>2025/1/2</a:t>
             </a:fld>
             <a:endParaRPr lang="zh-TW" altLang="en-US"/>
           </a:p>
@@ -3204,7 +3811,7 @@
           <a:p>
             <a:fld id="{31822A52-CB54-4445-AC34-F501DA2D4712}" type="datetimeFigureOut">
               <a:rPr lang="zh-TW" altLang="en-US" smtClean="0"/>
-              <a:t>2024/12/31</a:t>
+              <a:t>2025/1/2</a:t>
             </a:fld>
             <a:endParaRPr lang="zh-TW" altLang="en-US"/>
           </a:p>
@@ -3317,7 +3924,7 @@
           <a:p>
             <a:fld id="{31822A52-CB54-4445-AC34-F501DA2D4712}" type="datetimeFigureOut">
               <a:rPr lang="zh-TW" altLang="en-US" smtClean="0"/>
-              <a:t>2024/12/31</a:t>
+              <a:t>2025/1/2</a:t>
             </a:fld>
             <a:endParaRPr lang="zh-TW" altLang="en-US"/>
           </a:p>
@@ -3628,7 +4235,7 @@
           <a:p>
             <a:fld id="{31822A52-CB54-4445-AC34-F501DA2D4712}" type="datetimeFigureOut">
               <a:rPr lang="zh-TW" altLang="en-US" smtClean="0"/>
-              <a:t>2024/12/31</a:t>
+              <a:t>2025/1/2</a:t>
             </a:fld>
             <a:endParaRPr lang="zh-TW" altLang="en-US"/>
           </a:p>
@@ -3916,7 +4523,7 @@
           <a:p>
             <a:fld id="{31822A52-CB54-4445-AC34-F501DA2D4712}" type="datetimeFigureOut">
               <a:rPr lang="zh-TW" altLang="en-US" smtClean="0"/>
-              <a:t>2024/12/31</a:t>
+              <a:t>2025/1/2</a:t>
             </a:fld>
             <a:endParaRPr lang="zh-TW" altLang="en-US"/>
           </a:p>
@@ -4157,7 +4764,7 @@
           <a:p>
             <a:fld id="{31822A52-CB54-4445-AC34-F501DA2D4712}" type="datetimeFigureOut">
               <a:rPr lang="zh-TW" altLang="en-US" smtClean="0"/>
-              <a:t>2024/12/31</a:t>
+              <a:t>2025/1/2</a:t>
             </a:fld>
             <a:endParaRPr lang="zh-TW" altLang="en-US"/>
           </a:p>
@@ -4621,7 +5228,7 @@
             <a:r>
               <a:rPr lang="en-US" altLang="zh-TW" dirty="0">
                 <a:latin typeface="Consolas" panose="020B0609020204030204" pitchFamily="49" charset="0"/>
-                <a:hlinkClick r:id="rId2"/>
+                <a:hlinkClick r:id="rId3"/>
               </a:rPr>
               <a:t>mailto:https://github.com/naudio/NAudio?tab=readme-ov-file</a:t>
             </a:r>
@@ -4662,7 +5269,7 @@
           <p:nvPr/>
         </p:nvPicPr>
         <p:blipFill>
-          <a:blip r:embed="rId3">
+          <a:blip r:embed="rId4">
             <a:extLst>
               <a:ext uri="{28A0092B-C50C-407E-A947-70E740481C1C}">
                 <a14:useLocalDpi xmlns:a14="http://schemas.microsoft.com/office/drawing/2010/main" val="0"/>
@@ -4851,56 +5458,6 @@
           <a:chExt cx="0" cy="0"/>
         </a:xfrm>
       </p:grpSpPr>
-      <p:sp>
-        <p:nvSpPr>
-          <p:cNvPr id="2" name="標題 1">
-            <a:extLst>
-              <a:ext uri="{FF2B5EF4-FFF2-40B4-BE49-F238E27FC236}">
-                <a16:creationId xmlns:a16="http://schemas.microsoft.com/office/drawing/2014/main" id="{28C0EAC7-D825-4FB0-9CF9-E033065915CC}"/>
-              </a:ext>
-            </a:extLst>
-          </p:cNvPr>
-          <p:cNvSpPr>
-            <a:spLocks noGrp="1"/>
-          </p:cNvSpPr>
-          <p:nvPr>
-            <p:ph type="title"/>
-          </p:nvPr>
-        </p:nvSpPr>
-        <p:spPr/>
-        <p:txBody>
-          <a:bodyPr/>
-          <a:lstStyle/>
-          <a:p>
-            <a:endParaRPr lang="zh-TW" altLang="en-US"/>
-          </a:p>
-        </p:txBody>
-      </p:sp>
-      <p:sp>
-        <p:nvSpPr>
-          <p:cNvPr id="3" name="內容版面配置區 2">
-            <a:extLst>
-              <a:ext uri="{FF2B5EF4-FFF2-40B4-BE49-F238E27FC236}">
-                <a16:creationId xmlns:a16="http://schemas.microsoft.com/office/drawing/2014/main" id="{6FF22F99-23F1-4CAE-9342-DAE71623276C}"/>
-              </a:ext>
-            </a:extLst>
-          </p:cNvPr>
-          <p:cNvSpPr>
-            <a:spLocks noGrp="1"/>
-          </p:cNvSpPr>
-          <p:nvPr>
-            <p:ph idx="1"/>
-          </p:nvPr>
-        </p:nvSpPr>
-        <p:spPr/>
-        <p:txBody>
-          <a:bodyPr/>
-          <a:lstStyle/>
-          <a:p>
-            <a:endParaRPr lang="zh-TW" altLang="en-US" dirty="0"/>
-          </a:p>
-        </p:txBody>
-      </p:sp>
       <p:pic>
         <p:nvPicPr>
           <p:cNvPr id="8" name="圖片 7">
@@ -4916,7 +5473,7 @@
           <p:nvPr/>
         </p:nvPicPr>
         <p:blipFill>
-          <a:blip r:embed="rId2"/>
+          <a:blip r:embed="rId3"/>
           <a:stretch>
             <a:fillRect/>
           </a:stretch>
@@ -4946,7 +5503,7 @@
           <p:nvPr/>
         </p:nvPicPr>
         <p:blipFill>
-          <a:blip r:embed="rId3"/>
+          <a:blip r:embed="rId4"/>
           <a:stretch>
             <a:fillRect/>
           </a:stretch>
@@ -4976,7 +5533,7 @@
           <p:nvPr/>
         </p:nvPicPr>
         <p:blipFill>
-          <a:blip r:embed="rId4"/>
+          <a:blip r:embed="rId5"/>
           <a:stretch>
             <a:fillRect/>
           </a:stretch>
@@ -5006,7 +5563,7 @@
           <p:nvPr/>
         </p:nvPicPr>
         <p:blipFill rotWithShape="1">
-          <a:blip r:embed="rId5"/>
+          <a:blip r:embed="rId6"/>
           <a:srcRect l="6274" t="26794" r="1241" b="8214"/>
           <a:stretch/>
         </p:blipFill>
@@ -5105,7 +5662,7 @@
         </p:spPr>
         <p:txBody>
           <a:bodyPr>
-            <a:normAutofit fontScale="92500"/>
+            <a:normAutofit/>
           </a:bodyPr>
           <a:lstStyle/>
           <a:p>
@@ -5114,7 +5671,7 @@
                 <a:latin typeface="標楷體" panose="03000509000000000000" pitchFamily="65" charset="-120"/>
                 <a:ea typeface="標楷體" panose="03000509000000000000" pitchFamily="65" charset="-120"/>
               </a:rPr>
-              <a:t>一般調音器的邏輯是一定的音分範圍內都算判斷準確，因為每個設備外放或是樂器的音會有些許泛音上的不同，非專業的收音設備可能會因為這些泛音而對不上標準音高頻率：</a:t>
+              <a:t>一般調音器的邏輯是一定的音分範圍內都算判斷準確，因為每個設備外放或是樂器的音會有些許泛音或偏差音上的不同，非專業的收音設備可能會因為這些泛音而對不上標準音高頻率：</a:t>
             </a:r>
             <a:br>
               <a:rPr lang="en-US" altLang="zh-TW" sz="2400" dirty="0">
@@ -5152,22 +5709,6 @@
               </a:rPr>
               <a:t>可能就會測到偏高或是偏低，即便是由標準鋼琴發出的音。</a:t>
             </a:r>
-            <a:endParaRPr lang="en-US" altLang="zh-TW" sz="2400" dirty="0">
-              <a:latin typeface="標楷體" panose="03000509000000000000" pitchFamily="65" charset="-120"/>
-              <a:ea typeface="標楷體" panose="03000509000000000000" pitchFamily="65" charset="-120"/>
-            </a:endParaRPr>
-          </a:p>
-          <a:p>
-            <a:pPr marL="0" indent="0">
-              <a:buNone/>
-            </a:pPr>
-            <a:r>
-              <a:rPr lang="zh-TW" altLang="en-US" sz="2400" dirty="0">
-                <a:latin typeface="標楷體" panose="03000509000000000000" pitchFamily="65" charset="-120"/>
-                <a:ea typeface="標楷體" panose="03000509000000000000" pitchFamily="65" charset="-120"/>
-              </a:rPr>
-              <a:t>  </a:t>
-            </a:r>
             <a:r>
               <a:rPr lang="en-US" altLang="zh-TW" sz="2400" dirty="0">
                 <a:latin typeface="Arial" panose="020B0604020202020204" pitchFamily="34" charset="0"/>
@@ -5246,7 +5787,7 @@
                 <a:ea typeface="標楷體" panose="03000509000000000000" pitchFamily="65" charset="-120"/>
                 <a:cs typeface="Arial" panose="020B0604020202020204" pitchFamily="34" charset="0"/>
               </a:rPr>
-              <a:t>手機測量到仍會高於</a:t>
+              <a:t>手機測量到仍會高於  </a:t>
             </a:r>
             <a:r>
               <a:rPr lang="en-US" altLang="zh-TW" sz="2400" dirty="0">
@@ -5279,7 +5820,7 @@
                 <a:latin typeface="標楷體" panose="03000509000000000000" pitchFamily="65" charset="-120"/>
                 <a:ea typeface="標楷體" panose="03000509000000000000" pitchFamily="65" charset="-120"/>
               </a:rPr>
-              <a:t>一般的麥克風，容易收到環境或是電腦發出的高頻</a:t>
+              <a:t>一般的電腦麥克風，容易收到環境或是電腦發出的高頻</a:t>
             </a:r>
             <a:r>
               <a:rPr lang="en-US" altLang="zh-TW" sz="2400" dirty="0">
@@ -5339,81 +5880,6 @@
               </a:rPr>
               <a:t>，這一點需要用程式或是硬體本身進行濾波處理。</a:t>
             </a:r>
-            <a:endParaRPr lang="en-US" altLang="zh-TW" sz="2400" dirty="0">
-              <a:latin typeface="Consolas" panose="020B0609020204030204" pitchFamily="49" charset="0"/>
-              <a:ea typeface="標楷體" panose="03000509000000000000" pitchFamily="65" charset="-120"/>
-            </a:endParaRPr>
-          </a:p>
-          <a:p>
-            <a:r>
-              <a:rPr lang="zh-TW" altLang="en-US" sz="2400" dirty="0">
-                <a:latin typeface="Consolas" panose="020B0609020204030204" pitchFamily="49" charset="0"/>
-                <a:ea typeface="標楷體" panose="03000509000000000000" pitchFamily="65" charset="-120"/>
-              </a:rPr>
-              <a:t>只要是自然發出的音頻</a:t>
-            </a:r>
-            <a:r>
-              <a:rPr lang="en-US" altLang="zh-TW" sz="2400" dirty="0">
-                <a:latin typeface="Consolas" panose="020B0609020204030204" pitchFamily="49" charset="0"/>
-                <a:ea typeface="標楷體" panose="03000509000000000000" pitchFamily="65" charset="-120"/>
-              </a:rPr>
-              <a:t>(</a:t>
-            </a:r>
-            <a:r>
-              <a:rPr lang="zh-TW" altLang="en-US" sz="2400" dirty="0">
-                <a:latin typeface="Consolas" panose="020B0609020204030204" pitchFamily="49" charset="0"/>
-                <a:ea typeface="標楷體" panose="03000509000000000000" pitchFamily="65" charset="-120"/>
-              </a:rPr>
-              <a:t>音叉除外</a:t>
-            </a:r>
-            <a:r>
-              <a:rPr lang="en-US" altLang="zh-TW" sz="2400" dirty="0">
-                <a:latin typeface="Consolas" panose="020B0609020204030204" pitchFamily="49" charset="0"/>
-                <a:ea typeface="標楷體" panose="03000509000000000000" pitchFamily="65" charset="-120"/>
-              </a:rPr>
-              <a:t>)</a:t>
-            </a:r>
-            <a:r>
-              <a:rPr lang="zh-TW" altLang="en-US" sz="2400" dirty="0">
-                <a:latin typeface="Consolas" panose="020B0609020204030204" pitchFamily="49" charset="0"/>
-                <a:ea typeface="標楷體" panose="03000509000000000000" pitchFamily="65" charset="-120"/>
-              </a:rPr>
-              <a:t>，就會有泛音列</a:t>
-            </a:r>
-            <a:r>
-              <a:rPr lang="en-US" altLang="zh-TW" sz="2400" dirty="0">
-                <a:latin typeface="Consolas" panose="020B0609020204030204" pitchFamily="49" charset="0"/>
-                <a:ea typeface="標楷體" panose="03000509000000000000" pitchFamily="65" charset="-120"/>
-              </a:rPr>
-              <a:t>(</a:t>
-            </a:r>
-            <a:r>
-              <a:rPr lang="zh-TW" altLang="en-US" sz="2400" dirty="0">
-                <a:latin typeface="Consolas" panose="020B0609020204030204" pitchFamily="49" charset="0"/>
-                <a:ea typeface="標楷體" panose="03000509000000000000" pitchFamily="65" charset="-120"/>
-              </a:rPr>
-              <a:t>形成駐波</a:t>
-            </a:r>
-            <a:r>
-              <a:rPr lang="en-US" altLang="zh-TW" sz="2400" dirty="0">
-                <a:latin typeface="Consolas" panose="020B0609020204030204" pitchFamily="49" charset="0"/>
-                <a:ea typeface="標楷體" panose="03000509000000000000" pitchFamily="65" charset="-120"/>
-              </a:rPr>
-              <a:t>)</a:t>
-            </a:r>
-            <a:r>
-              <a:rPr lang="zh-TW" altLang="en-US" sz="2400" dirty="0">
-                <a:latin typeface="Consolas" panose="020B0609020204030204" pitchFamily="49" charset="0"/>
-                <a:ea typeface="標楷體" panose="03000509000000000000" pitchFamily="65" charset="-120"/>
-              </a:rPr>
-              <a:t>，實際物體的泛音會受到材質的影響形成偏差音，而收音器也會受到泛音的影響而結果不同。</a:t>
-            </a:r>
-            <a:endParaRPr lang="en-US" altLang="zh-TW" sz="2400" dirty="0">
-              <a:latin typeface="Consolas" panose="020B0609020204030204" pitchFamily="49" charset="0"/>
-              <a:ea typeface="標楷體" panose="03000509000000000000" pitchFamily="65" charset="-120"/>
-            </a:endParaRPr>
-          </a:p>
-          <a:p>
             <a:r>
               <a:rPr lang="zh-TW" altLang="en-US" sz="2400" dirty="0">
                 <a:latin typeface="Arial" panose="020B0604020202020204" pitchFamily="34" charset="0"/>
@@ -5525,7 +5991,7 @@
         </p:nvSpPr>
         <p:spPr>
           <a:xfrm>
-            <a:off x="838200" y="1353670"/>
+            <a:off x="838200" y="1417466"/>
             <a:ext cx="10515600" cy="5139205"/>
           </a:xfrm>
         </p:spPr>
@@ -5536,7 +6002,7 @@
           <a:lstStyle/>
           <a:p>
             <a:r>
-              <a:rPr lang="en-US" altLang="zh-TW" sz="2000" dirty="0">
+              <a:rPr lang="en-US" altLang="zh-TW" sz="1600" dirty="0">
                 <a:latin typeface="Arial" panose="020B0604020202020204" pitchFamily="34" charset="0"/>
                 <a:ea typeface="標楷體" panose="03000509000000000000" pitchFamily="65" charset="-120"/>
                 <a:cs typeface="Arial" panose="020B0604020202020204" pitchFamily="34" charset="0"/>
@@ -5544,14 +6010,14 @@
               <a:t>Wiki-</a:t>
             </a:r>
             <a:r>
-              <a:rPr lang="zh-TW" altLang="en-US" sz="2000" dirty="0">
+              <a:rPr lang="zh-TW" altLang="en-US" sz="1600" dirty="0">
                 <a:latin typeface="Arial" panose="020B0604020202020204" pitchFamily="34" charset="0"/>
                 <a:ea typeface="標楷體" panose="03000509000000000000" pitchFamily="65" charset="-120"/>
                 <a:cs typeface="Arial" panose="020B0604020202020204" pitchFamily="34" charset="0"/>
               </a:rPr>
               <a:t>音高：</a:t>
             </a:r>
-            <a:endParaRPr lang="en-US" altLang="zh-TW" sz="2000" dirty="0">
+            <a:endParaRPr lang="en-US" altLang="zh-TW" sz="1600" dirty="0">
               <a:latin typeface="Arial" panose="020B0604020202020204" pitchFamily="34" charset="0"/>
               <a:ea typeface="標楷體" panose="03000509000000000000" pitchFamily="65" charset="-120"/>
               <a:cs typeface="Arial" panose="020B0604020202020204" pitchFamily="34" charset="0"/>
@@ -5562,7 +6028,7 @@
               <a:buNone/>
             </a:pPr>
             <a:r>
-              <a:rPr lang="en-US" altLang="zh-TW" sz="2000" dirty="0">
+              <a:rPr lang="en-US" altLang="zh-TW" sz="1600" dirty="0">
                 <a:latin typeface="Arial" panose="020B0604020202020204" pitchFamily="34" charset="0"/>
                 <a:ea typeface="標楷體" panose="03000509000000000000" pitchFamily="65" charset="-120"/>
                 <a:cs typeface="Arial" panose="020B0604020202020204" pitchFamily="34" charset="0"/>
@@ -5570,7 +6036,7 @@
               <a:t>    </a:t>
             </a:r>
             <a:r>
-              <a:rPr lang="en-US" altLang="zh-TW" sz="2000" dirty="0">
+              <a:rPr lang="en-US" altLang="zh-TW" sz="1600" dirty="0">
                 <a:latin typeface="Arial" panose="020B0604020202020204" pitchFamily="34" charset="0"/>
                 <a:ea typeface="標楷體" panose="03000509000000000000" pitchFamily="65" charset="-120"/>
                 <a:cs typeface="Arial" panose="020B0604020202020204" pitchFamily="34" charset="0"/>
@@ -5578,7 +6044,7 @@
               </a:rPr>
               <a:t>mailto:https://zh.wikipedia.org/zh-tw/%E9%9F%B3%E9%AB%98</a:t>
             </a:r>
-            <a:endParaRPr lang="en-US" altLang="zh-TW" sz="2000" dirty="0">
+            <a:endParaRPr lang="en-US" altLang="zh-TW" sz="1600" dirty="0">
               <a:latin typeface="Arial" panose="020B0604020202020204" pitchFamily="34" charset="0"/>
               <a:ea typeface="標楷體" panose="03000509000000000000" pitchFamily="65" charset="-120"/>
               <a:cs typeface="Arial" panose="020B0604020202020204" pitchFamily="34" charset="0"/>
@@ -5589,7 +6055,7 @@
               <a:buNone/>
             </a:pPr>
             <a:r>
-              <a:rPr lang="zh-TW" altLang="en-US" sz="2000" dirty="0">
+              <a:rPr lang="zh-TW" altLang="en-US" sz="1600" dirty="0">
                 <a:latin typeface="Arial" panose="020B0604020202020204" pitchFamily="34" charset="0"/>
                 <a:ea typeface="標楷體" panose="03000509000000000000" pitchFamily="65" charset="-120"/>
                 <a:cs typeface="Arial" panose="020B0604020202020204" pitchFamily="34" charset="0"/>
@@ -5597,7 +6063,7 @@
               <a:t>    </a:t>
             </a:r>
             <a:r>
-              <a:rPr lang="en-US" altLang="zh-TW" sz="2000" dirty="0">
+              <a:rPr lang="en-US" altLang="zh-TW" sz="1600" dirty="0">
                 <a:latin typeface="Arial" panose="020B0604020202020204" pitchFamily="34" charset="0"/>
                 <a:ea typeface="標楷體" panose="03000509000000000000" pitchFamily="65" charset="-120"/>
                 <a:cs typeface="Arial" panose="020B0604020202020204" pitchFamily="34" charset="0"/>
@@ -5606,7 +6072,7 @@
               <a:t>mailto:https://zh.wikipedia.org/zh-</a:t>
             </a:r>
             <a:r>
-              <a:rPr lang="zh-TW" altLang="en-US" sz="2000" dirty="0">
+              <a:rPr lang="zh-TW" altLang="en-US" sz="1600" dirty="0">
                 <a:latin typeface="Arial" panose="020B0604020202020204" pitchFamily="34" charset="0"/>
                 <a:ea typeface="標楷體" panose="03000509000000000000" pitchFamily="65" charset="-120"/>
                 <a:cs typeface="Arial" panose="020B0604020202020204" pitchFamily="34" charset="0"/>
@@ -5614,7 +6080,7 @@
               <a:t>   </a:t>
             </a:r>
             <a:r>
-              <a:rPr lang="en-US" altLang="zh-TW" sz="2000" dirty="0" err="1">
+              <a:rPr lang="en-US" altLang="zh-TW" sz="1600" dirty="0" err="1">
                 <a:latin typeface="Arial" panose="020B0604020202020204" pitchFamily="34" charset="0"/>
                 <a:ea typeface="標楷體" panose="03000509000000000000" pitchFamily="65" charset="-120"/>
                 <a:cs typeface="Arial" panose="020B0604020202020204" pitchFamily="34" charset="0"/>
@@ -5623,7 +6089,7 @@
               <a:t>tw</a:t>
             </a:r>
             <a:r>
-              <a:rPr lang="en-US" altLang="zh-TW" sz="2000" dirty="0">
+              <a:rPr lang="en-US" altLang="zh-TW" sz="1600" dirty="0">
                 <a:latin typeface="Arial" panose="020B0604020202020204" pitchFamily="34" charset="0"/>
                 <a:ea typeface="標楷體" panose="03000509000000000000" pitchFamily="65" charset="-120"/>
                 <a:cs typeface="Arial" panose="020B0604020202020204" pitchFamily="34" charset="0"/>
@@ -5631,7 +6097,7 @@
               </a:rPr>
               <a:t>/%E4%BA%BA%E5%A3%B0%E9%9F%B3%E5%9F%9F</a:t>
             </a:r>
-            <a:endParaRPr lang="en-US" altLang="zh-TW" sz="2000" dirty="0">
+            <a:endParaRPr lang="en-US" altLang="zh-TW" sz="1600" dirty="0">
               <a:latin typeface="Arial" panose="020B0604020202020204" pitchFamily="34" charset="0"/>
               <a:ea typeface="標楷體" panose="03000509000000000000" pitchFamily="65" charset="-120"/>
               <a:cs typeface="Arial" panose="020B0604020202020204" pitchFamily="34" charset="0"/>
@@ -5639,7 +6105,7 @@
           </a:p>
           <a:p>
             <a:r>
-              <a:rPr lang="en-US" altLang="zh-TW" sz="2000" dirty="0">
+              <a:rPr lang="en-US" altLang="zh-TW" sz="1600" dirty="0">
                 <a:latin typeface="Arial" panose="020B0604020202020204" pitchFamily="34" charset="0"/>
                 <a:ea typeface="標楷體" panose="03000509000000000000" pitchFamily="65" charset="-120"/>
                 <a:cs typeface="Arial" panose="020B0604020202020204" pitchFamily="34" charset="0"/>
@@ -5647,14 +6113,14 @@
               <a:t>Naudio</a:t>
             </a:r>
             <a:r>
-              <a:rPr lang="zh-TW" altLang="en-US" sz="2000" dirty="0">
+              <a:rPr lang="zh-TW" altLang="en-US" sz="1600" dirty="0">
                 <a:latin typeface="Arial" panose="020B0604020202020204" pitchFamily="34" charset="0"/>
                 <a:ea typeface="標楷體" panose="03000509000000000000" pitchFamily="65" charset="-120"/>
                 <a:cs typeface="Arial" panose="020B0604020202020204" pitchFamily="34" charset="0"/>
               </a:rPr>
               <a:t> 套件：</a:t>
             </a:r>
-            <a:endParaRPr lang="en-US" altLang="zh-TW" sz="2000" dirty="0">
+            <a:endParaRPr lang="en-US" altLang="zh-TW" sz="1600" dirty="0">
               <a:latin typeface="Arial" panose="020B0604020202020204" pitchFamily="34" charset="0"/>
               <a:ea typeface="標楷體" panose="03000509000000000000" pitchFamily="65" charset="-120"/>
               <a:cs typeface="Arial" panose="020B0604020202020204" pitchFamily="34" charset="0"/>
@@ -5662,7 +6128,7 @@
           </a:p>
           <a:p>
             <a:r>
-              <a:rPr lang="en-US" altLang="zh-TW" sz="2000" dirty="0">
+              <a:rPr lang="en-US" altLang="zh-TW" sz="1600" dirty="0">
                 <a:latin typeface="Arial" panose="020B0604020202020204" pitchFamily="34" charset="0"/>
                 <a:ea typeface="標楷體" panose="03000509000000000000" pitchFamily="65" charset="-120"/>
                 <a:cs typeface="Arial" panose="020B0604020202020204" pitchFamily="34" charset="0"/>
@@ -5670,7 +6136,7 @@
               </a:rPr>
               <a:t>mailto:https://github.com/naudio/NAudio?tab=readme-ov-file</a:t>
             </a:r>
-            <a:endParaRPr lang="en-US" altLang="zh-TW" sz="2000" dirty="0">
+            <a:endParaRPr lang="en-US" altLang="zh-TW" sz="1600" dirty="0">
               <a:latin typeface="Arial" panose="020B0604020202020204" pitchFamily="34" charset="0"/>
               <a:ea typeface="標楷體" panose="03000509000000000000" pitchFamily="65" charset="-120"/>
               <a:cs typeface="Arial" panose="020B0604020202020204" pitchFamily="34" charset="0"/>
@@ -5678,14 +6144,14 @@
           </a:p>
           <a:p>
             <a:r>
-              <a:rPr lang="zh-TW" altLang="en-US" sz="2000" dirty="0">
+              <a:rPr lang="zh-TW" altLang="en-US" sz="1600" dirty="0">
                 <a:latin typeface="Arial" panose="020B0604020202020204" pitchFamily="34" charset="0"/>
                 <a:ea typeface="標楷體" panose="03000509000000000000" pitchFamily="65" charset="-120"/>
                 <a:cs typeface="Arial" panose="020B0604020202020204" pitchFamily="34" charset="0"/>
               </a:rPr>
               <a:t>好和弦：</a:t>
             </a:r>
-            <a:endParaRPr lang="en-US" altLang="zh-TW" sz="2000" dirty="0">
+            <a:endParaRPr lang="en-US" altLang="zh-TW" sz="1600" dirty="0">
               <a:latin typeface="Arial" panose="020B0604020202020204" pitchFamily="34" charset="0"/>
               <a:ea typeface="標楷體" panose="03000509000000000000" pitchFamily="65" charset="-120"/>
               <a:cs typeface="Arial" panose="020B0604020202020204" pitchFamily="34" charset="0"/>
@@ -5696,7 +6162,7 @@
               <a:buNone/>
             </a:pPr>
             <a:r>
-              <a:rPr lang="zh-TW" altLang="en-US" sz="2000" dirty="0">
+              <a:rPr lang="zh-TW" altLang="en-US" sz="1600" dirty="0">
                 <a:latin typeface="Arial" panose="020B0604020202020204" pitchFamily="34" charset="0"/>
                 <a:ea typeface="標楷體" panose="03000509000000000000" pitchFamily="65" charset="-120"/>
                 <a:cs typeface="Arial" panose="020B0604020202020204" pitchFamily="34" charset="0"/>
@@ -5704,7 +6170,7 @@
               <a:t>    </a:t>
             </a:r>
             <a:r>
-              <a:rPr lang="en-US" altLang="zh-TW" sz="2000" dirty="0">
+              <a:rPr lang="en-US" altLang="zh-TW" sz="1600" dirty="0">
                 <a:latin typeface="Arial" panose="020B0604020202020204" pitchFamily="34" charset="0"/>
                 <a:ea typeface="標楷體" panose="03000509000000000000" pitchFamily="65" charset="-120"/>
                 <a:cs typeface="Arial" panose="020B0604020202020204" pitchFamily="34" charset="0"/>
@@ -5712,7 +6178,7 @@
               </a:rPr>
               <a:t>mailto:https://nicechord.com/post/major-and-minor-modes/</a:t>
             </a:r>
-            <a:endParaRPr lang="en-US" altLang="zh-TW" sz="2000" dirty="0">
+            <a:endParaRPr lang="en-US" altLang="zh-TW" sz="1600" dirty="0">
               <a:latin typeface="Arial" panose="020B0604020202020204" pitchFamily="34" charset="0"/>
               <a:ea typeface="標楷體" panose="03000509000000000000" pitchFamily="65" charset="-120"/>
               <a:cs typeface="Arial" panose="020B0604020202020204" pitchFamily="34" charset="0"/>
@@ -5720,7 +6186,7 @@
           </a:p>
           <a:p>
             <a:r>
-              <a:rPr lang="en-US" altLang="zh-TW" sz="2000" dirty="0">
+              <a:rPr lang="en-US" altLang="zh-TW" sz="1600" dirty="0">
                 <a:latin typeface="Arial" panose="020B0604020202020204" pitchFamily="34" charset="0"/>
                 <a:ea typeface="標楷體" panose="03000509000000000000" pitchFamily="65" charset="-120"/>
                 <a:cs typeface="Arial" panose="020B0604020202020204" pitchFamily="34" charset="0"/>
@@ -5728,14 +6194,14 @@
               <a:t>Think DSP: Digital Signal Processing in Python by Allen B. Downey) </a:t>
             </a:r>
             <a:r>
-              <a:rPr lang="zh-TW" altLang="en-US" sz="2000" dirty="0">
+              <a:rPr lang="zh-TW" altLang="en-US" sz="1600" dirty="0">
                 <a:latin typeface="Arial" panose="020B0604020202020204" pitchFamily="34" charset="0"/>
                 <a:ea typeface="標楷體" panose="03000509000000000000" pitchFamily="65" charset="-120"/>
                 <a:cs typeface="Arial" panose="020B0604020202020204" pitchFamily="34" charset="0"/>
               </a:rPr>
               <a:t>中譯電子書：</a:t>
             </a:r>
-            <a:endParaRPr lang="en-US" altLang="zh-TW" sz="2000" dirty="0">
+            <a:endParaRPr lang="en-US" altLang="zh-TW" sz="1600" dirty="0">
               <a:latin typeface="Arial" panose="020B0604020202020204" pitchFamily="34" charset="0"/>
               <a:ea typeface="標楷體" panose="03000509000000000000" pitchFamily="65" charset="-120"/>
               <a:cs typeface="Arial" panose="020B0604020202020204" pitchFamily="34" charset="0"/>
@@ -5743,7 +6209,7 @@
           </a:p>
           <a:p>
             <a:r>
-              <a:rPr lang="en-US" altLang="zh-TW" sz="2000" dirty="0">
+              <a:rPr lang="en-US" altLang="zh-TW" sz="1600" dirty="0">
                 <a:latin typeface="Arial" panose="020B0604020202020204" pitchFamily="34" charset="0"/>
                 <a:ea typeface="標楷體" panose="03000509000000000000" pitchFamily="65" charset="-120"/>
                 <a:cs typeface="Arial" panose="020B0604020202020204" pitchFamily="34" charset="0"/>
@@ -5751,7 +6217,7 @@
               </a:rPr>
               <a:t>mailto:https://timag-shield.blogspot.com/2017/04/thinkdsp_82.html</a:t>
             </a:r>
-            <a:endParaRPr lang="en-US" altLang="zh-TW" sz="2000" dirty="0">
+            <a:endParaRPr lang="en-US" altLang="zh-TW" sz="1600" dirty="0">
               <a:latin typeface="Arial" panose="020B0604020202020204" pitchFamily="34" charset="0"/>
               <a:ea typeface="標楷體" panose="03000509000000000000" pitchFamily="65" charset="-120"/>
               <a:cs typeface="Arial" panose="020B0604020202020204" pitchFamily="34" charset="0"/>
@@ -5759,14 +6225,72 @@
           </a:p>
           <a:p>
             <a:r>
-              <a:rPr lang="zh-TW" altLang="en-US" sz="2000" dirty="0">
+              <a:rPr lang="en-US" altLang="zh-TW" sz="1600" dirty="0" err="1">
+                <a:latin typeface="Arial" panose="020B0604020202020204" pitchFamily="34" charset="0"/>
+                <a:ea typeface="標楷體" panose="03000509000000000000" pitchFamily="65" charset="-120"/>
+                <a:cs typeface="Arial" panose="020B0604020202020204" pitchFamily="34" charset="0"/>
+              </a:rPr>
+              <a:t>Naudio</a:t>
+            </a:r>
+            <a:r>
+              <a:rPr lang="en-US" altLang="zh-TW" sz="1600" dirty="0">
+                <a:latin typeface="Arial" panose="020B0604020202020204" pitchFamily="34" charset="0"/>
+                <a:ea typeface="標楷體" panose="03000509000000000000" pitchFamily="65" charset="-120"/>
+                <a:cs typeface="Arial" panose="020B0604020202020204" pitchFamily="34" charset="0"/>
+              </a:rPr>
+              <a:t> stack overflow</a:t>
+            </a:r>
+            <a:r>
+              <a:rPr lang="zh-TW" altLang="en-US" sz="1600" dirty="0">
+                <a:latin typeface="Arial" panose="020B0604020202020204" pitchFamily="34" charset="0"/>
+                <a:ea typeface="標楷體" panose="03000509000000000000" pitchFamily="65" charset="-120"/>
+                <a:cs typeface="Arial" panose="020B0604020202020204" pitchFamily="34" charset="0"/>
+              </a:rPr>
+              <a:t>：</a:t>
+            </a:r>
+            <a:endParaRPr lang="en-US" altLang="zh-TW" sz="1600" dirty="0">
+              <a:latin typeface="Arial" panose="020B0604020202020204" pitchFamily="34" charset="0"/>
+              <a:ea typeface="標楷體" panose="03000509000000000000" pitchFamily="65" charset="-120"/>
+              <a:cs typeface="Arial" panose="020B0604020202020204" pitchFamily="34" charset="0"/>
+            </a:endParaRPr>
+          </a:p>
+          <a:p>
+            <a:pPr marL="0" indent="0">
+              <a:buNone/>
+            </a:pPr>
+            <a:r>
+              <a:rPr lang="en-US" altLang="zh-TW" sz="1600" dirty="0">
+                <a:latin typeface="Arial" panose="020B0604020202020204" pitchFamily="34" charset="0"/>
+                <a:ea typeface="標楷體" panose="03000509000000000000" pitchFamily="65" charset="-120"/>
+                <a:cs typeface="Arial" panose="020B0604020202020204" pitchFamily="34" charset="0"/>
+              </a:rPr>
+              <a:t>    </a:t>
+            </a:r>
+            <a:r>
+              <a:rPr lang="en-US" altLang="zh-TW" sz="1600" dirty="0">
+                <a:latin typeface="Arial" panose="020B0604020202020204" pitchFamily="34" charset="0"/>
+                <a:ea typeface="標楷體" panose="03000509000000000000" pitchFamily="65" charset="-120"/>
+                <a:cs typeface="Arial" panose="020B0604020202020204" pitchFamily="34" charset="0"/>
+                <a:hlinkClick r:id="rId8"/>
+              </a:rPr>
+              <a:t>mailto:https://stackoverflow.com/questions/tagged/naudio?tab=newest&amp;page=1&amp;pagesize=15</a:t>
+            </a:r>
+            <a:endParaRPr lang="en-US" altLang="zh-TW" sz="1600" dirty="0">
+              <a:latin typeface="Arial" panose="020B0604020202020204" pitchFamily="34" charset="0"/>
+              <a:ea typeface="標楷體" panose="03000509000000000000" pitchFamily="65" charset="-120"/>
+              <a:cs typeface="Arial" panose="020B0604020202020204" pitchFamily="34" charset="0"/>
+            </a:endParaRPr>
+          </a:p>
+          <a:p>
+            <a:r>
+              <a:rPr lang="zh-TW" altLang="en-US" sz="1600" dirty="0">
                 <a:latin typeface="Arial" panose="020B0604020202020204" pitchFamily="34" charset="0"/>
                 <a:ea typeface="標楷體" panose="03000509000000000000" pitchFamily="65" charset="-120"/>
                 <a:cs typeface="Arial" panose="020B0604020202020204" pitchFamily="34" charset="0"/>
               </a:rPr>
               <a:t>音高測量相關影片：</a:t>
             </a:r>
-            <a:endParaRPr lang="en-US" altLang="zh-TW" sz="2000" dirty="0">
+            <a:endParaRPr lang="en-US" altLang="zh-TW" sz="1600" dirty="0">
               <a:latin typeface="Arial" panose="020B0604020202020204" pitchFamily="34" charset="0"/>
               <a:ea typeface="標楷體" panose="03000509000000000000" pitchFamily="65" charset="-120"/>
               <a:cs typeface="Arial" panose="020B0604020202020204" pitchFamily="34" charset="0"/>
@@ -5777,7 +6301,7 @@
               <a:buNone/>
             </a:pPr>
             <a:r>
-              <a:rPr lang="zh-TW" altLang="en-US" sz="2000" dirty="0">
+              <a:rPr lang="zh-TW" altLang="en-US" sz="1600" dirty="0">
                 <a:latin typeface="Arial" panose="020B0604020202020204" pitchFamily="34" charset="0"/>
                 <a:ea typeface="標楷體" panose="03000509000000000000" pitchFamily="65" charset="-120"/>
                 <a:cs typeface="Arial" panose="020B0604020202020204" pitchFamily="34" charset="0"/>
@@ -5785,42 +6309,42 @@
               <a:t>    </a:t>
             </a:r>
             <a:r>
-              <a:rPr lang="en-US" altLang="zh-TW" sz="2000" dirty="0">
+              <a:rPr lang="en-US" altLang="zh-TW" sz="1600" dirty="0">
                 <a:latin typeface="Arial" panose="020B0604020202020204" pitchFamily="34" charset="0"/>
                 <a:ea typeface="標楷體" panose="03000509000000000000" pitchFamily="65" charset="-120"/>
                 <a:cs typeface="Arial" panose="020B0604020202020204" pitchFamily="34" charset="0"/>
-                <a:hlinkClick r:id="rId8"/>
+                <a:hlinkClick r:id="rId9"/>
               </a:rPr>
               <a:t>mailto:https://www.bilibili.com/video/BV1tj411T71P/?spm_id_from=333.337.search-</a:t>
             </a:r>
             <a:r>
-              <a:rPr lang="zh-TW" altLang="en-US" sz="2000" dirty="0">
+              <a:rPr lang="zh-TW" altLang="en-US" sz="1600" dirty="0">
                 <a:latin typeface="Arial" panose="020B0604020202020204" pitchFamily="34" charset="0"/>
                 <a:ea typeface="標楷體" panose="03000509000000000000" pitchFamily="65" charset="-120"/>
                 <a:cs typeface="Arial" panose="020B0604020202020204" pitchFamily="34" charset="0"/>
-                <a:hlinkClick r:id="rId8"/>
+                <a:hlinkClick r:id="rId9"/>
               </a:rPr>
               <a:t> </a:t>
             </a:r>
             <a:r>
-              <a:rPr lang="en-US" altLang="zh-TW" sz="2000" dirty="0" err="1">
+              <a:rPr lang="en-US" altLang="zh-TW" sz="1600" dirty="0" err="1">
                 <a:latin typeface="Arial" panose="020B0604020202020204" pitchFamily="34" charset="0"/>
                 <a:ea typeface="標楷體" panose="03000509000000000000" pitchFamily="65" charset="-120"/>
                 <a:cs typeface="Arial" panose="020B0604020202020204" pitchFamily="34" charset="0"/>
-                <a:hlinkClick r:id="rId8"/>
+                <a:hlinkClick r:id="rId9"/>
               </a:rPr>
               <a:t>card.all.click&amp;vd_source</a:t>
             </a:r>
             <a:r>
-              <a:rPr lang="en-US" altLang="zh-TW" sz="2000" dirty="0">
+              <a:rPr lang="en-US" altLang="zh-TW" sz="1600" dirty="0">
                 <a:latin typeface="Arial" panose="020B0604020202020204" pitchFamily="34" charset="0"/>
                 <a:ea typeface="標楷體" panose="03000509000000000000" pitchFamily="65" charset="-120"/>
                 <a:cs typeface="Arial" panose="020B0604020202020204" pitchFamily="34" charset="0"/>
-                <a:hlinkClick r:id="rId8"/>
+                <a:hlinkClick r:id="rId9"/>
               </a:rPr>
               <a:t>=88ea28052682913da01ac2ec14baf19d</a:t>
             </a:r>
-            <a:endParaRPr lang="en-US" altLang="zh-TW" sz="2000" dirty="0">
+            <a:endParaRPr lang="en-US" altLang="zh-TW" sz="1600" dirty="0">
               <a:latin typeface="Arial" panose="020B0604020202020204" pitchFamily="34" charset="0"/>
               <a:ea typeface="標楷體" panose="03000509000000000000" pitchFamily="65" charset="-120"/>
               <a:cs typeface="Arial" panose="020B0604020202020204" pitchFamily="34" charset="0"/>
@@ -5891,10 +6415,10 @@
       </p:sp>
       <p:pic>
         <p:nvPicPr>
-          <p:cNvPr id="13" name="圖片 12">
-            <a:extLst>
-              <a:ext uri="{FF2B5EF4-FFF2-40B4-BE49-F238E27FC236}">
-                <a16:creationId xmlns:a16="http://schemas.microsoft.com/office/drawing/2014/main" id="{AF94DD1B-CDA2-43E5-A806-5E8E63AA1FB1}"/>
+          <p:cNvPr id="3" name="圖片 2">
+            <a:extLst>
+              <a:ext uri="{FF2B5EF4-FFF2-40B4-BE49-F238E27FC236}">
+                <a16:creationId xmlns:a16="http://schemas.microsoft.com/office/drawing/2014/main" id="{94122336-73E2-45B8-A678-70001E282193}"/>
               </a:ext>
             </a:extLst>
           </p:cNvPr>
@@ -5911,8 +6435,8 @@
         </p:blipFill>
         <p:spPr>
           <a:xfrm>
-            <a:off x="100635" y="1699369"/>
-            <a:ext cx="11990729" cy="4191204"/>
+            <a:off x="0" y="1767618"/>
+            <a:ext cx="12190829" cy="3920799"/>
           </a:xfrm>
           <a:prstGeom prst="rect">
             <a:avLst/>
@@ -5933,63 +6457,7 @@
         </p:nvSpPr>
         <p:spPr>
           <a:xfrm>
-            <a:off x="2757377" y="2349796"/>
-            <a:ext cx="1474381" cy="414669"/>
-          </a:xfrm>
-          <a:prstGeom prst="rect">
-            <a:avLst/>
-          </a:prstGeom>
-          <a:noFill/>
-          <a:ln w="38100" cap="flat" cmpd="sng" algn="ctr">
-            <a:solidFill>
-              <a:srgbClr val="FF0000">
-                <a:alpha val="70000"/>
-              </a:srgbClr>
-            </a:solidFill>
-            <a:prstDash val="solid"/>
-            <a:round/>
-            <a:headEnd type="none" w="med" len="med"/>
-            <a:tailEnd type="none" w="med" len="med"/>
-          </a:ln>
-        </p:spPr>
-        <p:style>
-          <a:lnRef idx="0">
-            <a:scrgbClr r="0" g="0" b="0"/>
-          </a:lnRef>
-          <a:fillRef idx="0">
-            <a:scrgbClr r="0" g="0" b="0"/>
-          </a:fillRef>
-          <a:effectRef idx="0">
-            <a:scrgbClr r="0" g="0" b="0"/>
-          </a:effectRef>
-          <a:fontRef idx="minor">
-            <a:schemeClr val="accent2"/>
-          </a:fontRef>
-        </p:style>
-        <p:txBody>
-          <a:bodyPr rtlCol="0" anchor="ctr"/>
-          <a:lstStyle/>
-          <a:p>
-            <a:pPr algn="ctr"/>
-            <a:endParaRPr lang="zh-TW" altLang="en-US"/>
-          </a:p>
-        </p:txBody>
-      </p:sp>
-      <p:sp>
-        <p:nvSpPr>
-          <p:cNvPr id="7" name="矩形 6">
-            <a:extLst>
-              <a:ext uri="{FF2B5EF4-FFF2-40B4-BE49-F238E27FC236}">
-                <a16:creationId xmlns:a16="http://schemas.microsoft.com/office/drawing/2014/main" id="{E21DC240-7DD6-46BC-A085-538E1AE428C9}"/>
-              </a:ext>
-            </a:extLst>
-          </p:cNvPr>
-          <p:cNvSpPr/>
-          <p:nvPr/>
-        </p:nvSpPr>
-        <p:spPr>
-          <a:xfrm>
-            <a:off x="2757377" y="2839072"/>
+            <a:off x="2682947" y="2349975"/>
             <a:ext cx="1867786" cy="414669"/>
           </a:xfrm>
           <a:prstGeom prst="rect">
@@ -6033,10 +6501,10 @@
       </p:sp>
       <p:sp>
         <p:nvSpPr>
-          <p:cNvPr id="8" name="矩形 7">
-            <a:extLst>
-              <a:ext uri="{FF2B5EF4-FFF2-40B4-BE49-F238E27FC236}">
-                <a16:creationId xmlns:a16="http://schemas.microsoft.com/office/drawing/2014/main" id="{DA926834-F6C2-4DD8-9072-1742595E31E5}"/>
+          <p:cNvPr id="7" name="矩形 6">
+            <a:extLst>
+              <a:ext uri="{FF2B5EF4-FFF2-40B4-BE49-F238E27FC236}">
+                <a16:creationId xmlns:a16="http://schemas.microsoft.com/office/drawing/2014/main" id="{E21DC240-7DD6-46BC-A085-538E1AE428C9}"/>
               </a:ext>
             </a:extLst>
           </p:cNvPr>
@@ -6045,8 +6513,8 @@
         </p:nvSpPr>
         <p:spPr>
           <a:xfrm>
-            <a:off x="2757376" y="3875546"/>
-            <a:ext cx="2962939" cy="414669"/>
+            <a:off x="2682947" y="2816378"/>
+            <a:ext cx="1867786" cy="414669"/>
           </a:xfrm>
           <a:prstGeom prst="rect">
             <a:avLst/>
@@ -6089,10 +6557,10 @@
       </p:sp>
       <p:sp>
         <p:nvSpPr>
-          <p:cNvPr id="9" name="矩形 8">
-            <a:extLst>
-              <a:ext uri="{FF2B5EF4-FFF2-40B4-BE49-F238E27FC236}">
-                <a16:creationId xmlns:a16="http://schemas.microsoft.com/office/drawing/2014/main" id="{4D4E21C6-E2E4-43ED-80B0-8F63DBCA32F0}"/>
+          <p:cNvPr id="8" name="矩形 7">
+            <a:extLst>
+              <a:ext uri="{FF2B5EF4-FFF2-40B4-BE49-F238E27FC236}">
+                <a16:creationId xmlns:a16="http://schemas.microsoft.com/office/drawing/2014/main" id="{DA926834-F6C2-4DD8-9072-1742595E31E5}"/>
               </a:ext>
             </a:extLst>
           </p:cNvPr>
@@ -6101,8 +6569,64 @@
         </p:nvSpPr>
         <p:spPr>
           <a:xfrm>
-            <a:off x="2757377" y="4883059"/>
-            <a:ext cx="1658679" cy="414669"/>
+            <a:off x="2682947" y="3771878"/>
+            <a:ext cx="2771555" cy="414669"/>
+          </a:xfrm>
+          <a:prstGeom prst="rect">
+            <a:avLst/>
+          </a:prstGeom>
+          <a:noFill/>
+          <a:ln w="38100" cap="flat" cmpd="sng" algn="ctr">
+            <a:solidFill>
+              <a:srgbClr val="FF0000">
+                <a:alpha val="70000"/>
+              </a:srgbClr>
+            </a:solidFill>
+            <a:prstDash val="solid"/>
+            <a:round/>
+            <a:headEnd type="none" w="med" len="med"/>
+            <a:tailEnd type="none" w="med" len="med"/>
+          </a:ln>
+        </p:spPr>
+        <p:style>
+          <a:lnRef idx="0">
+            <a:scrgbClr r="0" g="0" b="0"/>
+          </a:lnRef>
+          <a:fillRef idx="0">
+            <a:scrgbClr r="0" g="0" b="0"/>
+          </a:fillRef>
+          <a:effectRef idx="0">
+            <a:scrgbClr r="0" g="0" b="0"/>
+          </a:effectRef>
+          <a:fontRef idx="minor">
+            <a:schemeClr val="accent2"/>
+          </a:fontRef>
+        </p:style>
+        <p:txBody>
+          <a:bodyPr rtlCol="0" anchor="ctr"/>
+          <a:lstStyle/>
+          <a:p>
+            <a:pPr algn="ctr"/>
+            <a:endParaRPr lang="zh-TW" altLang="en-US"/>
+          </a:p>
+        </p:txBody>
+      </p:sp>
+      <p:sp>
+        <p:nvSpPr>
+          <p:cNvPr id="9" name="矩形 8">
+            <a:extLst>
+              <a:ext uri="{FF2B5EF4-FFF2-40B4-BE49-F238E27FC236}">
+                <a16:creationId xmlns:a16="http://schemas.microsoft.com/office/drawing/2014/main" id="{4D4E21C6-E2E4-43ED-80B0-8F63DBCA32F0}"/>
+              </a:ext>
+            </a:extLst>
+          </p:cNvPr>
+          <p:cNvSpPr/>
+          <p:nvPr/>
+        </p:nvSpPr>
+        <p:spPr>
+          <a:xfrm>
+            <a:off x="2682947" y="4704685"/>
+            <a:ext cx="1640959" cy="414669"/>
           </a:xfrm>
           <a:prstGeom prst="rect">
             <a:avLst/>
@@ -6418,7 +6942,9 @@
             </p:nvSpPr>
             <p:spPr/>
             <p:txBody>
-              <a:bodyPr/>
+              <a:bodyPr>
+                <a:normAutofit/>
+              </a:bodyPr>
               <a:lstStyle/>
               <a:p>
                 <a:r>
@@ -6765,6 +7291,112 @@
                   </a:rPr>
                   <a:t>。</a:t>
                 </a:r>
+                <a:endParaRPr lang="en-US" altLang="zh-TW" dirty="0">
+                  <a:latin typeface="Arial" panose="020B0604020202020204" pitchFamily="34" charset="0"/>
+                  <a:ea typeface="標楷體" panose="03000509000000000000" pitchFamily="65" charset="-120"/>
+                  <a:cs typeface="Arial" panose="020B0604020202020204" pitchFamily="34" charset="0"/>
+                </a:endParaRPr>
+              </a:p>
+              <a:p>
+                <a:r>
+                  <a:rPr lang="zh-TW" altLang="en-US" sz="2800" dirty="0">
+                    <a:latin typeface="Arial" panose="020B0604020202020204" pitchFamily="34" charset="0"/>
+                    <a:ea typeface="標楷體" panose="03000509000000000000" pitchFamily="65" charset="-120"/>
+                    <a:cs typeface="Arial" panose="020B0604020202020204" pitchFamily="34" charset="0"/>
+                  </a:rPr>
+                  <a:t>人</a:t>
+                </a:r>
+                <a:r>
+                  <a:rPr lang="zh-TW" altLang="en-US" dirty="0">
+                    <a:latin typeface="Arial" panose="020B0604020202020204" pitchFamily="34" charset="0"/>
+                    <a:ea typeface="標楷體" panose="03000509000000000000" pitchFamily="65" charset="-120"/>
+                    <a:cs typeface="Arial" panose="020B0604020202020204" pitchFamily="34" charset="0"/>
+                  </a:rPr>
+                  <a:t>類</a:t>
+                </a:r>
+                <a:r>
+                  <a:rPr lang="zh-TW" altLang="en-US" sz="2800" dirty="0">
+                    <a:latin typeface="Arial" panose="020B0604020202020204" pitchFamily="34" charset="0"/>
+                    <a:ea typeface="標楷體" panose="03000509000000000000" pitchFamily="65" charset="-120"/>
+                    <a:cs typeface="Arial" panose="020B0604020202020204" pitchFamily="34" charset="0"/>
+                  </a:rPr>
+                  <a:t>感知音高</a:t>
+                </a:r>
+                <a:r>
+                  <a:rPr lang="en-US" altLang="zh-TW" sz="2800" dirty="0">
+                    <a:latin typeface="Arial" panose="020B0604020202020204" pitchFamily="34" charset="0"/>
+                    <a:ea typeface="標楷體" panose="03000509000000000000" pitchFamily="65" charset="-120"/>
+                    <a:cs typeface="Arial" panose="020B0604020202020204" pitchFamily="34" charset="0"/>
+                  </a:rPr>
+                  <a:t>(</a:t>
+                </a:r>
+                <a:r>
+                  <a:rPr lang="zh-TW" altLang="en-US" sz="2800" dirty="0">
+                    <a:latin typeface="Arial" panose="020B0604020202020204" pitchFamily="34" charset="0"/>
+                    <a:ea typeface="標楷體" panose="03000509000000000000" pitchFamily="65" charset="-120"/>
+                    <a:cs typeface="Arial" panose="020B0604020202020204" pitchFamily="34" charset="0"/>
+                  </a:rPr>
+                  <a:t>音程差</a:t>
+                </a:r>
+                <a:r>
+                  <a:rPr lang="en-US" altLang="zh-TW" sz="2800" dirty="0">
+                    <a:latin typeface="Arial" panose="020B0604020202020204" pitchFamily="34" charset="0"/>
+                    <a:ea typeface="標楷體" panose="03000509000000000000" pitchFamily="65" charset="-120"/>
+                    <a:cs typeface="Arial" panose="020B0604020202020204" pitchFamily="34" charset="0"/>
+                  </a:rPr>
+                  <a:t>)</a:t>
+                </a:r>
+                <a:r>
+                  <a:rPr lang="zh-TW" altLang="en-US" sz="2800" dirty="0">
+                    <a:latin typeface="Arial" panose="020B0604020202020204" pitchFamily="34" charset="0"/>
+                    <a:ea typeface="標楷體" panose="03000509000000000000" pitchFamily="65" charset="-120"/>
+                    <a:cs typeface="Arial" panose="020B0604020202020204" pitchFamily="34" charset="0"/>
+                  </a:rPr>
+                  <a:t>是依據頻率的對數</a:t>
+                </a:r>
+                <a:r>
+                  <a:rPr lang="zh-TW" altLang="en-US" dirty="0">
+                    <a:latin typeface="Arial" panose="020B0604020202020204" pitchFamily="34" charset="0"/>
+                    <a:ea typeface="標楷體" panose="03000509000000000000" pitchFamily="65" charset="-120"/>
+                    <a:cs typeface="Arial" panose="020B0604020202020204" pitchFamily="34" charset="0"/>
+                  </a:rPr>
+                  <a:t>比例</a:t>
+                </a:r>
+                <a:r>
+                  <a:rPr lang="zh-TW" altLang="en-US" sz="2800" dirty="0">
+                    <a:latin typeface="Arial" panose="020B0604020202020204" pitchFamily="34" charset="0"/>
+                    <a:ea typeface="標楷體" panose="03000509000000000000" pitchFamily="65" charset="-120"/>
+                    <a:cs typeface="Arial" panose="020B0604020202020204" pitchFamily="34" charset="0"/>
+                  </a:rPr>
+                  <a:t>，</a:t>
+                </a:r>
+                <a:r>
+                  <a:rPr lang="zh-TW" altLang="en-US" dirty="0">
+                    <a:latin typeface="Arial" panose="020B0604020202020204" pitchFamily="34" charset="0"/>
+                    <a:ea typeface="標楷體" panose="03000509000000000000" pitchFamily="65" charset="-120"/>
+                    <a:cs typeface="Arial" panose="020B0604020202020204" pitchFamily="34" charset="0"/>
+                  </a:rPr>
+                  <a:t>而不是頻率差。</a:t>
+                </a:r>
+                <a:endParaRPr lang="en-US" altLang="zh-TW" dirty="0">
+                  <a:latin typeface="Arial" panose="020B0604020202020204" pitchFamily="34" charset="0"/>
+                  <a:ea typeface="標楷體" panose="03000509000000000000" pitchFamily="65" charset="-120"/>
+                  <a:cs typeface="Arial" panose="020B0604020202020204" pitchFamily="34" charset="0"/>
+                </a:endParaRPr>
+              </a:p>
+              <a:p>
+                <a:endParaRPr lang="en-US" altLang="zh-TW" sz="2800" dirty="0">
+                  <a:latin typeface="Arial" panose="020B0604020202020204" pitchFamily="34" charset="0"/>
+                  <a:ea typeface="標楷體" panose="03000509000000000000" pitchFamily="65" charset="-120"/>
+                  <a:cs typeface="Arial" panose="020B0604020202020204" pitchFamily="34" charset="0"/>
+                </a:endParaRPr>
+              </a:p>
+              <a:p>
+                <a:endParaRPr lang="zh-TW" altLang="en-US" dirty="0">
+                  <a:latin typeface="Arial" panose="020B0604020202020204" pitchFamily="34" charset="0"/>
+                  <a:ea typeface="標楷體" panose="03000509000000000000" pitchFamily="65" charset="-120"/>
+                  <a:cs typeface="Arial" panose="020B0604020202020204" pitchFamily="34" charset="0"/>
+                </a:endParaRPr>
               </a:p>
             </p:txBody>
           </p:sp>
@@ -6825,7 +7457,7 @@
             </p:nvSpPr>
             <p:spPr>
               <a:xfrm>
-                <a:off x="1419426" y="5013882"/>
+                <a:off x="1419426" y="5205268"/>
                 <a:ext cx="4676574" cy="561885"/>
               </a:xfrm>
               <a:prstGeom prst="rect">
@@ -6955,7 +7587,7 @@
             </p:nvSpPr>
             <p:spPr>
               <a:xfrm>
-                <a:off x="1419426" y="5013882"/>
+                <a:off x="1419426" y="5205268"/>
                 <a:ext cx="4676574" cy="561885"/>
               </a:xfrm>
               <a:prstGeom prst="rect">
@@ -6999,7 +7631,7 @@
             </p:nvSpPr>
             <p:spPr>
               <a:xfrm>
-                <a:off x="6890317" y="4879904"/>
+                <a:off x="6890317" y="5071290"/>
                 <a:ext cx="3030657" cy="829843"/>
               </a:xfrm>
               <a:prstGeom prst="rect">
@@ -7187,7 +7819,7 @@
             </p:nvSpPr>
             <p:spPr>
               <a:xfrm>
-                <a:off x="6890317" y="4879904"/>
+                <a:off x="6890317" y="5071290"/>
                 <a:ext cx="3030657" cy="829843"/>
               </a:xfrm>
               <a:prstGeom prst="rect">
@@ -7292,8 +7924,8 @@
           </a:extLst>
         </p:spPr>
       </p:pic>
-      <mc:AlternateContent xmlns:mc="http://schemas.openxmlformats.org/markup-compatibility/2006">
-        <mc:Choice xmlns:a14="http://schemas.microsoft.com/office/drawing/2010/main" Requires="a14">
+      <mc:AlternateContent xmlns:mc="http://schemas.openxmlformats.org/markup-compatibility/2006" xmlns:a14="http://schemas.microsoft.com/office/drawing/2010/main">
+        <mc:Choice Requires="a14">
           <p:sp>
             <p:nvSpPr>
               <p:cNvPr id="8" name="文字方塊 7">
@@ -7377,7 +8009,7 @@
             </p:txBody>
           </p:sp>
         </mc:Choice>
-        <mc:Fallback>
+        <mc:Fallback xmlns="">
           <p:sp>
             <p:nvSpPr>
               <p:cNvPr id="8" name="文字方塊 7">
@@ -7422,8 +8054,8 @@
           </p:sp>
         </mc:Fallback>
       </mc:AlternateContent>
-      <mc:AlternateContent xmlns:mc="http://schemas.openxmlformats.org/markup-compatibility/2006">
-        <mc:Choice xmlns:a14="http://schemas.microsoft.com/office/drawing/2010/main" Requires="a14">
+      <mc:AlternateContent xmlns:mc="http://schemas.openxmlformats.org/markup-compatibility/2006" xmlns:a14="http://schemas.microsoft.com/office/drawing/2010/main">
+        <mc:Choice Requires="a14">
           <p:sp>
             <p:nvSpPr>
               <p:cNvPr id="10" name="文字方塊 9">
@@ -7513,7 +8145,7 @@
             </p:txBody>
           </p:sp>
         </mc:Choice>
-        <mc:Fallback>
+        <mc:Fallback xmlns="">
           <p:sp>
             <p:nvSpPr>
               <p:cNvPr id="10" name="文字方塊 9">
@@ -8043,43 +8675,6 @@
             </a:endParaRPr>
           </a:p>
           <a:p>
-            <a:pPr marL="0" indent="0">
-              <a:buNone/>
-            </a:pPr>
-            <a:r>
-              <a:rPr lang="zh-TW" altLang="en-US" sz="2400" dirty="0">
-                <a:latin typeface="Arial" panose="020B0604020202020204" pitchFamily="34" charset="0"/>
-                <a:ea typeface="標楷體" panose="03000509000000000000" pitchFamily="65" charset="-120"/>
-                <a:cs typeface="Arial" panose="020B0604020202020204" pitchFamily="34" charset="0"/>
-              </a:rPr>
-              <a:t>   </a:t>
-            </a:r>
-            <a:r>
-              <a:rPr lang="en-US" altLang="zh-TW" sz="2400" dirty="0">
-                <a:latin typeface="Arial" panose="020B0604020202020204" pitchFamily="34" charset="0"/>
-                <a:ea typeface="標楷體" panose="03000509000000000000" pitchFamily="65" charset="-120"/>
-                <a:cs typeface="Arial" panose="020B0604020202020204" pitchFamily="34" charset="0"/>
-              </a:rPr>
-              <a:t>(ex: </a:t>
-            </a:r>
-            <a:r>
-              <a:rPr lang="zh-TW" altLang="en-US" sz="2400" dirty="0">
-                <a:latin typeface="Arial" panose="020B0604020202020204" pitchFamily="34" charset="0"/>
-                <a:ea typeface="標楷體" panose="03000509000000000000" pitchFamily="65" charset="-120"/>
-                <a:cs typeface="Arial" panose="020B0604020202020204" pitchFamily="34" charset="0"/>
-              </a:rPr>
-              <a:t>鋼琴有高音更高，低音更低的特性</a:t>
-            </a:r>
-            <a:r>
-              <a:rPr lang="en-US" altLang="zh-TW" sz="2400" dirty="0">
-                <a:latin typeface="Arial" panose="020B0604020202020204" pitchFamily="34" charset="0"/>
-                <a:ea typeface="標楷體" panose="03000509000000000000" pitchFamily="65" charset="-120"/>
-                <a:cs typeface="Arial" panose="020B0604020202020204" pitchFamily="34" charset="0"/>
-              </a:rPr>
-              <a:t>)</a:t>
-            </a:r>
-          </a:p>
-          <a:p>
             <a:r>
               <a:rPr lang="zh-TW" altLang="en-US" sz="2400" dirty="0">
                 <a:latin typeface="Arial" panose="020B0604020202020204" pitchFamily="34" charset="0"/>
@@ -8271,31 +8866,6 @@
           </a:p>
         </p:txBody>
       </p:sp>
-      <p:sp>
-        <p:nvSpPr>
-          <p:cNvPr id="11" name="內容版面配置區 10">
-            <a:extLst>
-              <a:ext uri="{FF2B5EF4-FFF2-40B4-BE49-F238E27FC236}">
-                <a16:creationId xmlns:a16="http://schemas.microsoft.com/office/drawing/2014/main" id="{FF535D7D-8804-4DC8-A5AB-622156FADF9A}"/>
-              </a:ext>
-            </a:extLst>
-          </p:cNvPr>
-          <p:cNvSpPr>
-            <a:spLocks noGrp="1"/>
-          </p:cNvSpPr>
-          <p:nvPr>
-            <p:ph idx="1"/>
-          </p:nvPr>
-        </p:nvSpPr>
-        <p:spPr/>
-        <p:txBody>
-          <a:bodyPr/>
-          <a:lstStyle/>
-          <a:p>
-            <a:endParaRPr lang="zh-TW" altLang="en-US"/>
-          </a:p>
-        </p:txBody>
-      </p:sp>
       <p:pic>
         <p:nvPicPr>
           <p:cNvPr id="15" name="圖片 14">
@@ -8311,7 +8881,7 @@
           <p:nvPr/>
         </p:nvPicPr>
         <p:blipFill rotWithShape="1">
-          <a:blip r:embed="rId2"/>
+          <a:blip r:embed="rId3"/>
           <a:srcRect t="7490"/>
           <a:stretch/>
         </p:blipFill>
@@ -8340,7 +8910,7 @@
           <p:nvPr/>
         </p:nvPicPr>
         <p:blipFill>
-          <a:blip r:embed="rId3"/>
+          <a:blip r:embed="rId4"/>
           <a:stretch>
             <a:fillRect/>
           </a:stretch>
@@ -8445,8 +9015,8 @@
           </a:prstGeom>
         </p:spPr>
       </p:pic>
-      <mc:AlternateContent xmlns:mc="http://schemas.openxmlformats.org/markup-compatibility/2006">
-        <mc:Choice xmlns:a14="http://schemas.microsoft.com/office/drawing/2010/main" Requires="a14">
+      <mc:AlternateContent xmlns:mc="http://schemas.openxmlformats.org/markup-compatibility/2006" xmlns:a14="http://schemas.microsoft.com/office/drawing/2010/main">
+        <mc:Choice Requires="a14">
           <p:sp>
             <p:nvSpPr>
               <p:cNvPr id="7" name="文字方塊 6">
@@ -8632,7 +9202,7 @@
             </p:txBody>
           </p:sp>
         </mc:Choice>
-        <mc:Fallback>
+        <mc:Fallback xmlns="">
           <p:sp>
             <p:nvSpPr>
               <p:cNvPr id="7" name="文字方塊 6">

--- a/1224報告_NAudio.pptx
+++ b/1224報告_NAudio.pptx
@@ -522,6 +522,13 @@
           <a:p>
             <a:r>
               <a:rPr lang="zh-TW" altLang="en-US" dirty="0"/>
+              <a:t>發想：</a:t>
+            </a:r>
+            <a:br>
+              <a:rPr lang="en-US" altLang="zh-TW" dirty="0"/>
+            </a:br>
+            <a:r>
+              <a:rPr lang="zh-TW" altLang="en-US" dirty="0"/>
               <a:t>原本是想做關於能分析歌曲調性的技術</a:t>
             </a:r>
             <a:br>
@@ -589,6 +596,406 @@
     <p:extLst>
       <p:ext uri="{BB962C8B-B14F-4D97-AF65-F5344CB8AC3E}">
         <p14:creationId xmlns:p14="http://schemas.microsoft.com/office/powerpoint/2010/main" val="1023816260"/>
+      </p:ext>
+    </p:extLst>
+  </p:cSld>
+  <p:clrMapOvr>
+    <a:masterClrMapping/>
+  </p:clrMapOvr>
+</p:notes>
+</file>
+
+<file path=ppt/notesSlides/notesSlide10.xml><?xml version="1.0" encoding="utf-8"?>
+<p:notes xmlns:a="http://schemas.openxmlformats.org/drawingml/2006/main" xmlns:r="http://schemas.openxmlformats.org/officeDocument/2006/relationships" xmlns:p="http://schemas.openxmlformats.org/presentationml/2006/main">
+  <p:cSld>
+    <p:spTree>
+      <p:nvGrpSpPr>
+        <p:cNvPr id="1" name=""/>
+        <p:cNvGrpSpPr/>
+        <p:nvPr/>
+      </p:nvGrpSpPr>
+      <p:grpSpPr>
+        <a:xfrm>
+          <a:off x="0" y="0"/>
+          <a:ext cx="0" cy="0"/>
+          <a:chOff x="0" y="0"/>
+          <a:chExt cx="0" cy="0"/>
+        </a:xfrm>
+      </p:grpSpPr>
+      <p:sp>
+        <p:nvSpPr>
+          <p:cNvPr id="2" name="投影片影像版面配置區 1"/>
+          <p:cNvSpPr>
+            <a:spLocks noGrp="1" noRot="1" noChangeAspect="1"/>
+          </p:cNvSpPr>
+          <p:nvPr>
+            <p:ph type="sldImg"/>
+          </p:nvPr>
+        </p:nvSpPr>
+        <p:spPr/>
+      </p:sp>
+      <p:sp>
+        <p:nvSpPr>
+          <p:cNvPr id="3" name="備忘稿版面配置區 2"/>
+          <p:cNvSpPr>
+            <a:spLocks noGrp="1"/>
+          </p:cNvSpPr>
+          <p:nvPr>
+            <p:ph type="body" idx="1"/>
+          </p:nvPr>
+        </p:nvSpPr>
+        <p:spPr/>
+        <p:txBody>
+          <a:bodyPr/>
+          <a:lstStyle/>
+          <a:p>
+            <a:r>
+              <a:rPr lang="zh-TW" altLang="en-US" dirty="0"/>
+              <a:t>一般環境下</a:t>
+            </a:r>
+            <a:endParaRPr lang="en-US" altLang="zh-TW" dirty="0"/>
+          </a:p>
+          <a:p>
+            <a:r>
+              <a:rPr lang="zh-TW" altLang="en-US" dirty="0"/>
+              <a:t>容易收到高頻的音</a:t>
+            </a:r>
+            <a:br>
+              <a:rPr lang="en-US" altLang="zh-TW" dirty="0"/>
+            </a:br>
+            <a:r>
+              <a:rPr lang="zh-TW" altLang="en-US" dirty="0"/>
+              <a:t>需要透過濾波才能解決</a:t>
+            </a:r>
+            <a:endParaRPr lang="en-US" altLang="zh-TW" dirty="0"/>
+          </a:p>
+          <a:p>
+            <a:r>
+              <a:rPr lang="zh-TW" altLang="en-US" dirty="0"/>
+              <a:t>濾波主要有兩種方式：</a:t>
+            </a:r>
+            <a:endParaRPr lang="en-US" altLang="zh-TW" dirty="0"/>
+          </a:p>
+          <a:p>
+            <a:r>
+              <a:rPr lang="en-US" altLang="zh-TW" dirty="0"/>
+              <a:t>1.</a:t>
+            </a:r>
+            <a:r>
+              <a:rPr lang="zh-TW" altLang="en-US" dirty="0"/>
+              <a:t> 直接設閥值 </a:t>
+            </a:r>
+            <a:r>
+              <a:rPr lang="en-US" altLang="zh-TW" dirty="0"/>
+              <a:t>2.</a:t>
+            </a:r>
+            <a:r>
+              <a:rPr lang="zh-TW" altLang="en-US" dirty="0"/>
+              <a:t> 傅立葉轉換</a:t>
+            </a:r>
+          </a:p>
+        </p:txBody>
+      </p:sp>
+      <p:sp>
+        <p:nvSpPr>
+          <p:cNvPr id="4" name="投影片編號版面配置區 3"/>
+          <p:cNvSpPr>
+            <a:spLocks noGrp="1"/>
+          </p:cNvSpPr>
+          <p:nvPr>
+            <p:ph type="sldNum" sz="quarter" idx="5"/>
+          </p:nvPr>
+        </p:nvSpPr>
+        <p:spPr/>
+        <p:txBody>
+          <a:bodyPr/>
+          <a:lstStyle/>
+          <a:p>
+            <a:fld id="{E285D06F-C5C6-4EC7-8C43-7BC9C8305506}" type="slidenum">
+              <a:rPr lang="zh-TW" altLang="en-US" smtClean="0"/>
+              <a:t>10</a:t>
+            </a:fld>
+            <a:endParaRPr lang="zh-TW" altLang="en-US"/>
+          </a:p>
+        </p:txBody>
+      </p:sp>
+    </p:spTree>
+    <p:extLst>
+      <p:ext uri="{BB962C8B-B14F-4D97-AF65-F5344CB8AC3E}">
+        <p14:creationId xmlns:p14="http://schemas.microsoft.com/office/powerpoint/2010/main" val="1966005026"/>
+      </p:ext>
+    </p:extLst>
+  </p:cSld>
+  <p:clrMapOvr>
+    <a:masterClrMapping/>
+  </p:clrMapOvr>
+</p:notes>
+</file>
+
+<file path=ppt/notesSlides/notesSlide11.xml><?xml version="1.0" encoding="utf-8"?>
+<p:notes xmlns:a="http://schemas.openxmlformats.org/drawingml/2006/main" xmlns:r="http://schemas.openxmlformats.org/officeDocument/2006/relationships" xmlns:p="http://schemas.openxmlformats.org/presentationml/2006/main">
+  <p:cSld>
+    <p:spTree>
+      <p:nvGrpSpPr>
+        <p:cNvPr id="1" name=""/>
+        <p:cNvGrpSpPr/>
+        <p:nvPr/>
+      </p:nvGrpSpPr>
+      <p:grpSpPr>
+        <a:xfrm>
+          <a:off x="0" y="0"/>
+          <a:ext cx="0" cy="0"/>
+          <a:chOff x="0" y="0"/>
+          <a:chExt cx="0" cy="0"/>
+        </a:xfrm>
+      </p:grpSpPr>
+      <p:sp>
+        <p:nvSpPr>
+          <p:cNvPr id="2" name="投影片影像版面配置區 1"/>
+          <p:cNvSpPr>
+            <a:spLocks noGrp="1" noRot="1" noChangeAspect="1"/>
+          </p:cNvSpPr>
+          <p:nvPr>
+            <p:ph type="sldImg"/>
+          </p:nvPr>
+        </p:nvSpPr>
+        <p:spPr/>
+      </p:sp>
+      <p:sp>
+        <p:nvSpPr>
+          <p:cNvPr id="3" name="備忘稿版面配置區 2"/>
+          <p:cNvSpPr>
+            <a:spLocks noGrp="1"/>
+          </p:cNvSpPr>
+          <p:nvPr>
+            <p:ph type="body" idx="1"/>
+          </p:nvPr>
+        </p:nvSpPr>
+        <p:spPr/>
+        <p:txBody>
+          <a:bodyPr/>
+          <a:lstStyle/>
+          <a:p>
+            <a:r>
+              <a:rPr lang="en-US" altLang="zh-TW" dirty="0" err="1"/>
+              <a:t>WaveOutEvent</a:t>
+            </a:r>
+            <a:r>
+              <a:rPr lang="zh-TW" altLang="en-US" dirty="0"/>
+              <a:t>：傳入放音設備</a:t>
+            </a:r>
+            <a:r>
+              <a:rPr lang="en-US" altLang="zh-TW" dirty="0"/>
+              <a:t>index</a:t>
+            </a:r>
+            <a:r>
+              <a:rPr lang="zh-TW" altLang="en-US" dirty="0"/>
+              <a:t>值建立放音物件</a:t>
+            </a:r>
+            <a:endParaRPr lang="en-US" altLang="zh-TW" dirty="0"/>
+          </a:p>
+          <a:p>
+            <a:r>
+              <a:rPr lang="en-US" altLang="zh-TW" dirty="0" err="1"/>
+              <a:t>SignalGenerator</a:t>
+            </a:r>
+            <a:r>
+              <a:rPr lang="zh-TW" altLang="en-US" dirty="0"/>
+              <a:t>：訊號產生器</a:t>
+            </a:r>
+            <a:r>
+              <a:rPr lang="en-US" altLang="zh-TW" dirty="0"/>
+              <a:t>, </a:t>
+            </a:r>
+            <a:r>
+              <a:rPr lang="zh-TW" altLang="en-US" dirty="0"/>
+              <a:t>設定波型</a:t>
+            </a:r>
+            <a:endParaRPr lang="en-US" altLang="zh-TW" dirty="0"/>
+          </a:p>
+          <a:p>
+            <a:r>
+              <a:rPr lang="en-US" altLang="zh-TW" dirty="0" err="1"/>
+              <a:t>fn</a:t>
+            </a:r>
+            <a:r>
+              <a:rPr lang="en-US" altLang="zh-TW" dirty="0"/>
+              <a:t> = f0 * 2^n</a:t>
+            </a:r>
+            <a:br>
+              <a:rPr lang="en-US" altLang="zh-TW" dirty="0"/>
+            </a:br>
+            <a:r>
+              <a:rPr lang="zh-TW" altLang="en-US" dirty="0"/>
+              <a:t>做成鋼琴只是示意音高</a:t>
+            </a:r>
+            <a:br>
+              <a:rPr lang="en-US" altLang="zh-TW" dirty="0"/>
+            </a:br>
+            <a:r>
+              <a:rPr lang="zh-TW" altLang="en-US" dirty="0"/>
+              <a:t>實際上如果要發出類似鋼琴的聲音</a:t>
+            </a:r>
+            <a:br>
+              <a:rPr lang="en-US" altLang="zh-TW" dirty="0"/>
+            </a:br>
+            <a:r>
+              <a:rPr lang="zh-TW" altLang="en-US" dirty="0"/>
+              <a:t>就要先準備每個音的</a:t>
+            </a:r>
+            <a:r>
+              <a:rPr lang="en-US" altLang="zh-TW" dirty="0"/>
+              <a:t>.wav</a:t>
+            </a:r>
+            <a:r>
+              <a:rPr lang="zh-TW" altLang="en-US" dirty="0"/>
+              <a:t>檔</a:t>
+            </a:r>
+            <a:endParaRPr lang="en-US" altLang="zh-TW" dirty="0"/>
+          </a:p>
+          <a:p>
+            <a:r>
+              <a:rPr lang="zh-TW" altLang="en-US" dirty="0"/>
+              <a:t>在用</a:t>
+            </a:r>
+            <a:r>
+              <a:rPr lang="en-US" altLang="zh-TW" dirty="0" err="1"/>
+              <a:t>WaveOutEvent</a:t>
+            </a:r>
+            <a:r>
+              <a:rPr lang="zh-TW" altLang="en-US" dirty="0"/>
+              <a:t>事件播放相對應音高</a:t>
+            </a:r>
+          </a:p>
+        </p:txBody>
+      </p:sp>
+      <p:sp>
+        <p:nvSpPr>
+          <p:cNvPr id="4" name="投影片編號版面配置區 3"/>
+          <p:cNvSpPr>
+            <a:spLocks noGrp="1"/>
+          </p:cNvSpPr>
+          <p:nvPr>
+            <p:ph type="sldNum" sz="quarter" idx="5"/>
+          </p:nvPr>
+        </p:nvSpPr>
+        <p:spPr/>
+        <p:txBody>
+          <a:bodyPr/>
+          <a:lstStyle/>
+          <a:p>
+            <a:fld id="{E285D06F-C5C6-4EC7-8C43-7BC9C8305506}" type="slidenum">
+              <a:rPr lang="zh-TW" altLang="en-US" smtClean="0"/>
+              <a:t>11</a:t>
+            </a:fld>
+            <a:endParaRPr lang="zh-TW" altLang="en-US"/>
+          </a:p>
+        </p:txBody>
+      </p:sp>
+    </p:spTree>
+    <p:extLst>
+      <p:ext uri="{BB962C8B-B14F-4D97-AF65-F5344CB8AC3E}">
+        <p14:creationId xmlns:p14="http://schemas.microsoft.com/office/powerpoint/2010/main" val="3225734016"/>
+      </p:ext>
+    </p:extLst>
+  </p:cSld>
+  <p:clrMapOvr>
+    <a:masterClrMapping/>
+  </p:clrMapOvr>
+</p:notes>
+</file>
+
+<file path=ppt/notesSlides/notesSlide12.xml><?xml version="1.0" encoding="utf-8"?>
+<p:notes xmlns:a="http://schemas.openxmlformats.org/drawingml/2006/main" xmlns:r="http://schemas.openxmlformats.org/officeDocument/2006/relationships" xmlns:p="http://schemas.openxmlformats.org/presentationml/2006/main">
+  <p:cSld>
+    <p:spTree>
+      <p:nvGrpSpPr>
+        <p:cNvPr id="1" name=""/>
+        <p:cNvGrpSpPr/>
+        <p:nvPr/>
+      </p:nvGrpSpPr>
+      <p:grpSpPr>
+        <a:xfrm>
+          <a:off x="0" y="0"/>
+          <a:ext cx="0" cy="0"/>
+          <a:chOff x="0" y="0"/>
+          <a:chExt cx="0" cy="0"/>
+        </a:xfrm>
+      </p:grpSpPr>
+      <p:sp>
+        <p:nvSpPr>
+          <p:cNvPr id="2" name="投影片影像版面配置區 1"/>
+          <p:cNvSpPr>
+            <a:spLocks noGrp="1" noRot="1" noChangeAspect="1"/>
+          </p:cNvSpPr>
+          <p:nvPr>
+            <p:ph type="sldImg"/>
+          </p:nvPr>
+        </p:nvSpPr>
+        <p:spPr/>
+      </p:sp>
+      <p:sp>
+        <p:nvSpPr>
+          <p:cNvPr id="3" name="備忘稿版面配置區 2"/>
+          <p:cNvSpPr>
+            <a:spLocks noGrp="1"/>
+          </p:cNvSpPr>
+          <p:nvPr>
+            <p:ph type="body" idx="1"/>
+          </p:nvPr>
+        </p:nvSpPr>
+        <p:spPr/>
+        <p:txBody>
+          <a:bodyPr/>
+          <a:lstStyle/>
+          <a:p>
+            <a:r>
+              <a:rPr lang="zh-TW" altLang="en-US" dirty="0"/>
+              <a:t>音分範圍：</a:t>
+            </a:r>
+            <a:r>
+              <a:rPr lang="en-US" altLang="zh-TW" dirty="0"/>
+              <a:t>50</a:t>
+            </a:r>
+            <a:r>
+              <a:rPr lang="zh-TW" altLang="en-US" dirty="0"/>
+              <a:t> </a:t>
+            </a:r>
+            <a:r>
+              <a:rPr lang="en-US" altLang="zh-TW" dirty="0"/>
+              <a:t>cents</a:t>
+            </a:r>
+            <a:endParaRPr lang="zh-TW" altLang="en-US" dirty="0"/>
+          </a:p>
+        </p:txBody>
+      </p:sp>
+      <p:sp>
+        <p:nvSpPr>
+          <p:cNvPr id="4" name="投影片編號版面配置區 3"/>
+          <p:cNvSpPr>
+            <a:spLocks noGrp="1"/>
+          </p:cNvSpPr>
+          <p:nvPr>
+            <p:ph type="sldNum" sz="quarter" idx="5"/>
+          </p:nvPr>
+        </p:nvSpPr>
+        <p:spPr/>
+        <p:txBody>
+          <a:bodyPr/>
+          <a:lstStyle/>
+          <a:p>
+            <a:fld id="{E285D06F-C5C6-4EC7-8C43-7BC9C8305506}" type="slidenum">
+              <a:rPr lang="zh-TW" altLang="en-US" smtClean="0"/>
+              <a:t>12</a:t>
+            </a:fld>
+            <a:endParaRPr lang="zh-TW" altLang="en-US"/>
+          </a:p>
+        </p:txBody>
+      </p:sp>
+    </p:spTree>
+    <p:extLst>
+      <p:ext uri="{BB962C8B-B14F-4D97-AF65-F5344CB8AC3E}">
+        <p14:creationId xmlns:p14="http://schemas.microsoft.com/office/powerpoint/2010/main" val="1978316518"/>
       </p:ext>
     </p:extLst>
   </p:cSld>
@@ -642,6 +1049,81 @@
           <a:bodyPr/>
           <a:lstStyle/>
           <a:p>
+            <a:r>
+              <a:rPr lang="zh-TW" altLang="en-US" dirty="0"/>
+              <a:t>為何會選擇這個套件：</a:t>
+            </a:r>
+            <a:endParaRPr lang="en-US" altLang="zh-TW" dirty="0"/>
+          </a:p>
+          <a:p>
+            <a:r>
+              <a:rPr lang="en-US" altLang="zh-TW" dirty="0"/>
+              <a:t>1.</a:t>
+            </a:r>
+            <a:r>
+              <a:rPr lang="zh-TW" altLang="en-US" dirty="0"/>
+              <a:t> 免費開源</a:t>
+            </a:r>
+            <a:r>
+              <a:rPr lang="en-US" altLang="zh-TW" dirty="0"/>
+              <a:t>,</a:t>
+            </a:r>
+            <a:r>
+              <a:rPr lang="zh-TW" altLang="en-US" dirty="0"/>
+              <a:t>技術成熟</a:t>
+            </a:r>
+            <a:endParaRPr lang="en-US" altLang="zh-TW" dirty="0"/>
+          </a:p>
+          <a:p>
+            <a:r>
+              <a:rPr lang="en-US" altLang="zh-TW" dirty="0"/>
+              <a:t>2.</a:t>
+            </a:r>
+            <a:r>
+              <a:rPr lang="zh-TW" altLang="en-US" dirty="0"/>
+              <a:t> 幾乎能處理音訊處裡各種方面</a:t>
+            </a:r>
+            <a:endParaRPr lang="en-US" altLang="zh-TW" dirty="0"/>
+          </a:p>
+          <a:p>
+            <a:r>
+              <a:rPr lang="en-US" altLang="zh-TW" dirty="0"/>
+              <a:t>3.</a:t>
+            </a:r>
+            <a:r>
+              <a:rPr lang="zh-TW" altLang="en-US" dirty="0"/>
+              <a:t> </a:t>
+            </a:r>
+            <a:r>
+              <a:rPr lang="en-US" altLang="zh-TW" dirty="0"/>
+              <a:t>API</a:t>
+            </a:r>
+            <a:r>
+              <a:rPr lang="zh-TW" altLang="en-US" dirty="0"/>
+              <a:t>被封裝得很簡單</a:t>
+            </a:r>
+            <a:r>
+              <a:rPr lang="en-US" altLang="zh-TW" dirty="0"/>
+              <a:t>,</a:t>
+            </a:r>
+            <a:r>
+              <a:rPr lang="zh-TW" altLang="en-US" dirty="0"/>
+              <a:t>易上手</a:t>
+            </a:r>
+            <a:endParaRPr lang="en-US" altLang="zh-TW" dirty="0"/>
+          </a:p>
+          <a:p>
+            <a:r>
+              <a:rPr lang="en-US" altLang="zh-TW" dirty="0"/>
+              <a:t>4.</a:t>
+            </a:r>
+            <a:r>
+              <a:rPr lang="zh-TW" altLang="en-US" dirty="0"/>
+              <a:t> 教學文件詳細清楚</a:t>
+            </a:r>
+            <a:br>
+              <a:rPr lang="en-US" altLang="zh-TW" dirty="0"/>
+            </a:br>
             <a:r>
               <a:rPr lang="zh-TW" altLang="en-US" dirty="0"/>
               <a:t>用到：</a:t>
@@ -926,10 +1408,6 @@
               <a:rPr lang="en-US" altLang="zh-TW" dirty="0"/>
             </a:br>
             <a:r>
-              <a:rPr lang="zh-TW" altLang="en-US" dirty="0"/>
-              <a:t>簡單來說  </a:t>
-            </a:r>
-            <a:r>
               <a:rPr lang="en-US" altLang="zh-TW" dirty="0"/>
               <a:t>“</a:t>
             </a:r>
@@ -944,6 +1422,16 @@
             <a:r>
               <a:rPr lang="zh-TW" altLang="en-US" dirty="0"/>
               <a:t>是人耳感知力，物理學，數學之間和諧的結果，也使移調操作變得方便</a:t>
+            </a:r>
+            <a:endParaRPr lang="en-US" altLang="zh-TW" dirty="0"/>
+          </a:p>
+          <a:p>
+            <a:endParaRPr lang="en-US" altLang="zh-TW" dirty="0"/>
+          </a:p>
+          <a:p>
+            <a:r>
+              <a:rPr lang="zh-TW" altLang="en-US" dirty="0"/>
+              <a:t>音高只跟物體物理特性有關  跟能量無關</a:t>
             </a:r>
           </a:p>
         </p:txBody>
@@ -1334,7 +1822,7 @@
             </a:r>
             <a:r>
               <a:rPr lang="zh-TW" altLang="en-US" dirty="0"/>
-              <a:t>：緩衝區 可限制收音位元區塊大小</a:t>
+              <a:t>：緩衝區 可限制收音位元區塊大小 超過就會</a:t>
             </a:r>
             <a:endParaRPr lang="en-US" altLang="zh-TW" dirty="0"/>
           </a:p>
@@ -1548,7 +2036,7 @@
             </a:r>
             <a:r>
               <a:rPr lang="en-US" altLang="zh-TW" dirty="0"/>
-              <a:t>&lt;-50</a:t>
+              <a:t>&lt;-50(cent)</a:t>
             </a:r>
             <a:r>
               <a:rPr lang="zh-TW" altLang="en-US" dirty="0"/>
@@ -1579,7 +2067,7 @@
             </a:r>
             <a:r>
               <a:rPr lang="en-US" altLang="zh-TW" dirty="0"/>
-              <a:t>-50~50</a:t>
+              <a:t>-50~50(cent)</a:t>
             </a:r>
             <a:r>
               <a:rPr lang="zh-TW" altLang="en-US" dirty="0"/>
@@ -1782,52 +2270,31 @@
           <a:lstStyle/>
           <a:p>
             <a:r>
-              <a:rPr lang="en-US" altLang="zh-TW" dirty="0" err="1"/>
-              <a:t>WaveOutEvent</a:t>
-            </a:r>
-            <a:r>
               <a:rPr lang="zh-TW" altLang="en-US" dirty="0"/>
-              <a:t>：傳入放音設備</a:t>
-            </a:r>
-            <a:r>
+              <a:t>吉他調音</a:t>
+            </a:r>
+            <a:endParaRPr lang="en-US" altLang="zh-TW" dirty="0"/>
+          </a:p>
+          <a:p>
+            <a:r>
+              <a:rPr lang="zh-TW" altLang="en-US" dirty="0"/>
+              <a:t>一般市面上的調音器</a:t>
+            </a:r>
+            <a:br>
               <a:rPr lang="en-US" altLang="zh-TW" dirty="0"/>
-              <a:t>index</a:t>
-            </a:r>
+            </a:br>
             <a:r>
               <a:rPr lang="zh-TW" altLang="en-US" dirty="0"/>
-              <a:t>值建立放音物件</a:t>
-            </a:r>
-            <a:endParaRPr lang="en-US" altLang="zh-TW" dirty="0"/>
-          </a:p>
-          <a:p>
-            <a:r>
-              <a:rPr lang="en-US" altLang="zh-TW" dirty="0" err="1"/>
-              <a:t>SignalGenerator</a:t>
+              <a:t>準度大概都在</a:t>
+            </a:r>
+            <a:r>
+              <a:rPr lang="en-US" altLang="zh-TW" dirty="0"/>
+              <a:t>+-50</a:t>
             </a:r>
             <a:r>
               <a:rPr lang="zh-TW" altLang="en-US" dirty="0"/>
-              <a:t>：訊號產生器</a:t>
-            </a:r>
-            <a:r>
-              <a:rPr lang="en-US" altLang="zh-TW" dirty="0"/>
-              <a:t>, </a:t>
-            </a:r>
-            <a:r>
-              <a:rPr lang="zh-TW" altLang="en-US" dirty="0"/>
-              <a:t>設定波型</a:t>
-            </a:r>
-            <a:endParaRPr lang="en-US" altLang="zh-TW" dirty="0"/>
-          </a:p>
-          <a:p>
-            <a:r>
-              <a:rPr lang="en-US" altLang="zh-TW" dirty="0" err="1"/>
-              <a:t>fn</a:t>
-            </a:r>
-            <a:r>
-              <a:rPr lang="en-US" altLang="zh-TW" dirty="0"/>
-              <a:t> = f0 * 2^n</a:t>
-            </a:r>
-            <a:endParaRPr lang="zh-TW" altLang="en-US" dirty="0"/>
+              <a:t>音分以內</a:t>
+            </a:r>
           </a:p>
         </p:txBody>
       </p:sp>
@@ -1848,7 +2315,7 @@
           <a:p>
             <a:fld id="{E285D06F-C5C6-4EC7-8C43-7BC9C8305506}" type="slidenum">
               <a:rPr lang="zh-TW" altLang="en-US" smtClean="0"/>
-              <a:t>11</a:t>
+              <a:t>8</a:t>
             </a:fld>
             <a:endParaRPr lang="zh-TW" altLang="en-US"/>
           </a:p>
@@ -1857,7 +2324,7 @@
     </p:spTree>
     <p:extLst>
       <p:ext uri="{BB962C8B-B14F-4D97-AF65-F5344CB8AC3E}">
-        <p14:creationId xmlns:p14="http://schemas.microsoft.com/office/powerpoint/2010/main" val="3225734016"/>
+        <p14:creationId xmlns:p14="http://schemas.microsoft.com/office/powerpoint/2010/main" val="649395039"/>
       </p:ext>
     </p:extLst>
   </p:cSld>
@@ -1913,21 +2380,8 @@
           <a:p>
             <a:r>
               <a:rPr lang="zh-TW" altLang="en-US" dirty="0"/>
-              <a:t>音分範圍：</a:t>
-            </a:r>
-            <a:r>
-              <a:rPr lang="en-US" altLang="zh-TW" dirty="0"/>
-              <a:t>50</a:t>
-            </a:r>
-            <a:r>
-              <a:rPr lang="zh-TW" altLang="en-US" dirty="0"/>
-              <a:t> </a:t>
-            </a:r>
-            <a:r>
-              <a:rPr lang="en-US" altLang="zh-TW" dirty="0"/>
-              <a:t>cents</a:t>
-            </a:r>
-            <a:endParaRPr lang="zh-TW" altLang="en-US" dirty="0"/>
+              <a:t>安靜環境下的人聲</a:t>
+            </a:r>
           </a:p>
         </p:txBody>
       </p:sp>
@@ -1948,7 +2402,7 @@
           <a:p>
             <a:fld id="{E285D06F-C5C6-4EC7-8C43-7BC9C8305506}" type="slidenum">
               <a:rPr lang="zh-TW" altLang="en-US" smtClean="0"/>
-              <a:t>12</a:t>
+              <a:t>9</a:t>
             </a:fld>
             <a:endParaRPr lang="zh-TW" altLang="en-US"/>
           </a:p>
@@ -1957,7 +2411,7 @@
     </p:spTree>
     <p:extLst>
       <p:ext uri="{BB962C8B-B14F-4D97-AF65-F5344CB8AC3E}">
-        <p14:creationId xmlns:p14="http://schemas.microsoft.com/office/powerpoint/2010/main" val="1978316518"/>
+        <p14:creationId xmlns:p14="http://schemas.microsoft.com/office/powerpoint/2010/main" val="1236081061"/>
       </p:ext>
     </p:extLst>
   </p:cSld>
@@ -5396,7 +5850,7 @@
           <p:nvPr/>
         </p:nvPicPr>
         <p:blipFill>
-          <a:blip r:embed="rId2">
+          <a:blip r:embed="rId3">
             <a:extLst>
               <a:ext uri="{28A0092B-C50C-407E-A947-70E740481C1C}">
                 <a14:useLocalDpi xmlns:a14="http://schemas.microsoft.com/office/drawing/2010/main" val="0"/>
@@ -5540,7 +5994,7 @@
         </p:blipFill>
         <p:spPr>
           <a:xfrm>
-            <a:off x="322729" y="1341531"/>
+            <a:off x="369018" y="863066"/>
             <a:ext cx="5726982" cy="3630958"/>
           </a:xfrm>
           <a:prstGeom prst="rect">
@@ -5569,8 +6023,8 @@
         </p:blipFill>
         <p:spPr>
           <a:xfrm>
-            <a:off x="6218076" y="5125547"/>
-            <a:ext cx="5651195" cy="699528"/>
+            <a:off x="1551393" y="5050587"/>
+            <a:ext cx="9089214" cy="1125100"/>
           </a:xfrm>
           <a:prstGeom prst="rect">
             <a:avLst/>
@@ -7150,7 +7604,38 @@
                     <a:latin typeface="標楷體" panose="03000509000000000000" pitchFamily="65" charset="-120"/>
                     <a:ea typeface="標楷體" panose="03000509000000000000" pitchFamily="65" charset="-120"/>
                   </a:rPr>
-                  <a:t> 半音。</a:t>
+                  <a:t> 半音</a:t>
+                </a:r>
+                <a:r>
+                  <a:rPr lang="en-US" altLang="zh-TW" dirty="0">
+                    <a:latin typeface="Arial" panose="020B0604020202020204" pitchFamily="34" charset="0"/>
+                    <a:ea typeface="標楷體" panose="03000509000000000000" pitchFamily="65" charset="-120"/>
+                    <a:cs typeface="Arial" panose="020B0604020202020204" pitchFamily="34" charset="0"/>
+                  </a:rPr>
+                  <a:t>(</a:t>
+                </a:r>
+                <a:r>
+                  <a:rPr lang="zh-TW" altLang="en-US" dirty="0">
+                    <a:latin typeface="Arial" panose="020B0604020202020204" pitchFamily="34" charset="0"/>
+                    <a:ea typeface="標楷體" panose="03000509000000000000" pitchFamily="65" charset="-120"/>
+                    <a:cs typeface="Arial" panose="020B0604020202020204" pitchFamily="34" charset="0"/>
+                  </a:rPr>
+                  <a:t>十二平均律</a:t>
+                </a:r>
+                <a:r>
+                  <a:rPr lang="en-US" altLang="zh-TW" dirty="0">
+                    <a:latin typeface="Arial" panose="020B0604020202020204" pitchFamily="34" charset="0"/>
+                    <a:ea typeface="標楷體" panose="03000509000000000000" pitchFamily="65" charset="-120"/>
+                    <a:cs typeface="Arial" panose="020B0604020202020204" pitchFamily="34" charset="0"/>
+                  </a:rPr>
+                  <a:t>)</a:t>
+                </a:r>
+                <a:r>
+                  <a:rPr lang="zh-TW" altLang="en-US" dirty="0">
+                    <a:latin typeface="標楷體" panose="03000509000000000000" pitchFamily="65" charset="-120"/>
+                    <a:ea typeface="標楷體" panose="03000509000000000000" pitchFamily="65" charset="-120"/>
+                  </a:rPr>
+                  <a:t>。</a:t>
                 </a:r>
                 <a:endParaRPr lang="en-US" altLang="zh-TW" dirty="0">
                   <a:latin typeface="標楷體" panose="03000509000000000000" pitchFamily="65" charset="-120"/>
@@ -9443,7 +9928,7 @@
           </p:nvPr>
         </p:nvPicPr>
         <p:blipFill>
-          <a:blip r:embed="rId2">
+          <a:blip r:embed="rId3">
             <a:extLst>
               <a:ext uri="{28A0092B-C50C-407E-A947-70E740481C1C}">
                 <a14:useLocalDpi xmlns:a14="http://schemas.microsoft.com/office/drawing/2010/main" val="0"/>
@@ -9556,7 +10041,7 @@
           <p:nvPr/>
         </p:nvPicPr>
         <p:blipFill>
-          <a:blip r:embed="rId2">
+          <a:blip r:embed="rId3">
             <a:extLst>
               <a:ext uri="{28A0092B-C50C-407E-A947-70E740481C1C}">
                 <a14:useLocalDpi xmlns:a14="http://schemas.microsoft.com/office/drawing/2010/main" val="0"/>

--- a/1224報告_NAudio.pptx
+++ b/1224報告_NAudio.pptx
@@ -209,7 +209,7 @@
           <a:p>
             <a:fld id="{6413CF5F-F7FE-4C60-8BAA-96CD33FF18AC}" type="datetimeFigureOut">
               <a:rPr lang="zh-TW" altLang="en-US" smtClean="0"/>
-              <a:t>2025/1/2</a:t>
+              <a:t>2025/1/6</a:t>
             </a:fld>
             <a:endParaRPr lang="zh-TW" altLang="en-US"/>
           </a:p>
@@ -811,7 +811,18 @@
               <a:rPr lang="zh-TW" altLang="en-US" dirty="0"/>
               <a:t>設定波型</a:t>
             </a:r>
-            <a:endParaRPr lang="en-US" altLang="zh-TW" dirty="0"/>
+            <a:r>
+              <a:rPr lang="en-US" altLang="zh-TW" dirty="0"/>
+              <a:t>(Sin </a:t>
+            </a:r>
+            <a:r>
+              <a:rPr lang="zh-TW" altLang="en-US" dirty="0"/>
+              <a:t>正弦波</a:t>
+            </a:r>
+            <a:r>
+              <a:rPr lang="en-US" altLang="zh-TW" dirty="0"/>
+              <a:t>)</a:t>
+            </a:r>
           </a:p>
           <a:p>
             <a:r>
@@ -965,7 +976,67 @@
               <a:rPr lang="en-US" altLang="zh-TW" dirty="0"/>
               <a:t>cents</a:t>
             </a:r>
-            <a:endParaRPr lang="zh-TW" altLang="en-US" dirty="0"/>
+            <a:br>
+              <a:rPr lang="en-US" altLang="zh-TW" dirty="0"/>
+            </a:br>
+            <a:r>
+              <a:rPr lang="zh-TW" altLang="en-US" dirty="0"/>
+              <a:t>之後有閒暇時間的話想要做能夠隨機發出音頻</a:t>
+            </a:r>
+            <a:br>
+              <a:rPr lang="en-US" altLang="zh-TW" dirty="0"/>
+            </a:br>
+            <a:r>
+              <a:rPr lang="zh-TW" altLang="en-US" dirty="0"/>
+              <a:t>然後讓使用者猜是哪一個音</a:t>
+            </a:r>
+            <a:br>
+              <a:rPr lang="en-US" altLang="zh-TW" dirty="0"/>
+            </a:br>
+            <a:r>
+              <a:rPr lang="zh-TW" altLang="en-US" dirty="0"/>
+              <a:t>訓練音感用的應用</a:t>
+            </a:r>
+            <a:br>
+              <a:rPr lang="en-US" altLang="zh-TW" dirty="0"/>
+            </a:br>
+            <a:r>
+              <a:rPr lang="zh-TW" altLang="en-US" dirty="0"/>
+              <a:t>目前市面上有類似的</a:t>
+            </a:r>
+            <a:r>
+              <a:rPr lang="en-US" altLang="zh-TW" dirty="0"/>
+              <a:t>APP </a:t>
+            </a:r>
+            <a:br>
+              <a:rPr lang="en-US" altLang="zh-TW" dirty="0"/>
+            </a:br>
+            <a:r>
+              <a:rPr lang="zh-TW" altLang="en-US" dirty="0"/>
+              <a:t>但是通常答錯一次就會給提示了</a:t>
+            </a:r>
+            <a:br>
+              <a:rPr lang="en-US" altLang="zh-TW" dirty="0"/>
+            </a:br>
+            <a:r>
+              <a:rPr lang="zh-TW" altLang="en-US" dirty="0"/>
+              <a:t>所以我想做的是至少能讓人錯</a:t>
+            </a:r>
+            <a:r>
+              <a:rPr lang="en-US" altLang="zh-TW" dirty="0"/>
+              <a:t>2-3</a:t>
+            </a:r>
+            <a:r>
+              <a:rPr lang="zh-TW" altLang="en-US" dirty="0"/>
+              <a:t>次以後再給提示</a:t>
+            </a:r>
+            <a:br>
+              <a:rPr lang="en-US" altLang="zh-TW" dirty="0"/>
+            </a:br>
+            <a:r>
+              <a:rPr lang="zh-TW" altLang="en-US" dirty="0"/>
+              <a:t>慢慢提高準確度比較不會讓人勸退</a:t>
+            </a:r>
           </a:p>
         </p:txBody>
       </p:sp>
@@ -2568,7 +2639,7 @@
           <a:p>
             <a:fld id="{31822A52-CB54-4445-AC34-F501DA2D4712}" type="datetimeFigureOut">
               <a:rPr lang="zh-TW" altLang="en-US" smtClean="0"/>
-              <a:t>2025/1/2</a:t>
+              <a:t>2025/1/6</a:t>
             </a:fld>
             <a:endParaRPr lang="zh-TW" altLang="en-US"/>
           </a:p>
@@ -2766,7 +2837,7 @@
           <a:p>
             <a:fld id="{31822A52-CB54-4445-AC34-F501DA2D4712}" type="datetimeFigureOut">
               <a:rPr lang="zh-TW" altLang="en-US" smtClean="0"/>
-              <a:t>2025/1/2</a:t>
+              <a:t>2025/1/6</a:t>
             </a:fld>
             <a:endParaRPr lang="zh-TW" altLang="en-US"/>
           </a:p>
@@ -2974,7 +3045,7 @@
           <a:p>
             <a:fld id="{31822A52-CB54-4445-AC34-F501DA2D4712}" type="datetimeFigureOut">
               <a:rPr lang="zh-TW" altLang="en-US" smtClean="0"/>
-              <a:t>2025/1/2</a:t>
+              <a:t>2025/1/6</a:t>
             </a:fld>
             <a:endParaRPr lang="zh-TW" altLang="en-US"/>
           </a:p>
@@ -3172,7 +3243,7 @@
           <a:p>
             <a:fld id="{31822A52-CB54-4445-AC34-F501DA2D4712}" type="datetimeFigureOut">
               <a:rPr lang="zh-TW" altLang="en-US" smtClean="0"/>
-              <a:t>2025/1/2</a:t>
+              <a:t>2025/1/6</a:t>
             </a:fld>
             <a:endParaRPr lang="zh-TW" altLang="en-US"/>
           </a:p>
@@ -3447,7 +3518,7 @@
           <a:p>
             <a:fld id="{31822A52-CB54-4445-AC34-F501DA2D4712}" type="datetimeFigureOut">
               <a:rPr lang="zh-TW" altLang="en-US" smtClean="0"/>
-              <a:t>2025/1/2</a:t>
+              <a:t>2025/1/6</a:t>
             </a:fld>
             <a:endParaRPr lang="zh-TW" altLang="en-US"/>
           </a:p>
@@ -3712,7 +3783,7 @@
           <a:p>
             <a:fld id="{31822A52-CB54-4445-AC34-F501DA2D4712}" type="datetimeFigureOut">
               <a:rPr lang="zh-TW" altLang="en-US" smtClean="0"/>
-              <a:t>2025/1/2</a:t>
+              <a:t>2025/1/6</a:t>
             </a:fld>
             <a:endParaRPr lang="zh-TW" altLang="en-US"/>
           </a:p>
@@ -4124,7 +4195,7 @@
           <a:p>
             <a:fld id="{31822A52-CB54-4445-AC34-F501DA2D4712}" type="datetimeFigureOut">
               <a:rPr lang="zh-TW" altLang="en-US" smtClean="0"/>
-              <a:t>2025/1/2</a:t>
+              <a:t>2025/1/6</a:t>
             </a:fld>
             <a:endParaRPr lang="zh-TW" altLang="en-US"/>
           </a:p>
@@ -4265,7 +4336,7 @@
           <a:p>
             <a:fld id="{31822A52-CB54-4445-AC34-F501DA2D4712}" type="datetimeFigureOut">
               <a:rPr lang="zh-TW" altLang="en-US" smtClean="0"/>
-              <a:t>2025/1/2</a:t>
+              <a:t>2025/1/6</a:t>
             </a:fld>
             <a:endParaRPr lang="zh-TW" altLang="en-US"/>
           </a:p>
@@ -4378,7 +4449,7 @@
           <a:p>
             <a:fld id="{31822A52-CB54-4445-AC34-F501DA2D4712}" type="datetimeFigureOut">
               <a:rPr lang="zh-TW" altLang="en-US" smtClean="0"/>
-              <a:t>2025/1/2</a:t>
+              <a:t>2025/1/6</a:t>
             </a:fld>
             <a:endParaRPr lang="zh-TW" altLang="en-US"/>
           </a:p>
@@ -4689,7 +4760,7 @@
           <a:p>
             <a:fld id="{31822A52-CB54-4445-AC34-F501DA2D4712}" type="datetimeFigureOut">
               <a:rPr lang="zh-TW" altLang="en-US" smtClean="0"/>
-              <a:t>2025/1/2</a:t>
+              <a:t>2025/1/6</a:t>
             </a:fld>
             <a:endParaRPr lang="zh-TW" altLang="en-US"/>
           </a:p>
@@ -4977,7 +5048,7 @@
           <a:p>
             <a:fld id="{31822A52-CB54-4445-AC34-F501DA2D4712}" type="datetimeFigureOut">
               <a:rPr lang="zh-TW" altLang="en-US" smtClean="0"/>
-              <a:t>2025/1/2</a:t>
+              <a:t>2025/1/6</a:t>
             </a:fld>
             <a:endParaRPr lang="zh-TW" altLang="en-US"/>
           </a:p>
@@ -5218,7 +5289,7 @@
           <a:p>
             <a:fld id="{31822A52-CB54-4445-AC34-F501DA2D4712}" type="datetimeFigureOut">
               <a:rPr lang="zh-TW" altLang="en-US" smtClean="0"/>
-              <a:t>2025/1/2</a:t>
+              <a:t>2025/1/6</a:t>
             </a:fld>
             <a:endParaRPr lang="zh-TW" altLang="en-US"/>
           </a:p>
@@ -5914,10 +5985,10 @@
       </p:grpSpPr>
       <p:pic>
         <p:nvPicPr>
-          <p:cNvPr id="8" name="圖片 7">
+          <p:cNvPr id="14" name="圖片 13">
             <a:extLst>
               <a:ext uri="{FF2B5EF4-FFF2-40B4-BE49-F238E27FC236}">
-                <a16:creationId xmlns:a16="http://schemas.microsoft.com/office/drawing/2014/main" id="{F1B410B8-6FEF-47EF-BD52-A35DFD3F835B}"/>
+                <a16:creationId xmlns:a16="http://schemas.microsoft.com/office/drawing/2014/main" id="{AFC2DC58-B2FE-46BE-838F-28A43E645454}"/>
               </a:ext>
             </a:extLst>
           </p:cNvPr>
@@ -5926,16 +5997,15 @@
           </p:cNvPicPr>
           <p:nvPr/>
         </p:nvPicPr>
-        <p:blipFill>
+        <p:blipFill rotWithShape="1">
           <a:blip r:embed="rId3"/>
-          <a:stretch>
-            <a:fillRect/>
-          </a:stretch>
+          <a:srcRect l="6274" t="26794" r="1241" b="8214"/>
+          <a:stretch/>
         </p:blipFill>
         <p:spPr>
           <a:xfrm>
-            <a:off x="6218076" y="2353797"/>
-            <a:ext cx="5379874" cy="2455722"/>
+            <a:off x="1551393" y="4944261"/>
+            <a:ext cx="9089214" cy="1125100"/>
           </a:xfrm>
           <a:prstGeom prst="rect">
             <a:avLst/>
@@ -5944,10 +6014,10 @@
       </p:pic>
       <p:pic>
         <p:nvPicPr>
-          <p:cNvPr id="10" name="圖片 9">
+          <p:cNvPr id="3" name="圖片 2">
             <a:extLst>
               <a:ext uri="{FF2B5EF4-FFF2-40B4-BE49-F238E27FC236}">
-                <a16:creationId xmlns:a16="http://schemas.microsoft.com/office/drawing/2014/main" id="{9E01122A-E924-4D43-B69E-8637B1D79746}"/>
+                <a16:creationId xmlns:a16="http://schemas.microsoft.com/office/drawing/2014/main" id="{FD0D272F-B8C4-456D-A0CB-69A50590F889}"/>
               </a:ext>
             </a:extLst>
           </p:cNvPr>
@@ -5964,8 +6034,8 @@
         </p:blipFill>
         <p:spPr>
           <a:xfrm>
-            <a:off x="6218076" y="570333"/>
-            <a:ext cx="5379874" cy="1542396"/>
+            <a:off x="6441361" y="2138023"/>
+            <a:ext cx="5379874" cy="2594750"/>
           </a:xfrm>
           <a:prstGeom prst="rect">
             <a:avLst/>
@@ -5974,10 +6044,10 @@
       </p:pic>
       <p:pic>
         <p:nvPicPr>
-          <p:cNvPr id="12" name="圖片 11">
+          <p:cNvPr id="5" name="圖片 4">
             <a:extLst>
               <a:ext uri="{FF2B5EF4-FFF2-40B4-BE49-F238E27FC236}">
-                <a16:creationId xmlns:a16="http://schemas.microsoft.com/office/drawing/2014/main" id="{758FBB89-4181-4E04-96F1-61ED03C39BDA}"/>
+                <a16:creationId xmlns:a16="http://schemas.microsoft.com/office/drawing/2014/main" id="{03C69151-9D1E-4B87-8951-001959C10011}"/>
               </a:ext>
             </a:extLst>
           </p:cNvPr>
@@ -5994,8 +6064,8 @@
         </p:blipFill>
         <p:spPr>
           <a:xfrm>
-            <a:off x="369018" y="863066"/>
-            <a:ext cx="5726982" cy="3630958"/>
+            <a:off x="363388" y="710507"/>
+            <a:ext cx="5955897" cy="3787064"/>
           </a:xfrm>
           <a:prstGeom prst="rect">
             <a:avLst/>
@@ -6004,10 +6074,10 @@
       </p:pic>
       <p:pic>
         <p:nvPicPr>
-          <p:cNvPr id="14" name="圖片 13">
+          <p:cNvPr id="11" name="圖片 10">
             <a:extLst>
               <a:ext uri="{FF2B5EF4-FFF2-40B4-BE49-F238E27FC236}">
-                <a16:creationId xmlns:a16="http://schemas.microsoft.com/office/drawing/2014/main" id="{AFC2DC58-B2FE-46BE-838F-28A43E645454}"/>
+                <a16:creationId xmlns:a16="http://schemas.microsoft.com/office/drawing/2014/main" id="{448F4ED9-4F9B-4F61-B4D4-08D78AE7E60E}"/>
               </a:ext>
             </a:extLst>
           </p:cNvPr>
@@ -6016,15 +6086,16 @@
           </p:cNvPicPr>
           <p:nvPr/>
         </p:nvPicPr>
-        <p:blipFill rotWithShape="1">
+        <p:blipFill>
           <a:blip r:embed="rId6"/>
-          <a:srcRect l="6274" t="26794" r="1241" b="8214"/>
-          <a:stretch/>
+          <a:stretch>
+            <a:fillRect/>
+          </a:stretch>
         </p:blipFill>
         <p:spPr>
           <a:xfrm>
-            <a:off x="1551393" y="5050587"/>
-            <a:ext cx="9089214" cy="1125100"/>
+            <a:off x="6441361" y="710507"/>
+            <a:ext cx="5379874" cy="1283937"/>
           </a:xfrm>
           <a:prstGeom prst="rect">
             <a:avLst/>
@@ -7394,7 +7465,12 @@
                 <p:ph idx="1"/>
               </p:nvPr>
             </p:nvSpPr>
-            <p:spPr/>
+            <p:spPr>
+              <a:xfrm>
+                <a:off x="838200" y="1690688"/>
+                <a:ext cx="10515600" cy="4351338"/>
+              </a:xfrm>
+            </p:spPr>
             <p:txBody>
               <a:bodyPr>
                 <a:normAutofit/>
@@ -7569,7 +7645,7 @@
                     <a:ea typeface="標楷體" panose="03000509000000000000" pitchFamily="65" charset="-120"/>
                     <a:cs typeface="Arial" panose="020B0604020202020204" pitchFamily="34" charset="0"/>
                   </a:rPr>
-                  <a:t> 推算出整個線性音高空間</a:t>
+                  <a:t> 推算出整個指數性音高空間</a:t>
                 </a:r>
                 <a:r>
                   <a:rPr lang="zh-TW" altLang="en-US" dirty="0">
@@ -7589,7 +7665,7 @@
                     <a:latin typeface="標楷體" panose="03000509000000000000" pitchFamily="65" charset="-120"/>
                     <a:ea typeface="標楷體" panose="03000509000000000000" pitchFamily="65" charset="-120"/>
                   </a:rPr>
-                  <a:t>每個八度大小定義為 </a:t>
+                  <a:t>一個八度定義為 </a:t>
                 </a:r>
                 <a:r>
                   <a:rPr lang="en-US" altLang="zh-TW" dirty="0">
@@ -7637,32 +7713,32 @@
                   </a:rPr>
                   <a:t>。</a:t>
                 </a:r>
-                <a:endParaRPr lang="en-US" altLang="zh-TW" dirty="0">
-                  <a:latin typeface="標楷體" panose="03000509000000000000" pitchFamily="65" charset="-120"/>
-                  <a:ea typeface="標楷體" panose="03000509000000000000" pitchFamily="65" charset="-120"/>
-                </a:endParaRPr>
-              </a:p>
-              <a:p>
+                <a:br>
+                  <a:rPr lang="en-US" altLang="zh-TW" dirty="0">
+                    <a:latin typeface="標楷體" panose="03000509000000000000" pitchFamily="65" charset="-120"/>
+                    <a:ea typeface="標楷體" panose="03000509000000000000" pitchFamily="65" charset="-120"/>
+                  </a:rPr>
+                </a:br>
                 <a:r>
                   <a:rPr lang="zh-TW" altLang="en-US" dirty="0">
                     <a:latin typeface="標楷體" panose="03000509000000000000" pitchFamily="65" charset="-120"/>
                     <a:ea typeface="標楷體" panose="03000509000000000000" pitchFamily="65" charset="-120"/>
                   </a:rPr>
-                  <a:t>兩個半音相當於一個音程。</a:t>
+                  <a:t>兩個半音定義為一個音程。</a:t>
                 </a:r>
-                <a:endParaRPr lang="en-US" altLang="zh-TW" dirty="0">
-                  <a:latin typeface="標楷體" panose="03000509000000000000" pitchFamily="65" charset="-120"/>
-                  <a:ea typeface="標楷體" panose="03000509000000000000" pitchFamily="65" charset="-120"/>
-                </a:endParaRPr>
-              </a:p>
-              <a:p>
+                <a:br>
+                  <a:rPr lang="en-US" altLang="zh-TW" dirty="0">
+                    <a:latin typeface="標楷體" panose="03000509000000000000" pitchFamily="65" charset="-120"/>
+                    <a:ea typeface="標楷體" panose="03000509000000000000" pitchFamily="65" charset="-120"/>
+                  </a:rPr>
+                </a:br>
                 <a:r>
                   <a:rPr lang="zh-TW" altLang="en-US" dirty="0">
                     <a:latin typeface="Arial" panose="020B0604020202020204" pitchFamily="34" charset="0"/>
                     <a:ea typeface="標楷體" panose="03000509000000000000" pitchFamily="65" charset="-120"/>
                     <a:cs typeface="Arial" panose="020B0604020202020204" pitchFamily="34" charset="0"/>
                   </a:rPr>
-                  <a:t>定義一個八度音程為</a:t>
+                  <a:t>一個八度音程定義為</a:t>
                 </a:r>
                 <a:r>
                   <a:rPr lang="en-US" altLang="zh-TW" dirty="0">
@@ -7904,6 +7980,10 @@
               </p:nvPr>
             </p:nvSpPr>
             <p:spPr>
+              <a:xfrm>
+                <a:off x="838200" y="1690688"/>
+                <a:ext cx="10515600" cy="4351338"/>
+              </a:xfrm>
               <a:blipFill>
                 <a:blip r:embed="rId3"/>
                 <a:stretch>
@@ -7942,7 +8022,7 @@
             </p:nvSpPr>
             <p:spPr>
               <a:xfrm>
-                <a:off x="1419426" y="5205268"/>
+                <a:off x="1419426" y="4933393"/>
                 <a:ext cx="4676574" cy="561885"/>
               </a:xfrm>
               <a:prstGeom prst="rect">
@@ -8072,7 +8152,7 @@
             </p:nvSpPr>
             <p:spPr>
               <a:xfrm>
-                <a:off x="1419426" y="5205268"/>
+                <a:off x="1419426" y="4933393"/>
                 <a:ext cx="4676574" cy="561885"/>
               </a:xfrm>
               <a:prstGeom prst="rect">
@@ -8116,7 +8196,7 @@
             </p:nvSpPr>
             <p:spPr>
               <a:xfrm>
-                <a:off x="6890317" y="5071290"/>
+                <a:off x="6890317" y="4837371"/>
                 <a:ext cx="3030657" cy="829843"/>
               </a:xfrm>
               <a:prstGeom prst="rect">
@@ -8304,7 +8384,7 @@
             </p:nvSpPr>
             <p:spPr>
               <a:xfrm>
-                <a:off x="6890317" y="5071290"/>
+                <a:off x="6890317" y="4837371"/>
                 <a:ext cx="3030657" cy="829843"/>
               </a:xfrm>
               <a:prstGeom prst="rect">
@@ -8391,7 +8471,7 @@
         </p:blipFill>
         <p:spPr bwMode="auto">
           <a:xfrm>
-            <a:off x="6409830" y="2094166"/>
+            <a:off x="6441728" y="3272367"/>
             <a:ext cx="5615946" cy="1513583"/>
           </a:xfrm>
           <a:prstGeom prst="rect">
@@ -8409,8 +8489,8 @@
           </a:extLst>
         </p:spPr>
       </p:pic>
-      <mc:AlternateContent xmlns:mc="http://schemas.openxmlformats.org/markup-compatibility/2006" xmlns:a14="http://schemas.microsoft.com/office/drawing/2010/main">
-        <mc:Choice Requires="a14">
+      <mc:AlternateContent xmlns:mc="http://schemas.openxmlformats.org/markup-compatibility/2006">
+        <mc:Choice xmlns:a14="http://schemas.microsoft.com/office/drawing/2010/main" Requires="a14">
           <p:sp>
             <p:nvSpPr>
               <p:cNvPr id="8" name="文字方塊 7">
@@ -8425,7 +8505,7 @@
             </p:nvSpPr>
             <p:spPr>
               <a:xfrm>
-                <a:off x="7052210" y="1273102"/>
+                <a:off x="7084108" y="2451303"/>
                 <a:ext cx="4512262" cy="369332"/>
               </a:xfrm>
               <a:prstGeom prst="rect">
@@ -8494,7 +8574,7 @@
             </p:txBody>
           </p:sp>
         </mc:Choice>
-        <mc:Fallback xmlns="">
+        <mc:Fallback>
           <p:sp>
             <p:nvSpPr>
               <p:cNvPr id="8" name="文字方塊 7">
@@ -8511,7 +8591,7 @@
             </p:nvSpPr>
             <p:spPr>
               <a:xfrm>
-                <a:off x="7052210" y="1273102"/>
+                <a:off x="7084108" y="2451303"/>
                 <a:ext cx="4512262" cy="369332"/>
               </a:xfrm>
               <a:prstGeom prst="rect">
@@ -8520,7 +8600,7 @@
               <a:blipFill>
                 <a:blip r:embed="rId4"/>
                 <a:stretch>
-                  <a:fillRect l="-2432" t="-28333" r="-676" b="-50000"/>
+                  <a:fillRect l="-2432" t="-26230" r="-811" b="-49180"/>
                 </a:stretch>
               </a:blipFill>
             </p:spPr>
@@ -8539,8 +8619,8 @@
           </p:sp>
         </mc:Fallback>
       </mc:AlternateContent>
-      <mc:AlternateContent xmlns:mc="http://schemas.openxmlformats.org/markup-compatibility/2006" xmlns:a14="http://schemas.microsoft.com/office/drawing/2010/main">
-        <mc:Choice Requires="a14">
+      <mc:AlternateContent xmlns:mc="http://schemas.openxmlformats.org/markup-compatibility/2006">
+        <mc:Choice xmlns:a14="http://schemas.microsoft.com/office/drawing/2010/main" Requires="a14">
           <p:sp>
             <p:nvSpPr>
               <p:cNvPr id="10" name="文字方塊 9">
@@ -8555,7 +8635,7 @@
             </p:nvSpPr>
             <p:spPr>
               <a:xfrm>
-                <a:off x="7052208" y="857556"/>
+                <a:off x="7084106" y="2035757"/>
                 <a:ext cx="4512263" cy="369332"/>
               </a:xfrm>
               <a:prstGeom prst="rect">
@@ -8630,7 +8710,7 @@
             </p:txBody>
           </p:sp>
         </mc:Choice>
-        <mc:Fallback xmlns="">
+        <mc:Fallback>
           <p:sp>
             <p:nvSpPr>
               <p:cNvPr id="10" name="文字方塊 9">
@@ -8647,7 +8727,7 @@
             </p:nvSpPr>
             <p:spPr>
               <a:xfrm>
-                <a:off x="7052208" y="857556"/>
+                <a:off x="7084106" y="2035757"/>
                 <a:ext cx="4512263" cy="369332"/>
               </a:xfrm>
               <a:prstGeom prst="rect">
@@ -8656,7 +8736,7 @@
               <a:blipFill>
                 <a:blip r:embed="rId5"/>
                 <a:stretch>
-                  <a:fillRect l="-2432" t="-28333" r="-1486" b="-50000"/>
+                  <a:fillRect l="-2297" t="-27869" r="-1622" b="-47541"/>
                 </a:stretch>
               </a:blipFill>
             </p:spPr>
@@ -8677,10 +8757,10 @@
       </mc:AlternateContent>
       <p:pic>
         <p:nvPicPr>
-          <p:cNvPr id="11" name="圖片 10">
+          <p:cNvPr id="9" name="圖片 8">
             <a:extLst>
               <a:ext uri="{FF2B5EF4-FFF2-40B4-BE49-F238E27FC236}">
-                <a16:creationId xmlns:a16="http://schemas.microsoft.com/office/drawing/2014/main" id="{E187AC0F-1A69-41D0-8304-16DE2582C26D}"/>
+                <a16:creationId xmlns:a16="http://schemas.microsoft.com/office/drawing/2014/main" id="{5B4B8FE9-ECDB-427D-9AEE-E216B3F333A7}"/>
               </a:ext>
             </a:extLst>
           </p:cNvPr>
@@ -8690,81 +8770,15 @@
           <p:nvPr/>
         </p:nvPicPr>
         <p:blipFill>
-          <a:blip r:embed="rId6">
-            <a:extLst>
-              <a:ext uri="{28A0092B-C50C-407E-A947-70E740481C1C}">
-                <a14:useLocalDpi xmlns:a14="http://schemas.microsoft.com/office/drawing/2010/main" val="0"/>
-              </a:ext>
-            </a:extLst>
-          </a:blip>
+          <a:blip r:embed="rId6"/>
           <a:stretch>
             <a:fillRect/>
           </a:stretch>
         </p:blipFill>
         <p:spPr>
           <a:xfrm>
-            <a:off x="1836501" y="4484071"/>
-            <a:ext cx="8518998" cy="2373929"/>
-          </a:xfrm>
-          <a:prstGeom prst="rect">
-            <a:avLst/>
-          </a:prstGeom>
-        </p:spPr>
-      </p:pic>
-      <p:pic>
-        <p:nvPicPr>
-          <p:cNvPr id="9" name="圖片 8">
-            <a:extLst>
-              <a:ext uri="{FF2B5EF4-FFF2-40B4-BE49-F238E27FC236}">
-                <a16:creationId xmlns:a16="http://schemas.microsoft.com/office/drawing/2014/main" id="{5B4B8FE9-ECDB-427D-9AEE-E216B3F333A7}"/>
-              </a:ext>
-            </a:extLst>
-          </p:cNvPr>
-          <p:cNvPicPr>
-            <a:picLocks noChangeAspect="1"/>
-          </p:cNvPicPr>
-          <p:nvPr/>
-        </p:nvPicPr>
-        <p:blipFill>
-          <a:blip r:embed="rId7"/>
-          <a:stretch>
-            <a:fillRect/>
-          </a:stretch>
-        </p:blipFill>
-        <p:spPr>
-          <a:xfrm>
-            <a:off x="346721" y="110573"/>
+            <a:off x="378619" y="1132141"/>
             <a:ext cx="6266161" cy="4280452"/>
-          </a:xfrm>
-          <a:prstGeom prst="rect">
-            <a:avLst/>
-          </a:prstGeom>
-        </p:spPr>
-      </p:pic>
-      <p:pic>
-        <p:nvPicPr>
-          <p:cNvPr id="7" name="圖片 6">
-            <a:extLst>
-              <a:ext uri="{FF2B5EF4-FFF2-40B4-BE49-F238E27FC236}">
-                <a16:creationId xmlns:a16="http://schemas.microsoft.com/office/drawing/2014/main" id="{BA6D1106-09D6-4430-9986-D99F45EE46FA}"/>
-              </a:ext>
-            </a:extLst>
-          </p:cNvPr>
-          <p:cNvPicPr>
-            <a:picLocks noChangeAspect="1"/>
-          </p:cNvPicPr>
-          <p:nvPr/>
-        </p:nvPicPr>
-        <p:blipFill>
-          <a:blip r:embed="rId8"/>
-          <a:stretch>
-            <a:fillRect/>
-          </a:stretch>
-        </p:blipFill>
-        <p:spPr>
-          <a:xfrm>
-            <a:off x="1506559" y="421778"/>
-            <a:ext cx="9178882" cy="5163120"/>
           </a:xfrm>
           <a:prstGeom prst="rect">
             <a:avLst/>
@@ -8781,127 +8795,6 @@
   <p:clrMapOvr>
     <a:masterClrMapping/>
   </p:clrMapOvr>
-  <p:timing>
-    <p:tnLst>
-      <p:par>
-        <p:cTn id="1" dur="indefinite" restart="never" nodeType="tmRoot">
-          <p:childTnLst>
-            <p:seq concurrent="1" nextAc="seek">
-              <p:cTn id="2" dur="indefinite" nodeType="mainSeq">
-                <p:childTnLst>
-                  <p:par>
-                    <p:cTn id="3" fill="hold">
-                      <p:stCondLst>
-                        <p:cond delay="indefinite"/>
-                      </p:stCondLst>
-                      <p:childTnLst>
-                        <p:par>
-                          <p:cTn id="4" fill="hold">
-                            <p:stCondLst>
-                              <p:cond delay="0"/>
-                            </p:stCondLst>
-                            <p:childTnLst>
-                              <p:par>
-                                <p:cTn id="5" presetID="2" presetClass="entr" presetSubtype="4" fill="hold" nodeType="clickEffect">
-                                  <p:stCondLst>
-                                    <p:cond delay="0"/>
-                                  </p:stCondLst>
-                                  <p:childTnLst>
-                                    <p:set>
-                                      <p:cBhvr>
-                                        <p:cTn id="6" dur="1" fill="hold">
-                                          <p:stCondLst>
-                                            <p:cond delay="0"/>
-                                          </p:stCondLst>
-                                        </p:cTn>
-                                        <p:tgtEl>
-                                          <p:spTgt spid="7"/>
-                                        </p:tgtEl>
-                                        <p:attrNameLst>
-                                          <p:attrName>style.visibility</p:attrName>
-                                        </p:attrNameLst>
-                                      </p:cBhvr>
-                                      <p:to>
-                                        <p:strVal val="visible"/>
-                                      </p:to>
-                                    </p:set>
-                                    <p:anim calcmode="lin" valueType="num">
-                                      <p:cBhvr additive="base">
-                                        <p:cTn id="7" dur="500" fill="hold"/>
-                                        <p:tgtEl>
-                                          <p:spTgt spid="7"/>
-                                        </p:tgtEl>
-                                        <p:attrNameLst>
-                                          <p:attrName>ppt_x</p:attrName>
-                                        </p:attrNameLst>
-                                      </p:cBhvr>
-                                      <p:tavLst>
-                                        <p:tav tm="0">
-                                          <p:val>
-                                            <p:strVal val="#ppt_x"/>
-                                          </p:val>
-                                        </p:tav>
-                                        <p:tav tm="100000">
-                                          <p:val>
-                                            <p:strVal val="#ppt_x"/>
-                                          </p:val>
-                                        </p:tav>
-                                      </p:tavLst>
-                                    </p:anim>
-                                    <p:anim calcmode="lin" valueType="num">
-                                      <p:cBhvr additive="base">
-                                        <p:cTn id="8" dur="500" fill="hold"/>
-                                        <p:tgtEl>
-                                          <p:spTgt spid="7"/>
-                                        </p:tgtEl>
-                                        <p:attrNameLst>
-                                          <p:attrName>ppt_y</p:attrName>
-                                        </p:attrNameLst>
-                                      </p:cBhvr>
-                                      <p:tavLst>
-                                        <p:tav tm="0">
-                                          <p:val>
-                                            <p:strVal val="1+#ppt_h/2"/>
-                                          </p:val>
-                                        </p:tav>
-                                        <p:tav tm="100000">
-                                          <p:val>
-                                            <p:strVal val="#ppt_y"/>
-                                          </p:val>
-                                        </p:tav>
-                                      </p:tavLst>
-                                    </p:anim>
-                                  </p:childTnLst>
-                                </p:cTn>
-                              </p:par>
-                            </p:childTnLst>
-                          </p:cTn>
-                        </p:par>
-                      </p:childTnLst>
-                    </p:cTn>
-                  </p:par>
-                </p:childTnLst>
-              </p:cTn>
-              <p:prevCondLst>
-                <p:cond evt="onPrev" delay="0">
-                  <p:tgtEl>
-                    <p:sldTgt/>
-                  </p:tgtEl>
-                </p:cond>
-              </p:prevCondLst>
-              <p:nextCondLst>
-                <p:cond evt="onNext" delay="0">
-                  <p:tgtEl>
-                    <p:sldTgt/>
-                  </p:tgtEl>
-                </p:cond>
-              </p:nextCondLst>
-            </p:seq>
-          </p:childTnLst>
-        </p:cTn>
-      </p:par>
-    </p:tnLst>
-  </p:timing>
 </p:sld>
 </file>
 
@@ -9353,10 +9246,10 @@
       </p:sp>
       <p:pic>
         <p:nvPicPr>
-          <p:cNvPr id="15" name="圖片 14">
+          <p:cNvPr id="4" name="圖片 3">
             <a:extLst>
               <a:ext uri="{FF2B5EF4-FFF2-40B4-BE49-F238E27FC236}">
-                <a16:creationId xmlns:a16="http://schemas.microsoft.com/office/drawing/2014/main" id="{4BCA8551-CAFF-4993-9762-DB3EAFEE5A01}"/>
+                <a16:creationId xmlns:a16="http://schemas.microsoft.com/office/drawing/2014/main" id="{1B2119D0-3CF2-4D72-97B1-7EEF958C2188}"/>
               </a:ext>
             </a:extLst>
           </p:cNvPr>
@@ -9365,15 +9258,16 @@
           </p:cNvPicPr>
           <p:nvPr/>
         </p:nvPicPr>
-        <p:blipFill rotWithShape="1">
+        <p:blipFill>
           <a:blip r:embed="rId3"/>
-          <a:srcRect t="7490"/>
-          <a:stretch/>
+          <a:stretch>
+            <a:fillRect/>
+          </a:stretch>
         </p:blipFill>
         <p:spPr>
           <a:xfrm>
-            <a:off x="2340522" y="1918738"/>
-            <a:ext cx="7510956" cy="4605545"/>
+            <a:off x="557172" y="293409"/>
+            <a:ext cx="11077656" cy="1562111"/>
           </a:xfrm>
           <a:prstGeom prst="rect">
             <a:avLst/>
@@ -9382,10 +9276,10 @@
       </p:pic>
       <p:pic>
         <p:nvPicPr>
-          <p:cNvPr id="4" name="圖片 3">
+          <p:cNvPr id="7" name="圖片 6">
             <a:extLst>
               <a:ext uri="{FF2B5EF4-FFF2-40B4-BE49-F238E27FC236}">
-                <a16:creationId xmlns:a16="http://schemas.microsoft.com/office/drawing/2014/main" id="{1B2119D0-3CF2-4D72-97B1-7EEF958C2188}"/>
+                <a16:creationId xmlns:a16="http://schemas.microsoft.com/office/drawing/2014/main" id="{FD3C844D-8504-4409-9D2E-2D694F57F39C}"/>
               </a:ext>
             </a:extLst>
           </p:cNvPr>
@@ -9402,8 +9296,8 @@
         </p:blipFill>
         <p:spPr>
           <a:xfrm>
-            <a:off x="557172" y="293409"/>
-            <a:ext cx="11077656" cy="1562111"/>
+            <a:off x="2034599" y="1927236"/>
+            <a:ext cx="8122801" cy="4540769"/>
           </a:xfrm>
           <a:prstGeom prst="rect">
             <a:avLst/>
@@ -9778,8 +9672,8 @@
         </p:nvCxnSpPr>
         <p:spPr>
           <a:xfrm flipH="1">
-            <a:off x="7442791" y="1318437"/>
-            <a:ext cx="1839435" cy="1493996"/>
+            <a:off x="7378995" y="1318437"/>
+            <a:ext cx="1903232" cy="1493996"/>
           </a:xfrm>
           <a:prstGeom prst="straightConnector1">
             <a:avLst/>

--- a/1224報告_NAudio.pptx
+++ b/1224報告_NAudio.pptx
@@ -966,7 +966,7 @@
             </a:r>
             <a:r>
               <a:rPr lang="en-US" altLang="zh-TW" dirty="0"/>
-              <a:t>50</a:t>
+              <a:t>5</a:t>
             </a:r>
             <a:r>
               <a:rPr lang="zh-TW" altLang="en-US" dirty="0"/>
@@ -2360,11 +2360,38 @@
             </a:r>
             <a:r>
               <a:rPr lang="en-US" altLang="zh-TW" dirty="0"/>
-              <a:t>+-50</a:t>
-            </a:r>
-            <a:r>
-              <a:rPr lang="zh-TW" altLang="en-US" dirty="0"/>
-              <a:t>音分以內</a:t>
+              <a:t>+-5~10</a:t>
+            </a:r>
+            <a:r>
+              <a:rPr lang="zh-TW" altLang="en-US" dirty="0"/>
+              <a:t>音分</a:t>
+            </a:r>
+            <a:br>
+              <a:rPr lang="en-US" altLang="zh-TW" dirty="0"/>
+            </a:br>
+            <a:r>
+              <a:rPr lang="en-US" altLang="zh-TW" dirty="0"/>
+              <a:t>A4</a:t>
+            </a:r>
+            <a:r>
+              <a:rPr lang="zh-TW" altLang="en-US" dirty="0"/>
+              <a:t>是</a:t>
+            </a:r>
+            <a:r>
+              <a:rPr lang="en-US" altLang="zh-TW" dirty="0"/>
+              <a:t>440</a:t>
+            </a:r>
+            <a:r>
+              <a:rPr lang="zh-TW" altLang="en-US" dirty="0"/>
+              <a:t>  測到</a:t>
+            </a:r>
+            <a:r>
+              <a:rPr lang="en-US" altLang="zh-TW" dirty="0"/>
+              <a:t>441</a:t>
+            </a:r>
+            <a:r>
+              <a:rPr lang="zh-TW" altLang="en-US" dirty="0"/>
+              <a:t>是因為物理問題</a:t>
             </a:r>
           </a:p>
         </p:txBody>
@@ -6516,8 +6543,8 @@
         </p:nvSpPr>
         <p:spPr>
           <a:xfrm>
-            <a:off x="838200" y="1417466"/>
-            <a:ext cx="10515600" cy="5139205"/>
+            <a:off x="838200" y="1690688"/>
+            <a:ext cx="10515600" cy="4865983"/>
           </a:xfrm>
         </p:spPr>
         <p:txBody>
@@ -6527,22 +6554,22 @@
           <a:lstStyle/>
           <a:p>
             <a:r>
-              <a:rPr lang="en-US" altLang="zh-TW" sz="1600" dirty="0">
+              <a:rPr lang="en-US" altLang="zh-TW" sz="1800" dirty="0">
                 <a:latin typeface="Arial" panose="020B0604020202020204" pitchFamily="34" charset="0"/>
                 <a:ea typeface="標楷體" panose="03000509000000000000" pitchFamily="65" charset="-120"/>
                 <a:cs typeface="Arial" panose="020B0604020202020204" pitchFamily="34" charset="0"/>
               </a:rPr>
-              <a:t>Wiki-</a:t>
-            </a:r>
-            <a:r>
-              <a:rPr lang="zh-TW" altLang="en-US" sz="1600" dirty="0">
+              <a:t>Wiki</a:t>
+            </a:r>
+            <a:r>
+              <a:rPr lang="zh-TW" altLang="en-US" sz="1800" dirty="0">
                 <a:latin typeface="Arial" panose="020B0604020202020204" pitchFamily="34" charset="0"/>
                 <a:ea typeface="標楷體" panose="03000509000000000000" pitchFamily="65" charset="-120"/>
                 <a:cs typeface="Arial" panose="020B0604020202020204" pitchFamily="34" charset="0"/>
               </a:rPr>
-              <a:t>音高：</a:t>
-            </a:r>
-            <a:endParaRPr lang="en-US" altLang="zh-TW" sz="1600" dirty="0">
+              <a:t>：</a:t>
+            </a:r>
+            <a:endParaRPr lang="en-US" altLang="zh-TW" sz="1800" dirty="0">
               <a:latin typeface="Arial" panose="020B0604020202020204" pitchFamily="34" charset="0"/>
               <a:ea typeface="標楷體" panose="03000509000000000000" pitchFamily="65" charset="-120"/>
               <a:cs typeface="Arial" panose="020B0604020202020204" pitchFamily="34" charset="0"/>
@@ -6553,7 +6580,7 @@
               <a:buNone/>
             </a:pPr>
             <a:r>
-              <a:rPr lang="en-US" altLang="zh-TW" sz="1600" dirty="0">
+              <a:rPr lang="en-US" altLang="zh-TW" sz="1800" dirty="0">
                 <a:latin typeface="Arial" panose="020B0604020202020204" pitchFamily="34" charset="0"/>
                 <a:ea typeface="標楷體" panose="03000509000000000000" pitchFamily="65" charset="-120"/>
                 <a:cs typeface="Arial" panose="020B0604020202020204" pitchFamily="34" charset="0"/>
@@ -6561,7 +6588,7 @@
               <a:t>    </a:t>
             </a:r>
             <a:r>
-              <a:rPr lang="en-US" altLang="zh-TW" sz="1600" dirty="0">
+              <a:rPr lang="en-US" altLang="zh-TW" sz="1800" dirty="0">
                 <a:latin typeface="Arial" panose="020B0604020202020204" pitchFamily="34" charset="0"/>
                 <a:ea typeface="標楷體" panose="03000509000000000000" pitchFamily="65" charset="-120"/>
                 <a:cs typeface="Arial" panose="020B0604020202020204" pitchFamily="34" charset="0"/>
@@ -6569,7 +6596,7 @@
               </a:rPr>
               <a:t>mailto:https://zh.wikipedia.org/zh-tw/%E9%9F%B3%E9%AB%98</a:t>
             </a:r>
-            <a:endParaRPr lang="en-US" altLang="zh-TW" sz="1600" dirty="0">
+            <a:endParaRPr lang="en-US" altLang="zh-TW" sz="1800" dirty="0">
               <a:latin typeface="Arial" panose="020B0604020202020204" pitchFamily="34" charset="0"/>
               <a:ea typeface="標楷體" panose="03000509000000000000" pitchFamily="65" charset="-120"/>
               <a:cs typeface="Arial" panose="020B0604020202020204" pitchFamily="34" charset="0"/>
@@ -6580,7 +6607,7 @@
               <a:buNone/>
             </a:pPr>
             <a:r>
-              <a:rPr lang="zh-TW" altLang="en-US" sz="1600" dirty="0">
+              <a:rPr lang="zh-TW" altLang="en-US" sz="1800" dirty="0">
                 <a:latin typeface="Arial" panose="020B0604020202020204" pitchFamily="34" charset="0"/>
                 <a:ea typeface="標楷體" panose="03000509000000000000" pitchFamily="65" charset="-120"/>
                 <a:cs typeface="Arial" panose="020B0604020202020204" pitchFamily="34" charset="0"/>
@@ -6588,7 +6615,7 @@
               <a:t>    </a:t>
             </a:r>
             <a:r>
-              <a:rPr lang="en-US" altLang="zh-TW" sz="1600" dirty="0">
+              <a:rPr lang="en-US" altLang="zh-TW" sz="1800" dirty="0">
                 <a:latin typeface="Arial" panose="020B0604020202020204" pitchFamily="34" charset="0"/>
                 <a:ea typeface="標楷體" panose="03000509000000000000" pitchFamily="65" charset="-120"/>
                 <a:cs typeface="Arial" panose="020B0604020202020204" pitchFamily="34" charset="0"/>
@@ -6597,7 +6624,7 @@
               <a:t>mailto:https://zh.wikipedia.org/zh-</a:t>
             </a:r>
             <a:r>
-              <a:rPr lang="zh-TW" altLang="en-US" sz="1600" dirty="0">
+              <a:rPr lang="zh-TW" altLang="en-US" sz="1800" dirty="0">
                 <a:latin typeface="Arial" panose="020B0604020202020204" pitchFamily="34" charset="0"/>
                 <a:ea typeface="標楷體" panose="03000509000000000000" pitchFamily="65" charset="-120"/>
                 <a:cs typeface="Arial" panose="020B0604020202020204" pitchFamily="34" charset="0"/>
@@ -6605,7 +6632,7 @@
               <a:t>   </a:t>
             </a:r>
             <a:r>
-              <a:rPr lang="en-US" altLang="zh-TW" sz="1600" dirty="0" err="1">
+              <a:rPr lang="en-US" altLang="zh-TW" sz="1800" dirty="0" err="1">
                 <a:latin typeface="Arial" panose="020B0604020202020204" pitchFamily="34" charset="0"/>
                 <a:ea typeface="標楷體" panose="03000509000000000000" pitchFamily="65" charset="-120"/>
                 <a:cs typeface="Arial" panose="020B0604020202020204" pitchFamily="34" charset="0"/>
@@ -6614,7 +6641,7 @@
               <a:t>tw</a:t>
             </a:r>
             <a:r>
-              <a:rPr lang="en-US" altLang="zh-TW" sz="1600" dirty="0">
+              <a:rPr lang="en-US" altLang="zh-TW" sz="1800" dirty="0">
                 <a:latin typeface="Arial" panose="020B0604020202020204" pitchFamily="34" charset="0"/>
                 <a:ea typeface="標楷體" panose="03000509000000000000" pitchFamily="65" charset="-120"/>
                 <a:cs typeface="Arial" panose="020B0604020202020204" pitchFamily="34" charset="0"/>
@@ -6622,7 +6649,7 @@
               </a:rPr>
               <a:t>/%E4%BA%BA%E5%A3%B0%E9%9F%B3%E5%9F%9F</a:t>
             </a:r>
-            <a:endParaRPr lang="en-US" altLang="zh-TW" sz="1600" dirty="0">
+            <a:endParaRPr lang="en-US" altLang="zh-TW" sz="1800" dirty="0">
               <a:latin typeface="Arial" panose="020B0604020202020204" pitchFamily="34" charset="0"/>
               <a:ea typeface="標楷體" panose="03000509000000000000" pitchFamily="65" charset="-120"/>
               <a:cs typeface="Arial" panose="020B0604020202020204" pitchFamily="34" charset="0"/>
@@ -6630,7 +6657,7 @@
           </a:p>
           <a:p>
             <a:r>
-              <a:rPr lang="en-US" altLang="zh-TW" sz="1600" dirty="0">
+              <a:rPr lang="en-US" altLang="zh-TW" sz="1800" dirty="0" err="1">
                 <a:latin typeface="Arial" panose="020B0604020202020204" pitchFamily="34" charset="0"/>
                 <a:ea typeface="標楷體" panose="03000509000000000000" pitchFamily="65" charset="-120"/>
                 <a:cs typeface="Arial" panose="020B0604020202020204" pitchFamily="34" charset="0"/>
@@ -6638,14 +6665,14 @@
               <a:t>Naudio</a:t>
             </a:r>
             <a:r>
-              <a:rPr lang="zh-TW" altLang="en-US" sz="1600" dirty="0">
+              <a:rPr lang="zh-TW" altLang="en-US" sz="1800" dirty="0">
                 <a:latin typeface="Arial" panose="020B0604020202020204" pitchFamily="34" charset="0"/>
                 <a:ea typeface="標楷體" panose="03000509000000000000" pitchFamily="65" charset="-120"/>
                 <a:cs typeface="Arial" panose="020B0604020202020204" pitchFamily="34" charset="0"/>
               </a:rPr>
-              <a:t> 套件：</a:t>
-            </a:r>
-            <a:endParaRPr lang="en-US" altLang="zh-TW" sz="1600" dirty="0">
+              <a:t>：</a:t>
+            </a:r>
+            <a:endParaRPr lang="en-US" altLang="zh-TW" sz="1800" dirty="0">
               <a:latin typeface="Arial" panose="020B0604020202020204" pitchFamily="34" charset="0"/>
               <a:ea typeface="標楷體" panose="03000509000000000000" pitchFamily="65" charset="-120"/>
               <a:cs typeface="Arial" panose="020B0604020202020204" pitchFamily="34" charset="0"/>
@@ -6653,7 +6680,7 @@
           </a:p>
           <a:p>
             <a:r>
-              <a:rPr lang="en-US" altLang="zh-TW" sz="1600" dirty="0">
+              <a:rPr lang="en-US" altLang="zh-TW" sz="1800" dirty="0">
                 <a:latin typeface="Arial" panose="020B0604020202020204" pitchFamily="34" charset="0"/>
                 <a:ea typeface="標楷體" panose="03000509000000000000" pitchFamily="65" charset="-120"/>
                 <a:cs typeface="Arial" panose="020B0604020202020204" pitchFamily="34" charset="0"/>
@@ -6661,7 +6688,7 @@
               </a:rPr>
               <a:t>mailto:https://github.com/naudio/NAudio?tab=readme-ov-file</a:t>
             </a:r>
-            <a:endParaRPr lang="en-US" altLang="zh-TW" sz="1600" dirty="0">
+            <a:endParaRPr lang="en-US" altLang="zh-TW" sz="1800" dirty="0">
               <a:latin typeface="Arial" panose="020B0604020202020204" pitchFamily="34" charset="0"/>
               <a:ea typeface="標楷體" panose="03000509000000000000" pitchFamily="65" charset="-120"/>
               <a:cs typeface="Arial" panose="020B0604020202020204" pitchFamily="34" charset="0"/>
@@ -6669,14 +6696,14 @@
           </a:p>
           <a:p>
             <a:r>
-              <a:rPr lang="zh-TW" altLang="en-US" sz="1600" dirty="0">
+              <a:rPr lang="zh-TW" altLang="en-US" sz="1800" dirty="0">
                 <a:latin typeface="Arial" panose="020B0604020202020204" pitchFamily="34" charset="0"/>
                 <a:ea typeface="標楷體" panose="03000509000000000000" pitchFamily="65" charset="-120"/>
                 <a:cs typeface="Arial" panose="020B0604020202020204" pitchFamily="34" charset="0"/>
               </a:rPr>
               <a:t>好和弦：</a:t>
             </a:r>
-            <a:endParaRPr lang="en-US" altLang="zh-TW" sz="1600" dirty="0">
+            <a:endParaRPr lang="en-US" altLang="zh-TW" sz="1800" dirty="0">
               <a:latin typeface="Arial" panose="020B0604020202020204" pitchFamily="34" charset="0"/>
               <a:ea typeface="標楷體" panose="03000509000000000000" pitchFamily="65" charset="-120"/>
               <a:cs typeface="Arial" panose="020B0604020202020204" pitchFamily="34" charset="0"/>
@@ -6687,7 +6714,7 @@
               <a:buNone/>
             </a:pPr>
             <a:r>
-              <a:rPr lang="zh-TW" altLang="en-US" sz="1600" dirty="0">
+              <a:rPr lang="zh-TW" altLang="en-US" sz="1800" dirty="0">
                 <a:latin typeface="Arial" panose="020B0604020202020204" pitchFamily="34" charset="0"/>
                 <a:ea typeface="標楷體" panose="03000509000000000000" pitchFamily="65" charset="-120"/>
                 <a:cs typeface="Arial" panose="020B0604020202020204" pitchFamily="34" charset="0"/>
@@ -6695,7 +6722,7 @@
               <a:t>    </a:t>
             </a:r>
             <a:r>
-              <a:rPr lang="en-US" altLang="zh-TW" sz="1600" dirty="0">
+              <a:rPr lang="en-US" altLang="zh-TW" sz="1800" dirty="0">
                 <a:latin typeface="Arial" panose="020B0604020202020204" pitchFamily="34" charset="0"/>
                 <a:ea typeface="標楷體" panose="03000509000000000000" pitchFamily="65" charset="-120"/>
                 <a:cs typeface="Arial" panose="020B0604020202020204" pitchFamily="34" charset="0"/>
@@ -6703,7 +6730,7 @@
               </a:rPr>
               <a:t>mailto:https://nicechord.com/post/major-and-minor-modes/</a:t>
             </a:r>
-            <a:endParaRPr lang="en-US" altLang="zh-TW" sz="1600" dirty="0">
+            <a:endParaRPr lang="en-US" altLang="zh-TW" sz="1800" dirty="0">
               <a:latin typeface="Arial" panose="020B0604020202020204" pitchFamily="34" charset="0"/>
               <a:ea typeface="標楷體" panose="03000509000000000000" pitchFamily="65" charset="-120"/>
               <a:cs typeface="Arial" panose="020B0604020202020204" pitchFamily="34" charset="0"/>
@@ -6711,7 +6738,7 @@
           </a:p>
           <a:p>
             <a:r>
-              <a:rPr lang="en-US" altLang="zh-TW" sz="1600" dirty="0">
+              <a:rPr lang="en-US" altLang="zh-TW" sz="1800" dirty="0">
                 <a:latin typeface="Arial" panose="020B0604020202020204" pitchFamily="34" charset="0"/>
                 <a:ea typeface="標楷體" panose="03000509000000000000" pitchFamily="65" charset="-120"/>
                 <a:cs typeface="Arial" panose="020B0604020202020204" pitchFamily="34" charset="0"/>
@@ -6719,14 +6746,14 @@
               <a:t>Think DSP: Digital Signal Processing in Python by Allen B. Downey) </a:t>
             </a:r>
             <a:r>
-              <a:rPr lang="zh-TW" altLang="en-US" sz="1600" dirty="0">
+              <a:rPr lang="zh-TW" altLang="en-US" sz="1800" dirty="0">
                 <a:latin typeface="Arial" panose="020B0604020202020204" pitchFamily="34" charset="0"/>
                 <a:ea typeface="標楷體" panose="03000509000000000000" pitchFamily="65" charset="-120"/>
                 <a:cs typeface="Arial" panose="020B0604020202020204" pitchFamily="34" charset="0"/>
               </a:rPr>
               <a:t>中譯電子書：</a:t>
             </a:r>
-            <a:endParaRPr lang="en-US" altLang="zh-TW" sz="1600" dirty="0">
+            <a:endParaRPr lang="en-US" altLang="zh-TW" sz="1800" dirty="0">
               <a:latin typeface="Arial" panose="020B0604020202020204" pitchFamily="34" charset="0"/>
               <a:ea typeface="標楷體" panose="03000509000000000000" pitchFamily="65" charset="-120"/>
               <a:cs typeface="Arial" panose="020B0604020202020204" pitchFamily="34" charset="0"/>
@@ -6734,7 +6761,7 @@
           </a:p>
           <a:p>
             <a:r>
-              <a:rPr lang="en-US" altLang="zh-TW" sz="1600" dirty="0">
+              <a:rPr lang="en-US" altLang="zh-TW" sz="1800" dirty="0">
                 <a:latin typeface="Arial" panose="020B0604020202020204" pitchFamily="34" charset="0"/>
                 <a:ea typeface="標楷體" panose="03000509000000000000" pitchFamily="65" charset="-120"/>
                 <a:cs typeface="Arial" panose="020B0604020202020204" pitchFamily="34" charset="0"/>
@@ -6742,7 +6769,7 @@
               </a:rPr>
               <a:t>mailto:https://timag-shield.blogspot.com/2017/04/thinkdsp_82.html</a:t>
             </a:r>
-            <a:endParaRPr lang="en-US" altLang="zh-TW" sz="1600" dirty="0">
+            <a:endParaRPr lang="en-US" altLang="zh-TW" sz="1800" dirty="0">
               <a:latin typeface="Arial" panose="020B0604020202020204" pitchFamily="34" charset="0"/>
               <a:ea typeface="標楷體" panose="03000509000000000000" pitchFamily="65" charset="-120"/>
               <a:cs typeface="Arial" panose="020B0604020202020204" pitchFamily="34" charset="0"/>
@@ -6750,7 +6777,7 @@
           </a:p>
           <a:p>
             <a:r>
-              <a:rPr lang="en-US" altLang="zh-TW" sz="1600" dirty="0" err="1">
+              <a:rPr lang="en-US" altLang="zh-TW" sz="1800" dirty="0" err="1">
                 <a:latin typeface="Arial" panose="020B0604020202020204" pitchFamily="34" charset="0"/>
                 <a:ea typeface="標楷體" panose="03000509000000000000" pitchFamily="65" charset="-120"/>
                 <a:cs typeface="Arial" panose="020B0604020202020204" pitchFamily="34" charset="0"/>
@@ -6758,7 +6785,7 @@
               <a:t>Naudio</a:t>
             </a:r>
             <a:r>
-              <a:rPr lang="en-US" altLang="zh-TW" sz="1600" dirty="0">
+              <a:rPr lang="en-US" altLang="zh-TW" sz="1800" dirty="0">
                 <a:latin typeface="Arial" panose="020B0604020202020204" pitchFamily="34" charset="0"/>
                 <a:ea typeface="標楷體" panose="03000509000000000000" pitchFamily="65" charset="-120"/>
                 <a:cs typeface="Arial" panose="020B0604020202020204" pitchFamily="34" charset="0"/>
@@ -6766,14 +6793,14 @@
               <a:t> stack overflow</a:t>
             </a:r>
             <a:r>
-              <a:rPr lang="zh-TW" altLang="en-US" sz="1600" dirty="0">
+              <a:rPr lang="zh-TW" altLang="en-US" sz="1800" dirty="0">
                 <a:latin typeface="Arial" panose="020B0604020202020204" pitchFamily="34" charset="0"/>
                 <a:ea typeface="標楷體" panose="03000509000000000000" pitchFamily="65" charset="-120"/>
                 <a:cs typeface="Arial" panose="020B0604020202020204" pitchFamily="34" charset="0"/>
               </a:rPr>
               <a:t>：</a:t>
             </a:r>
-            <a:endParaRPr lang="en-US" altLang="zh-TW" sz="1600" dirty="0">
+            <a:endParaRPr lang="en-US" altLang="zh-TW" sz="1800" dirty="0">
               <a:latin typeface="Arial" panose="020B0604020202020204" pitchFamily="34" charset="0"/>
               <a:ea typeface="標楷體" panose="03000509000000000000" pitchFamily="65" charset="-120"/>
               <a:cs typeface="Arial" panose="020B0604020202020204" pitchFamily="34" charset="0"/>
@@ -6784,7 +6811,7 @@
               <a:buNone/>
             </a:pPr>
             <a:r>
-              <a:rPr lang="en-US" altLang="zh-TW" sz="1600" dirty="0">
+              <a:rPr lang="en-US" altLang="zh-TW" sz="1800" dirty="0">
                 <a:latin typeface="Arial" panose="020B0604020202020204" pitchFamily="34" charset="0"/>
                 <a:ea typeface="標楷體" panose="03000509000000000000" pitchFamily="65" charset="-120"/>
                 <a:cs typeface="Arial" panose="020B0604020202020204" pitchFamily="34" charset="0"/>
@@ -6792,7 +6819,7 @@
               <a:t>    </a:t>
             </a:r>
             <a:r>
-              <a:rPr lang="en-US" altLang="zh-TW" sz="1600" dirty="0">
+              <a:rPr lang="en-US" altLang="zh-TW" sz="1800" dirty="0">
                 <a:latin typeface="Arial" panose="020B0604020202020204" pitchFamily="34" charset="0"/>
                 <a:ea typeface="標楷體" panose="03000509000000000000" pitchFamily="65" charset="-120"/>
                 <a:cs typeface="Arial" panose="020B0604020202020204" pitchFamily="34" charset="0"/>
@@ -6800,76 +6827,7 @@
               </a:rPr>
               <a:t>mailto:https://stackoverflow.com/questions/tagged/naudio?tab=newest&amp;page=1&amp;pagesize=15</a:t>
             </a:r>
-            <a:endParaRPr lang="en-US" altLang="zh-TW" sz="1600" dirty="0">
-              <a:latin typeface="Arial" panose="020B0604020202020204" pitchFamily="34" charset="0"/>
-              <a:ea typeface="標楷體" panose="03000509000000000000" pitchFamily="65" charset="-120"/>
-              <a:cs typeface="Arial" panose="020B0604020202020204" pitchFamily="34" charset="0"/>
-            </a:endParaRPr>
-          </a:p>
-          <a:p>
-            <a:r>
-              <a:rPr lang="zh-TW" altLang="en-US" sz="1600" dirty="0">
-                <a:latin typeface="Arial" panose="020B0604020202020204" pitchFamily="34" charset="0"/>
-                <a:ea typeface="標楷體" panose="03000509000000000000" pitchFamily="65" charset="-120"/>
-                <a:cs typeface="Arial" panose="020B0604020202020204" pitchFamily="34" charset="0"/>
-              </a:rPr>
-              <a:t>音高測量相關影片：</a:t>
-            </a:r>
-            <a:endParaRPr lang="en-US" altLang="zh-TW" sz="1600" dirty="0">
-              <a:latin typeface="Arial" panose="020B0604020202020204" pitchFamily="34" charset="0"/>
-              <a:ea typeface="標楷體" panose="03000509000000000000" pitchFamily="65" charset="-120"/>
-              <a:cs typeface="Arial" panose="020B0604020202020204" pitchFamily="34" charset="0"/>
-            </a:endParaRPr>
-          </a:p>
-          <a:p>
-            <a:pPr marL="0" indent="0">
-              <a:buNone/>
-            </a:pPr>
-            <a:r>
-              <a:rPr lang="zh-TW" altLang="en-US" sz="1600" dirty="0">
-                <a:latin typeface="Arial" panose="020B0604020202020204" pitchFamily="34" charset="0"/>
-                <a:ea typeface="標楷體" panose="03000509000000000000" pitchFamily="65" charset="-120"/>
-                <a:cs typeface="Arial" panose="020B0604020202020204" pitchFamily="34" charset="0"/>
-              </a:rPr>
-              <a:t>    </a:t>
-            </a:r>
-            <a:r>
-              <a:rPr lang="en-US" altLang="zh-TW" sz="1600" dirty="0">
-                <a:latin typeface="Arial" panose="020B0604020202020204" pitchFamily="34" charset="0"/>
-                <a:ea typeface="標楷體" panose="03000509000000000000" pitchFamily="65" charset="-120"/>
-                <a:cs typeface="Arial" panose="020B0604020202020204" pitchFamily="34" charset="0"/>
-                <a:hlinkClick r:id="rId9"/>
-              </a:rPr>
-              <a:t>mailto:https://www.bilibili.com/video/BV1tj411T71P/?spm_id_from=333.337.search-</a:t>
-            </a:r>
-            <a:r>
-              <a:rPr lang="zh-TW" altLang="en-US" sz="1600" dirty="0">
-                <a:latin typeface="Arial" panose="020B0604020202020204" pitchFamily="34" charset="0"/>
-                <a:ea typeface="標楷體" panose="03000509000000000000" pitchFamily="65" charset="-120"/>
-                <a:cs typeface="Arial" panose="020B0604020202020204" pitchFamily="34" charset="0"/>
-                <a:hlinkClick r:id="rId9"/>
-              </a:rPr>
-              <a:t> </a:t>
-            </a:r>
-            <a:r>
-              <a:rPr lang="en-US" altLang="zh-TW" sz="1600" dirty="0" err="1">
-                <a:latin typeface="Arial" panose="020B0604020202020204" pitchFamily="34" charset="0"/>
-                <a:ea typeface="標楷體" panose="03000509000000000000" pitchFamily="65" charset="-120"/>
-                <a:cs typeface="Arial" panose="020B0604020202020204" pitchFamily="34" charset="0"/>
-                <a:hlinkClick r:id="rId9"/>
-              </a:rPr>
-              <a:t>card.all.click&amp;vd_source</a:t>
-            </a:r>
-            <a:r>
-              <a:rPr lang="en-US" altLang="zh-TW" sz="1600" dirty="0">
-                <a:latin typeface="Arial" panose="020B0604020202020204" pitchFamily="34" charset="0"/>
-                <a:ea typeface="標楷體" panose="03000509000000000000" pitchFamily="65" charset="-120"/>
-                <a:cs typeface="Arial" panose="020B0604020202020204" pitchFamily="34" charset="0"/>
-                <a:hlinkClick r:id="rId9"/>
-              </a:rPr>
-              <a:t>=88ea28052682913da01ac2ec14baf19d</a:t>
-            </a:r>
-            <a:endParaRPr lang="en-US" altLang="zh-TW" sz="1600" dirty="0">
+            <a:endParaRPr lang="en-US" altLang="zh-TW" sz="1800" dirty="0">
               <a:latin typeface="Arial" panose="020B0604020202020204" pitchFamily="34" charset="0"/>
               <a:ea typeface="標楷體" panose="03000509000000000000" pitchFamily="65" charset="-120"/>
               <a:cs typeface="Arial" panose="020B0604020202020204" pitchFamily="34" charset="0"/>
